--- a/ModelAxelroda_prezentacja.pptx
+++ b/ModelAxelroda_prezentacja.pptx
@@ -10,13 +10,15 @@
     <p:sldId id="269" r:id="rId4"/>
     <p:sldId id="261" r:id="rId5"/>
     <p:sldId id="268" r:id="rId6"/>
-    <p:sldId id="259" r:id="rId7"/>
-    <p:sldId id="270" r:id="rId8"/>
-    <p:sldId id="263" r:id="rId9"/>
-    <p:sldId id="265" r:id="rId10"/>
-    <p:sldId id="266" r:id="rId11"/>
-    <p:sldId id="267" r:id="rId12"/>
-    <p:sldId id="264" r:id="rId13"/>
+    <p:sldId id="279" r:id="rId7"/>
+    <p:sldId id="280" r:id="rId8"/>
+    <p:sldId id="281" r:id="rId9"/>
+    <p:sldId id="282" r:id="rId10"/>
+    <p:sldId id="263" r:id="rId11"/>
+    <p:sldId id="278" r:id="rId12"/>
+    <p:sldId id="271" r:id="rId13"/>
+    <p:sldId id="265" r:id="rId14"/>
+    <p:sldId id="264" r:id="rId15"/>
   </p:sldIdLst>
   <p:sldSz cx="12192000" cy="6858000"/>
   <p:notesSz cx="6858000" cy="9144000"/>
@@ -3478,7 +3480,7 @@
         </p:nvSpPr>
         <p:spPr>
           <a:xfrm>
-            <a:off x="1532020" y="4907756"/>
+            <a:off x="1524000" y="4709636"/>
             <a:ext cx="9144000" cy="1655762"/>
           </a:xfrm>
         </p:spPr>
@@ -3577,12 +3579,162 @@
           <a:chExt cx="0" cy="0"/>
         </a:xfrm>
       </p:grpSpPr>
+      <p:sp>
+        <p:nvSpPr>
+          <p:cNvPr id="2" name="Tytuł 1">
+            <a:extLst>
+              <a:ext uri="{FF2B5EF4-FFF2-40B4-BE49-F238E27FC236}">
+                <a16:creationId xmlns:a16="http://schemas.microsoft.com/office/drawing/2014/main" id="{77407CC0-3BB3-4563-A997-6BDBBB130FFE}"/>
+              </a:ext>
+            </a:extLst>
+          </p:cNvPr>
+          <p:cNvSpPr>
+            <a:spLocks noGrp="1"/>
+          </p:cNvSpPr>
+          <p:nvPr>
+            <p:ph type="title"/>
+          </p:nvPr>
+        </p:nvSpPr>
+        <p:spPr/>
+        <p:txBody>
+          <a:bodyPr/>
+          <a:lstStyle/>
+          <a:p>
+            <a:r>
+              <a:rPr lang="pl-PL" dirty="0"/>
+              <a:t>Rozszerzenie modelu</a:t>
+            </a:r>
+            <a:endParaRPr lang="en-US" dirty="0"/>
+          </a:p>
+        </p:txBody>
+      </p:sp>
+      <p:sp>
+        <p:nvSpPr>
+          <p:cNvPr id="3" name="Symbol zastępczy zawartości 2">
+            <a:extLst>
+              <a:ext uri="{FF2B5EF4-FFF2-40B4-BE49-F238E27FC236}">
+                <a16:creationId xmlns:a16="http://schemas.microsoft.com/office/drawing/2014/main" id="{BA4F3297-7DD6-0EF4-82F1-773AB2F43F61}"/>
+              </a:ext>
+            </a:extLst>
+          </p:cNvPr>
+          <p:cNvSpPr>
+            <a:spLocks noGrp="1"/>
+          </p:cNvSpPr>
+          <p:nvPr>
+            <p:ph idx="1"/>
+          </p:nvPr>
+        </p:nvSpPr>
+        <p:spPr>
+          <a:xfrm>
+            <a:off x="838199" y="1825625"/>
+            <a:ext cx="8839201" cy="4222249"/>
+          </a:xfrm>
+        </p:spPr>
+        <p:txBody>
+          <a:bodyPr>
+            <a:normAutofit/>
+          </a:bodyPr>
+          <a:lstStyle/>
+          <a:p>
+            <a:pPr marL="0" indent="0">
+              <a:buNone/>
+            </a:pPr>
+            <a:r>
+              <a:rPr lang="pl-PL" sz="3600" dirty="0"/>
+              <a:t>Wprowadzamy nowe typy sąsiedztw:</a:t>
+            </a:r>
+          </a:p>
+          <a:p>
+            <a:pPr>
+              <a:buFont typeface="Wingdings" panose="05000000000000000000" pitchFamily="2" charset="2"/>
+              <a:buChar char="§"/>
+            </a:pPr>
+            <a:r>
+              <a:rPr lang="pl-PL" sz="3600" dirty="0"/>
+              <a:t>Rozszerzone – zwiększamy sąsiedztwo o przekątne (z 4 wspólnych do 8).</a:t>
+            </a:r>
+          </a:p>
+          <a:p>
+            <a:pPr>
+              <a:buFont typeface="Wingdings" panose="05000000000000000000" pitchFamily="2" charset="2"/>
+              <a:buChar char="§"/>
+            </a:pPr>
+            <a:r>
+              <a:rPr lang="pl-PL" sz="3600" dirty="0"/>
+              <a:t>Toroidalne – łączymy agentów na brzegach (za</a:t>
+            </a:r>
+            <a:r>
+              <a:rPr lang="en-US" sz="3600" dirty="0" err="1"/>
+              <a:t>wijamy</a:t>
+            </a:r>
+            <a:r>
+              <a:rPr lang="en-US" sz="3600" dirty="0"/>
+              <a:t> </a:t>
+            </a:r>
+            <a:r>
+              <a:rPr lang="en-US" sz="3600" dirty="0" err="1"/>
+              <a:t>siatkę</a:t>
+            </a:r>
+            <a:r>
+              <a:rPr lang="en-US" sz="3600" dirty="0"/>
+              <a:t> w </a:t>
+            </a:r>
+            <a:r>
+              <a:rPr lang="en-US" sz="3600" dirty="0" err="1"/>
+              <a:t>kształt</a:t>
+            </a:r>
+            <a:r>
+              <a:rPr lang="en-US" sz="3600" dirty="0"/>
+              <a:t> </a:t>
+            </a:r>
+            <a:r>
+              <a:rPr lang="en-US" sz="3600" dirty="0" err="1"/>
+              <a:t>torusa</a:t>
+            </a:r>
+            <a:r>
+              <a:rPr lang="pl-PL" sz="3600" dirty="0"/>
+              <a:t>), wy</a:t>
+            </a:r>
+            <a:r>
+              <a:rPr lang="en-US" sz="3600" dirty="0" err="1"/>
+              <a:t>równując</a:t>
+            </a:r>
+            <a:r>
+              <a:rPr lang="en-US" sz="3600" dirty="0"/>
+              <a:t> </a:t>
+            </a:r>
+            <a:r>
+              <a:rPr lang="en-US" sz="3600" dirty="0" err="1"/>
+              <a:t>szanse</a:t>
+            </a:r>
+            <a:r>
+              <a:rPr lang="en-US" sz="3600" dirty="0"/>
+              <a:t> </a:t>
+            </a:r>
+            <a:r>
+              <a:rPr lang="en-US" sz="3600" dirty="0" err="1"/>
+              <a:t>interakcj</a:t>
+            </a:r>
+            <a:r>
+              <a:rPr lang="pl-PL" sz="3600" dirty="0"/>
+              <a:t>i.</a:t>
+            </a:r>
+          </a:p>
+          <a:p>
+            <a:pPr>
+              <a:buFont typeface="Wingdings" panose="05000000000000000000" pitchFamily="2" charset="2"/>
+              <a:buChar char="§"/>
+            </a:pPr>
+            <a:endParaRPr lang="en-US" sz="3600" dirty="0"/>
+          </a:p>
+        </p:txBody>
+      </p:sp>
       <p:pic>
         <p:nvPicPr>
-          <p:cNvPr id="3" name="Obraz 2">
-            <a:extLst>
-              <a:ext uri="{FF2B5EF4-FFF2-40B4-BE49-F238E27FC236}">
-                <a16:creationId xmlns:a16="http://schemas.microsoft.com/office/drawing/2014/main" id="{18B7D6B0-EEBD-D815-15AE-8724C4FB03A0}"/>
+          <p:cNvPr id="5" name="Obraz 4">
+            <a:extLst>
+              <a:ext uri="{FF2B5EF4-FFF2-40B4-BE49-F238E27FC236}">
+                <a16:creationId xmlns:a16="http://schemas.microsoft.com/office/drawing/2014/main" id="{B5D8E6B7-A676-19C9-FBC0-6F82629BCBDD}"/>
               </a:ext>
             </a:extLst>
           </p:cNvPr>
@@ -3599,54 +3751,18 @@
         </p:blipFill>
         <p:spPr>
           <a:xfrm>
-            <a:off x="633261" y="1465586"/>
-            <a:ext cx="10925477" cy="4552282"/>
+            <a:off x="8549941" y="3962400"/>
+            <a:ext cx="3261175" cy="2735179"/>
           </a:xfrm>
           <a:prstGeom prst="rect">
             <a:avLst/>
           </a:prstGeom>
         </p:spPr>
       </p:pic>
-      <p:sp>
-        <p:nvSpPr>
-          <p:cNvPr id="4" name="pole tekstowe 3">
-            <a:extLst>
-              <a:ext uri="{FF2B5EF4-FFF2-40B4-BE49-F238E27FC236}">
-                <a16:creationId xmlns:a16="http://schemas.microsoft.com/office/drawing/2014/main" id="{097C5563-DBC3-3CBF-3A70-8EC67806C1BA}"/>
-              </a:ext>
-            </a:extLst>
-          </p:cNvPr>
-          <p:cNvSpPr txBox="1"/>
-          <p:nvPr/>
-        </p:nvSpPr>
-        <p:spPr>
-          <a:xfrm>
-            <a:off x="4748463" y="545431"/>
-            <a:ext cx="4812632" cy="584775"/>
-          </a:xfrm>
-          <a:prstGeom prst="rect">
-            <a:avLst/>
-          </a:prstGeom>
-          <a:noFill/>
-        </p:spPr>
-        <p:txBody>
-          <a:bodyPr wrap="square" rtlCol="0">
-            <a:spAutoFit/>
-          </a:bodyPr>
-          <a:lstStyle/>
-          <a:p>
-            <a:r>
-              <a:rPr lang="pl-PL" sz="3200" dirty="0"/>
-              <a:t>Symulacja A</a:t>
-            </a:r>
-            <a:endParaRPr lang="en-US" sz="3200" dirty="0"/>
-          </a:p>
-        </p:txBody>
-      </p:sp>
     </p:spTree>
     <p:extLst>
       <p:ext uri="{BB962C8B-B14F-4D97-AF65-F5344CB8AC3E}">
-        <p14:creationId xmlns:p14="http://schemas.microsoft.com/office/powerpoint/2010/main" val="3206338473"/>
+        <p14:creationId xmlns:p14="http://schemas.microsoft.com/office/powerpoint/2010/main" val="1142525123"/>
       </p:ext>
     </p:extLst>
   </p:cSld>
@@ -3664,7 +3780,7 @@
         <p:cNvPr id="1" name="">
           <a:extLst>
             <a:ext uri="{FF2B5EF4-FFF2-40B4-BE49-F238E27FC236}">
-              <a16:creationId xmlns:a16="http://schemas.microsoft.com/office/drawing/2014/main" id="{371A5F96-3E07-ED20-3338-B070932A3402}"/>
+              <a16:creationId xmlns:a16="http://schemas.microsoft.com/office/drawing/2014/main" id="{94DBAB6D-D60C-623B-DF2D-F83D89DE38F1}"/>
             </a:ext>
           </a:extLst>
         </p:cNvPr>
@@ -3679,12 +3795,48 @@
           <a:chExt cx="0" cy="0"/>
         </a:xfrm>
       </p:grpSpPr>
-      <p:sp>
-        <p:nvSpPr>
-          <p:cNvPr id="4" name="pole tekstowe 3">
-            <a:extLst>
-              <a:ext uri="{FF2B5EF4-FFF2-40B4-BE49-F238E27FC236}">
-                <a16:creationId xmlns:a16="http://schemas.microsoft.com/office/drawing/2014/main" id="{7F79C7B7-EDAF-2875-B6A9-B59B7B014C1F}"/>
+      <p:pic>
+        <p:nvPicPr>
+          <p:cNvPr id="4" name="Obraz 3">
+            <a:extLst>
+              <a:ext uri="{FF2B5EF4-FFF2-40B4-BE49-F238E27FC236}">
+                <a16:creationId xmlns:a16="http://schemas.microsoft.com/office/drawing/2014/main" id="{B1180836-521C-4E00-E013-C85F79DFE369}"/>
+              </a:ext>
+            </a:extLst>
+          </p:cNvPr>
+          <p:cNvPicPr>
+            <a:picLocks noChangeAspect="1"/>
+          </p:cNvPicPr>
+          <p:nvPr/>
+        </p:nvPicPr>
+        <p:blipFill>
+          <a:blip r:embed="rId2">
+            <a:extLst>
+              <a:ext uri="{28A0092B-C50C-407E-A947-70E740481C1C}">
+                <a14:useLocalDpi xmlns:a14="http://schemas.microsoft.com/office/drawing/2010/main" val="0"/>
+              </a:ext>
+            </a:extLst>
+          </a:blip>
+          <a:stretch>
+            <a:fillRect/>
+          </a:stretch>
+        </p:blipFill>
+        <p:spPr>
+          <a:xfrm>
+            <a:off x="38110" y="144379"/>
+            <a:ext cx="12153890" cy="5064121"/>
+          </a:xfrm>
+          <a:prstGeom prst="rect">
+            <a:avLst/>
+          </a:prstGeom>
+        </p:spPr>
+      </p:pic>
+      <p:sp>
+        <p:nvSpPr>
+          <p:cNvPr id="6" name="pole tekstowe 5">
+            <a:extLst>
+              <a:ext uri="{FF2B5EF4-FFF2-40B4-BE49-F238E27FC236}">
+                <a16:creationId xmlns:a16="http://schemas.microsoft.com/office/drawing/2014/main" id="{F5E76416-235D-E25C-30AC-483D5D255A56}"/>
               </a:ext>
             </a:extLst>
           </p:cNvPr>
@@ -3693,8 +3845,8 @@
         </p:nvSpPr>
         <p:spPr>
           <a:xfrm>
-            <a:off x="4748463" y="545431"/>
-            <a:ext cx="4812632" cy="584775"/>
+            <a:off x="481262" y="5396392"/>
+            <a:ext cx="5213685" cy="969496"/>
           </a:xfrm>
           <a:prstGeom prst="rect">
             <a:avLst/>
@@ -3702,53 +3854,69 @@
           <a:noFill/>
         </p:spPr>
         <p:txBody>
+          <a:bodyPr wrap="square" rtlCol="0" anchor="b">
+            <a:spAutoFit/>
+          </a:bodyPr>
+          <a:lstStyle/>
+          <a:p>
+            <a:r>
+              <a:rPr lang="pl-PL" sz="1900" u="sng" dirty="0"/>
+              <a:t>Parametry</a:t>
+            </a:r>
+          </a:p>
+          <a:p>
+            <a:r>
+              <a:rPr lang="pl-PL" sz="1900" dirty="0"/>
+              <a:t>liczba cech: 6, liczba wariantów: 12</a:t>
+            </a:r>
+          </a:p>
+          <a:p>
+            <a:r>
+              <a:rPr lang="pl-PL" sz="1900" dirty="0"/>
+              <a:t>długość boku siatki: 30,  liczba iteracji: 2mln</a:t>
+            </a:r>
+          </a:p>
+        </p:txBody>
+      </p:sp>
+      <p:sp>
+        <p:nvSpPr>
+          <p:cNvPr id="8" name="pole tekstowe 7">
+            <a:extLst>
+              <a:ext uri="{FF2B5EF4-FFF2-40B4-BE49-F238E27FC236}">
+                <a16:creationId xmlns:a16="http://schemas.microsoft.com/office/drawing/2014/main" id="{9D5815F6-BA71-98FE-D1B4-B0D71CC12B44}"/>
+              </a:ext>
+            </a:extLst>
+          </p:cNvPr>
+          <p:cNvSpPr txBox="1"/>
+          <p:nvPr/>
+        </p:nvSpPr>
+        <p:spPr>
+          <a:xfrm>
+            <a:off x="8534400" y="5619530"/>
+            <a:ext cx="2316480" cy="523220"/>
+          </a:xfrm>
+          <a:prstGeom prst="rect">
+            <a:avLst/>
+          </a:prstGeom>
+          <a:noFill/>
+        </p:spPr>
+        <p:txBody>
           <a:bodyPr wrap="square" rtlCol="0">
             <a:spAutoFit/>
           </a:bodyPr>
           <a:lstStyle/>
           <a:p>
             <a:r>
-              <a:rPr lang="pl-PL" sz="3200" dirty="0"/>
-              <a:t>Symulacja B</a:t>
-            </a:r>
-            <a:endParaRPr lang="en-US" sz="3200" dirty="0"/>
-          </a:p>
-        </p:txBody>
-      </p:sp>
-      <p:pic>
-        <p:nvPicPr>
-          <p:cNvPr id="5" name="Obraz 4">
-            <a:extLst>
-              <a:ext uri="{FF2B5EF4-FFF2-40B4-BE49-F238E27FC236}">
-                <a16:creationId xmlns:a16="http://schemas.microsoft.com/office/drawing/2014/main" id="{BAE61DAC-EC9F-4311-0B8B-E18BB0CE6723}"/>
-              </a:ext>
-            </a:extLst>
-          </p:cNvPr>
-          <p:cNvPicPr>
-            <a:picLocks noChangeAspect="1"/>
-          </p:cNvPicPr>
-          <p:nvPr/>
-        </p:nvPicPr>
-        <p:blipFill>
-          <a:blip r:embed="rId2"/>
-          <a:stretch>
-            <a:fillRect/>
-          </a:stretch>
-        </p:blipFill>
-        <p:spPr>
-          <a:xfrm>
-            <a:off x="381000" y="1550069"/>
-            <a:ext cx="11430000" cy="4762500"/>
-          </a:xfrm>
-          <a:prstGeom prst="rect">
-            <a:avLst/>
-          </a:prstGeom>
-        </p:spPr>
-      </p:pic>
+              <a:rPr lang="pl-PL" sz="2800" b="1" dirty="0"/>
+              <a:t>Symulacja A</a:t>
+            </a:r>
+          </a:p>
+        </p:txBody>
+      </p:sp>
     </p:spTree>
     <p:extLst>
       <p:ext uri="{BB962C8B-B14F-4D97-AF65-F5344CB8AC3E}">
-        <p14:creationId xmlns:p14="http://schemas.microsoft.com/office/powerpoint/2010/main" val="3745341163"/>
+        <p14:creationId xmlns:p14="http://schemas.microsoft.com/office/powerpoint/2010/main" val="338881112"/>
       </p:ext>
     </p:extLst>
   </p:cSld>
@@ -3759,6 +3927,246 @@
 </file>
 
 <file path=ppt/slides/slide12.xml><?xml version="1.0" encoding="utf-8"?>
+<p:sld xmlns:a="http://schemas.openxmlformats.org/drawingml/2006/main" xmlns:r="http://schemas.openxmlformats.org/officeDocument/2006/relationships" xmlns:p="http://schemas.openxmlformats.org/presentationml/2006/main">
+  <p:cSld>
+    <p:spTree>
+      <p:nvGrpSpPr>
+        <p:cNvPr id="1" name=""/>
+        <p:cNvGrpSpPr/>
+        <p:nvPr/>
+      </p:nvGrpSpPr>
+      <p:grpSpPr>
+        <a:xfrm>
+          <a:off x="0" y="0"/>
+          <a:ext cx="0" cy="0"/>
+          <a:chOff x="0" y="0"/>
+          <a:chExt cx="0" cy="0"/>
+        </a:xfrm>
+      </p:grpSpPr>
+      <p:pic>
+        <p:nvPicPr>
+          <p:cNvPr id="5" name="Obraz 4">
+            <a:extLst>
+              <a:ext uri="{FF2B5EF4-FFF2-40B4-BE49-F238E27FC236}">
+                <a16:creationId xmlns:a16="http://schemas.microsoft.com/office/drawing/2014/main" id="{97A5FA6D-A409-3767-1C9F-4EEC8B12B3FD}"/>
+              </a:ext>
+            </a:extLst>
+          </p:cNvPr>
+          <p:cNvPicPr>
+            <a:picLocks noChangeAspect="1"/>
+          </p:cNvPicPr>
+          <p:nvPr/>
+        </p:nvPicPr>
+        <p:blipFill>
+          <a:blip r:embed="rId2">
+            <a:extLst>
+              <a:ext uri="{28A0092B-C50C-407E-A947-70E740481C1C}">
+                <a14:useLocalDpi xmlns:a14="http://schemas.microsoft.com/office/drawing/2010/main" val="0"/>
+              </a:ext>
+            </a:extLst>
+          </a:blip>
+          <a:stretch>
+            <a:fillRect/>
+          </a:stretch>
+        </p:blipFill>
+        <p:spPr>
+          <a:xfrm>
+            <a:off x="25667" y="144379"/>
+            <a:ext cx="12166333" cy="5069305"/>
+          </a:xfrm>
+          <a:prstGeom prst="rect">
+            <a:avLst/>
+          </a:prstGeom>
+        </p:spPr>
+      </p:pic>
+      <p:sp>
+        <p:nvSpPr>
+          <p:cNvPr id="3" name="pole tekstowe 2">
+            <a:extLst>
+              <a:ext uri="{FF2B5EF4-FFF2-40B4-BE49-F238E27FC236}">
+                <a16:creationId xmlns:a16="http://schemas.microsoft.com/office/drawing/2014/main" id="{75CDD93B-F121-21E0-1374-5C6EF0B1751B}"/>
+              </a:ext>
+            </a:extLst>
+          </p:cNvPr>
+          <p:cNvSpPr txBox="1"/>
+          <p:nvPr/>
+        </p:nvSpPr>
+        <p:spPr>
+          <a:xfrm>
+            <a:off x="481262" y="5396392"/>
+            <a:ext cx="5213685" cy="969496"/>
+          </a:xfrm>
+          <a:prstGeom prst="rect">
+            <a:avLst/>
+          </a:prstGeom>
+          <a:noFill/>
+        </p:spPr>
+        <p:txBody>
+          <a:bodyPr wrap="square" rtlCol="0" anchor="b">
+            <a:spAutoFit/>
+          </a:bodyPr>
+          <a:lstStyle/>
+          <a:p>
+            <a:r>
+              <a:rPr lang="pl-PL" sz="1900" u="sng" dirty="0"/>
+              <a:t>Parametry</a:t>
+            </a:r>
+          </a:p>
+          <a:p>
+            <a:r>
+              <a:rPr lang="pl-PL" sz="1900" dirty="0"/>
+              <a:t>liczba cech: 6, liczba wariantów: 12</a:t>
+            </a:r>
+          </a:p>
+          <a:p>
+            <a:r>
+              <a:rPr lang="pl-PL" sz="1900" dirty="0"/>
+              <a:t>długość boku siatki: 30,  liczba iteracji: 1mln</a:t>
+            </a:r>
+          </a:p>
+        </p:txBody>
+      </p:sp>
+      <p:sp>
+        <p:nvSpPr>
+          <p:cNvPr id="6" name="pole tekstowe 5">
+            <a:extLst>
+              <a:ext uri="{FF2B5EF4-FFF2-40B4-BE49-F238E27FC236}">
+                <a16:creationId xmlns:a16="http://schemas.microsoft.com/office/drawing/2014/main" id="{230A3FC0-811A-7882-6409-E81F1253BC56}"/>
+              </a:ext>
+            </a:extLst>
+          </p:cNvPr>
+          <p:cNvSpPr txBox="1"/>
+          <p:nvPr/>
+        </p:nvSpPr>
+        <p:spPr>
+          <a:xfrm>
+            <a:off x="8534400" y="5619530"/>
+            <a:ext cx="2316480" cy="523220"/>
+          </a:xfrm>
+          <a:prstGeom prst="rect">
+            <a:avLst/>
+          </a:prstGeom>
+          <a:noFill/>
+        </p:spPr>
+        <p:txBody>
+          <a:bodyPr wrap="square" rtlCol="0">
+            <a:spAutoFit/>
+          </a:bodyPr>
+          <a:lstStyle/>
+          <a:p>
+            <a:r>
+              <a:rPr lang="pl-PL" sz="2800" b="1" dirty="0"/>
+              <a:t>Symulacja B</a:t>
+            </a:r>
+          </a:p>
+        </p:txBody>
+      </p:sp>
+    </p:spTree>
+    <p:extLst>
+      <p:ext uri="{BB962C8B-B14F-4D97-AF65-F5344CB8AC3E}">
+        <p14:creationId xmlns:p14="http://schemas.microsoft.com/office/powerpoint/2010/main" val="438986128"/>
+      </p:ext>
+    </p:extLst>
+  </p:cSld>
+  <p:clrMapOvr>
+    <a:masterClrMapping/>
+  </p:clrMapOvr>
+</p:sld>
+</file>
+
+<file path=ppt/slides/slide13.xml><?xml version="1.0" encoding="utf-8"?>
+<p:sld xmlns:a="http://schemas.openxmlformats.org/drawingml/2006/main" xmlns:r="http://schemas.openxmlformats.org/officeDocument/2006/relationships" xmlns:p="http://schemas.openxmlformats.org/presentationml/2006/main">
+  <p:cSld>
+    <p:spTree>
+      <p:nvGrpSpPr>
+        <p:cNvPr id="1" name=""/>
+        <p:cNvGrpSpPr/>
+        <p:nvPr/>
+      </p:nvGrpSpPr>
+      <p:grpSpPr>
+        <a:xfrm>
+          <a:off x="0" y="0"/>
+          <a:ext cx="0" cy="0"/>
+          <a:chOff x="0" y="0"/>
+          <a:chExt cx="0" cy="0"/>
+        </a:xfrm>
+      </p:grpSpPr>
+      <p:sp>
+        <p:nvSpPr>
+          <p:cNvPr id="2" name="Tytuł 1">
+            <a:extLst>
+              <a:ext uri="{FF2B5EF4-FFF2-40B4-BE49-F238E27FC236}">
+                <a16:creationId xmlns:a16="http://schemas.microsoft.com/office/drawing/2014/main" id="{958507E3-A492-ADE9-9CC9-39CA0FE7FF78}"/>
+              </a:ext>
+            </a:extLst>
+          </p:cNvPr>
+          <p:cNvSpPr>
+            <a:spLocks noGrp="1"/>
+          </p:cNvSpPr>
+          <p:nvPr>
+            <p:ph type="title"/>
+          </p:nvPr>
+        </p:nvSpPr>
+        <p:spPr/>
+        <p:txBody>
+          <a:bodyPr/>
+          <a:lstStyle/>
+          <a:p>
+            <a:r>
+              <a:rPr lang="pl-PL" dirty="0"/>
+              <a:t>Rezultat rozszerzenia modelu</a:t>
+            </a:r>
+            <a:endParaRPr lang="en-US" dirty="0"/>
+          </a:p>
+        </p:txBody>
+      </p:sp>
+      <p:sp>
+        <p:nvSpPr>
+          <p:cNvPr id="3" name="Symbol zastępczy zawartości 2">
+            <a:extLst>
+              <a:ext uri="{FF2B5EF4-FFF2-40B4-BE49-F238E27FC236}">
+                <a16:creationId xmlns:a16="http://schemas.microsoft.com/office/drawing/2014/main" id="{0A2EC9DE-B8DC-3284-A196-82B0FE9D5307}"/>
+              </a:ext>
+            </a:extLst>
+          </p:cNvPr>
+          <p:cNvSpPr>
+            <a:spLocks noGrp="1"/>
+          </p:cNvSpPr>
+          <p:nvPr>
+            <p:ph idx="1"/>
+          </p:nvPr>
+        </p:nvSpPr>
+        <p:spPr/>
+        <p:txBody>
+          <a:bodyPr/>
+          <a:lstStyle/>
+          <a:p>
+            <a:pPr>
+              <a:buFont typeface="Wingdings" panose="05000000000000000000" pitchFamily="2" charset="2"/>
+              <a:buChar char="§"/>
+            </a:pPr>
+            <a:r>
+              <a:rPr lang="pl-PL" dirty="0"/>
+              <a:t>Szybsze ujednolicenie poprzez posiadanie większej liczby sąsiadów.</a:t>
+            </a:r>
+            <a:endParaRPr lang="en-US" dirty="0"/>
+          </a:p>
+        </p:txBody>
+      </p:sp>
+    </p:spTree>
+    <p:extLst>
+      <p:ext uri="{BB962C8B-B14F-4D97-AF65-F5344CB8AC3E}">
+        <p14:creationId xmlns:p14="http://schemas.microsoft.com/office/powerpoint/2010/main" val="907463827"/>
+      </p:ext>
+    </p:extLst>
+  </p:cSld>
+  <p:clrMapOvr>
+    <a:masterClrMapping/>
+  </p:clrMapOvr>
+</p:sld>
+</file>
+
+<file path=ppt/slides/slide14.xml><?xml version="1.0" encoding="utf-8"?>
 <p:sld xmlns:a="http://schemas.openxmlformats.org/drawingml/2006/main" xmlns:r="http://schemas.openxmlformats.org/officeDocument/2006/relationships" xmlns:p="http://schemas.openxmlformats.org/presentationml/2006/main">
   <p:cSld>
     <p:spTree>
@@ -4768,23 +5176,11 @@
             </a:r>
             <a:r>
               <a:rPr lang="en-US" dirty="0"/>
-              <a:t>: Program </a:t>
-            </a:r>
-            <a:r>
-              <a:rPr lang="en-US" dirty="0" err="1"/>
-              <a:t>wybiera</a:t>
-            </a:r>
-            <a:r>
-              <a:rPr lang="en-US" dirty="0"/>
-              <a:t> </a:t>
-            </a:r>
-            <a:r>
-              <a:rPr lang="en-US" dirty="0" err="1"/>
-              <a:t>losowo</a:t>
-            </a:r>
-            <a:r>
-              <a:rPr lang="en-US" dirty="0"/>
-              <a:t> </a:t>
+              <a:t>: </a:t>
+            </a:r>
+            <a:r>
+              <a:rPr lang="pl-PL" dirty="0"/>
+              <a:t>losowo wybieramy </a:t>
             </a:r>
             <a:r>
               <a:rPr lang="en-US" dirty="0" err="1"/>
@@ -6036,7 +6432,13 @@
   <p:cSld>
     <p:spTree>
       <p:nvGrpSpPr>
-        <p:cNvPr id="1" name=""/>
+        <p:cNvPr id="1" name="">
+          <a:extLst>
+            <a:ext uri="{FF2B5EF4-FFF2-40B4-BE49-F238E27FC236}">
+              <a16:creationId xmlns:a16="http://schemas.microsoft.com/office/drawing/2014/main" id="{C975BD9F-7388-27B7-6E97-13AEFA7F3079}"/>
+            </a:ext>
+          </a:extLst>
+        </p:cNvPr>
         <p:cNvGrpSpPr/>
         <p:nvPr/>
       </p:nvGrpSpPr>
@@ -6048,94 +6450,99 @@
           <a:chExt cx="0" cy="0"/>
         </a:xfrm>
       </p:grpSpPr>
-      <p:sp>
-        <p:nvSpPr>
-          <p:cNvPr id="2" name="Tytuł 1">
-            <a:extLst>
-              <a:ext uri="{FF2B5EF4-FFF2-40B4-BE49-F238E27FC236}">
-                <a16:creationId xmlns:a16="http://schemas.microsoft.com/office/drawing/2014/main" id="{D0B8A69A-FCE4-1153-712A-FAC99C76CCDF}"/>
-              </a:ext>
-            </a:extLst>
-          </p:cNvPr>
-          <p:cNvSpPr>
-            <a:spLocks noGrp="1"/>
-          </p:cNvSpPr>
-          <p:nvPr>
-            <p:ph type="ctrTitle"/>
-          </p:nvPr>
-        </p:nvSpPr>
-        <p:spPr/>
-        <p:txBody>
-          <a:bodyPr/>
-          <a:lstStyle/>
-          <a:p>
-            <a:r>
-              <a:rPr lang="pl-PL" dirty="0"/>
-              <a:t>	TU CALE ZDJECIA I STATYSTYKA </a:t>
-            </a:r>
-            <a:endParaRPr lang="en-US" dirty="0"/>
-          </a:p>
-        </p:txBody>
-      </p:sp>
-      <p:sp>
-        <p:nvSpPr>
-          <p:cNvPr id="3" name="Podtytuł 2">
-            <a:extLst>
-              <a:ext uri="{FF2B5EF4-FFF2-40B4-BE49-F238E27FC236}">
-                <a16:creationId xmlns:a16="http://schemas.microsoft.com/office/drawing/2014/main" id="{53B25650-7C85-A4E5-2F5F-CB2D99D6E4C4}"/>
-              </a:ext>
-            </a:extLst>
-          </p:cNvPr>
-          <p:cNvSpPr>
-            <a:spLocks noGrp="1"/>
-          </p:cNvSpPr>
-          <p:nvPr>
-            <p:ph type="subTitle" idx="1"/>
-          </p:nvPr>
-        </p:nvSpPr>
-        <p:spPr/>
-        <p:txBody>
-          <a:bodyPr>
-            <a:normAutofit fontScale="92500"/>
+      <p:pic>
+        <p:nvPicPr>
+          <p:cNvPr id="4" name="Obraz 3">
+            <a:extLst>
+              <a:ext uri="{FF2B5EF4-FFF2-40B4-BE49-F238E27FC236}">
+                <a16:creationId xmlns:a16="http://schemas.microsoft.com/office/drawing/2014/main" id="{4693E866-FE5B-AD44-8FA5-3862CBAF09FA}"/>
+              </a:ext>
+            </a:extLst>
+          </p:cNvPr>
+          <p:cNvPicPr>
+            <a:picLocks noChangeAspect="1"/>
+          </p:cNvPicPr>
+          <p:nvPr/>
+        </p:nvPicPr>
+        <p:blipFill>
+          <a:blip r:embed="rId2">
+            <a:extLst>
+              <a:ext uri="{28A0092B-C50C-407E-A947-70E740481C1C}">
+                <a14:useLocalDpi xmlns:a14="http://schemas.microsoft.com/office/drawing/2010/main" val="0"/>
+              </a:ext>
+            </a:extLst>
+          </a:blip>
+          <a:stretch>
+            <a:fillRect/>
+          </a:stretch>
+        </p:blipFill>
+        <p:spPr>
+          <a:xfrm>
+            <a:off x="2744536" y="76200"/>
+            <a:ext cx="8940800" cy="6705600"/>
+          </a:xfrm>
+          <a:prstGeom prst="rect">
+            <a:avLst/>
+          </a:prstGeom>
+        </p:spPr>
+      </p:pic>
+      <p:sp>
+        <p:nvSpPr>
+          <p:cNvPr id="3" name="pole tekstowe 2">
+            <a:extLst>
+              <a:ext uri="{FF2B5EF4-FFF2-40B4-BE49-F238E27FC236}">
+                <a16:creationId xmlns:a16="http://schemas.microsoft.com/office/drawing/2014/main" id="{3B774FEC-EBFA-B662-1372-7D093BD8B71A}"/>
+              </a:ext>
+            </a:extLst>
+          </p:cNvPr>
+          <p:cNvSpPr txBox="1"/>
+          <p:nvPr/>
+        </p:nvSpPr>
+        <p:spPr>
+          <a:xfrm>
+            <a:off x="481262" y="5104004"/>
+            <a:ext cx="3100138" cy="1261884"/>
+          </a:xfrm>
+          <a:prstGeom prst="rect">
+            <a:avLst/>
+          </a:prstGeom>
+          <a:noFill/>
+        </p:spPr>
+        <p:txBody>
+          <a:bodyPr wrap="square" rtlCol="0" anchor="b">
+            <a:spAutoFit/>
           </a:bodyPr>
           <a:lstStyle/>
           <a:p>
             <a:r>
-              <a:rPr lang="pl-PL" sz="7200" dirty="0">
-                <a:highlight>
-                  <a:srgbClr val="FFFF00"/>
-                </a:highlight>
-              </a:rPr>
-              <a:t>DO ZROBIENIA </a:t>
-            </a:r>
-            <a:r>
-              <a:rPr lang="pl-PL" sz="7200" dirty="0" err="1">
-                <a:highlight>
-                  <a:srgbClr val="FFFF00"/>
-                </a:highlight>
-              </a:rPr>
-              <a:t>sZyMoN</a:t>
-            </a:r>
-            <a:r>
-              <a:rPr lang="pl-PL" sz="7200" dirty="0">
-                <a:highlight>
-                  <a:srgbClr val="FFFF00"/>
-                </a:highlight>
-              </a:rPr>
-              <a:t>!</a:t>
-            </a:r>
-            <a:endParaRPr lang="en-US" sz="7200" dirty="0">
-              <a:highlight>
-                <a:srgbClr val="FFFF00"/>
-              </a:highlight>
-            </a:endParaRPr>
+              <a:rPr lang="pl-PL" sz="1900" u="sng" dirty="0"/>
+              <a:t>Parametry</a:t>
+            </a:r>
+          </a:p>
+          <a:p>
+            <a:r>
+              <a:rPr lang="pl-PL" sz="1900" dirty="0"/>
+              <a:t>liczba cech: 5</a:t>
+            </a:r>
+          </a:p>
+          <a:p>
+            <a:r>
+              <a:rPr lang="pl-PL" sz="1900" dirty="0"/>
+              <a:t>długość boku siatki: 10</a:t>
+            </a:r>
+          </a:p>
+          <a:p>
+            <a:r>
+              <a:rPr lang="pl-PL" sz="1900" dirty="0"/>
+              <a:t>liczba iteracji: &lt;300000</a:t>
+            </a:r>
           </a:p>
         </p:txBody>
       </p:sp>
     </p:spTree>
     <p:extLst>
       <p:ext uri="{BB962C8B-B14F-4D97-AF65-F5344CB8AC3E}">
-        <p14:creationId xmlns:p14="http://schemas.microsoft.com/office/powerpoint/2010/main" val="3546194582"/>
+        <p14:creationId xmlns:p14="http://schemas.microsoft.com/office/powerpoint/2010/main" val="2455441191"/>
       </p:ext>
     </p:extLst>
   </p:cSld>
@@ -6150,7 +6557,13 @@
   <p:cSld>
     <p:spTree>
       <p:nvGrpSpPr>
-        <p:cNvPr id="1" name=""/>
+        <p:cNvPr id="1" name="">
+          <a:extLst>
+            <a:ext uri="{FF2B5EF4-FFF2-40B4-BE49-F238E27FC236}">
+              <a16:creationId xmlns:a16="http://schemas.microsoft.com/office/drawing/2014/main" id="{3AEBEEFD-4777-E5BE-A441-F2ED6C94E4B5}"/>
+            </a:ext>
+          </a:extLst>
+        </p:cNvPr>
         <p:cNvGrpSpPr/>
         <p:nvPr/>
       </p:nvGrpSpPr>
@@ -6162,60 +6575,164 @@
           <a:chExt cx="0" cy="0"/>
         </a:xfrm>
       </p:grpSpPr>
-      <p:sp>
-        <p:nvSpPr>
-          <p:cNvPr id="2" name="Tytuł 1">
-            <a:extLst>
-              <a:ext uri="{FF2B5EF4-FFF2-40B4-BE49-F238E27FC236}">
-                <a16:creationId xmlns:a16="http://schemas.microsoft.com/office/drawing/2014/main" id="{E8BE52D9-B0DB-27E5-E0DD-1371A853577A}"/>
-              </a:ext>
-            </a:extLst>
-          </p:cNvPr>
-          <p:cNvSpPr>
-            <a:spLocks noGrp="1"/>
-          </p:cNvSpPr>
-          <p:nvPr>
-            <p:ph type="title"/>
-          </p:nvPr>
-        </p:nvSpPr>
-        <p:spPr/>
-        <p:txBody>
-          <a:bodyPr/>
+      <p:pic>
+        <p:nvPicPr>
+          <p:cNvPr id="4" name="Obraz 3">
+            <a:extLst>
+              <a:ext uri="{FF2B5EF4-FFF2-40B4-BE49-F238E27FC236}">
+                <a16:creationId xmlns:a16="http://schemas.microsoft.com/office/drawing/2014/main" id="{8AA74A69-C74E-CA5A-4969-7D4FF901DFA8}"/>
+              </a:ext>
+            </a:extLst>
+          </p:cNvPr>
+          <p:cNvPicPr>
+            <a:picLocks noChangeAspect="1"/>
+          </p:cNvPicPr>
+          <p:nvPr/>
+        </p:nvPicPr>
+        <p:blipFill>
+          <a:blip r:embed="rId2">
+            <a:extLst>
+              <a:ext uri="{28A0092B-C50C-407E-A947-70E740481C1C}">
+                <a14:useLocalDpi xmlns:a14="http://schemas.microsoft.com/office/drawing/2010/main" val="0"/>
+              </a:ext>
+            </a:extLst>
+          </a:blip>
+          <a:stretch>
+            <a:fillRect/>
+          </a:stretch>
+        </p:blipFill>
+        <p:spPr>
+          <a:xfrm>
+            <a:off x="2785790" y="144378"/>
+            <a:ext cx="8758990" cy="6569243"/>
+          </a:xfrm>
+          <a:prstGeom prst="rect">
+            <a:avLst/>
+          </a:prstGeom>
+        </p:spPr>
+      </p:pic>
+      <p:sp>
+        <p:nvSpPr>
+          <p:cNvPr id="3" name="pole tekstowe 2">
+            <a:extLst>
+              <a:ext uri="{FF2B5EF4-FFF2-40B4-BE49-F238E27FC236}">
+                <a16:creationId xmlns:a16="http://schemas.microsoft.com/office/drawing/2014/main" id="{335EFD6F-418E-DEBF-4D57-0A479983EECB}"/>
+              </a:ext>
+            </a:extLst>
+          </p:cNvPr>
+          <p:cNvSpPr txBox="1"/>
+          <p:nvPr/>
+        </p:nvSpPr>
+        <p:spPr>
+          <a:xfrm>
+            <a:off x="481262" y="5104004"/>
+            <a:ext cx="3100138" cy="1261884"/>
+          </a:xfrm>
+          <a:prstGeom prst="rect">
+            <a:avLst/>
+          </a:prstGeom>
+          <a:noFill/>
+        </p:spPr>
+        <p:txBody>
+          <a:bodyPr wrap="square" rtlCol="0" anchor="b">
+            <a:spAutoFit/>
+          </a:bodyPr>
           <a:lstStyle/>
           <a:p>
-            <a:endParaRPr lang="pl-PL"/>
-          </a:p>
-        </p:txBody>
-      </p:sp>
-      <p:sp>
-        <p:nvSpPr>
-          <p:cNvPr id="3" name="Symbol zastępczy zawartości 2">
-            <a:extLst>
-              <a:ext uri="{FF2B5EF4-FFF2-40B4-BE49-F238E27FC236}">
-                <a16:creationId xmlns:a16="http://schemas.microsoft.com/office/drawing/2014/main" id="{5129E3C5-E2F4-479C-1370-A47643ED6B4C}"/>
-              </a:ext>
-            </a:extLst>
-          </p:cNvPr>
-          <p:cNvSpPr>
-            <a:spLocks noGrp="1"/>
-          </p:cNvSpPr>
-          <p:nvPr>
-            <p:ph idx="1"/>
-          </p:nvPr>
-        </p:nvSpPr>
-        <p:spPr/>
-        <p:txBody>
-          <a:bodyPr/>
+            <a:r>
+              <a:rPr lang="pl-PL" sz="1900" u="sng" dirty="0"/>
+              <a:t>Parametry</a:t>
+            </a:r>
+          </a:p>
+          <a:p>
+            <a:r>
+              <a:rPr lang="pl-PL" sz="1900" dirty="0"/>
+              <a:t>liczba cech: 5</a:t>
+            </a:r>
+          </a:p>
+          <a:p>
+            <a:r>
+              <a:rPr lang="pl-PL" sz="1900" dirty="0"/>
+              <a:t>długość boku siatki: 10</a:t>
+            </a:r>
+          </a:p>
+          <a:p>
+            <a:r>
+              <a:rPr lang="pl-PL" sz="1900" dirty="0"/>
+              <a:t>liczba iteracji: &lt;400000</a:t>
+            </a:r>
+          </a:p>
+        </p:txBody>
+      </p:sp>
+      <p:pic>
+        <p:nvPicPr>
+          <p:cNvPr id="6" name="Obraz 5">
+            <a:extLst>
+              <a:ext uri="{FF2B5EF4-FFF2-40B4-BE49-F238E27FC236}">
+                <a16:creationId xmlns:a16="http://schemas.microsoft.com/office/drawing/2014/main" id="{BD0C09B4-26CE-4575-BDA9-DE177BA3BAD9}"/>
+              </a:ext>
+            </a:extLst>
+          </p:cNvPr>
+          <p:cNvPicPr>
+            <a:picLocks noChangeAspect="1"/>
+          </p:cNvPicPr>
+          <p:nvPr/>
+        </p:nvPicPr>
+        <p:blipFill>
+          <a:blip r:embed="rId3"/>
+          <a:stretch>
+            <a:fillRect/>
+          </a:stretch>
+        </p:blipFill>
+        <p:spPr>
+          <a:xfrm>
+            <a:off x="5651792" y="304800"/>
+            <a:ext cx="3877218" cy="288364"/>
+          </a:xfrm>
+          <a:prstGeom prst="rect">
+            <a:avLst/>
+          </a:prstGeom>
+        </p:spPr>
+      </p:pic>
+      <p:sp>
+        <p:nvSpPr>
+          <p:cNvPr id="7" name="pole tekstowe 6">
+            <a:extLst>
+              <a:ext uri="{FF2B5EF4-FFF2-40B4-BE49-F238E27FC236}">
+                <a16:creationId xmlns:a16="http://schemas.microsoft.com/office/drawing/2014/main" id="{55926E9D-9C6D-461D-CA0A-C9934EBC198E}"/>
+              </a:ext>
+            </a:extLst>
+          </p:cNvPr>
+          <p:cNvSpPr txBox="1"/>
+          <p:nvPr/>
+        </p:nvSpPr>
+        <p:spPr>
+          <a:xfrm>
+            <a:off x="3446284" y="288758"/>
+            <a:ext cx="8288233" cy="384721"/>
+          </a:xfrm>
+          <a:prstGeom prst="rect">
+            <a:avLst/>
+          </a:prstGeom>
+          <a:noFill/>
+        </p:spPr>
+        <p:txBody>
+          <a:bodyPr wrap="square" rtlCol="0">
+            <a:spAutoFit/>
+          </a:bodyPr>
           <a:lstStyle/>
           <a:p>
-            <a:endParaRPr lang="pl-PL"/>
+            <a:r>
+              <a:rPr lang="pl-PL" sz="1900" dirty="0"/>
+              <a:t>Unormowana wielkość największego regionu w zależności od liczby wariantów</a:t>
+            </a:r>
           </a:p>
         </p:txBody>
       </p:sp>
     </p:spTree>
     <p:extLst>
       <p:ext uri="{BB962C8B-B14F-4D97-AF65-F5344CB8AC3E}">
-        <p14:creationId xmlns:p14="http://schemas.microsoft.com/office/powerpoint/2010/main" val="249834709"/>
+        <p14:creationId xmlns:p14="http://schemas.microsoft.com/office/powerpoint/2010/main" val="1244680839"/>
       </p:ext>
     </p:extLst>
   </p:cSld>
@@ -6230,7 +6747,13 @@
   <p:cSld>
     <p:spTree>
       <p:nvGrpSpPr>
-        <p:cNvPr id="1" name=""/>
+        <p:cNvPr id="1" name="">
+          <a:extLst>
+            <a:ext uri="{FF2B5EF4-FFF2-40B4-BE49-F238E27FC236}">
+              <a16:creationId xmlns:a16="http://schemas.microsoft.com/office/drawing/2014/main" id="{0346A47C-9D1B-ADDB-C999-E46054B35C68}"/>
+            </a:ext>
+          </a:extLst>
+        </p:cNvPr>
         <p:cNvGrpSpPr/>
         <p:nvPr/>
       </p:nvGrpSpPr>
@@ -6242,209 +6765,12 @@
           <a:chExt cx="0" cy="0"/>
         </a:xfrm>
       </p:grpSpPr>
-      <p:sp>
-        <p:nvSpPr>
-          <p:cNvPr id="2" name="Tytuł 1">
-            <a:extLst>
-              <a:ext uri="{FF2B5EF4-FFF2-40B4-BE49-F238E27FC236}">
-                <a16:creationId xmlns:a16="http://schemas.microsoft.com/office/drawing/2014/main" id="{77407CC0-3BB3-4563-A997-6BDBBB130FFE}"/>
-              </a:ext>
-            </a:extLst>
-          </p:cNvPr>
-          <p:cNvSpPr>
-            <a:spLocks noGrp="1"/>
-          </p:cNvSpPr>
-          <p:nvPr>
-            <p:ph type="title"/>
-          </p:nvPr>
-        </p:nvSpPr>
-        <p:spPr/>
-        <p:txBody>
-          <a:bodyPr/>
-          <a:lstStyle/>
-          <a:p>
-            <a:r>
-              <a:rPr lang="pl-PL" dirty="0"/>
-              <a:t>Rozszerzenie modelu</a:t>
-            </a:r>
-            <a:endParaRPr lang="en-US" dirty="0"/>
-          </a:p>
-        </p:txBody>
-      </p:sp>
-      <p:sp>
-        <p:nvSpPr>
-          <p:cNvPr id="3" name="Symbol zastępczy zawartości 2">
-            <a:extLst>
-              <a:ext uri="{FF2B5EF4-FFF2-40B4-BE49-F238E27FC236}">
-                <a16:creationId xmlns:a16="http://schemas.microsoft.com/office/drawing/2014/main" id="{BA4F3297-7DD6-0EF4-82F1-773AB2F43F61}"/>
-              </a:ext>
-            </a:extLst>
-          </p:cNvPr>
-          <p:cNvSpPr>
-            <a:spLocks noGrp="1"/>
-          </p:cNvSpPr>
-          <p:nvPr>
-            <p:ph idx="1"/>
-          </p:nvPr>
-        </p:nvSpPr>
-        <p:spPr>
-          <a:xfrm>
-            <a:off x="838200" y="1825625"/>
-            <a:ext cx="10198768" cy="4351338"/>
-          </a:xfrm>
-        </p:spPr>
-        <p:txBody>
-          <a:bodyPr>
-            <a:normAutofit/>
-          </a:bodyPr>
-          <a:lstStyle/>
-          <a:p>
-            <a:pPr>
-              <a:buFont typeface="Wingdings" panose="05000000000000000000" pitchFamily="2" charset="2"/>
-              <a:buChar char="§"/>
-            </a:pPr>
-            <a:r>
-              <a:rPr lang="pl-PL" sz="3600" dirty="0"/>
-              <a:t>Extended – zwiększamy sąsiedztwo o przekątne (do 8 z 4).</a:t>
-            </a:r>
-          </a:p>
-          <a:p>
-            <a:pPr>
-              <a:buFont typeface="Wingdings" panose="05000000000000000000" pitchFamily="2" charset="2"/>
-              <a:buChar char="§"/>
-            </a:pPr>
-            <a:r>
-              <a:rPr lang="pl-PL" sz="3600" dirty="0"/>
-              <a:t>Model toroidalny - </a:t>
-            </a:r>
-            <a:r>
-              <a:rPr lang="en-US" sz="3600" dirty="0" err="1"/>
-              <a:t>Zwijamy</a:t>
-            </a:r>
-            <a:r>
-              <a:rPr lang="en-US" sz="3600" dirty="0"/>
-              <a:t> </a:t>
-            </a:r>
-            <a:r>
-              <a:rPr lang="en-US" sz="3600" dirty="0" err="1"/>
-              <a:t>siatkę</a:t>
-            </a:r>
-            <a:r>
-              <a:rPr lang="en-US" sz="3600" dirty="0"/>
-              <a:t> w </a:t>
-            </a:r>
-            <a:r>
-              <a:rPr lang="en-US" sz="3600" dirty="0" err="1"/>
-              <a:t>kształt</a:t>
-            </a:r>
-            <a:r>
-              <a:rPr lang="en-US" sz="3600" dirty="0"/>
-              <a:t> </a:t>
-            </a:r>
-            <a:r>
-              <a:rPr lang="en-US" sz="3600" dirty="0" err="1"/>
-              <a:t>torusa</a:t>
-            </a:r>
-            <a:r>
-              <a:rPr lang="en-US" sz="3600" dirty="0"/>
-              <a:t> – </a:t>
-            </a:r>
-            <a:r>
-              <a:rPr lang="en-US" sz="3600" dirty="0" err="1"/>
-              <a:t>agenci</a:t>
-            </a:r>
-            <a:r>
-              <a:rPr lang="en-US" sz="3600" dirty="0"/>
-              <a:t> z </a:t>
-            </a:r>
-            <a:r>
-              <a:rPr lang="en-US" sz="3600" dirty="0" err="1"/>
-              <a:t>lewej</a:t>
-            </a:r>
-            <a:r>
-              <a:rPr lang="en-US" sz="3600" dirty="0"/>
-              <a:t> </a:t>
-            </a:r>
-            <a:r>
-              <a:rPr lang="en-US" sz="3600" dirty="0" err="1"/>
-              <a:t>krawędzi</a:t>
-            </a:r>
-            <a:r>
-              <a:rPr lang="en-US" sz="3600" dirty="0"/>
-              <a:t> </a:t>
-            </a:r>
-            <a:r>
-              <a:rPr lang="en-US" sz="3600" dirty="0" err="1"/>
-              <a:t>łączą</a:t>
-            </a:r>
-            <a:r>
-              <a:rPr lang="en-US" sz="3600" dirty="0"/>
-              <a:t> </a:t>
-            </a:r>
-            <a:r>
-              <a:rPr lang="en-US" sz="3600" dirty="0" err="1"/>
-              <a:t>się</a:t>
-            </a:r>
-            <a:r>
-              <a:rPr lang="en-US" sz="3600" dirty="0"/>
-              <a:t> </a:t>
-            </a:r>
-            <a:r>
-              <a:rPr lang="en-US" sz="3600" dirty="0" err="1"/>
-              <a:t>bezpośrednio</a:t>
-            </a:r>
-            <a:r>
-              <a:rPr lang="en-US" sz="3600" dirty="0"/>
-              <a:t> z </a:t>
-            </a:r>
-            <a:r>
-              <a:rPr lang="en-US" sz="3600" dirty="0" err="1"/>
-              <a:t>prawą</a:t>
-            </a:r>
-            <a:r>
-              <a:rPr lang="en-US" sz="3600" dirty="0"/>
-              <a:t>, </a:t>
-            </a:r>
-            <a:r>
-              <a:rPr lang="en-US" sz="3600" dirty="0" err="1"/>
-              <a:t>wyrównując</a:t>
-            </a:r>
-            <a:r>
-              <a:rPr lang="en-US" sz="3600" dirty="0"/>
-              <a:t> </a:t>
-            </a:r>
-            <a:r>
-              <a:rPr lang="en-US" sz="3600" dirty="0" err="1"/>
-              <a:t>szanse</a:t>
-            </a:r>
-            <a:r>
-              <a:rPr lang="en-US" sz="3600" dirty="0"/>
-              <a:t> </a:t>
-            </a:r>
-            <a:r>
-              <a:rPr lang="en-US" sz="3600" dirty="0" err="1"/>
-              <a:t>interakcj</a:t>
-            </a:r>
-            <a:r>
-              <a:rPr lang="pl-PL" sz="3600" dirty="0"/>
-              <a:t>i.</a:t>
-            </a:r>
-          </a:p>
-          <a:p>
-            <a:pPr>
-              <a:buFont typeface="Wingdings" panose="05000000000000000000" pitchFamily="2" charset="2"/>
-              <a:buChar char="§"/>
-            </a:pPr>
-            <a:endParaRPr lang="en-US" sz="3600" dirty="0"/>
-          </a:p>
-        </p:txBody>
-      </p:sp>
       <p:pic>
         <p:nvPicPr>
-          <p:cNvPr id="5" name="Obraz 4">
-            <a:extLst>
-              <a:ext uri="{FF2B5EF4-FFF2-40B4-BE49-F238E27FC236}">
-                <a16:creationId xmlns:a16="http://schemas.microsoft.com/office/drawing/2014/main" id="{B5D8E6B7-A676-19C9-FBC0-6F82629BCBDD}"/>
+          <p:cNvPr id="4" name="Obraz 3">
+            <a:extLst>
+              <a:ext uri="{FF2B5EF4-FFF2-40B4-BE49-F238E27FC236}">
+                <a16:creationId xmlns:a16="http://schemas.microsoft.com/office/drawing/2014/main" id="{D1C94B36-4188-B57F-D942-9E288C45B2A9}"/>
               </a:ext>
             </a:extLst>
           </p:cNvPr>
@@ -6454,25 +6780,84 @@
           <p:nvPr/>
         </p:nvPicPr>
         <p:blipFill>
-          <a:blip r:embed="rId2"/>
+          <a:blip r:embed="rId2">
+            <a:extLst>
+              <a:ext uri="{28A0092B-C50C-407E-A947-70E740481C1C}">
+                <a14:useLocalDpi xmlns:a14="http://schemas.microsoft.com/office/drawing/2010/main" val="0"/>
+              </a:ext>
+            </a:extLst>
+          </a:blip>
           <a:stretch>
             <a:fillRect/>
           </a:stretch>
         </p:blipFill>
         <p:spPr>
           <a:xfrm>
-            <a:off x="8549941" y="3962400"/>
-            <a:ext cx="3261175" cy="2735179"/>
+            <a:off x="2398000" y="244638"/>
+            <a:ext cx="9794000" cy="6121250"/>
           </a:xfrm>
           <a:prstGeom prst="rect">
             <a:avLst/>
           </a:prstGeom>
         </p:spPr>
       </p:pic>
+      <p:sp>
+        <p:nvSpPr>
+          <p:cNvPr id="3" name="pole tekstowe 2">
+            <a:extLst>
+              <a:ext uri="{FF2B5EF4-FFF2-40B4-BE49-F238E27FC236}">
+                <a16:creationId xmlns:a16="http://schemas.microsoft.com/office/drawing/2014/main" id="{4E702975-534F-BD40-3DB2-DC29CD0460FD}"/>
+              </a:ext>
+            </a:extLst>
+          </p:cNvPr>
+          <p:cNvSpPr txBox="1"/>
+          <p:nvPr/>
+        </p:nvSpPr>
+        <p:spPr>
+          <a:xfrm>
+            <a:off x="481262" y="5104004"/>
+            <a:ext cx="3100138" cy="1261884"/>
+          </a:xfrm>
+          <a:prstGeom prst="rect">
+            <a:avLst/>
+          </a:prstGeom>
+          <a:noFill/>
+        </p:spPr>
+        <p:txBody>
+          <a:bodyPr wrap="square" rtlCol="0" anchor="b">
+            <a:spAutoFit/>
+          </a:bodyPr>
+          <a:lstStyle/>
+          <a:p>
+            <a:r>
+              <a:rPr lang="pl-PL" sz="1900" u="sng" dirty="0"/>
+              <a:t>Parametry</a:t>
+            </a:r>
+          </a:p>
+          <a:p>
+            <a:r>
+              <a:rPr lang="pl-PL" sz="1900" dirty="0"/>
+              <a:t>liczba cech: 5</a:t>
+            </a:r>
+          </a:p>
+          <a:p>
+            <a:r>
+              <a:rPr lang="pl-PL" sz="1900" dirty="0"/>
+              <a:t>liczba wariantów: 5</a:t>
+            </a:r>
+          </a:p>
+          <a:p>
+            <a:r>
+              <a:rPr lang="pl-PL" sz="1900" dirty="0"/>
+              <a:t>liczba iteracji: &lt;1mln</a:t>
+            </a:r>
+          </a:p>
+        </p:txBody>
+      </p:sp>
     </p:spTree>
     <p:extLst>
       <p:ext uri="{BB962C8B-B14F-4D97-AF65-F5344CB8AC3E}">
-        <p14:creationId xmlns:p14="http://schemas.microsoft.com/office/powerpoint/2010/main" val="1142525123"/>
+        <p14:creationId xmlns:p14="http://schemas.microsoft.com/office/powerpoint/2010/main" val="2773652040"/>
       </p:ext>
     </p:extLst>
   </p:cSld>
@@ -6487,7 +6872,13 @@
   <p:cSld>
     <p:spTree>
       <p:nvGrpSpPr>
-        <p:cNvPr id="1" name=""/>
+        <p:cNvPr id="1" name="">
+          <a:extLst>
+            <a:ext uri="{FF2B5EF4-FFF2-40B4-BE49-F238E27FC236}">
+              <a16:creationId xmlns:a16="http://schemas.microsoft.com/office/drawing/2014/main" id="{CC6C778C-6913-9203-0009-771F46F93336}"/>
+            </a:ext>
+          </a:extLst>
+        </p:cNvPr>
         <p:cNvGrpSpPr/>
         <p:nvPr/>
       </p:nvGrpSpPr>
@@ -6499,72 +6890,93 @@
           <a:chExt cx="0" cy="0"/>
         </a:xfrm>
       </p:grpSpPr>
-      <p:sp>
-        <p:nvSpPr>
-          <p:cNvPr id="2" name="Tytuł 1">
-            <a:extLst>
-              <a:ext uri="{FF2B5EF4-FFF2-40B4-BE49-F238E27FC236}">
-                <a16:creationId xmlns:a16="http://schemas.microsoft.com/office/drawing/2014/main" id="{958507E3-A492-ADE9-9CC9-39CA0FE7FF78}"/>
-              </a:ext>
-            </a:extLst>
-          </p:cNvPr>
-          <p:cNvSpPr>
-            <a:spLocks noGrp="1"/>
-          </p:cNvSpPr>
-          <p:nvPr>
-            <p:ph type="title"/>
-          </p:nvPr>
-        </p:nvSpPr>
-        <p:spPr/>
-        <p:txBody>
-          <a:bodyPr/>
+      <p:pic>
+        <p:nvPicPr>
+          <p:cNvPr id="4" name="Obraz 3">
+            <a:extLst>
+              <a:ext uri="{FF2B5EF4-FFF2-40B4-BE49-F238E27FC236}">
+                <a16:creationId xmlns:a16="http://schemas.microsoft.com/office/drawing/2014/main" id="{0145A6B3-F51E-DF0E-0AF2-74CD15D5F1B7}"/>
+              </a:ext>
+            </a:extLst>
+          </p:cNvPr>
+          <p:cNvPicPr>
+            <a:picLocks noChangeAspect="1"/>
+          </p:cNvPicPr>
+          <p:nvPr/>
+        </p:nvPicPr>
+        <p:blipFill>
+          <a:blip r:embed="rId2">
+            <a:extLst>
+              <a:ext uri="{28A0092B-C50C-407E-A947-70E740481C1C}">
+                <a14:useLocalDpi xmlns:a14="http://schemas.microsoft.com/office/drawing/2010/main" val="0"/>
+              </a:ext>
+            </a:extLst>
+          </a:blip>
+          <a:stretch>
+            <a:fillRect/>
+          </a:stretch>
+        </p:blipFill>
+        <p:spPr>
+          <a:xfrm>
+            <a:off x="0" y="324263"/>
+            <a:ext cx="12192000" cy="4876799"/>
+          </a:xfrm>
+          <a:prstGeom prst="rect">
+            <a:avLst/>
+          </a:prstGeom>
+        </p:spPr>
+      </p:pic>
+      <p:sp>
+        <p:nvSpPr>
+          <p:cNvPr id="6" name="pole tekstowe 5">
+            <a:extLst>
+              <a:ext uri="{FF2B5EF4-FFF2-40B4-BE49-F238E27FC236}">
+                <a16:creationId xmlns:a16="http://schemas.microsoft.com/office/drawing/2014/main" id="{172743B8-D8F6-9E33-B65F-B2EE3D858D57}"/>
+              </a:ext>
+            </a:extLst>
+          </p:cNvPr>
+          <p:cNvSpPr txBox="1"/>
+          <p:nvPr/>
+        </p:nvSpPr>
+        <p:spPr>
+          <a:xfrm>
+            <a:off x="481262" y="5396392"/>
+            <a:ext cx="5213685" cy="969496"/>
+          </a:xfrm>
+          <a:prstGeom prst="rect">
+            <a:avLst/>
+          </a:prstGeom>
+          <a:noFill/>
+        </p:spPr>
+        <p:txBody>
+          <a:bodyPr wrap="square" rtlCol="0" anchor="b">
+            <a:spAutoFit/>
+          </a:bodyPr>
           <a:lstStyle/>
           <a:p>
             <a:r>
-              <a:rPr lang="pl-PL" dirty="0"/>
-              <a:t>Rezultat rozszerzenia modelu</a:t>
-            </a:r>
-            <a:endParaRPr lang="en-US" dirty="0"/>
-          </a:p>
-        </p:txBody>
-      </p:sp>
-      <p:sp>
-        <p:nvSpPr>
-          <p:cNvPr id="3" name="Symbol zastępczy zawartości 2">
-            <a:extLst>
-              <a:ext uri="{FF2B5EF4-FFF2-40B4-BE49-F238E27FC236}">
-                <a16:creationId xmlns:a16="http://schemas.microsoft.com/office/drawing/2014/main" id="{0A2EC9DE-B8DC-3284-A196-82B0FE9D5307}"/>
-              </a:ext>
-            </a:extLst>
-          </p:cNvPr>
-          <p:cNvSpPr>
-            <a:spLocks noGrp="1"/>
-          </p:cNvSpPr>
-          <p:nvPr>
-            <p:ph idx="1"/>
-          </p:nvPr>
-        </p:nvSpPr>
-        <p:spPr/>
-        <p:txBody>
-          <a:bodyPr/>
-          <a:lstStyle/>
-          <a:p>
-            <a:pPr>
-              <a:buFont typeface="Wingdings" panose="05000000000000000000" pitchFamily="2" charset="2"/>
-              <a:buChar char="§"/>
-            </a:pPr>
-            <a:r>
-              <a:rPr lang="pl-PL" dirty="0"/>
-              <a:t>Szybsze ujednolicenie poprzez posiadanie większej ilości sąsiadów.</a:t>
-            </a:r>
-            <a:endParaRPr lang="en-US" dirty="0"/>
+              <a:rPr lang="pl-PL" sz="1900" u="sng" dirty="0"/>
+              <a:t>Parametry</a:t>
+            </a:r>
+          </a:p>
+          <a:p>
+            <a:r>
+              <a:rPr lang="pl-PL" sz="1900" dirty="0"/>
+              <a:t>liczba cech: 3, liczba wariantów: 6</a:t>
+            </a:r>
+          </a:p>
+          <a:p>
+            <a:r>
+              <a:rPr lang="pl-PL" sz="1900" dirty="0"/>
+              <a:t>długość boku siatki: 18,  liczba iteracji: 1mln</a:t>
+            </a:r>
           </a:p>
         </p:txBody>
       </p:sp>
     </p:spTree>
     <p:extLst>
       <p:ext uri="{BB962C8B-B14F-4D97-AF65-F5344CB8AC3E}">
-        <p14:creationId xmlns:p14="http://schemas.microsoft.com/office/powerpoint/2010/main" val="907463827"/>
+        <p14:creationId xmlns:p14="http://schemas.microsoft.com/office/powerpoint/2010/main" val="2513979403"/>
       </p:ext>
     </p:extLst>
   </p:cSld>

--- a/ModelAxelroda_prezentacja.pptx
+++ b/ModelAxelroda_prezentacja.pptx
@@ -274,7 +274,7 @@
           <a:p>
             <a:fld id="{230516DF-AA08-42DB-AE84-024A6CB5A4E7}" type="datetimeFigureOut">
               <a:rPr lang="en-US" smtClean="0"/>
-              <a:t>6/23/2026</a:t>
+              <a:t>6/24/2026</a:t>
             </a:fld>
             <a:endParaRPr lang="en-US"/>
           </a:p>
@@ -474,7 +474,7 @@
           <a:p>
             <a:fld id="{230516DF-AA08-42DB-AE84-024A6CB5A4E7}" type="datetimeFigureOut">
               <a:rPr lang="en-US" smtClean="0"/>
-              <a:t>6/23/2026</a:t>
+              <a:t>6/24/2026</a:t>
             </a:fld>
             <a:endParaRPr lang="en-US"/>
           </a:p>
@@ -684,7 +684,7 @@
           <a:p>
             <a:fld id="{230516DF-AA08-42DB-AE84-024A6CB5A4E7}" type="datetimeFigureOut">
               <a:rPr lang="en-US" smtClean="0"/>
-              <a:t>6/23/2026</a:t>
+              <a:t>6/24/2026</a:t>
             </a:fld>
             <a:endParaRPr lang="en-US"/>
           </a:p>
@@ -884,7 +884,7 @@
           <a:p>
             <a:fld id="{230516DF-AA08-42DB-AE84-024A6CB5A4E7}" type="datetimeFigureOut">
               <a:rPr lang="en-US" smtClean="0"/>
-              <a:t>6/23/2026</a:t>
+              <a:t>6/24/2026</a:t>
             </a:fld>
             <a:endParaRPr lang="en-US"/>
           </a:p>
@@ -1160,7 +1160,7 @@
           <a:p>
             <a:fld id="{230516DF-AA08-42DB-AE84-024A6CB5A4E7}" type="datetimeFigureOut">
               <a:rPr lang="en-US" smtClean="0"/>
-              <a:t>6/23/2026</a:t>
+              <a:t>6/24/2026</a:t>
             </a:fld>
             <a:endParaRPr lang="en-US"/>
           </a:p>
@@ -1428,7 +1428,7 @@
           <a:p>
             <a:fld id="{230516DF-AA08-42DB-AE84-024A6CB5A4E7}" type="datetimeFigureOut">
               <a:rPr lang="en-US" smtClean="0"/>
-              <a:t>6/23/2026</a:t>
+              <a:t>6/24/2026</a:t>
             </a:fld>
             <a:endParaRPr lang="en-US"/>
           </a:p>
@@ -1843,7 +1843,7 @@
           <a:p>
             <a:fld id="{230516DF-AA08-42DB-AE84-024A6CB5A4E7}" type="datetimeFigureOut">
               <a:rPr lang="en-US" smtClean="0"/>
-              <a:t>6/23/2026</a:t>
+              <a:t>6/24/2026</a:t>
             </a:fld>
             <a:endParaRPr lang="en-US"/>
           </a:p>
@@ -1985,7 +1985,7 @@
           <a:p>
             <a:fld id="{230516DF-AA08-42DB-AE84-024A6CB5A4E7}" type="datetimeFigureOut">
               <a:rPr lang="en-US" smtClean="0"/>
-              <a:t>6/23/2026</a:t>
+              <a:t>6/24/2026</a:t>
             </a:fld>
             <a:endParaRPr lang="en-US"/>
           </a:p>
@@ -2098,7 +2098,7 @@
           <a:p>
             <a:fld id="{230516DF-AA08-42DB-AE84-024A6CB5A4E7}" type="datetimeFigureOut">
               <a:rPr lang="en-US" smtClean="0"/>
-              <a:t>6/23/2026</a:t>
+              <a:t>6/24/2026</a:t>
             </a:fld>
             <a:endParaRPr lang="en-US"/>
           </a:p>
@@ -2411,7 +2411,7 @@
           <a:p>
             <a:fld id="{230516DF-AA08-42DB-AE84-024A6CB5A4E7}" type="datetimeFigureOut">
               <a:rPr lang="en-US" smtClean="0"/>
-              <a:t>6/23/2026</a:t>
+              <a:t>6/24/2026</a:t>
             </a:fld>
             <a:endParaRPr lang="en-US"/>
           </a:p>
@@ -2700,7 +2700,7 @@
           <a:p>
             <a:fld id="{230516DF-AA08-42DB-AE84-024A6CB5A4E7}" type="datetimeFigureOut">
               <a:rPr lang="en-US" smtClean="0"/>
-              <a:t>6/23/2026</a:t>
+              <a:t>6/24/2026</a:t>
             </a:fld>
             <a:endParaRPr lang="en-US"/>
           </a:p>
@@ -2943,7 +2943,7 @@
           <a:p>
             <a:fld id="{230516DF-AA08-42DB-AE84-024A6CB5A4E7}" type="datetimeFigureOut">
               <a:rPr lang="en-US" smtClean="0"/>
-              <a:t>6/23/2026</a:t>
+              <a:t>6/24/2026</a:t>
             </a:fld>
             <a:endParaRPr lang="en-US"/>
           </a:p>
@@ -4147,7 +4147,45 @@
             </a:pPr>
             <a:r>
               <a:rPr lang="pl-PL" dirty="0"/>
-              <a:t>Szybsze ujednolicenie poprzez posiadanie większej liczby sąsiadów.</a:t>
+              <a:t>Więcej sąsiadów powoduje bardziej ekspansywną wymianę kulturową</a:t>
+            </a:r>
+          </a:p>
+          <a:p>
+            <a:pPr>
+              <a:buFont typeface="Wingdings" panose="05000000000000000000" pitchFamily="2" charset="2"/>
+              <a:buChar char="§"/>
+            </a:pPr>
+            <a:r>
+              <a:rPr lang="pl-PL" dirty="0"/>
+              <a:t>Mniej sąsiadów sprzyja tworzeniu się odrębnych regionów</a:t>
+            </a:r>
+          </a:p>
+          <a:p>
+            <a:pPr>
+              <a:buFont typeface="Wingdings" panose="05000000000000000000" pitchFamily="2" charset="2"/>
+              <a:buChar char="§"/>
+            </a:pPr>
+            <a:r>
+              <a:rPr lang="pl-PL" dirty="0"/>
+              <a:t>Dla większej liczby sąsiadów rośnie </a:t>
+            </a:r>
+            <a:r>
+              <a:rPr lang="pl-PL" b="1" dirty="0"/>
+              <a:t>konkurencja o dominację kulturową</a:t>
+            </a:r>
+            <a:r>
+              <a:rPr lang="pl-PL" dirty="0"/>
+              <a:t> z innymi agentami</a:t>
+            </a:r>
+          </a:p>
+          <a:p>
+            <a:pPr>
+              <a:buFont typeface="Wingdings" panose="05000000000000000000" pitchFamily="2" charset="2"/>
+              <a:buChar char="§"/>
+            </a:pPr>
+            <a:r>
+              <a:rPr lang="pl-PL" dirty="0"/>
+              <a:t>Model toroidalny likwiduje możliwość łatwiejszego upodabniania się kultury na brzegach</a:t>
             </a:r>
             <a:endParaRPr lang="en-US" dirty="0"/>
           </a:p>

--- a/ModelAxelroda_prezentacja.pptx
+++ b/ModelAxelroda_prezentacja.pptx
@@ -8,17 +8,23 @@
     <p:sldId id="256" r:id="rId2"/>
     <p:sldId id="258" r:id="rId3"/>
     <p:sldId id="269" r:id="rId4"/>
-    <p:sldId id="261" r:id="rId5"/>
-    <p:sldId id="268" r:id="rId6"/>
-    <p:sldId id="279" r:id="rId7"/>
-    <p:sldId id="280" r:id="rId8"/>
-    <p:sldId id="281" r:id="rId9"/>
-    <p:sldId id="282" r:id="rId10"/>
-    <p:sldId id="263" r:id="rId11"/>
-    <p:sldId id="278" r:id="rId12"/>
-    <p:sldId id="271" r:id="rId13"/>
-    <p:sldId id="265" r:id="rId14"/>
-    <p:sldId id="264" r:id="rId15"/>
+    <p:sldId id="285" r:id="rId5"/>
+    <p:sldId id="283" r:id="rId6"/>
+    <p:sldId id="286" r:id="rId7"/>
+    <p:sldId id="284" r:id="rId8"/>
+    <p:sldId id="288" r:id="rId9"/>
+    <p:sldId id="289" r:id="rId10"/>
+    <p:sldId id="261" r:id="rId11"/>
+    <p:sldId id="268" r:id="rId12"/>
+    <p:sldId id="279" r:id="rId13"/>
+    <p:sldId id="280" r:id="rId14"/>
+    <p:sldId id="281" r:id="rId15"/>
+    <p:sldId id="282" r:id="rId16"/>
+    <p:sldId id="263" r:id="rId17"/>
+    <p:sldId id="278" r:id="rId18"/>
+    <p:sldId id="271" r:id="rId19"/>
+    <p:sldId id="265" r:id="rId20"/>
+    <p:sldId id="264" r:id="rId21"/>
   </p:sldIdLst>
   <p:sldSz cx="12192000" cy="6858000"/>
   <p:notesSz cx="6858000" cy="9144000"/>
@@ -123,6 +129,685 @@
     </p:ext>
   </p:extLst>
 </p:presentation>
+</file>
+
+<file path=ppt/revisionInfo.xml><?xml version="1.0" encoding="utf-8"?>
+<p1510:revInfo xmlns:a="http://schemas.openxmlformats.org/drawingml/2006/main" xmlns:r="http://schemas.openxmlformats.org/officeDocument/2006/relationships" xmlns:p1510="http://schemas.microsoft.com/office/powerpoint/2015/10/main">
+  <p1510:revLst>
+    <p1510:client id="{35F291EB-6735-4D1A-942D-821418AF55C5}" v="12" dt="2026-06-24T16:30:27.113"/>
+  </p1510:revLst>
+</p1510:revInfo>
+</file>
+
+<file path=ppt/changesInfos/changesInfo1.xml><?xml version="1.0" encoding="utf-8"?>
+<pc:chgInfo xmlns:a="http://schemas.openxmlformats.org/drawingml/2006/main" xmlns:r="http://schemas.openxmlformats.org/officeDocument/2006/relationships" xmlns:ac="http://schemas.microsoft.com/office/drawing/2013/main/command" xmlns:pc="http://schemas.microsoft.com/office/powerpoint/2013/main/command">
+  <pc:docChgLst>
+    <pc:chgData name="Karol Garabczewski" userId="6e35707fbcbc2133" providerId="LiveId" clId="{FDA66D67-08B2-4F99-85FD-82FDE8892109}"/>
+    <pc:docChg chg="undo custSel addSld delSld modSld">
+      <pc:chgData name="Karol Garabczewski" userId="6e35707fbcbc2133" providerId="LiveId" clId="{FDA66D67-08B2-4F99-85FD-82FDE8892109}" dt="2026-06-24T16:32:13.398" v="655" actId="20577"/>
+      <pc:docMkLst>
+        <pc:docMk/>
+      </pc:docMkLst>
+      <pc:sldChg chg="addSp delSp modSp new mod">
+        <pc:chgData name="Karol Garabczewski" userId="6e35707fbcbc2133" providerId="LiveId" clId="{FDA66D67-08B2-4F99-85FD-82FDE8892109}" dt="2026-06-24T16:27:39.748" v="568" actId="20577"/>
+        <pc:sldMkLst>
+          <pc:docMk/>
+          <pc:sldMk cId="4177816438" sldId="283"/>
+        </pc:sldMkLst>
+        <pc:spChg chg="mod">
+          <ac:chgData name="Karol Garabczewski" userId="6e35707fbcbc2133" providerId="LiveId" clId="{FDA66D67-08B2-4F99-85FD-82FDE8892109}" dt="2026-06-24T16:01:54.246" v="21" actId="20577"/>
+          <ac:spMkLst>
+            <pc:docMk/>
+            <pc:sldMk cId="4177816438" sldId="283"/>
+            <ac:spMk id="2" creationId="{6E73E7B9-8195-F34D-5595-4475F0AD43AD}"/>
+          </ac:spMkLst>
+        </pc:spChg>
+        <pc:spChg chg="add del">
+          <ac:chgData name="Karol Garabczewski" userId="6e35707fbcbc2133" providerId="LiveId" clId="{FDA66D67-08B2-4F99-85FD-82FDE8892109}" dt="2026-06-24T16:02:13.200" v="25" actId="22"/>
+          <ac:spMkLst>
+            <pc:docMk/>
+            <pc:sldMk cId="4177816438" sldId="283"/>
+            <ac:spMk id="3" creationId="{1FDA5552-AE7D-5585-2170-6F2AAEA32F70}"/>
+          </ac:spMkLst>
+        </pc:spChg>
+        <pc:spChg chg="add del mod">
+          <ac:chgData name="Karol Garabczewski" userId="6e35707fbcbc2133" providerId="LiveId" clId="{FDA66D67-08B2-4F99-85FD-82FDE8892109}" dt="2026-06-24T16:03:50.852" v="72" actId="478"/>
+          <ac:spMkLst>
+            <pc:docMk/>
+            <pc:sldMk cId="4177816438" sldId="283"/>
+            <ac:spMk id="4" creationId="{E92E6A4F-04A6-8D7B-21FB-8B6639859B88}"/>
+          </ac:spMkLst>
+        </pc:spChg>
+        <pc:spChg chg="add del mod">
+          <ac:chgData name="Karol Garabczewski" userId="6e35707fbcbc2133" providerId="LiveId" clId="{FDA66D67-08B2-4F99-85FD-82FDE8892109}" dt="2026-06-24T16:02:13.200" v="25" actId="22"/>
+          <ac:spMkLst>
+            <pc:docMk/>
+            <pc:sldMk cId="4177816438" sldId="283"/>
+            <ac:spMk id="6" creationId="{22D2651C-3C2C-1FA5-62A7-21DD3BDDAED0}"/>
+          </ac:spMkLst>
+        </pc:spChg>
+        <pc:spChg chg="add del">
+          <ac:chgData name="Karol Garabczewski" userId="6e35707fbcbc2133" providerId="LiveId" clId="{FDA66D67-08B2-4F99-85FD-82FDE8892109}" dt="2026-06-24T16:03:39.649" v="68" actId="478"/>
+          <ac:spMkLst>
+            <pc:docMk/>
+            <pc:sldMk cId="4177816438" sldId="283"/>
+            <ac:spMk id="8" creationId="{2001BBC7-1CA3-AF94-07D9-E511560831FE}"/>
+          </ac:spMkLst>
+        </pc:spChg>
+        <pc:spChg chg="add del">
+          <ac:chgData name="Karol Garabczewski" userId="6e35707fbcbc2133" providerId="LiveId" clId="{FDA66D67-08B2-4F99-85FD-82FDE8892109}" dt="2026-06-24T16:03:39.310" v="67" actId="478"/>
+          <ac:spMkLst>
+            <pc:docMk/>
+            <pc:sldMk cId="4177816438" sldId="283"/>
+            <ac:spMk id="10" creationId="{5A81D67E-CD33-D6D8-3322-B6DE3DE284C0}"/>
+          </ac:spMkLst>
+        </pc:spChg>
+        <pc:spChg chg="add del">
+          <ac:chgData name="Karol Garabczewski" userId="6e35707fbcbc2133" providerId="LiveId" clId="{FDA66D67-08B2-4F99-85FD-82FDE8892109}" dt="2026-06-24T16:03:38.879" v="66" actId="478"/>
+          <ac:spMkLst>
+            <pc:docMk/>
+            <pc:sldMk cId="4177816438" sldId="283"/>
+            <ac:spMk id="12" creationId="{E42EDBBA-005B-027B-A402-501C119ECA93}"/>
+          </ac:spMkLst>
+        </pc:spChg>
+        <pc:spChg chg="add del">
+          <ac:chgData name="Karol Garabczewski" userId="6e35707fbcbc2133" providerId="LiveId" clId="{FDA66D67-08B2-4F99-85FD-82FDE8892109}" dt="2026-06-24T16:03:38.394" v="65" actId="478"/>
+          <ac:spMkLst>
+            <pc:docMk/>
+            <pc:sldMk cId="4177816438" sldId="283"/>
+            <ac:spMk id="14" creationId="{76F0FE7C-6EFE-FC96-909E-13C3F5A60585}"/>
+          </ac:spMkLst>
+        </pc:spChg>
+        <pc:spChg chg="add del">
+          <ac:chgData name="Karol Garabczewski" userId="6e35707fbcbc2133" providerId="LiveId" clId="{FDA66D67-08B2-4F99-85FD-82FDE8892109}" dt="2026-06-24T16:03:36.220" v="64" actId="478"/>
+          <ac:spMkLst>
+            <pc:docMk/>
+            <pc:sldMk cId="4177816438" sldId="283"/>
+            <ac:spMk id="16" creationId="{158DB3DC-FE4B-AA93-6407-2C5DF73FB072}"/>
+          </ac:spMkLst>
+        </pc:spChg>
+        <pc:spChg chg="add mod">
+          <ac:chgData name="Karol Garabczewski" userId="6e35707fbcbc2133" providerId="LiveId" clId="{FDA66D67-08B2-4F99-85FD-82FDE8892109}" dt="2026-06-24T16:03:43.091" v="69" actId="1076"/>
+          <ac:spMkLst>
+            <pc:docMk/>
+            <pc:sldMk cId="4177816438" sldId="283"/>
+            <ac:spMk id="18" creationId="{162C34F4-E5BF-196B-C3B6-3371932A86FC}"/>
+          </ac:spMkLst>
+        </pc:spChg>
+        <pc:spChg chg="add mod">
+          <ac:chgData name="Karol Garabczewski" userId="6e35707fbcbc2133" providerId="LiveId" clId="{FDA66D67-08B2-4F99-85FD-82FDE8892109}" dt="2026-06-24T16:03:46.173" v="70" actId="1076"/>
+          <ac:spMkLst>
+            <pc:docMk/>
+            <pc:sldMk cId="4177816438" sldId="283"/>
+            <ac:spMk id="20" creationId="{7A65A284-5220-2432-0399-9DB910A9676E}"/>
+          </ac:spMkLst>
+        </pc:spChg>
+        <pc:spChg chg="add mod">
+          <ac:chgData name="Karol Garabczewski" userId="6e35707fbcbc2133" providerId="LiveId" clId="{FDA66D67-08B2-4F99-85FD-82FDE8892109}" dt="2026-06-24T16:03:19.223" v="58" actId="1076"/>
+          <ac:spMkLst>
+            <pc:docMk/>
+            <pc:sldMk cId="4177816438" sldId="283"/>
+            <ac:spMk id="22" creationId="{E3580E95-F18E-1221-CA34-5BBD1386E33F}"/>
+          </ac:spMkLst>
+        </pc:spChg>
+        <pc:spChg chg="add mod">
+          <ac:chgData name="Karol Garabczewski" userId="6e35707fbcbc2133" providerId="LiveId" clId="{FDA66D67-08B2-4F99-85FD-82FDE8892109}" dt="2026-06-24T16:03:08.477" v="55" actId="1076"/>
+          <ac:spMkLst>
+            <pc:docMk/>
+            <pc:sldMk cId="4177816438" sldId="283"/>
+            <ac:spMk id="24" creationId="{A561B71D-0308-4444-F094-B18C604947C7}"/>
+          </ac:spMkLst>
+        </pc:spChg>
+        <pc:spChg chg="add mod">
+          <ac:chgData name="Karol Garabczewski" userId="6e35707fbcbc2133" providerId="LiveId" clId="{FDA66D67-08B2-4F99-85FD-82FDE8892109}" dt="2026-06-24T16:03:16.733" v="57" actId="1076"/>
+          <ac:spMkLst>
+            <pc:docMk/>
+            <pc:sldMk cId="4177816438" sldId="283"/>
+            <ac:spMk id="26" creationId="{41E2EE0C-5C78-BDA6-CC8C-E8DF1B93D3C0}"/>
+          </ac:spMkLst>
+        </pc:spChg>
+        <pc:spChg chg="add del mod">
+          <ac:chgData name="Karol Garabczewski" userId="6e35707fbcbc2133" providerId="LiveId" clId="{FDA66D67-08B2-4F99-85FD-82FDE8892109}" dt="2026-06-24T16:03:35.093" v="62" actId="478"/>
+          <ac:spMkLst>
+            <pc:docMk/>
+            <pc:sldMk cId="4177816438" sldId="283"/>
+            <ac:spMk id="28" creationId="{284BCA09-6094-A1B9-CB8C-5F33B0AF64D1}"/>
+          </ac:spMkLst>
+        </pc:spChg>
+        <pc:spChg chg="add del mod">
+          <ac:chgData name="Karol Garabczewski" userId="6e35707fbcbc2133" providerId="LiveId" clId="{FDA66D67-08B2-4F99-85FD-82FDE8892109}" dt="2026-06-24T16:03:35.708" v="63" actId="478"/>
+          <ac:spMkLst>
+            <pc:docMk/>
+            <pc:sldMk cId="4177816438" sldId="283"/>
+            <ac:spMk id="30" creationId="{532D2F97-314D-1A6A-FA2A-653893738756}"/>
+          </ac:spMkLst>
+        </pc:spChg>
+        <pc:spChg chg="add mod">
+          <ac:chgData name="Karol Garabczewski" userId="6e35707fbcbc2133" providerId="LiveId" clId="{FDA66D67-08B2-4F99-85FD-82FDE8892109}" dt="2026-06-24T16:03:48.228" v="71" actId="1076"/>
+          <ac:spMkLst>
+            <pc:docMk/>
+            <pc:sldMk cId="4177816438" sldId="283"/>
+            <ac:spMk id="32" creationId="{CA8EF8AA-DAA8-82B5-A9CC-80CA73818898}"/>
+          </ac:spMkLst>
+        </pc:spChg>
+        <pc:spChg chg="add mod">
+          <ac:chgData name="Karol Garabczewski" userId="6e35707fbcbc2133" providerId="LiveId" clId="{FDA66D67-08B2-4F99-85FD-82FDE8892109}" dt="2026-06-24T16:02:31.757" v="44" actId="1076"/>
+          <ac:spMkLst>
+            <pc:docMk/>
+            <pc:sldMk cId="4177816438" sldId="283"/>
+            <ac:spMk id="34" creationId="{57A84347-3C28-0608-CCE9-FF307F2D1363}"/>
+          </ac:spMkLst>
+        </pc:spChg>
+        <pc:spChg chg="add mod">
+          <ac:chgData name="Karol Garabczewski" userId="6e35707fbcbc2133" providerId="LiveId" clId="{FDA66D67-08B2-4F99-85FD-82FDE8892109}" dt="2026-06-24T16:04:24.995" v="78" actId="1076"/>
+          <ac:spMkLst>
+            <pc:docMk/>
+            <pc:sldMk cId="4177816438" sldId="283"/>
+            <ac:spMk id="36" creationId="{BB92E317-308C-C82C-F0D6-B1CBCABBAB8F}"/>
+          </ac:spMkLst>
+        </pc:spChg>
+        <pc:spChg chg="add mod">
+          <ac:chgData name="Karol Garabczewski" userId="6e35707fbcbc2133" providerId="LiveId" clId="{FDA66D67-08B2-4F99-85FD-82FDE8892109}" dt="2026-06-24T16:04:31.826" v="79" actId="1076"/>
+          <ac:spMkLst>
+            <pc:docMk/>
+            <pc:sldMk cId="4177816438" sldId="283"/>
+            <ac:spMk id="38" creationId="{3676DDD0-8F97-CDB3-0733-8AED04BCCE03}"/>
+          </ac:spMkLst>
+        </pc:spChg>
+        <pc:spChg chg="add mod">
+          <ac:chgData name="Karol Garabczewski" userId="6e35707fbcbc2133" providerId="LiveId" clId="{FDA66D67-08B2-4F99-85FD-82FDE8892109}" dt="2026-06-24T16:16:07.741" v="423" actId="20577"/>
+          <ac:spMkLst>
+            <pc:docMk/>
+            <pc:sldMk cId="4177816438" sldId="283"/>
+            <ac:spMk id="52" creationId="{F3A3AAF2-9249-D8E4-A60F-8997B179BD44}"/>
+          </ac:spMkLst>
+        </pc:spChg>
+        <pc:spChg chg="add mod">
+          <ac:chgData name="Karol Garabczewski" userId="6e35707fbcbc2133" providerId="LiveId" clId="{FDA66D67-08B2-4F99-85FD-82FDE8892109}" dt="2026-06-24T16:27:39.748" v="568" actId="20577"/>
+          <ac:spMkLst>
+            <pc:docMk/>
+            <pc:sldMk cId="4177816438" sldId="283"/>
+            <ac:spMk id="54" creationId="{FEBE3FE7-FC69-DF23-5693-5BFA66A3C28F}"/>
+          </ac:spMkLst>
+        </pc:spChg>
+        <pc:spChg chg="add mod">
+          <ac:chgData name="Karol Garabczewski" userId="6e35707fbcbc2133" providerId="LiveId" clId="{FDA66D67-08B2-4F99-85FD-82FDE8892109}" dt="2026-06-24T16:26:11.567" v="540" actId="20577"/>
+          <ac:spMkLst>
+            <pc:docMk/>
+            <pc:sldMk cId="4177816438" sldId="283"/>
+            <ac:spMk id="56" creationId="{F89312C5-49AE-22D6-9603-F3BFEE4F2393}"/>
+          </ac:spMkLst>
+        </pc:spChg>
+        <pc:spChg chg="add mod">
+          <ac:chgData name="Karol Garabczewski" userId="6e35707fbcbc2133" providerId="LiveId" clId="{FDA66D67-08B2-4F99-85FD-82FDE8892109}" dt="2026-06-24T16:16:19.830" v="431" actId="20577"/>
+          <ac:spMkLst>
+            <pc:docMk/>
+            <pc:sldMk cId="4177816438" sldId="283"/>
+            <ac:spMk id="58" creationId="{C82DE7F7-4A6E-D448-5EA1-FC67861C1AAB}"/>
+          </ac:spMkLst>
+        </pc:spChg>
+        <pc:spChg chg="add mod">
+          <ac:chgData name="Karol Garabczewski" userId="6e35707fbcbc2133" providerId="LiveId" clId="{FDA66D67-08B2-4F99-85FD-82FDE8892109}" dt="2026-06-24T16:16:27.742" v="439" actId="20577"/>
+          <ac:spMkLst>
+            <pc:docMk/>
+            <pc:sldMk cId="4177816438" sldId="283"/>
+            <ac:spMk id="60" creationId="{778407FD-ACDB-C53D-5EE4-6259F8641BA6}"/>
+          </ac:spMkLst>
+        </pc:spChg>
+        <pc:spChg chg="add mod">
+          <ac:chgData name="Karol Garabczewski" userId="6e35707fbcbc2133" providerId="LiveId" clId="{FDA66D67-08B2-4F99-85FD-82FDE8892109}" dt="2026-06-24T16:15:44.094" v="415" actId="1076"/>
+          <ac:spMkLst>
+            <pc:docMk/>
+            <pc:sldMk cId="4177816438" sldId="283"/>
+            <ac:spMk id="62" creationId="{2242972C-E54B-FF5E-BF33-C07E8C410F33}"/>
+          </ac:spMkLst>
+        </pc:spChg>
+        <pc:spChg chg="add mod">
+          <ac:chgData name="Karol Garabczewski" userId="6e35707fbcbc2133" providerId="LiveId" clId="{FDA66D67-08B2-4F99-85FD-82FDE8892109}" dt="2026-06-24T16:17:02.923" v="447" actId="20577"/>
+          <ac:spMkLst>
+            <pc:docMk/>
+            <pc:sldMk cId="4177816438" sldId="283"/>
+            <ac:spMk id="64" creationId="{FA5AA254-9D3B-345A-6B80-DEDB06F4B007}"/>
+          </ac:spMkLst>
+        </pc:spChg>
+        <pc:spChg chg="add mod">
+          <ac:chgData name="Karol Garabczewski" userId="6e35707fbcbc2133" providerId="LiveId" clId="{FDA66D67-08B2-4F99-85FD-82FDE8892109}" dt="2026-06-24T16:17:05.770" v="449" actId="20577"/>
+          <ac:spMkLst>
+            <pc:docMk/>
+            <pc:sldMk cId="4177816438" sldId="283"/>
+            <ac:spMk id="66" creationId="{9612E740-FAA5-4D31-23E4-29A8C433D625}"/>
+          </ac:spMkLst>
+        </pc:spChg>
+        <pc:spChg chg="add mod">
+          <ac:chgData name="Karol Garabczewski" userId="6e35707fbcbc2133" providerId="LiveId" clId="{FDA66D67-08B2-4F99-85FD-82FDE8892109}" dt="2026-06-24T16:17:10.251" v="453" actId="20577"/>
+          <ac:spMkLst>
+            <pc:docMk/>
+            <pc:sldMk cId="4177816438" sldId="283"/>
+            <ac:spMk id="68" creationId="{CFD58858-A36C-1E95-CF69-39BCC23728EF}"/>
+          </ac:spMkLst>
+        </pc:spChg>
+        <pc:cxnChg chg="add del mod">
+          <ac:chgData name="Karol Garabczewski" userId="6e35707fbcbc2133" providerId="LiveId" clId="{FDA66D67-08B2-4F99-85FD-82FDE8892109}" dt="2026-06-24T16:04:15.038" v="76" actId="478"/>
+          <ac:cxnSpMkLst>
+            <pc:docMk/>
+            <pc:sldMk cId="4177816438" sldId="283"/>
+            <ac:cxnSpMk id="40" creationId="{C426C4FF-5DCB-C2BC-2C5C-CE2DA26C076D}"/>
+          </ac:cxnSpMkLst>
+        </pc:cxnChg>
+        <pc:cxnChg chg="add mod">
+          <ac:chgData name="Karol Garabczewski" userId="6e35707fbcbc2133" providerId="LiveId" clId="{FDA66D67-08B2-4F99-85FD-82FDE8892109}" dt="2026-06-24T16:04:54.376" v="82" actId="14100"/>
+          <ac:cxnSpMkLst>
+            <pc:docMk/>
+            <pc:sldMk cId="4177816438" sldId="283"/>
+            <ac:cxnSpMk id="43" creationId="{C9869464-7E11-25F4-829B-1BB75C4C95EC}"/>
+          </ac:cxnSpMkLst>
+        </pc:cxnChg>
+        <pc:cxnChg chg="add mod">
+          <ac:chgData name="Karol Garabczewski" userId="6e35707fbcbc2133" providerId="LiveId" clId="{FDA66D67-08B2-4F99-85FD-82FDE8892109}" dt="2026-06-24T16:05:02.955" v="84" actId="1076"/>
+          <ac:cxnSpMkLst>
+            <pc:docMk/>
+            <pc:sldMk cId="4177816438" sldId="283"/>
+            <ac:cxnSpMk id="46" creationId="{5D0C730A-33EB-F4B2-C53D-ED036C246845}"/>
+          </ac:cxnSpMkLst>
+        </pc:cxnChg>
+        <pc:cxnChg chg="add mod">
+          <ac:chgData name="Karol Garabczewski" userId="6e35707fbcbc2133" providerId="LiveId" clId="{FDA66D67-08B2-4F99-85FD-82FDE8892109}" dt="2026-06-24T16:05:13.652" v="86" actId="1076"/>
+          <ac:cxnSpMkLst>
+            <pc:docMk/>
+            <pc:sldMk cId="4177816438" sldId="283"/>
+            <ac:cxnSpMk id="47" creationId="{61B80037-DFC5-D3FC-9281-B3941B12EE95}"/>
+          </ac:cxnSpMkLst>
+        </pc:cxnChg>
+        <pc:cxnChg chg="add mod">
+          <ac:chgData name="Karol Garabczewski" userId="6e35707fbcbc2133" providerId="LiveId" clId="{FDA66D67-08B2-4F99-85FD-82FDE8892109}" dt="2026-06-24T16:05:47.886" v="88" actId="1076"/>
+          <ac:cxnSpMkLst>
+            <pc:docMk/>
+            <pc:sldMk cId="4177816438" sldId="283"/>
+            <ac:cxnSpMk id="49" creationId="{9C1D0090-D415-4954-C6E8-7737509B1BAE}"/>
+          </ac:cxnSpMkLst>
+        </pc:cxnChg>
+        <pc:cxnChg chg="add mod">
+          <ac:chgData name="Karol Garabczewski" userId="6e35707fbcbc2133" providerId="LiveId" clId="{FDA66D67-08B2-4F99-85FD-82FDE8892109}" dt="2026-06-24T16:05:54.735" v="90" actId="1076"/>
+          <ac:cxnSpMkLst>
+            <pc:docMk/>
+            <pc:sldMk cId="4177816438" sldId="283"/>
+            <ac:cxnSpMk id="50" creationId="{4B581ADB-6BD1-383C-8015-40878020625C}"/>
+          </ac:cxnSpMkLst>
+        </pc:cxnChg>
+        <pc:cxnChg chg="add mod">
+          <ac:chgData name="Karol Garabczewski" userId="6e35707fbcbc2133" providerId="LiveId" clId="{FDA66D67-08B2-4F99-85FD-82FDE8892109}" dt="2026-06-24T16:05:59.066" v="92" actId="1076"/>
+          <ac:cxnSpMkLst>
+            <pc:docMk/>
+            <pc:sldMk cId="4177816438" sldId="283"/>
+            <ac:cxnSpMk id="51" creationId="{5FDA1F15-5941-5C61-97D5-E509DD17DC9F}"/>
+          </ac:cxnSpMkLst>
+        </pc:cxnChg>
+      </pc:sldChg>
+      <pc:sldChg chg="addSp delSp modSp new mod">
+        <pc:chgData name="Karol Garabczewski" userId="6e35707fbcbc2133" providerId="LiveId" clId="{FDA66D67-08B2-4F99-85FD-82FDE8892109}" dt="2026-06-24T16:28:23.937" v="574" actId="1076"/>
+        <pc:sldMkLst>
+          <pc:docMk/>
+          <pc:sldMk cId="1118797495" sldId="284"/>
+        </pc:sldMkLst>
+        <pc:spChg chg="mod">
+          <ac:chgData name="Karol Garabczewski" userId="6e35707fbcbc2133" providerId="LiveId" clId="{FDA66D67-08B2-4F99-85FD-82FDE8892109}" dt="2026-06-24T16:19:36.932" v="469" actId="20577"/>
+          <ac:spMkLst>
+            <pc:docMk/>
+            <pc:sldMk cId="1118797495" sldId="284"/>
+            <ac:spMk id="2" creationId="{64710E48-1FEB-75E1-9FF5-BF24E36679CE}"/>
+          </ac:spMkLst>
+        </pc:spChg>
+        <pc:spChg chg="del">
+          <ac:chgData name="Karol Garabczewski" userId="6e35707fbcbc2133" providerId="LiveId" clId="{FDA66D67-08B2-4F99-85FD-82FDE8892109}" dt="2026-06-24T16:20:04.492" v="474" actId="22"/>
+          <ac:spMkLst>
+            <pc:docMk/>
+            <pc:sldMk cId="1118797495" sldId="284"/>
+            <ac:spMk id="3" creationId="{1321E44D-E5A7-A62C-4020-62264912505C}"/>
+          </ac:spMkLst>
+        </pc:spChg>
+        <pc:spChg chg="add del">
+          <ac:chgData name="Karol Garabczewski" userId="6e35707fbcbc2133" providerId="LiveId" clId="{FDA66D67-08B2-4F99-85FD-82FDE8892109}" dt="2026-06-24T16:19:46.993" v="471" actId="11529"/>
+          <ac:spMkLst>
+            <pc:docMk/>
+            <pc:sldMk cId="1118797495" sldId="284"/>
+            <ac:spMk id="4" creationId="{4B38FE26-9255-F9E6-C6B5-F7F8B5BDE69E}"/>
+          </ac:spMkLst>
+        </pc:spChg>
+        <pc:spChg chg="add del">
+          <ac:chgData name="Karol Garabczewski" userId="6e35707fbcbc2133" providerId="LiveId" clId="{FDA66D67-08B2-4F99-85FD-82FDE8892109}" dt="2026-06-24T16:19:58.591" v="473" actId="478"/>
+          <ac:spMkLst>
+            <pc:docMk/>
+            <pc:sldMk cId="1118797495" sldId="284"/>
+            <ac:spMk id="5" creationId="{D397B0E3-0193-9E9A-7B56-87433D4C4D13}"/>
+          </ac:spMkLst>
+        </pc:spChg>
+        <pc:spChg chg="add del mod">
+          <ac:chgData name="Karol Garabczewski" userId="6e35707fbcbc2133" providerId="LiveId" clId="{FDA66D67-08B2-4F99-85FD-82FDE8892109}" dt="2026-06-24T16:20:25.349" v="479" actId="478"/>
+          <ac:spMkLst>
+            <pc:docMk/>
+            <pc:sldMk cId="1118797495" sldId="284"/>
+            <ac:spMk id="7" creationId="{2B4F0F80-F488-6F1B-B60B-D6D1D8441C71}"/>
+          </ac:spMkLst>
+        </pc:spChg>
+        <pc:spChg chg="add mod">
+          <ac:chgData name="Karol Garabczewski" userId="6e35707fbcbc2133" providerId="LiveId" clId="{FDA66D67-08B2-4F99-85FD-82FDE8892109}" dt="2026-06-24T16:20:55.403" v="483" actId="1076"/>
+          <ac:spMkLst>
+            <pc:docMk/>
+            <pc:sldMk cId="1118797495" sldId="284"/>
+            <ac:spMk id="9" creationId="{131B6BCD-3E54-BB78-E755-BCA7545685E5}"/>
+          </ac:spMkLst>
+        </pc:spChg>
+        <pc:spChg chg="add mod">
+          <ac:chgData name="Karol Garabczewski" userId="6e35707fbcbc2133" providerId="LiveId" clId="{FDA66D67-08B2-4F99-85FD-82FDE8892109}" dt="2026-06-24T16:21:14.853" v="487" actId="1076"/>
+          <ac:spMkLst>
+            <pc:docMk/>
+            <pc:sldMk cId="1118797495" sldId="284"/>
+            <ac:spMk id="11" creationId="{612D9946-9FCE-AD9C-2C98-039CCFD8A53E}"/>
+          </ac:spMkLst>
+        </pc:spChg>
+        <pc:spChg chg="add mod">
+          <ac:chgData name="Karol Garabczewski" userId="6e35707fbcbc2133" providerId="LiveId" clId="{FDA66D67-08B2-4F99-85FD-82FDE8892109}" dt="2026-06-24T16:23:46.723" v="505" actId="1076"/>
+          <ac:spMkLst>
+            <pc:docMk/>
+            <pc:sldMk cId="1118797495" sldId="284"/>
+            <ac:spMk id="13" creationId="{AB27A452-A91D-34BB-F858-46BFD3DE416A}"/>
+          </ac:spMkLst>
+        </pc:spChg>
+        <pc:spChg chg="add mod">
+          <ac:chgData name="Karol Garabczewski" userId="6e35707fbcbc2133" providerId="LiveId" clId="{FDA66D67-08B2-4F99-85FD-82FDE8892109}" dt="2026-06-24T16:21:27.616" v="491" actId="1076"/>
+          <ac:spMkLst>
+            <pc:docMk/>
+            <pc:sldMk cId="1118797495" sldId="284"/>
+            <ac:spMk id="15" creationId="{D9242B72-DCF4-C8F1-FEDE-135C0B2699D5}"/>
+          </ac:spMkLst>
+        </pc:spChg>
+        <pc:spChg chg="add mod">
+          <ac:chgData name="Karol Garabczewski" userId="6e35707fbcbc2133" providerId="LiveId" clId="{FDA66D67-08B2-4F99-85FD-82FDE8892109}" dt="2026-06-24T16:21:39.259" v="494" actId="1076"/>
+          <ac:spMkLst>
+            <pc:docMk/>
+            <pc:sldMk cId="1118797495" sldId="284"/>
+            <ac:spMk id="17" creationId="{8ADAF726-B1A5-29E0-0454-35317E6C03BE}"/>
+          </ac:spMkLst>
+        </pc:spChg>
+        <pc:spChg chg="add mod">
+          <ac:chgData name="Karol Garabczewski" userId="6e35707fbcbc2133" providerId="LiveId" clId="{FDA66D67-08B2-4F99-85FD-82FDE8892109}" dt="2026-06-24T16:24:36.462" v="512" actId="1076"/>
+          <ac:spMkLst>
+            <pc:docMk/>
+            <pc:sldMk cId="1118797495" sldId="284"/>
+            <ac:spMk id="30" creationId="{5548D2F4-4961-0379-E518-D19D4856086D}"/>
+          </ac:spMkLst>
+        </pc:spChg>
+        <pc:spChg chg="add mod">
+          <ac:chgData name="Karol Garabczewski" userId="6e35707fbcbc2133" providerId="LiveId" clId="{FDA66D67-08B2-4F99-85FD-82FDE8892109}" dt="2026-06-24T16:26:04.547" v="536" actId="20577"/>
+          <ac:spMkLst>
+            <pc:docMk/>
+            <pc:sldMk cId="1118797495" sldId="284"/>
+            <ac:spMk id="32" creationId="{6D3C2D8F-CCC2-81F0-C64D-FB2CC4361B4C}"/>
+          </ac:spMkLst>
+        </pc:spChg>
+        <pc:spChg chg="add mod">
+          <ac:chgData name="Karol Garabczewski" userId="6e35707fbcbc2133" providerId="LiveId" clId="{FDA66D67-08B2-4F99-85FD-82FDE8892109}" dt="2026-06-24T16:25:07.192" v="524" actId="1076"/>
+          <ac:spMkLst>
+            <pc:docMk/>
+            <pc:sldMk cId="1118797495" sldId="284"/>
+            <ac:spMk id="34" creationId="{08764B5B-577A-C2E4-C28D-F42F4BB0365F}"/>
+          </ac:spMkLst>
+        </pc:spChg>
+        <pc:spChg chg="add mod">
+          <ac:chgData name="Karol Garabczewski" userId="6e35707fbcbc2133" providerId="LiveId" clId="{FDA66D67-08B2-4F99-85FD-82FDE8892109}" dt="2026-06-24T16:25:22.398" v="529" actId="1076"/>
+          <ac:spMkLst>
+            <pc:docMk/>
+            <pc:sldMk cId="1118797495" sldId="284"/>
+            <ac:spMk id="36" creationId="{84F7A12F-81EC-6324-76CE-47E4C6116F04}"/>
+          </ac:spMkLst>
+        </pc:spChg>
+        <pc:spChg chg="add mod">
+          <ac:chgData name="Karol Garabczewski" userId="6e35707fbcbc2133" providerId="LiveId" clId="{FDA66D67-08B2-4F99-85FD-82FDE8892109}" dt="2026-06-24T16:27:31.393" v="564" actId="20577"/>
+          <ac:spMkLst>
+            <pc:docMk/>
+            <pc:sldMk cId="1118797495" sldId="284"/>
+            <ac:spMk id="38" creationId="{416B634B-CA48-13E1-484B-0FFAA0AA75DC}"/>
+          </ac:spMkLst>
+        </pc:spChg>
+        <pc:spChg chg="add mod">
+          <ac:chgData name="Karol Garabczewski" userId="6e35707fbcbc2133" providerId="LiveId" clId="{FDA66D67-08B2-4F99-85FD-82FDE8892109}" dt="2026-06-24T16:26:44.583" v="552" actId="20577"/>
+          <ac:spMkLst>
+            <pc:docMk/>
+            <pc:sldMk cId="1118797495" sldId="284"/>
+            <ac:spMk id="39" creationId="{16FD7123-3018-ABF3-9811-A76DE5E2FE44}"/>
+          </ac:spMkLst>
+        </pc:spChg>
+        <pc:spChg chg="add del mod">
+          <ac:chgData name="Karol Garabczewski" userId="6e35707fbcbc2133" providerId="LiveId" clId="{FDA66D67-08B2-4F99-85FD-82FDE8892109}" dt="2026-06-24T16:26:54.933" v="556" actId="478"/>
+          <ac:spMkLst>
+            <pc:docMk/>
+            <pc:sldMk cId="1118797495" sldId="284"/>
+            <ac:spMk id="41" creationId="{EA8CCC9A-C2C7-62E5-77FC-1AA968EA924A}"/>
+          </ac:spMkLst>
+        </pc:spChg>
+        <pc:spChg chg="add mod">
+          <ac:chgData name="Karol Garabczewski" userId="6e35707fbcbc2133" providerId="LiveId" clId="{FDA66D67-08B2-4F99-85FD-82FDE8892109}" dt="2026-06-24T16:27:08.531" v="562" actId="20577"/>
+          <ac:spMkLst>
+            <pc:docMk/>
+            <pc:sldMk cId="1118797495" sldId="284"/>
+            <ac:spMk id="43" creationId="{2E687FF8-2E0A-F4C6-4D25-DFD31FD71D47}"/>
+          </ac:spMkLst>
+        </pc:spChg>
+        <pc:spChg chg="add mod">
+          <ac:chgData name="Karol Garabczewski" userId="6e35707fbcbc2133" providerId="LiveId" clId="{FDA66D67-08B2-4F99-85FD-82FDE8892109}" dt="2026-06-24T16:28:11.596" v="572" actId="20577"/>
+          <ac:spMkLst>
+            <pc:docMk/>
+            <pc:sldMk cId="1118797495" sldId="284"/>
+            <ac:spMk id="45" creationId="{7BA17F71-47CB-2FBD-417F-8F0FEA8E8CC4}"/>
+          </ac:spMkLst>
+        </pc:spChg>
+        <pc:spChg chg="add mod">
+          <ac:chgData name="Karol Garabczewski" userId="6e35707fbcbc2133" providerId="LiveId" clId="{FDA66D67-08B2-4F99-85FD-82FDE8892109}" dt="2026-06-24T16:28:23.937" v="574" actId="1076"/>
+          <ac:spMkLst>
+            <pc:docMk/>
+            <pc:sldMk cId="1118797495" sldId="284"/>
+            <ac:spMk id="47" creationId="{BFE46211-1B17-C36E-5C11-B59990142E9D}"/>
+          </ac:spMkLst>
+        </pc:spChg>
+        <pc:cxnChg chg="add mod">
+          <ac:chgData name="Karol Garabczewski" userId="6e35707fbcbc2133" providerId="LiveId" clId="{FDA66D67-08B2-4F99-85FD-82FDE8892109}" dt="2026-06-24T16:23:38.824" v="504" actId="17032"/>
+          <ac:cxnSpMkLst>
+            <pc:docMk/>
+            <pc:sldMk cId="1118797495" sldId="284"/>
+            <ac:cxnSpMk id="19" creationId="{3906933A-48B1-4DE6-31F8-ED6E37B3FB43}"/>
+          </ac:cxnSpMkLst>
+        </pc:cxnChg>
+        <pc:cxnChg chg="add mod">
+          <ac:chgData name="Karol Garabczewski" userId="6e35707fbcbc2133" providerId="LiveId" clId="{FDA66D67-08B2-4F99-85FD-82FDE8892109}" dt="2026-06-24T16:23:35.610" v="503" actId="17032"/>
+          <ac:cxnSpMkLst>
+            <pc:docMk/>
+            <pc:sldMk cId="1118797495" sldId="284"/>
+            <ac:cxnSpMk id="21" creationId="{2B3C4987-50BD-3C34-CC12-4DDC7B419FA9}"/>
+          </ac:cxnSpMkLst>
+        </pc:cxnChg>
+        <pc:cxnChg chg="add mod">
+          <ac:chgData name="Karol Garabczewski" userId="6e35707fbcbc2133" providerId="LiveId" clId="{FDA66D67-08B2-4F99-85FD-82FDE8892109}" dt="2026-06-24T16:23:20.712" v="501" actId="17032"/>
+          <ac:cxnSpMkLst>
+            <pc:docMk/>
+            <pc:sldMk cId="1118797495" sldId="284"/>
+            <ac:cxnSpMk id="23" creationId="{346C79FC-4A6C-CAB9-0115-6F015A081528}"/>
+          </ac:cxnSpMkLst>
+        </pc:cxnChg>
+        <pc:cxnChg chg="add mod">
+          <ac:chgData name="Karol Garabczewski" userId="6e35707fbcbc2133" providerId="LiveId" clId="{FDA66D67-08B2-4F99-85FD-82FDE8892109}" dt="2026-06-24T16:23:46.723" v="505" actId="1076"/>
+          <ac:cxnSpMkLst>
+            <pc:docMk/>
+            <pc:sldMk cId="1118797495" sldId="284"/>
+            <ac:cxnSpMk id="25" creationId="{53D9BAA0-6220-6395-B510-807358D00E4F}"/>
+          </ac:cxnSpMkLst>
+        </pc:cxnChg>
+      </pc:sldChg>
+      <pc:sldChg chg="addSp delSp modSp new mod">
+        <pc:chgData name="Karol Garabczewski" userId="6e35707fbcbc2133" providerId="LiveId" clId="{FDA66D67-08B2-4F99-85FD-82FDE8892109}" dt="2026-06-24T16:12:35.757" v="366" actId="20577"/>
+        <pc:sldMkLst>
+          <pc:docMk/>
+          <pc:sldMk cId="584733732" sldId="285"/>
+        </pc:sldMkLst>
+        <pc:spChg chg="mod">
+          <ac:chgData name="Karol Garabczewski" userId="6e35707fbcbc2133" providerId="LiveId" clId="{FDA66D67-08B2-4F99-85FD-82FDE8892109}" dt="2026-06-24T16:06:32.762" v="101" actId="20577"/>
+          <ac:spMkLst>
+            <pc:docMk/>
+            <pc:sldMk cId="584733732" sldId="285"/>
+            <ac:spMk id="2" creationId="{0FDF515C-BEA0-6167-A109-FEB7722E22A1}"/>
+          </ac:spMkLst>
+        </pc:spChg>
+        <pc:spChg chg="mod">
+          <ac:chgData name="Karol Garabczewski" userId="6e35707fbcbc2133" providerId="LiveId" clId="{FDA66D67-08B2-4F99-85FD-82FDE8892109}" dt="2026-06-24T16:10:30.074" v="283" actId="20577"/>
+          <ac:spMkLst>
+            <pc:docMk/>
+            <pc:sldMk cId="584733732" sldId="285"/>
+            <ac:spMk id="3" creationId="{46C43EA2-9663-4D23-85AF-79F10E830E41}"/>
+          </ac:spMkLst>
+        </pc:spChg>
+        <pc:spChg chg="add del mod">
+          <ac:chgData name="Karol Garabczewski" userId="6e35707fbcbc2133" providerId="LiveId" clId="{FDA66D67-08B2-4F99-85FD-82FDE8892109}" dt="2026-06-24T16:11:50.140" v="330"/>
+          <ac:spMkLst>
+            <pc:docMk/>
+            <pc:sldMk cId="584733732" sldId="285"/>
+            <ac:spMk id="6" creationId="{3A3E5946-E83D-FA67-E6F1-78A681F1C7F9}"/>
+          </ac:spMkLst>
+        </pc:spChg>
+        <pc:spChg chg="add del mod">
+          <ac:chgData name="Karol Garabczewski" userId="6e35707fbcbc2133" providerId="LiveId" clId="{FDA66D67-08B2-4F99-85FD-82FDE8892109}" dt="2026-06-24T16:11:50.141" v="332"/>
+          <ac:spMkLst>
+            <pc:docMk/>
+            <pc:sldMk cId="584733732" sldId="285"/>
+            <ac:spMk id="7" creationId="{CDD75693-79C7-4C45-5DEB-F32B1AE9124F}"/>
+          </ac:spMkLst>
+        </pc:spChg>
+        <pc:spChg chg="add mod">
+          <ac:chgData name="Karol Garabczewski" userId="6e35707fbcbc2133" providerId="LiveId" clId="{FDA66D67-08B2-4F99-85FD-82FDE8892109}" dt="2026-06-24T16:12:35.757" v="366" actId="20577"/>
+          <ac:spMkLst>
+            <pc:docMk/>
+            <pc:sldMk cId="584733732" sldId="285"/>
+            <ac:spMk id="8" creationId="{0EB9B950-B1B8-9E58-8752-63BA81109B26}"/>
+          </ac:spMkLst>
+        </pc:spChg>
+        <pc:cxnChg chg="add">
+          <ac:chgData name="Karol Garabczewski" userId="6e35707fbcbc2133" providerId="LiveId" clId="{FDA66D67-08B2-4F99-85FD-82FDE8892109}" dt="2026-06-24T16:10:15.127" v="280" actId="11529"/>
+          <ac:cxnSpMkLst>
+            <pc:docMk/>
+            <pc:sldMk cId="584733732" sldId="285"/>
+            <ac:cxnSpMk id="5" creationId="{A8262240-8185-DEDB-F5E4-112D01256BC1}"/>
+          </ac:cxnSpMkLst>
+        </pc:cxnChg>
+      </pc:sldChg>
+      <pc:sldChg chg="addSp modSp add mod">
+        <pc:chgData name="Karol Garabczewski" userId="6e35707fbcbc2133" providerId="LiveId" clId="{FDA66D67-08B2-4F99-85FD-82FDE8892109}" dt="2026-06-24T16:27:36.318" v="566" actId="20577"/>
+        <pc:sldMkLst>
+          <pc:docMk/>
+          <pc:sldMk cId="3105657409" sldId="286"/>
+        </pc:sldMkLst>
+        <pc:spChg chg="add mod">
+          <ac:chgData name="Karol Garabczewski" userId="6e35707fbcbc2133" providerId="LiveId" clId="{FDA66D67-08B2-4F99-85FD-82FDE8892109}" dt="2026-06-24T16:18:40.130" v="459" actId="1076"/>
+          <ac:spMkLst>
+            <pc:docMk/>
+            <pc:sldMk cId="3105657409" sldId="286"/>
+            <ac:spMk id="5" creationId="{39B7D9DC-EF69-40AC-8846-019845ACCDE5}"/>
+          </ac:spMkLst>
+        </pc:spChg>
+        <pc:spChg chg="mod ord">
+          <ac:chgData name="Karol Garabczewski" userId="6e35707fbcbc2133" providerId="LiveId" clId="{FDA66D67-08B2-4F99-85FD-82FDE8892109}" dt="2026-06-24T16:18:25.128" v="457" actId="166"/>
+          <ac:spMkLst>
+            <pc:docMk/>
+            <pc:sldMk cId="3105657409" sldId="286"/>
+            <ac:spMk id="24" creationId="{6C45BF54-2488-9C22-E776-903DA5069686}"/>
+          </ac:spMkLst>
+        </pc:spChg>
+        <pc:spChg chg="mod">
+          <ac:chgData name="Karol Garabczewski" userId="6e35707fbcbc2133" providerId="LiveId" clId="{FDA66D67-08B2-4F99-85FD-82FDE8892109}" dt="2026-06-24T16:27:36.318" v="566" actId="20577"/>
+          <ac:spMkLst>
+            <pc:docMk/>
+            <pc:sldMk cId="3105657409" sldId="286"/>
+            <ac:spMk id="54" creationId="{9959F5B0-C84A-CDC9-20CA-02D7CEC71B4C}"/>
+          </ac:spMkLst>
+        </pc:spChg>
+        <pc:spChg chg="mod">
+          <ac:chgData name="Karol Garabczewski" userId="6e35707fbcbc2133" providerId="LiveId" clId="{FDA66D67-08B2-4F99-85FD-82FDE8892109}" dt="2026-06-24T16:26:08.203" v="538" actId="20577"/>
+          <ac:spMkLst>
+            <pc:docMk/>
+            <pc:sldMk cId="3105657409" sldId="286"/>
+            <ac:spMk id="56" creationId="{6B3EF203-68BC-F9F3-3900-FD35A8A3344E}"/>
+          </ac:spMkLst>
+        </pc:spChg>
+        <pc:cxnChg chg="mod">
+          <ac:chgData name="Karol Garabczewski" userId="6e35707fbcbc2133" providerId="LiveId" clId="{FDA66D67-08B2-4F99-85FD-82FDE8892109}" dt="2026-06-24T16:17:48.625" v="455" actId="1076"/>
+          <ac:cxnSpMkLst>
+            <pc:docMk/>
+            <pc:sldMk cId="3105657409" sldId="286"/>
+            <ac:cxnSpMk id="50" creationId="{8EA55B8F-2BF8-8B7E-4219-9347607A451B}"/>
+          </ac:cxnSpMkLst>
+        </pc:cxnChg>
+      </pc:sldChg>
+      <pc:sldChg chg="modSp new del mod">
+        <pc:chgData name="Karol Garabczewski" userId="6e35707fbcbc2133" providerId="LiveId" clId="{FDA66D67-08B2-4F99-85FD-82FDE8892109}" dt="2026-06-24T16:28:59.950" v="595" actId="47"/>
+        <pc:sldMkLst>
+          <pc:docMk/>
+          <pc:sldMk cId="1472698360" sldId="287"/>
+        </pc:sldMkLst>
+        <pc:spChg chg="mod">
+          <ac:chgData name="Karol Garabczewski" userId="6e35707fbcbc2133" providerId="LiveId" clId="{FDA66D67-08B2-4F99-85FD-82FDE8892109}" dt="2026-06-24T16:28:53.014" v="593" actId="20577"/>
+          <ac:spMkLst>
+            <pc:docMk/>
+            <pc:sldMk cId="1472698360" sldId="287"/>
+            <ac:spMk id="2" creationId="{71290A9D-FEE6-90D5-048B-EA5A33380B58}"/>
+          </ac:spMkLst>
+        </pc:spChg>
+      </pc:sldChg>
+      <pc:sldChg chg="modSp add mod">
+        <pc:chgData name="Karol Garabczewski" userId="6e35707fbcbc2133" providerId="LiveId" clId="{FDA66D67-08B2-4F99-85FD-82FDE8892109}" dt="2026-06-24T16:29:43.207" v="596" actId="207"/>
+        <pc:sldMkLst>
+          <pc:docMk/>
+          <pc:sldMk cId="3565329498" sldId="288"/>
+        </pc:sldMkLst>
+        <pc:spChg chg="mod">
+          <ac:chgData name="Karol Garabczewski" userId="6e35707fbcbc2133" providerId="LiveId" clId="{FDA66D67-08B2-4F99-85FD-82FDE8892109}" dt="2026-06-24T16:29:43.207" v="596" actId="207"/>
+          <ac:spMkLst>
+            <pc:docMk/>
+            <pc:sldMk cId="3565329498" sldId="288"/>
+            <ac:spMk id="15" creationId="{D3BD3A29-07AC-309F-9B64-BD8F95B9EB68}"/>
+          </ac:spMkLst>
+        </pc:spChg>
+      </pc:sldChg>
+      <pc:sldChg chg="addSp modSp add mod">
+        <pc:chgData name="Karol Garabczewski" userId="6e35707fbcbc2133" providerId="LiveId" clId="{FDA66D67-08B2-4F99-85FD-82FDE8892109}" dt="2026-06-24T16:32:13.398" v="655" actId="20577"/>
+        <pc:sldMkLst>
+          <pc:docMk/>
+          <pc:sldMk cId="3975637616" sldId="289"/>
+        </pc:sldMkLst>
+        <pc:spChg chg="add mod">
+          <ac:chgData name="Karol Garabczewski" userId="6e35707fbcbc2133" providerId="LiveId" clId="{FDA66D67-08B2-4F99-85FD-82FDE8892109}" dt="2026-06-24T16:31:40.820" v="653" actId="14100"/>
+          <ac:spMkLst>
+            <pc:docMk/>
+            <pc:sldMk cId="3975637616" sldId="289"/>
+            <ac:spMk id="3" creationId="{FDF8329F-0805-4891-C012-7562F2DE2D8A}"/>
+          </ac:spMkLst>
+        </pc:spChg>
+        <pc:spChg chg="mod">
+          <ac:chgData name="Karol Garabczewski" userId="6e35707fbcbc2133" providerId="LiveId" clId="{FDA66D67-08B2-4F99-85FD-82FDE8892109}" dt="2026-06-24T16:30:15.695" v="599" actId="20577"/>
+          <ac:spMkLst>
+            <pc:docMk/>
+            <pc:sldMk cId="3975637616" sldId="289"/>
+            <ac:spMk id="30" creationId="{8DFE19C5-5B3B-5C03-A8E9-D957B2698F1B}"/>
+          </ac:spMkLst>
+        </pc:spChg>
+        <pc:spChg chg="mod">
+          <ac:chgData name="Karol Garabczewski" userId="6e35707fbcbc2133" providerId="LiveId" clId="{FDA66D67-08B2-4F99-85FD-82FDE8892109}" dt="2026-06-24T16:32:13.398" v="655" actId="20577"/>
+          <ac:spMkLst>
+            <pc:docMk/>
+            <pc:sldMk cId="3975637616" sldId="289"/>
+            <ac:spMk id="47" creationId="{7CE31329-00DB-DA96-9A24-0AC1472C4AF8}"/>
+          </ac:spMkLst>
+        </pc:spChg>
+      </pc:sldChg>
+    </pc:docChg>
+  </pc:docChgLst>
+</pc:chgInfo>
 </file>
 
 <file path=ppt/slideLayouts/slideLayout1.xml><?xml version="1.0" encoding="utf-8"?>
@@ -3584,6 +4269,1449 @@
           <p:cNvPr id="2" name="Tytuł 1">
             <a:extLst>
               <a:ext uri="{FF2B5EF4-FFF2-40B4-BE49-F238E27FC236}">
+                <a16:creationId xmlns:a16="http://schemas.microsoft.com/office/drawing/2014/main" id="{B66288A7-C2FF-EEAF-913F-879F9A76983E}"/>
+              </a:ext>
+            </a:extLst>
+          </p:cNvPr>
+          <p:cNvSpPr>
+            <a:spLocks noGrp="1"/>
+          </p:cNvSpPr>
+          <p:nvPr>
+            <p:ph type="title"/>
+          </p:nvPr>
+        </p:nvSpPr>
+        <p:spPr/>
+        <p:txBody>
+          <a:bodyPr/>
+          <a:lstStyle/>
+          <a:p>
+            <a:r>
+              <a:rPr lang="en-US" dirty="0" err="1"/>
+              <a:t>Przebieg</a:t>
+            </a:r>
+            <a:r>
+              <a:rPr lang="en-US" dirty="0"/>
+              <a:t> </a:t>
+            </a:r>
+            <a:r>
+              <a:rPr lang="en-US" dirty="0" err="1"/>
+              <a:t>symulacji</a:t>
+            </a:r>
+            <a:endParaRPr lang="en-US" dirty="0"/>
+          </a:p>
+        </p:txBody>
+      </p:sp>
+      <p:sp>
+        <p:nvSpPr>
+          <p:cNvPr id="3" name="Symbol zastępczy zawartości 2">
+            <a:extLst>
+              <a:ext uri="{FF2B5EF4-FFF2-40B4-BE49-F238E27FC236}">
+                <a16:creationId xmlns:a16="http://schemas.microsoft.com/office/drawing/2014/main" id="{0F17B2F8-4EF7-6C2B-E34A-76E8DFB21229}"/>
+              </a:ext>
+            </a:extLst>
+          </p:cNvPr>
+          <p:cNvSpPr>
+            <a:spLocks noGrp="1"/>
+          </p:cNvSpPr>
+          <p:nvPr>
+            <p:ph idx="1"/>
+          </p:nvPr>
+        </p:nvSpPr>
+        <p:spPr/>
+        <p:txBody>
+          <a:bodyPr>
+            <a:normAutofit fontScale="92500" lnSpcReduction="10000"/>
+          </a:bodyPr>
+          <a:lstStyle/>
+          <a:p>
+            <a:pPr marL="514350" indent="-514350">
+              <a:buFont typeface="+mj-lt"/>
+              <a:buAutoNum type="arabicPeriod"/>
+            </a:pPr>
+            <a:r>
+              <a:rPr lang="en-US" dirty="0"/>
+              <a:t>Na </a:t>
+            </a:r>
+            <a:r>
+              <a:rPr lang="en-US" dirty="0" err="1"/>
+              <a:t>początku</a:t>
+            </a:r>
+            <a:r>
+              <a:rPr lang="en-US" dirty="0"/>
+              <a:t> </a:t>
+            </a:r>
+            <a:r>
+              <a:rPr lang="en-US" dirty="0" err="1"/>
+              <a:t>agenci</a:t>
+            </a:r>
+            <a:r>
+              <a:rPr lang="en-US" dirty="0"/>
+              <a:t> </a:t>
+            </a:r>
+            <a:r>
+              <a:rPr lang="en-US" dirty="0" err="1"/>
+              <a:t>mają</a:t>
+            </a:r>
+            <a:r>
+              <a:rPr lang="en-US" dirty="0"/>
+              <a:t> </a:t>
+            </a:r>
+            <a:r>
+              <a:rPr lang="en-US" dirty="0" err="1"/>
+              <a:t>losowo</a:t>
+            </a:r>
+            <a:r>
+              <a:rPr lang="en-US" dirty="0"/>
+              <a:t> </a:t>
+            </a:r>
+            <a:r>
+              <a:rPr lang="en-US" dirty="0" err="1"/>
+              <a:t>przypisane</a:t>
+            </a:r>
+            <a:r>
+              <a:rPr lang="en-US" dirty="0"/>
+              <a:t> </a:t>
+            </a:r>
+            <a:r>
+              <a:rPr lang="en-US" dirty="0" err="1"/>
+              <a:t>warianty</a:t>
+            </a:r>
+            <a:r>
+              <a:rPr lang="en-US" dirty="0"/>
+              <a:t> </a:t>
+            </a:r>
+            <a:r>
+              <a:rPr lang="en-US" dirty="0" err="1"/>
+              <a:t>kulturowe</a:t>
+            </a:r>
+            <a:r>
+              <a:rPr lang="en-US" dirty="0"/>
+              <a:t>. </a:t>
+            </a:r>
+            <a:r>
+              <a:rPr lang="en-US" dirty="0" err="1"/>
+              <a:t>Większość</a:t>
+            </a:r>
+            <a:r>
+              <a:rPr lang="en-US" dirty="0"/>
+              <a:t> </a:t>
+            </a:r>
+            <a:r>
+              <a:rPr lang="en-US" dirty="0" err="1"/>
+              <a:t>sąsiadów</a:t>
+            </a:r>
+            <a:r>
+              <a:rPr lang="en-US" dirty="0"/>
+              <a:t> ma ze </a:t>
+            </a:r>
+            <a:r>
+              <a:rPr lang="en-US" dirty="0" err="1"/>
+              <a:t>sobą</a:t>
+            </a:r>
+            <a:r>
+              <a:rPr lang="en-US" dirty="0"/>
+              <a:t> </a:t>
+            </a:r>
+            <a:r>
+              <a:rPr lang="en-US" b="1" dirty="0" err="1"/>
+              <a:t>bardzo</a:t>
+            </a:r>
+            <a:r>
+              <a:rPr lang="en-US" b="1" dirty="0"/>
+              <a:t> </a:t>
+            </a:r>
+            <a:r>
+              <a:rPr lang="en-US" b="1" dirty="0" err="1"/>
+              <a:t>mało</a:t>
+            </a:r>
+            <a:r>
+              <a:rPr lang="en-US" b="1" dirty="0"/>
+              <a:t> </a:t>
+            </a:r>
+            <a:r>
+              <a:rPr lang="en-US" b="1" dirty="0" err="1"/>
+              <a:t>wspólnego</a:t>
+            </a:r>
+            <a:r>
+              <a:rPr lang="en-US" b="1" dirty="0"/>
+              <a:t> </a:t>
+            </a:r>
+            <a:r>
+              <a:rPr lang="en-US" dirty="0"/>
+              <a:t>(</a:t>
+            </a:r>
+            <a:r>
+              <a:rPr lang="en-US" dirty="0" err="1"/>
+              <a:t>dużo</a:t>
+            </a:r>
+            <a:r>
+              <a:rPr lang="en-US" dirty="0"/>
+              <a:t> </a:t>
+            </a:r>
+            <a:r>
+              <a:rPr lang="en-US" dirty="0" err="1"/>
+              <a:t>różnych</a:t>
+            </a:r>
+            <a:r>
+              <a:rPr lang="en-US" dirty="0"/>
+              <a:t> </a:t>
+            </a:r>
+            <a:r>
+              <a:rPr lang="en-US" dirty="0" err="1"/>
+              <a:t>kolorów</a:t>
+            </a:r>
+            <a:r>
+              <a:rPr lang="en-US" dirty="0"/>
+              <a:t> </a:t>
+            </a:r>
+            <a:r>
+              <a:rPr lang="en-US" dirty="0" err="1"/>
+              <a:t>na</a:t>
+            </a:r>
+            <a:r>
+              <a:rPr lang="en-US" dirty="0"/>
+              <a:t> </a:t>
+            </a:r>
+            <a:r>
+              <a:rPr lang="pl-PL" dirty="0"/>
+              <a:t>następnym slajdzie</a:t>
+            </a:r>
+            <a:r>
+              <a:rPr lang="en-US" dirty="0"/>
+              <a:t>).</a:t>
+            </a:r>
+          </a:p>
+          <a:p>
+            <a:pPr marL="514350" indent="-514350">
+              <a:buFont typeface="+mj-lt"/>
+              <a:buAutoNum type="arabicPeriod"/>
+            </a:pPr>
+            <a:r>
+              <a:rPr lang="en-US" dirty="0"/>
+              <a:t> W </a:t>
+            </a:r>
+            <a:r>
+              <a:rPr lang="en-US" dirty="0" err="1"/>
+              <a:t>miarę</a:t>
+            </a:r>
+            <a:r>
+              <a:rPr lang="en-US" dirty="0"/>
+              <a:t> </a:t>
+            </a:r>
+            <a:r>
+              <a:rPr lang="en-US" dirty="0" err="1"/>
+              <a:t>upływu</a:t>
+            </a:r>
+            <a:r>
+              <a:rPr lang="en-US" dirty="0"/>
+              <a:t> </a:t>
+            </a:r>
+            <a:r>
+              <a:rPr lang="en-US" dirty="0" err="1"/>
+              <a:t>czasu</a:t>
+            </a:r>
+            <a:r>
+              <a:rPr lang="en-US" dirty="0"/>
+              <a:t> (</a:t>
+            </a:r>
+            <a:r>
+              <a:rPr lang="en-US" dirty="0" err="1"/>
+              <a:t>zdarzeń</a:t>
+            </a:r>
+            <a:r>
+              <a:rPr lang="en-US" dirty="0"/>
+              <a:t>) </a:t>
+            </a:r>
+            <a:r>
+              <a:rPr lang="en-US" dirty="0" err="1"/>
+              <a:t>lokalne</a:t>
+            </a:r>
+            <a:r>
+              <a:rPr lang="en-US" dirty="0"/>
+              <a:t> </a:t>
+            </a:r>
+            <a:r>
+              <a:rPr lang="en-US" dirty="0" err="1"/>
+              <a:t>interakcje</a:t>
+            </a:r>
+            <a:r>
+              <a:rPr lang="en-US" dirty="0"/>
+              <a:t> </a:t>
+            </a:r>
+            <a:r>
+              <a:rPr lang="en-US" dirty="0" err="1"/>
+              <a:t>powodują</a:t>
+            </a:r>
+            <a:r>
+              <a:rPr lang="en-US" dirty="0"/>
+              <a:t>, </a:t>
+            </a:r>
+            <a:r>
+              <a:rPr lang="en-US" dirty="0" err="1"/>
+              <a:t>że</a:t>
+            </a:r>
+            <a:r>
+              <a:rPr lang="en-US" dirty="0"/>
+              <a:t> </a:t>
+            </a:r>
+            <a:r>
+              <a:rPr lang="en-US" dirty="0" err="1"/>
+              <a:t>wspólne</a:t>
+            </a:r>
+            <a:r>
+              <a:rPr lang="en-US" dirty="0"/>
+              <a:t> </a:t>
+            </a:r>
+            <a:r>
+              <a:rPr lang="en-US" dirty="0" err="1"/>
+              <a:t>warianty</a:t>
+            </a:r>
+            <a:r>
+              <a:rPr lang="en-US" dirty="0"/>
+              <a:t> </a:t>
+            </a:r>
+            <a:r>
+              <a:rPr lang="en-US" dirty="0" err="1"/>
+              <a:t>kulturowe</a:t>
+            </a:r>
+            <a:r>
+              <a:rPr lang="en-US" dirty="0"/>
+              <a:t> </a:t>
+            </a:r>
+            <a:r>
+              <a:rPr lang="en-US" b="1" dirty="0" err="1"/>
+              <a:t>rozprzestrzeniają</a:t>
+            </a:r>
+            <a:r>
+              <a:rPr lang="en-US" b="1" dirty="0"/>
+              <a:t> </a:t>
+            </a:r>
+            <a:r>
+              <a:rPr lang="en-US" b="1" dirty="0" err="1"/>
+              <a:t>się</a:t>
+            </a:r>
+            <a:r>
+              <a:rPr lang="en-US" b="1" dirty="0"/>
+              <a:t> </a:t>
+            </a:r>
+            <a:r>
+              <a:rPr lang="en-US" b="1" dirty="0" err="1"/>
+              <a:t>na</a:t>
+            </a:r>
+            <a:r>
+              <a:rPr lang="en-US" b="1" dirty="0"/>
+              <a:t> </a:t>
+            </a:r>
+            <a:r>
+              <a:rPr lang="en-US" b="1" dirty="0" err="1"/>
+              <a:t>coraz</a:t>
+            </a:r>
+            <a:r>
+              <a:rPr lang="en-US" b="1" dirty="0"/>
+              <a:t> </a:t>
+            </a:r>
+            <a:r>
+              <a:rPr lang="en-US" b="1" dirty="0" err="1"/>
+              <a:t>większe</a:t>
+            </a:r>
+            <a:r>
+              <a:rPr lang="en-US" b="1" dirty="0"/>
+              <a:t> </a:t>
+            </a:r>
+            <a:r>
+              <a:rPr lang="en-US" b="1" dirty="0" err="1"/>
+              <a:t>obszary</a:t>
+            </a:r>
+            <a:r>
+              <a:rPr lang="en-US" dirty="0"/>
+              <a:t> (</a:t>
+            </a:r>
+            <a:r>
+              <a:rPr lang="en-US" dirty="0" err="1"/>
+              <a:t>regiony</a:t>
+            </a:r>
+            <a:r>
+              <a:rPr lang="en-US" dirty="0"/>
+              <a:t> </a:t>
+            </a:r>
+            <a:r>
+              <a:rPr lang="en-US" dirty="0" err="1"/>
+              <a:t>kulturowe</a:t>
+            </a:r>
+            <a:r>
+              <a:rPr lang="en-US" dirty="0"/>
+              <a:t>).</a:t>
+            </a:r>
+          </a:p>
+          <a:p>
+            <a:pPr marL="514350" indent="-514350">
+              <a:buFont typeface="+mj-lt"/>
+              <a:buAutoNum type="arabicPeriod"/>
+            </a:pPr>
+            <a:r>
+              <a:rPr lang="en-US" b="1" dirty="0"/>
+              <a:t>Stan </a:t>
+            </a:r>
+            <a:r>
+              <a:rPr lang="en-US" b="1" dirty="0" err="1"/>
+              <a:t>stacjonarny</a:t>
+            </a:r>
+            <a:r>
+              <a:rPr lang="en-US" b="1" dirty="0"/>
+              <a:t>: </a:t>
+            </a:r>
+            <a:r>
+              <a:rPr lang="en-US" dirty="0" err="1"/>
+              <a:t>proces</a:t>
+            </a:r>
+            <a:r>
+              <a:rPr lang="en-US" dirty="0"/>
+              <a:t> </a:t>
+            </a:r>
+            <a:r>
+              <a:rPr lang="en-US" dirty="0" err="1"/>
+              <a:t>kończy</a:t>
+            </a:r>
+            <a:r>
+              <a:rPr lang="en-US" dirty="0"/>
+              <a:t> </a:t>
+            </a:r>
+            <a:r>
+              <a:rPr lang="en-US" dirty="0" err="1"/>
+              <a:t>się</a:t>
+            </a:r>
+            <a:r>
+              <a:rPr lang="en-US" dirty="0"/>
+              <a:t> </a:t>
+            </a:r>
+            <a:r>
+              <a:rPr lang="en-US" dirty="0" err="1"/>
+              <a:t>i</a:t>
+            </a:r>
+            <a:r>
+              <a:rPr lang="en-US" dirty="0"/>
+              <a:t> </a:t>
+            </a:r>
+            <a:r>
+              <a:rPr lang="en-US" dirty="0" err="1"/>
+              <a:t>stabilizuje</a:t>
+            </a:r>
+            <a:r>
+              <a:rPr lang="en-US" dirty="0"/>
+              <a:t>, </a:t>
+            </a:r>
+            <a:r>
+              <a:rPr lang="en-US" dirty="0" err="1"/>
+              <a:t>gdy</a:t>
+            </a:r>
+            <a:r>
+              <a:rPr lang="en-US" dirty="0"/>
+              <a:t> </a:t>
+            </a:r>
+            <a:r>
+              <a:rPr lang="en-US" dirty="0" err="1"/>
+              <a:t>żadna</a:t>
+            </a:r>
+            <a:r>
+              <a:rPr lang="en-US" dirty="0"/>
+              <a:t> para </a:t>
+            </a:r>
+            <a:r>
+              <a:rPr lang="en-US" dirty="0" err="1"/>
+              <a:t>sąsiadujących</a:t>
+            </a:r>
+            <a:r>
+              <a:rPr lang="en-US" dirty="0"/>
+              <a:t> </a:t>
+            </a:r>
+            <a:r>
+              <a:rPr lang="en-US" dirty="0" err="1"/>
+              <a:t>jednostek</a:t>
+            </a:r>
+            <a:r>
+              <a:rPr lang="en-US" dirty="0"/>
+              <a:t>  </a:t>
+            </a:r>
+            <a:r>
+              <a:rPr lang="en-US" dirty="0" err="1"/>
+              <a:t>nie</a:t>
+            </a:r>
+            <a:r>
+              <a:rPr lang="en-US" dirty="0"/>
+              <a:t> </a:t>
+            </a:r>
+            <a:r>
+              <a:rPr lang="en-US" dirty="0" err="1"/>
+              <a:t>może</a:t>
+            </a:r>
+            <a:r>
+              <a:rPr lang="en-US" dirty="0"/>
+              <a:t> </a:t>
+            </a:r>
+            <a:r>
+              <a:rPr lang="en-US" dirty="0" err="1"/>
+              <a:t>już</a:t>
+            </a:r>
+            <a:r>
+              <a:rPr lang="en-US" dirty="0"/>
+              <a:t> </a:t>
+            </a:r>
+            <a:r>
+              <a:rPr lang="en-US" dirty="0" err="1"/>
+              <a:t>zmienić</a:t>
+            </a:r>
+            <a:r>
+              <a:rPr lang="en-US" dirty="0"/>
+              <a:t> </a:t>
+            </a:r>
+            <a:r>
+              <a:rPr lang="en-US" dirty="0" err="1"/>
+              <a:t>swojej</a:t>
+            </a:r>
+            <a:r>
+              <a:rPr lang="en-US" dirty="0"/>
+              <a:t> </a:t>
+            </a:r>
+            <a:r>
+              <a:rPr lang="en-US" dirty="0" err="1"/>
+              <a:t>kultury</a:t>
+            </a:r>
+            <a:r>
+              <a:rPr lang="en-US" dirty="0"/>
+              <a:t> (</a:t>
+            </a:r>
+            <a:r>
+              <a:rPr lang="en-US" dirty="0" err="1"/>
+              <a:t>całkowicie</a:t>
+            </a:r>
+            <a:r>
+              <a:rPr lang="en-US" dirty="0"/>
+              <a:t> </a:t>
+            </a:r>
+            <a:r>
+              <a:rPr lang="en-US" dirty="0" err="1"/>
+              <a:t>identyczni</a:t>
+            </a:r>
+            <a:r>
+              <a:rPr lang="en-US" dirty="0"/>
+              <a:t> </a:t>
+            </a:r>
+            <a:r>
+              <a:rPr lang="en-US" dirty="0" err="1"/>
+              <a:t>albo</a:t>
+            </a:r>
+            <a:r>
+              <a:rPr lang="en-US" dirty="0"/>
+              <a:t> </a:t>
+            </a:r>
+            <a:r>
+              <a:rPr lang="en-US" dirty="0" err="1"/>
+              <a:t>całkowicie</a:t>
+            </a:r>
+            <a:r>
+              <a:rPr lang="en-US" dirty="0"/>
+              <a:t> </a:t>
+            </a:r>
+            <a:r>
+              <a:rPr lang="en-US" dirty="0" err="1"/>
+              <a:t>odmienni</a:t>
+            </a:r>
+            <a:r>
+              <a:rPr lang="en-US" dirty="0"/>
+              <a:t>).</a:t>
+            </a:r>
+          </a:p>
+          <a:p>
+            <a:pPr marL="514350" indent="-514350">
+              <a:buFont typeface="+mj-lt"/>
+              <a:buAutoNum type="arabicPeriod"/>
+            </a:pPr>
+            <a:r>
+              <a:rPr lang="en-US" b="1" dirty="0" err="1"/>
+              <a:t>Wynik</a:t>
+            </a:r>
+            <a:r>
+              <a:rPr lang="en-US" b="1" dirty="0"/>
+              <a:t> </a:t>
+            </a:r>
+            <a:r>
+              <a:rPr lang="en-US" b="1" dirty="0" err="1"/>
+              <a:t>końcowy</a:t>
+            </a:r>
+            <a:r>
+              <a:rPr lang="en-US" b="1" dirty="0"/>
+              <a:t> </a:t>
+            </a:r>
+            <a:r>
+              <a:rPr lang="en-US" dirty="0"/>
+              <a:t>to </a:t>
+            </a:r>
+            <a:r>
+              <a:rPr lang="en-US" b="1" dirty="0" err="1"/>
+              <a:t>globalna</a:t>
+            </a:r>
+            <a:r>
+              <a:rPr lang="en-US" b="1" dirty="0"/>
+              <a:t> </a:t>
+            </a:r>
+            <a:r>
+              <a:rPr lang="en-US" b="1" dirty="0" err="1"/>
+              <a:t>polaryzacja</a:t>
+            </a:r>
+            <a:r>
+              <a:rPr lang="en-US" dirty="0"/>
+              <a:t>, </a:t>
+            </a:r>
+            <a:r>
+              <a:rPr lang="en-US" dirty="0" err="1"/>
+              <a:t>czyli</a:t>
+            </a:r>
+            <a:r>
+              <a:rPr lang="en-US" dirty="0"/>
+              <a:t> </a:t>
+            </a:r>
+            <a:r>
+              <a:rPr lang="en-US" dirty="0" err="1"/>
+              <a:t>kilka</a:t>
+            </a:r>
+            <a:r>
+              <a:rPr lang="en-US" dirty="0"/>
+              <a:t> </a:t>
+            </a:r>
+            <a:r>
+              <a:rPr lang="en-US" dirty="0" err="1"/>
+              <a:t>całkowicie</a:t>
+            </a:r>
+            <a:r>
+              <a:rPr lang="en-US" dirty="0"/>
+              <a:t> </a:t>
+            </a:r>
+            <a:r>
+              <a:rPr lang="en-US" dirty="0" err="1"/>
+              <a:t>odizolowanych</a:t>
+            </a:r>
+            <a:r>
+              <a:rPr lang="en-US" dirty="0"/>
+              <a:t> od </a:t>
+            </a:r>
+            <a:r>
+              <a:rPr lang="en-US" dirty="0" err="1"/>
+              <a:t>siebie</a:t>
+            </a:r>
+            <a:r>
+              <a:rPr lang="en-US" dirty="0"/>
+              <a:t>,  </a:t>
+            </a:r>
+            <a:r>
+              <a:rPr lang="en-US" dirty="0" err="1"/>
+              <a:t>stabilnych</a:t>
+            </a:r>
+            <a:r>
+              <a:rPr lang="en-US" dirty="0"/>
+              <a:t> </a:t>
+            </a:r>
+            <a:r>
+              <a:rPr lang="en-US" dirty="0" err="1"/>
+              <a:t>regionów</a:t>
+            </a:r>
+            <a:r>
+              <a:rPr lang="en-US" dirty="0"/>
+              <a:t> </a:t>
+            </a:r>
+            <a:r>
+              <a:rPr lang="en-US" dirty="0" err="1"/>
+              <a:t>kulturowych</a:t>
+            </a:r>
+            <a:r>
+              <a:rPr lang="en-US" dirty="0"/>
+              <a:t>. </a:t>
+            </a:r>
+          </a:p>
+          <a:p>
+            <a:endParaRPr lang="en-US" dirty="0"/>
+          </a:p>
+        </p:txBody>
+      </p:sp>
+    </p:spTree>
+    <p:extLst>
+      <p:ext uri="{BB962C8B-B14F-4D97-AF65-F5344CB8AC3E}">
+        <p14:creationId xmlns:p14="http://schemas.microsoft.com/office/powerpoint/2010/main" val="3553586967"/>
+      </p:ext>
+    </p:extLst>
+  </p:cSld>
+  <p:clrMapOvr>
+    <a:masterClrMapping/>
+  </p:clrMapOvr>
+</p:sld>
+</file>
+
+<file path=ppt/slides/slide11.xml><?xml version="1.0" encoding="utf-8"?>
+<p:sld xmlns:a="http://schemas.openxmlformats.org/drawingml/2006/main" xmlns:r="http://schemas.openxmlformats.org/officeDocument/2006/relationships" xmlns:p="http://schemas.openxmlformats.org/presentationml/2006/main">
+  <p:cSld>
+    <p:spTree>
+      <p:nvGrpSpPr>
+        <p:cNvPr id="1" name=""/>
+        <p:cNvGrpSpPr/>
+        <p:nvPr/>
+      </p:nvGrpSpPr>
+      <p:grpSpPr>
+        <a:xfrm>
+          <a:off x="0" y="0"/>
+          <a:ext cx="0" cy="0"/>
+          <a:chOff x="0" y="0"/>
+          <a:chExt cx="0" cy="0"/>
+        </a:xfrm>
+      </p:grpSpPr>
+      <p:pic>
+        <p:nvPicPr>
+          <p:cNvPr id="3" name="Obraz 2">
+            <a:extLst>
+              <a:ext uri="{FF2B5EF4-FFF2-40B4-BE49-F238E27FC236}">
+                <a16:creationId xmlns:a16="http://schemas.microsoft.com/office/drawing/2014/main" id="{D3CB3F2C-B1F3-E809-0AE2-BC335BAD604E}"/>
+              </a:ext>
+            </a:extLst>
+          </p:cNvPr>
+          <p:cNvPicPr>
+            <a:picLocks noChangeAspect="1"/>
+          </p:cNvPicPr>
+          <p:nvPr/>
+        </p:nvPicPr>
+        <p:blipFill>
+          <a:blip r:embed="rId2">
+            <a:extLst>
+              <a:ext uri="{28A0092B-C50C-407E-A947-70E740481C1C}">
+                <a14:useLocalDpi xmlns:a14="http://schemas.microsoft.com/office/drawing/2010/main" val="0"/>
+              </a:ext>
+            </a:extLst>
+          </a:blip>
+          <a:srcRect b="6961"/>
+          <a:stretch>
+            <a:fillRect/>
+          </a:stretch>
+        </p:blipFill>
+        <p:spPr>
+          <a:xfrm>
+            <a:off x="2261936" y="0"/>
+            <a:ext cx="9673389" cy="6750022"/>
+          </a:xfrm>
+          <a:prstGeom prst="rect">
+            <a:avLst/>
+          </a:prstGeom>
+        </p:spPr>
+      </p:pic>
+      <p:sp>
+        <p:nvSpPr>
+          <p:cNvPr id="4" name="pole tekstowe 3">
+            <a:extLst>
+              <a:ext uri="{FF2B5EF4-FFF2-40B4-BE49-F238E27FC236}">
+                <a16:creationId xmlns:a16="http://schemas.microsoft.com/office/drawing/2014/main" id="{8DAC0634-F7D3-2AC5-5478-1014E6CD789D}"/>
+              </a:ext>
+            </a:extLst>
+          </p:cNvPr>
+          <p:cNvSpPr txBox="1"/>
+          <p:nvPr/>
+        </p:nvSpPr>
+        <p:spPr>
+          <a:xfrm>
+            <a:off x="481262" y="4811616"/>
+            <a:ext cx="3100138" cy="1554272"/>
+          </a:xfrm>
+          <a:prstGeom prst="rect">
+            <a:avLst/>
+          </a:prstGeom>
+          <a:noFill/>
+        </p:spPr>
+        <p:txBody>
+          <a:bodyPr wrap="square" rtlCol="0" anchor="b">
+            <a:spAutoFit/>
+          </a:bodyPr>
+          <a:lstStyle/>
+          <a:p>
+            <a:r>
+              <a:rPr lang="pl-PL" sz="1900" u="sng" dirty="0"/>
+              <a:t>Parametry</a:t>
+            </a:r>
+          </a:p>
+          <a:p>
+            <a:r>
+              <a:rPr lang="pl-PL" sz="1900" dirty="0"/>
+              <a:t>liczba cech: 3</a:t>
+            </a:r>
+          </a:p>
+          <a:p>
+            <a:r>
+              <a:rPr lang="pl-PL" sz="1900" dirty="0"/>
+              <a:t>liczba wariantów: 6</a:t>
+            </a:r>
+          </a:p>
+          <a:p>
+            <a:r>
+              <a:rPr lang="pl-PL" sz="1900" dirty="0"/>
+              <a:t>długość boku siatki: 15</a:t>
+            </a:r>
+          </a:p>
+          <a:p>
+            <a:r>
+              <a:rPr lang="pl-PL" sz="1900" dirty="0"/>
+              <a:t>liczba iteracji: &lt;1mln</a:t>
+            </a:r>
+          </a:p>
+        </p:txBody>
+      </p:sp>
+      <p:pic>
+        <p:nvPicPr>
+          <p:cNvPr id="6" name="Obraz 5">
+            <a:extLst>
+              <a:ext uri="{FF2B5EF4-FFF2-40B4-BE49-F238E27FC236}">
+                <a16:creationId xmlns:a16="http://schemas.microsoft.com/office/drawing/2014/main" id="{7FB32805-6F4F-BDDA-1811-5FDFEAF37A50}"/>
+              </a:ext>
+            </a:extLst>
+          </p:cNvPr>
+          <p:cNvPicPr>
+            <a:picLocks noChangeAspect="1"/>
+          </p:cNvPicPr>
+          <p:nvPr/>
+        </p:nvPicPr>
+        <p:blipFill>
+          <a:blip r:embed="rId3"/>
+          <a:stretch>
+            <a:fillRect/>
+          </a:stretch>
+        </p:blipFill>
+        <p:spPr>
+          <a:xfrm>
+            <a:off x="8051799" y="1037570"/>
+            <a:ext cx="2418081" cy="298469"/>
+          </a:xfrm>
+          <a:prstGeom prst="rect">
+            <a:avLst/>
+          </a:prstGeom>
+        </p:spPr>
+      </p:pic>
+      <p:pic>
+        <p:nvPicPr>
+          <p:cNvPr id="8" name="Obraz 7">
+            <a:extLst>
+              <a:ext uri="{FF2B5EF4-FFF2-40B4-BE49-F238E27FC236}">
+                <a16:creationId xmlns:a16="http://schemas.microsoft.com/office/drawing/2014/main" id="{04838392-E671-208D-C04A-254AFF27D9EF}"/>
+              </a:ext>
+            </a:extLst>
+          </p:cNvPr>
+          <p:cNvPicPr>
+            <a:picLocks noChangeAspect="1"/>
+          </p:cNvPicPr>
+          <p:nvPr/>
+        </p:nvPicPr>
+        <p:blipFill>
+          <a:blip r:embed="rId4"/>
+          <a:stretch>
+            <a:fillRect/>
+          </a:stretch>
+        </p:blipFill>
+        <p:spPr>
+          <a:xfrm>
+            <a:off x="8051799" y="822960"/>
+            <a:ext cx="2330692" cy="214610"/>
+          </a:xfrm>
+          <a:prstGeom prst="rect">
+            <a:avLst/>
+          </a:prstGeom>
+        </p:spPr>
+      </p:pic>
+    </p:spTree>
+    <p:extLst>
+      <p:ext uri="{BB962C8B-B14F-4D97-AF65-F5344CB8AC3E}">
+        <p14:creationId xmlns:p14="http://schemas.microsoft.com/office/powerpoint/2010/main" val="1943873016"/>
+      </p:ext>
+    </p:extLst>
+  </p:cSld>
+  <p:clrMapOvr>
+    <a:masterClrMapping/>
+  </p:clrMapOvr>
+</p:sld>
+</file>
+
+<file path=ppt/slides/slide12.xml><?xml version="1.0" encoding="utf-8"?>
+<p:sld xmlns:a="http://schemas.openxmlformats.org/drawingml/2006/main" xmlns:r="http://schemas.openxmlformats.org/officeDocument/2006/relationships" xmlns:p="http://schemas.openxmlformats.org/presentationml/2006/main">
+  <p:cSld>
+    <p:spTree>
+      <p:nvGrpSpPr>
+        <p:cNvPr id="1" name="">
+          <a:extLst>
+            <a:ext uri="{FF2B5EF4-FFF2-40B4-BE49-F238E27FC236}">
+              <a16:creationId xmlns:a16="http://schemas.microsoft.com/office/drawing/2014/main" id="{C975BD9F-7388-27B7-6E97-13AEFA7F3079}"/>
+            </a:ext>
+          </a:extLst>
+        </p:cNvPr>
+        <p:cNvGrpSpPr/>
+        <p:nvPr/>
+      </p:nvGrpSpPr>
+      <p:grpSpPr>
+        <a:xfrm>
+          <a:off x="0" y="0"/>
+          <a:ext cx="0" cy="0"/>
+          <a:chOff x="0" y="0"/>
+          <a:chExt cx="0" cy="0"/>
+        </a:xfrm>
+      </p:grpSpPr>
+      <p:pic>
+        <p:nvPicPr>
+          <p:cNvPr id="4" name="Obraz 3">
+            <a:extLst>
+              <a:ext uri="{FF2B5EF4-FFF2-40B4-BE49-F238E27FC236}">
+                <a16:creationId xmlns:a16="http://schemas.microsoft.com/office/drawing/2014/main" id="{4693E866-FE5B-AD44-8FA5-3862CBAF09FA}"/>
+              </a:ext>
+            </a:extLst>
+          </p:cNvPr>
+          <p:cNvPicPr>
+            <a:picLocks noChangeAspect="1"/>
+          </p:cNvPicPr>
+          <p:nvPr/>
+        </p:nvPicPr>
+        <p:blipFill>
+          <a:blip r:embed="rId2">
+            <a:extLst>
+              <a:ext uri="{28A0092B-C50C-407E-A947-70E740481C1C}">
+                <a14:useLocalDpi xmlns:a14="http://schemas.microsoft.com/office/drawing/2010/main" val="0"/>
+              </a:ext>
+            </a:extLst>
+          </a:blip>
+          <a:stretch>
+            <a:fillRect/>
+          </a:stretch>
+        </p:blipFill>
+        <p:spPr>
+          <a:xfrm>
+            <a:off x="2744536" y="76200"/>
+            <a:ext cx="8940800" cy="6705600"/>
+          </a:xfrm>
+          <a:prstGeom prst="rect">
+            <a:avLst/>
+          </a:prstGeom>
+        </p:spPr>
+      </p:pic>
+      <p:sp>
+        <p:nvSpPr>
+          <p:cNvPr id="3" name="pole tekstowe 2">
+            <a:extLst>
+              <a:ext uri="{FF2B5EF4-FFF2-40B4-BE49-F238E27FC236}">
+                <a16:creationId xmlns:a16="http://schemas.microsoft.com/office/drawing/2014/main" id="{3B774FEC-EBFA-B662-1372-7D093BD8B71A}"/>
+              </a:ext>
+            </a:extLst>
+          </p:cNvPr>
+          <p:cNvSpPr txBox="1"/>
+          <p:nvPr/>
+        </p:nvSpPr>
+        <p:spPr>
+          <a:xfrm>
+            <a:off x="481262" y="5104004"/>
+            <a:ext cx="3100138" cy="1261884"/>
+          </a:xfrm>
+          <a:prstGeom prst="rect">
+            <a:avLst/>
+          </a:prstGeom>
+          <a:noFill/>
+        </p:spPr>
+        <p:txBody>
+          <a:bodyPr wrap="square" rtlCol="0" anchor="b">
+            <a:spAutoFit/>
+          </a:bodyPr>
+          <a:lstStyle/>
+          <a:p>
+            <a:r>
+              <a:rPr lang="pl-PL" sz="1900" u="sng" dirty="0"/>
+              <a:t>Parametry</a:t>
+            </a:r>
+          </a:p>
+          <a:p>
+            <a:r>
+              <a:rPr lang="pl-PL" sz="1900" dirty="0"/>
+              <a:t>liczba cech: 5</a:t>
+            </a:r>
+          </a:p>
+          <a:p>
+            <a:r>
+              <a:rPr lang="pl-PL" sz="1900" dirty="0"/>
+              <a:t>długość boku siatki: 10</a:t>
+            </a:r>
+          </a:p>
+          <a:p>
+            <a:r>
+              <a:rPr lang="pl-PL" sz="1900" dirty="0"/>
+              <a:t>liczba iteracji: &lt;300000</a:t>
+            </a:r>
+          </a:p>
+        </p:txBody>
+      </p:sp>
+    </p:spTree>
+    <p:extLst>
+      <p:ext uri="{BB962C8B-B14F-4D97-AF65-F5344CB8AC3E}">
+        <p14:creationId xmlns:p14="http://schemas.microsoft.com/office/powerpoint/2010/main" val="2455441191"/>
+      </p:ext>
+    </p:extLst>
+  </p:cSld>
+  <p:clrMapOvr>
+    <a:masterClrMapping/>
+  </p:clrMapOvr>
+</p:sld>
+</file>
+
+<file path=ppt/slides/slide13.xml><?xml version="1.0" encoding="utf-8"?>
+<p:sld xmlns:a="http://schemas.openxmlformats.org/drawingml/2006/main" xmlns:r="http://schemas.openxmlformats.org/officeDocument/2006/relationships" xmlns:p="http://schemas.openxmlformats.org/presentationml/2006/main">
+  <p:cSld>
+    <p:spTree>
+      <p:nvGrpSpPr>
+        <p:cNvPr id="1" name="">
+          <a:extLst>
+            <a:ext uri="{FF2B5EF4-FFF2-40B4-BE49-F238E27FC236}">
+              <a16:creationId xmlns:a16="http://schemas.microsoft.com/office/drawing/2014/main" id="{3AEBEEFD-4777-E5BE-A441-F2ED6C94E4B5}"/>
+            </a:ext>
+          </a:extLst>
+        </p:cNvPr>
+        <p:cNvGrpSpPr/>
+        <p:nvPr/>
+      </p:nvGrpSpPr>
+      <p:grpSpPr>
+        <a:xfrm>
+          <a:off x="0" y="0"/>
+          <a:ext cx="0" cy="0"/>
+          <a:chOff x="0" y="0"/>
+          <a:chExt cx="0" cy="0"/>
+        </a:xfrm>
+      </p:grpSpPr>
+      <p:pic>
+        <p:nvPicPr>
+          <p:cNvPr id="4" name="Obraz 3">
+            <a:extLst>
+              <a:ext uri="{FF2B5EF4-FFF2-40B4-BE49-F238E27FC236}">
+                <a16:creationId xmlns:a16="http://schemas.microsoft.com/office/drawing/2014/main" id="{8AA74A69-C74E-CA5A-4969-7D4FF901DFA8}"/>
+              </a:ext>
+            </a:extLst>
+          </p:cNvPr>
+          <p:cNvPicPr>
+            <a:picLocks noChangeAspect="1"/>
+          </p:cNvPicPr>
+          <p:nvPr/>
+        </p:nvPicPr>
+        <p:blipFill>
+          <a:blip r:embed="rId2">
+            <a:extLst>
+              <a:ext uri="{28A0092B-C50C-407E-A947-70E740481C1C}">
+                <a14:useLocalDpi xmlns:a14="http://schemas.microsoft.com/office/drawing/2010/main" val="0"/>
+              </a:ext>
+            </a:extLst>
+          </a:blip>
+          <a:stretch>
+            <a:fillRect/>
+          </a:stretch>
+        </p:blipFill>
+        <p:spPr>
+          <a:xfrm>
+            <a:off x="2785790" y="144378"/>
+            <a:ext cx="8758990" cy="6569243"/>
+          </a:xfrm>
+          <a:prstGeom prst="rect">
+            <a:avLst/>
+          </a:prstGeom>
+        </p:spPr>
+      </p:pic>
+      <p:sp>
+        <p:nvSpPr>
+          <p:cNvPr id="3" name="pole tekstowe 2">
+            <a:extLst>
+              <a:ext uri="{FF2B5EF4-FFF2-40B4-BE49-F238E27FC236}">
+                <a16:creationId xmlns:a16="http://schemas.microsoft.com/office/drawing/2014/main" id="{335EFD6F-418E-DEBF-4D57-0A479983EECB}"/>
+              </a:ext>
+            </a:extLst>
+          </p:cNvPr>
+          <p:cNvSpPr txBox="1"/>
+          <p:nvPr/>
+        </p:nvSpPr>
+        <p:spPr>
+          <a:xfrm>
+            <a:off x="481262" y="5104004"/>
+            <a:ext cx="3100138" cy="1261884"/>
+          </a:xfrm>
+          <a:prstGeom prst="rect">
+            <a:avLst/>
+          </a:prstGeom>
+          <a:noFill/>
+        </p:spPr>
+        <p:txBody>
+          <a:bodyPr wrap="square" rtlCol="0" anchor="b">
+            <a:spAutoFit/>
+          </a:bodyPr>
+          <a:lstStyle/>
+          <a:p>
+            <a:r>
+              <a:rPr lang="pl-PL" sz="1900" u="sng" dirty="0"/>
+              <a:t>Parametry</a:t>
+            </a:r>
+          </a:p>
+          <a:p>
+            <a:r>
+              <a:rPr lang="pl-PL" sz="1900" dirty="0"/>
+              <a:t>liczba cech: 5</a:t>
+            </a:r>
+          </a:p>
+          <a:p>
+            <a:r>
+              <a:rPr lang="pl-PL" sz="1900" dirty="0"/>
+              <a:t>długość boku siatki: 10</a:t>
+            </a:r>
+          </a:p>
+          <a:p>
+            <a:r>
+              <a:rPr lang="pl-PL" sz="1900" dirty="0"/>
+              <a:t>liczba iteracji: &lt;400000</a:t>
+            </a:r>
+          </a:p>
+        </p:txBody>
+      </p:sp>
+      <p:pic>
+        <p:nvPicPr>
+          <p:cNvPr id="6" name="Obraz 5">
+            <a:extLst>
+              <a:ext uri="{FF2B5EF4-FFF2-40B4-BE49-F238E27FC236}">
+                <a16:creationId xmlns:a16="http://schemas.microsoft.com/office/drawing/2014/main" id="{BD0C09B4-26CE-4575-BDA9-DE177BA3BAD9}"/>
+              </a:ext>
+            </a:extLst>
+          </p:cNvPr>
+          <p:cNvPicPr>
+            <a:picLocks noChangeAspect="1"/>
+          </p:cNvPicPr>
+          <p:nvPr/>
+        </p:nvPicPr>
+        <p:blipFill>
+          <a:blip r:embed="rId3"/>
+          <a:stretch>
+            <a:fillRect/>
+          </a:stretch>
+        </p:blipFill>
+        <p:spPr>
+          <a:xfrm>
+            <a:off x="5651792" y="304800"/>
+            <a:ext cx="3877218" cy="288364"/>
+          </a:xfrm>
+          <a:prstGeom prst="rect">
+            <a:avLst/>
+          </a:prstGeom>
+        </p:spPr>
+      </p:pic>
+      <p:sp>
+        <p:nvSpPr>
+          <p:cNvPr id="7" name="pole tekstowe 6">
+            <a:extLst>
+              <a:ext uri="{FF2B5EF4-FFF2-40B4-BE49-F238E27FC236}">
+                <a16:creationId xmlns:a16="http://schemas.microsoft.com/office/drawing/2014/main" id="{55926E9D-9C6D-461D-CA0A-C9934EBC198E}"/>
+              </a:ext>
+            </a:extLst>
+          </p:cNvPr>
+          <p:cNvSpPr txBox="1"/>
+          <p:nvPr/>
+        </p:nvSpPr>
+        <p:spPr>
+          <a:xfrm>
+            <a:off x="3446284" y="288758"/>
+            <a:ext cx="8288233" cy="384721"/>
+          </a:xfrm>
+          <a:prstGeom prst="rect">
+            <a:avLst/>
+          </a:prstGeom>
+          <a:noFill/>
+        </p:spPr>
+        <p:txBody>
+          <a:bodyPr wrap="square" rtlCol="0">
+            <a:spAutoFit/>
+          </a:bodyPr>
+          <a:lstStyle/>
+          <a:p>
+            <a:r>
+              <a:rPr lang="pl-PL" sz="1900" dirty="0"/>
+              <a:t>Unormowana wielkość największego regionu w zależności od liczby wariantów</a:t>
+            </a:r>
+          </a:p>
+        </p:txBody>
+      </p:sp>
+    </p:spTree>
+    <p:extLst>
+      <p:ext uri="{BB962C8B-B14F-4D97-AF65-F5344CB8AC3E}">
+        <p14:creationId xmlns:p14="http://schemas.microsoft.com/office/powerpoint/2010/main" val="1244680839"/>
+      </p:ext>
+    </p:extLst>
+  </p:cSld>
+  <p:clrMapOvr>
+    <a:masterClrMapping/>
+  </p:clrMapOvr>
+</p:sld>
+</file>
+
+<file path=ppt/slides/slide14.xml><?xml version="1.0" encoding="utf-8"?>
+<p:sld xmlns:a="http://schemas.openxmlformats.org/drawingml/2006/main" xmlns:r="http://schemas.openxmlformats.org/officeDocument/2006/relationships" xmlns:p="http://schemas.openxmlformats.org/presentationml/2006/main">
+  <p:cSld>
+    <p:spTree>
+      <p:nvGrpSpPr>
+        <p:cNvPr id="1" name="">
+          <a:extLst>
+            <a:ext uri="{FF2B5EF4-FFF2-40B4-BE49-F238E27FC236}">
+              <a16:creationId xmlns:a16="http://schemas.microsoft.com/office/drawing/2014/main" id="{0346A47C-9D1B-ADDB-C999-E46054B35C68}"/>
+            </a:ext>
+          </a:extLst>
+        </p:cNvPr>
+        <p:cNvGrpSpPr/>
+        <p:nvPr/>
+      </p:nvGrpSpPr>
+      <p:grpSpPr>
+        <a:xfrm>
+          <a:off x="0" y="0"/>
+          <a:ext cx="0" cy="0"/>
+          <a:chOff x="0" y="0"/>
+          <a:chExt cx="0" cy="0"/>
+        </a:xfrm>
+      </p:grpSpPr>
+      <p:pic>
+        <p:nvPicPr>
+          <p:cNvPr id="4" name="Obraz 3">
+            <a:extLst>
+              <a:ext uri="{FF2B5EF4-FFF2-40B4-BE49-F238E27FC236}">
+                <a16:creationId xmlns:a16="http://schemas.microsoft.com/office/drawing/2014/main" id="{D1C94B36-4188-B57F-D942-9E288C45B2A9}"/>
+              </a:ext>
+            </a:extLst>
+          </p:cNvPr>
+          <p:cNvPicPr>
+            <a:picLocks noChangeAspect="1"/>
+          </p:cNvPicPr>
+          <p:nvPr/>
+        </p:nvPicPr>
+        <p:blipFill>
+          <a:blip r:embed="rId2">
+            <a:extLst>
+              <a:ext uri="{28A0092B-C50C-407E-A947-70E740481C1C}">
+                <a14:useLocalDpi xmlns:a14="http://schemas.microsoft.com/office/drawing/2010/main" val="0"/>
+              </a:ext>
+            </a:extLst>
+          </a:blip>
+          <a:stretch>
+            <a:fillRect/>
+          </a:stretch>
+        </p:blipFill>
+        <p:spPr>
+          <a:xfrm>
+            <a:off x="2398000" y="244638"/>
+            <a:ext cx="9794000" cy="6121250"/>
+          </a:xfrm>
+          <a:prstGeom prst="rect">
+            <a:avLst/>
+          </a:prstGeom>
+        </p:spPr>
+      </p:pic>
+      <p:sp>
+        <p:nvSpPr>
+          <p:cNvPr id="3" name="pole tekstowe 2">
+            <a:extLst>
+              <a:ext uri="{FF2B5EF4-FFF2-40B4-BE49-F238E27FC236}">
+                <a16:creationId xmlns:a16="http://schemas.microsoft.com/office/drawing/2014/main" id="{4E702975-534F-BD40-3DB2-DC29CD0460FD}"/>
+              </a:ext>
+            </a:extLst>
+          </p:cNvPr>
+          <p:cNvSpPr txBox="1"/>
+          <p:nvPr/>
+        </p:nvSpPr>
+        <p:spPr>
+          <a:xfrm>
+            <a:off x="481262" y="5104004"/>
+            <a:ext cx="3100138" cy="1261884"/>
+          </a:xfrm>
+          <a:prstGeom prst="rect">
+            <a:avLst/>
+          </a:prstGeom>
+          <a:noFill/>
+        </p:spPr>
+        <p:txBody>
+          <a:bodyPr wrap="square" rtlCol="0" anchor="b">
+            <a:spAutoFit/>
+          </a:bodyPr>
+          <a:lstStyle/>
+          <a:p>
+            <a:r>
+              <a:rPr lang="pl-PL" sz="1900" u="sng" dirty="0"/>
+              <a:t>Parametry</a:t>
+            </a:r>
+          </a:p>
+          <a:p>
+            <a:r>
+              <a:rPr lang="pl-PL" sz="1900" dirty="0"/>
+              <a:t>liczba cech: 5</a:t>
+            </a:r>
+          </a:p>
+          <a:p>
+            <a:r>
+              <a:rPr lang="pl-PL" sz="1900" dirty="0"/>
+              <a:t>liczba wariantów: 5</a:t>
+            </a:r>
+          </a:p>
+          <a:p>
+            <a:r>
+              <a:rPr lang="pl-PL" sz="1900" dirty="0"/>
+              <a:t>liczba iteracji: &lt;1mln</a:t>
+            </a:r>
+          </a:p>
+        </p:txBody>
+      </p:sp>
+    </p:spTree>
+    <p:extLst>
+      <p:ext uri="{BB962C8B-B14F-4D97-AF65-F5344CB8AC3E}">
+        <p14:creationId xmlns:p14="http://schemas.microsoft.com/office/powerpoint/2010/main" val="2773652040"/>
+      </p:ext>
+    </p:extLst>
+  </p:cSld>
+  <p:clrMapOvr>
+    <a:masterClrMapping/>
+  </p:clrMapOvr>
+</p:sld>
+</file>
+
+<file path=ppt/slides/slide15.xml><?xml version="1.0" encoding="utf-8"?>
+<p:sld xmlns:a="http://schemas.openxmlformats.org/drawingml/2006/main" xmlns:r="http://schemas.openxmlformats.org/officeDocument/2006/relationships" xmlns:p="http://schemas.openxmlformats.org/presentationml/2006/main">
+  <p:cSld>
+    <p:spTree>
+      <p:nvGrpSpPr>
+        <p:cNvPr id="1" name="">
+          <a:extLst>
+            <a:ext uri="{FF2B5EF4-FFF2-40B4-BE49-F238E27FC236}">
+              <a16:creationId xmlns:a16="http://schemas.microsoft.com/office/drawing/2014/main" id="{CC6C778C-6913-9203-0009-771F46F93336}"/>
+            </a:ext>
+          </a:extLst>
+        </p:cNvPr>
+        <p:cNvGrpSpPr/>
+        <p:nvPr/>
+      </p:nvGrpSpPr>
+      <p:grpSpPr>
+        <a:xfrm>
+          <a:off x="0" y="0"/>
+          <a:ext cx="0" cy="0"/>
+          <a:chOff x="0" y="0"/>
+          <a:chExt cx="0" cy="0"/>
+        </a:xfrm>
+      </p:grpSpPr>
+      <p:pic>
+        <p:nvPicPr>
+          <p:cNvPr id="4" name="Obraz 3">
+            <a:extLst>
+              <a:ext uri="{FF2B5EF4-FFF2-40B4-BE49-F238E27FC236}">
+                <a16:creationId xmlns:a16="http://schemas.microsoft.com/office/drawing/2014/main" id="{0145A6B3-F51E-DF0E-0AF2-74CD15D5F1B7}"/>
+              </a:ext>
+            </a:extLst>
+          </p:cNvPr>
+          <p:cNvPicPr>
+            <a:picLocks noChangeAspect="1"/>
+          </p:cNvPicPr>
+          <p:nvPr/>
+        </p:nvPicPr>
+        <p:blipFill>
+          <a:blip r:embed="rId2">
+            <a:extLst>
+              <a:ext uri="{28A0092B-C50C-407E-A947-70E740481C1C}">
+                <a14:useLocalDpi xmlns:a14="http://schemas.microsoft.com/office/drawing/2010/main" val="0"/>
+              </a:ext>
+            </a:extLst>
+          </a:blip>
+          <a:stretch>
+            <a:fillRect/>
+          </a:stretch>
+        </p:blipFill>
+        <p:spPr>
+          <a:xfrm>
+            <a:off x="0" y="324263"/>
+            <a:ext cx="12192000" cy="4876799"/>
+          </a:xfrm>
+          <a:prstGeom prst="rect">
+            <a:avLst/>
+          </a:prstGeom>
+        </p:spPr>
+      </p:pic>
+      <p:sp>
+        <p:nvSpPr>
+          <p:cNvPr id="6" name="pole tekstowe 5">
+            <a:extLst>
+              <a:ext uri="{FF2B5EF4-FFF2-40B4-BE49-F238E27FC236}">
+                <a16:creationId xmlns:a16="http://schemas.microsoft.com/office/drawing/2014/main" id="{172743B8-D8F6-9E33-B65F-B2EE3D858D57}"/>
+              </a:ext>
+            </a:extLst>
+          </p:cNvPr>
+          <p:cNvSpPr txBox="1"/>
+          <p:nvPr/>
+        </p:nvSpPr>
+        <p:spPr>
+          <a:xfrm>
+            <a:off x="481262" y="5396392"/>
+            <a:ext cx="5213685" cy="969496"/>
+          </a:xfrm>
+          <a:prstGeom prst="rect">
+            <a:avLst/>
+          </a:prstGeom>
+          <a:noFill/>
+        </p:spPr>
+        <p:txBody>
+          <a:bodyPr wrap="square" rtlCol="0" anchor="b">
+            <a:spAutoFit/>
+          </a:bodyPr>
+          <a:lstStyle/>
+          <a:p>
+            <a:r>
+              <a:rPr lang="pl-PL" sz="1900" u="sng" dirty="0"/>
+              <a:t>Parametry</a:t>
+            </a:r>
+          </a:p>
+          <a:p>
+            <a:r>
+              <a:rPr lang="pl-PL" sz="1900" dirty="0"/>
+              <a:t>liczba cech: 3, liczba wariantów: 6</a:t>
+            </a:r>
+          </a:p>
+          <a:p>
+            <a:r>
+              <a:rPr lang="pl-PL" sz="1900" dirty="0"/>
+              <a:t>długość boku siatki: 18,  liczba iteracji: 1mln</a:t>
+            </a:r>
+          </a:p>
+        </p:txBody>
+      </p:sp>
+    </p:spTree>
+    <p:extLst>
+      <p:ext uri="{BB962C8B-B14F-4D97-AF65-F5344CB8AC3E}">
+        <p14:creationId xmlns:p14="http://schemas.microsoft.com/office/powerpoint/2010/main" val="2513979403"/>
+      </p:ext>
+    </p:extLst>
+  </p:cSld>
+  <p:clrMapOvr>
+    <a:masterClrMapping/>
+  </p:clrMapOvr>
+</p:sld>
+</file>
+
+<file path=ppt/slides/slide16.xml><?xml version="1.0" encoding="utf-8"?>
+<p:sld xmlns:a="http://schemas.openxmlformats.org/drawingml/2006/main" xmlns:r="http://schemas.openxmlformats.org/officeDocument/2006/relationships" xmlns:p="http://schemas.openxmlformats.org/presentationml/2006/main">
+  <p:cSld>
+    <p:spTree>
+      <p:nvGrpSpPr>
+        <p:cNvPr id="1" name=""/>
+        <p:cNvGrpSpPr/>
+        <p:nvPr/>
+      </p:nvGrpSpPr>
+      <p:grpSpPr>
+        <a:xfrm>
+          <a:off x="0" y="0"/>
+          <a:ext cx="0" cy="0"/>
+          <a:chOff x="0" y="0"/>
+          <a:chExt cx="0" cy="0"/>
+        </a:xfrm>
+      </p:grpSpPr>
+      <p:sp>
+        <p:nvSpPr>
+          <p:cNvPr id="2" name="Tytuł 1">
+            <a:extLst>
+              <a:ext uri="{FF2B5EF4-FFF2-40B4-BE49-F238E27FC236}">
                 <a16:creationId xmlns:a16="http://schemas.microsoft.com/office/drawing/2014/main" id="{77407CC0-3BB3-4563-A997-6BDBBB130FFE}"/>
               </a:ext>
             </a:extLst>
@@ -3772,7 +5900,7 @@
 </p:sld>
 </file>
 
-<file path=ppt/slides/slide11.xml><?xml version="1.0" encoding="utf-8"?>
+<file path=ppt/slides/slide17.xml><?xml version="1.0" encoding="utf-8"?>
 <p:sld xmlns:a="http://schemas.openxmlformats.org/drawingml/2006/main" xmlns:r="http://schemas.openxmlformats.org/officeDocument/2006/relationships" xmlns:p="http://schemas.openxmlformats.org/presentationml/2006/main">
   <p:cSld>
     <p:spTree>
@@ -3926,7 +6054,7 @@
 </p:sld>
 </file>
 
-<file path=ppt/slides/slide12.xml><?xml version="1.0" encoding="utf-8"?>
+<file path=ppt/slides/slide18.xml><?xml version="1.0" encoding="utf-8"?>
 <p:sld xmlns:a="http://schemas.openxmlformats.org/drawingml/2006/main" xmlns:r="http://schemas.openxmlformats.org/officeDocument/2006/relationships" xmlns:p="http://schemas.openxmlformats.org/presentationml/2006/main">
   <p:cSld>
     <p:spTree>
@@ -4074,7 +6202,7 @@
 </p:sld>
 </file>
 
-<file path=ppt/slides/slide13.xml><?xml version="1.0" encoding="utf-8"?>
+<file path=ppt/slides/slide19.xml><?xml version="1.0" encoding="utf-8"?>
 <p:sld xmlns:a="http://schemas.openxmlformats.org/drawingml/2006/main" xmlns:r="http://schemas.openxmlformats.org/officeDocument/2006/relationships" xmlns:p="http://schemas.openxmlformats.org/presentationml/2006/main">
   <p:cSld>
     <p:spTree>
@@ -4195,638 +6323,6 @@
     <p:extLst>
       <p:ext uri="{BB962C8B-B14F-4D97-AF65-F5344CB8AC3E}">
         <p14:creationId xmlns:p14="http://schemas.microsoft.com/office/powerpoint/2010/main" val="907463827"/>
-      </p:ext>
-    </p:extLst>
-  </p:cSld>
-  <p:clrMapOvr>
-    <a:masterClrMapping/>
-  </p:clrMapOvr>
-</p:sld>
-</file>
-
-<file path=ppt/slides/slide14.xml><?xml version="1.0" encoding="utf-8"?>
-<p:sld xmlns:a="http://schemas.openxmlformats.org/drawingml/2006/main" xmlns:r="http://schemas.openxmlformats.org/officeDocument/2006/relationships" xmlns:p="http://schemas.openxmlformats.org/presentationml/2006/main">
-  <p:cSld>
-    <p:spTree>
-      <p:nvGrpSpPr>
-        <p:cNvPr id="1" name=""/>
-        <p:cNvGrpSpPr/>
-        <p:nvPr/>
-      </p:nvGrpSpPr>
-      <p:grpSpPr>
-        <a:xfrm>
-          <a:off x="0" y="0"/>
-          <a:ext cx="0" cy="0"/>
-          <a:chOff x="0" y="0"/>
-          <a:chExt cx="0" cy="0"/>
-        </a:xfrm>
-      </p:grpSpPr>
-      <p:sp>
-        <p:nvSpPr>
-          <p:cNvPr id="2" name="Tytuł 1">
-            <a:extLst>
-              <a:ext uri="{FF2B5EF4-FFF2-40B4-BE49-F238E27FC236}">
-                <a16:creationId xmlns:a16="http://schemas.microsoft.com/office/drawing/2014/main" id="{CB6157CB-37E3-1BAD-1464-BA515DC4B543}"/>
-              </a:ext>
-            </a:extLst>
-          </p:cNvPr>
-          <p:cNvSpPr>
-            <a:spLocks noGrp="1"/>
-          </p:cNvSpPr>
-          <p:nvPr>
-            <p:ph type="title"/>
-          </p:nvPr>
-        </p:nvSpPr>
-        <p:spPr/>
-        <p:txBody>
-          <a:bodyPr/>
-          <a:lstStyle/>
-          <a:p>
-            <a:r>
-              <a:rPr lang="pl-PL" dirty="0"/>
-              <a:t>Wnioski końcowe</a:t>
-            </a:r>
-            <a:endParaRPr lang="en-US" dirty="0"/>
-          </a:p>
-        </p:txBody>
-      </p:sp>
-      <p:sp>
-        <p:nvSpPr>
-          <p:cNvPr id="3" name="Symbol zastępczy zawartości 2">
-            <a:extLst>
-              <a:ext uri="{FF2B5EF4-FFF2-40B4-BE49-F238E27FC236}">
-                <a16:creationId xmlns:a16="http://schemas.microsoft.com/office/drawing/2014/main" id="{DE8976C9-4BCF-B715-7CBA-4FBC45D36595}"/>
-              </a:ext>
-            </a:extLst>
-          </p:cNvPr>
-          <p:cNvSpPr>
-            <a:spLocks noGrp="1"/>
-          </p:cNvSpPr>
-          <p:nvPr>
-            <p:ph idx="1"/>
-          </p:nvPr>
-        </p:nvSpPr>
-        <p:spPr>
-          <a:xfrm>
-            <a:off x="659219" y="1499191"/>
-            <a:ext cx="11206716" cy="5071730"/>
-          </a:xfrm>
-        </p:spPr>
-        <p:txBody>
-          <a:bodyPr>
-            <a:normAutofit fontScale="25000" lnSpcReduction="20000"/>
-          </a:bodyPr>
-          <a:lstStyle/>
-          <a:p>
-            <a:r>
-              <a:rPr lang="en-US" sz="12800" dirty="0" err="1"/>
-              <a:t>Najważniejszy</a:t>
-            </a:r>
-            <a:r>
-              <a:rPr lang="en-US" sz="12800" dirty="0"/>
-              <a:t> </a:t>
-            </a:r>
-            <a:r>
-              <a:rPr lang="en-US" sz="12800" dirty="0" err="1"/>
-              <a:t>wniosek</a:t>
-            </a:r>
-            <a:r>
-              <a:rPr lang="en-US" sz="12800" dirty="0"/>
-              <a:t> </a:t>
-            </a:r>
-            <a:r>
-              <a:rPr lang="en-US" sz="12800" dirty="0" err="1"/>
-              <a:t>płynący</a:t>
-            </a:r>
-            <a:r>
-              <a:rPr lang="en-US" sz="12800" dirty="0"/>
-              <a:t> z </a:t>
-            </a:r>
-            <a:r>
-              <a:rPr lang="en-US" sz="12800" dirty="0" err="1"/>
-              <a:t>badań</a:t>
-            </a:r>
-            <a:r>
-              <a:rPr lang="en-US" sz="12800" dirty="0"/>
-              <a:t> </a:t>
-            </a:r>
-            <a:r>
-              <a:rPr lang="en-US" sz="12800" dirty="0" err="1"/>
-              <a:t>Axelroda</a:t>
-            </a:r>
-            <a:r>
-              <a:rPr lang="en-US" sz="12800" dirty="0"/>
-              <a:t> </a:t>
-            </a:r>
-            <a:r>
-              <a:rPr lang="en-US" sz="12800" dirty="0" err="1"/>
-              <a:t>wskazuje</a:t>
-            </a:r>
-            <a:r>
-              <a:rPr lang="en-US" sz="12800" dirty="0"/>
-              <a:t>, </a:t>
-            </a:r>
-            <a:r>
-              <a:rPr lang="en-US" sz="12800" dirty="0" err="1"/>
-              <a:t>że</a:t>
-            </a:r>
-            <a:r>
-              <a:rPr lang="en-US" sz="12800" dirty="0"/>
-              <a:t> </a:t>
-            </a:r>
-            <a:r>
-              <a:rPr lang="en-US" sz="12800" b="1" dirty="0" err="1"/>
-              <a:t>dążenie</a:t>
-            </a:r>
-            <a:r>
-              <a:rPr lang="en-US" sz="12800" b="1" dirty="0"/>
-              <a:t> do </a:t>
-            </a:r>
-            <a:r>
-              <a:rPr lang="en-US" sz="12800" b="1" dirty="0" err="1"/>
-              <a:t>lokalnego</a:t>
-            </a:r>
-            <a:r>
-              <a:rPr lang="en-US" sz="12800" b="1" dirty="0"/>
-              <a:t> </a:t>
-            </a:r>
-            <a:r>
-              <a:rPr lang="en-US" sz="12800" b="1" dirty="0" err="1"/>
-              <a:t>podobieństwa</a:t>
-            </a:r>
-            <a:r>
-              <a:rPr lang="pl-PL" sz="12800" b="1" dirty="0"/>
-              <a:t> </a:t>
-            </a:r>
-            <a:r>
-              <a:rPr lang="en-US" sz="12800" dirty="0" err="1"/>
-              <a:t>paradoksalnie</a:t>
-            </a:r>
-            <a:r>
-              <a:rPr lang="en-US" sz="12800" dirty="0"/>
-              <a:t> </a:t>
-            </a:r>
-            <a:r>
-              <a:rPr lang="en-US" sz="12800" b="1" dirty="0" err="1"/>
-              <a:t>uniemożliwia</a:t>
-            </a:r>
-            <a:r>
-              <a:rPr lang="en-US" sz="12800" b="1" dirty="0"/>
-              <a:t> </a:t>
-            </a:r>
-            <a:r>
-              <a:rPr lang="en-US" sz="12800" b="1" dirty="0" err="1"/>
-              <a:t>całkowite</a:t>
-            </a:r>
-            <a:r>
-              <a:rPr lang="en-US" sz="12800" b="1" dirty="0"/>
-              <a:t> </a:t>
-            </a:r>
-            <a:r>
-              <a:rPr lang="en-US" sz="12800" b="1" dirty="0" err="1"/>
-              <a:t>ujednolicenie</a:t>
-            </a:r>
-            <a:r>
-              <a:rPr lang="en-US" sz="12800" b="1" dirty="0"/>
-              <a:t> </a:t>
-            </a:r>
-            <a:r>
-              <a:rPr lang="en-US" sz="12800" b="1" dirty="0" err="1"/>
-              <a:t>całego</a:t>
-            </a:r>
-            <a:r>
-              <a:rPr lang="en-US" sz="12800" b="1" dirty="0"/>
-              <a:t> </a:t>
-            </a:r>
-            <a:r>
-              <a:rPr lang="en-US" sz="12800" b="1" dirty="0" err="1"/>
-              <a:t>społeczeństwa</a:t>
-            </a:r>
-            <a:r>
-              <a:rPr lang="en-US" sz="12800" b="1" dirty="0"/>
-              <a:t> </a:t>
-            </a:r>
-            <a:r>
-              <a:rPr lang="en-US" sz="12800" dirty="0" err="1"/>
-              <a:t>i</a:t>
-            </a:r>
-            <a:r>
-              <a:rPr lang="en-US" sz="12800" dirty="0"/>
-              <a:t> </a:t>
-            </a:r>
-            <a:r>
-              <a:rPr lang="en-US" sz="12800" dirty="0" err="1"/>
-              <a:t>cementuje</a:t>
-            </a:r>
-            <a:r>
-              <a:rPr lang="en-US" sz="12800" dirty="0"/>
-              <a:t>  </a:t>
-            </a:r>
-            <a:r>
-              <a:rPr lang="en-US" sz="12800" dirty="0" err="1"/>
-              <a:t>trwałe</a:t>
-            </a:r>
-            <a:r>
-              <a:rPr lang="en-US" sz="12800" dirty="0"/>
-              <a:t> </a:t>
-            </a:r>
-            <a:r>
-              <a:rPr lang="en-US" sz="12800" dirty="0" err="1"/>
-              <a:t>podziały</a:t>
-            </a:r>
-            <a:r>
-              <a:rPr lang="en-US" sz="12800" dirty="0"/>
-              <a:t> </a:t>
-            </a:r>
-            <a:r>
-              <a:rPr lang="en-US" sz="12800" dirty="0" err="1"/>
-              <a:t>kulturowe</a:t>
-            </a:r>
-            <a:r>
-              <a:rPr lang="en-US" sz="12800" dirty="0"/>
-              <a:t> </a:t>
-            </a:r>
-            <a:r>
-              <a:rPr lang="en-US" sz="12800" dirty="0" err="1"/>
-              <a:t>na</a:t>
-            </a:r>
-            <a:r>
-              <a:rPr lang="en-US" sz="12800" dirty="0"/>
-              <a:t> </a:t>
-            </a:r>
-            <a:r>
-              <a:rPr lang="en-US" sz="12800" dirty="0" err="1"/>
-              <a:t>poziomie</a:t>
-            </a:r>
-            <a:r>
-              <a:rPr lang="en-US" sz="12800" dirty="0"/>
-              <a:t> </a:t>
-            </a:r>
-            <a:r>
-              <a:rPr lang="en-US" sz="12800" dirty="0" err="1"/>
-              <a:t>globalnym</a:t>
-            </a:r>
-            <a:r>
-              <a:rPr lang="en-US" sz="12800" dirty="0"/>
-              <a:t> (</a:t>
-            </a:r>
-            <a:r>
-              <a:rPr lang="en-US" sz="12800" dirty="0" err="1"/>
-              <a:t>wyspy</a:t>
-            </a:r>
-            <a:r>
-              <a:rPr lang="en-US" sz="12800" dirty="0"/>
-              <a:t> </a:t>
-            </a:r>
-            <a:r>
-              <a:rPr lang="en-US" sz="12800" dirty="0" err="1"/>
-              <a:t>wspólne</a:t>
-            </a:r>
-            <a:r>
-              <a:rPr lang="en-US" sz="12800" dirty="0"/>
-              <a:t> </a:t>
-            </a:r>
-            <a:r>
-              <a:rPr lang="en-US" sz="12800" dirty="0" err="1"/>
-              <a:t>kulturowo</a:t>
-            </a:r>
-            <a:r>
-              <a:rPr lang="en-US" sz="12800" dirty="0"/>
-              <a:t>).</a:t>
-            </a:r>
-            <a:br>
-              <a:rPr lang="en-US" sz="12800" dirty="0"/>
-            </a:br>
-            <a:endParaRPr lang="en-US" sz="12800" dirty="0"/>
-          </a:p>
-          <a:p>
-            <a:r>
-              <a:rPr lang="en-US" sz="12800" dirty="0"/>
-              <a:t>    </a:t>
-            </a:r>
-            <a:r>
-              <a:rPr lang="en-US" sz="12800" dirty="0" err="1"/>
-              <a:t>Im</a:t>
-            </a:r>
-            <a:r>
-              <a:rPr lang="en-US" sz="12800" dirty="0"/>
-              <a:t> </a:t>
-            </a:r>
-            <a:r>
-              <a:rPr lang="en-US" sz="12800" b="1" dirty="0" err="1"/>
-              <a:t>więcej</a:t>
-            </a:r>
-            <a:r>
-              <a:rPr lang="en-US" sz="12800" b="1" dirty="0"/>
-              <a:t> </a:t>
-            </a:r>
-            <a:r>
-              <a:rPr lang="en-US" sz="12800" b="1" dirty="0" err="1"/>
-              <a:t>cech</a:t>
-            </a:r>
-            <a:r>
-              <a:rPr lang="en-US" sz="12800" b="1" dirty="0"/>
-              <a:t> </a:t>
-            </a:r>
-            <a:r>
-              <a:rPr lang="en-US" sz="12800" dirty="0" err="1"/>
-              <a:t>opisuje</a:t>
-            </a:r>
-            <a:r>
-              <a:rPr lang="en-US" sz="12800" dirty="0"/>
-              <a:t> </a:t>
-            </a:r>
-            <a:r>
-              <a:rPr lang="en-US" sz="12800" dirty="0" err="1"/>
-              <a:t>kulturę</a:t>
-            </a:r>
-            <a:r>
-              <a:rPr lang="en-US" sz="12800" dirty="0"/>
-              <a:t>, </a:t>
-            </a:r>
-            <a:r>
-              <a:rPr lang="en-US" sz="12800" dirty="0" err="1"/>
-              <a:t>tym</a:t>
-            </a:r>
-            <a:r>
-              <a:rPr lang="en-US" sz="12800" dirty="0"/>
-              <a:t> </a:t>
-            </a:r>
-            <a:r>
-              <a:rPr lang="en-US" sz="12800" b="1" dirty="0" err="1"/>
-              <a:t>mniej</a:t>
-            </a:r>
-            <a:r>
-              <a:rPr lang="en-US" sz="12800" b="1" dirty="0"/>
-              <a:t> </a:t>
-            </a:r>
-            <a:r>
-              <a:rPr lang="en-US" sz="12800" b="1" dirty="0" err="1"/>
-              <a:t>stabilnych</a:t>
-            </a:r>
-            <a:r>
-              <a:rPr lang="en-US" sz="12800" b="1" dirty="0"/>
-              <a:t> </a:t>
-            </a:r>
-            <a:r>
-              <a:rPr lang="en-US" sz="12800" b="1" dirty="0" err="1"/>
-              <a:t>regionów</a:t>
-            </a:r>
-            <a:r>
-              <a:rPr lang="en-US" sz="12800" b="1" dirty="0"/>
-              <a:t> </a:t>
-            </a:r>
-            <a:r>
-              <a:rPr lang="en-US" sz="12800" b="1" dirty="0" err="1"/>
-              <a:t>kulturowych</a:t>
-            </a:r>
-            <a:r>
-              <a:rPr lang="en-US" sz="12800" b="1" dirty="0"/>
-              <a:t> </a:t>
-            </a:r>
-            <a:r>
-              <a:rPr lang="en-US" sz="12800" dirty="0" err="1"/>
-              <a:t>pozostaje</a:t>
-            </a:r>
-            <a:r>
-              <a:rPr lang="en-US" sz="12800" dirty="0"/>
-              <a:t> </a:t>
-            </a:r>
-            <a:r>
-              <a:rPr lang="en-US" sz="12800" dirty="0" err="1"/>
-              <a:t>na</a:t>
-            </a:r>
-            <a:r>
-              <a:rPr lang="en-US" sz="12800" dirty="0"/>
-              <a:t> </a:t>
-            </a:r>
-            <a:r>
-              <a:rPr lang="en-US" sz="12800" dirty="0" err="1"/>
-              <a:t>końcu</a:t>
-            </a:r>
-            <a:r>
-              <a:rPr lang="en-US" sz="12800" dirty="0"/>
-              <a:t> (</a:t>
-            </a:r>
-            <a:r>
-              <a:rPr lang="en-US" sz="12800" dirty="0" err="1"/>
-              <a:t>sprzeczne</a:t>
-            </a:r>
-            <a:r>
-              <a:rPr lang="en-US" sz="12800" dirty="0"/>
-              <a:t> z </a:t>
-            </a:r>
-            <a:r>
-              <a:rPr lang="en-US" sz="12800" dirty="0" err="1"/>
-              <a:t>intuicją</a:t>
-            </a:r>
-            <a:r>
-              <a:rPr lang="en-US" sz="12800" dirty="0"/>
-              <a:t>). </a:t>
-            </a:r>
-            <a:r>
-              <a:rPr lang="en-US" sz="12800" dirty="0" err="1"/>
-              <a:t>Dzieje</a:t>
-            </a:r>
-            <a:r>
-              <a:rPr lang="en-US" sz="12800" dirty="0"/>
-              <a:t> </a:t>
-            </a:r>
-            <a:r>
-              <a:rPr lang="en-US" sz="12800" dirty="0" err="1"/>
-              <a:t>się</a:t>
-            </a:r>
-            <a:r>
-              <a:rPr lang="en-US" sz="12800" dirty="0"/>
-              <a:t> </a:t>
-            </a:r>
-            <a:r>
-              <a:rPr lang="en-US" sz="12800" dirty="0" err="1"/>
-              <a:t>tak</a:t>
-            </a:r>
-            <a:r>
-              <a:rPr lang="en-US" sz="12800" dirty="0"/>
-              <a:t>, </a:t>
-            </a:r>
-            <a:r>
-              <a:rPr lang="en-US" sz="12800" dirty="0" err="1"/>
-              <a:t>ponieważ</a:t>
-            </a:r>
-            <a:r>
-              <a:rPr lang="en-US" sz="12800" dirty="0"/>
-              <a:t> </a:t>
-            </a:r>
-            <a:r>
-              <a:rPr lang="en-US" sz="12800" dirty="0" err="1"/>
-              <a:t>większa</a:t>
-            </a:r>
-            <a:r>
-              <a:rPr lang="en-US" sz="12800" dirty="0"/>
-              <a:t> </a:t>
-            </a:r>
-            <a:r>
-              <a:rPr lang="en-US" sz="12800" dirty="0" err="1"/>
-              <a:t>liczba</a:t>
-            </a:r>
-            <a:r>
-              <a:rPr lang="en-US" sz="12800" dirty="0"/>
-              <a:t> </a:t>
-            </a:r>
-            <a:r>
-              <a:rPr lang="en-US" sz="12800" dirty="0" err="1"/>
-              <a:t>cech</a:t>
-            </a:r>
-            <a:r>
-              <a:rPr lang="en-US" sz="12800" dirty="0"/>
-              <a:t> </a:t>
-            </a:r>
-            <a:r>
-              <a:rPr lang="en-US" sz="12800" dirty="0" err="1"/>
-              <a:t>statystycznie</a:t>
-            </a:r>
-            <a:r>
-              <a:rPr lang="pl-PL" sz="12800" dirty="0"/>
-              <a:t> </a:t>
-            </a:r>
-            <a:r>
-              <a:rPr lang="en-US" sz="12800" dirty="0" err="1"/>
-              <a:t>zwiększa</a:t>
-            </a:r>
-            <a:r>
-              <a:rPr lang="en-US" sz="12800" dirty="0"/>
-              <a:t> </a:t>
-            </a:r>
-            <a:r>
-              <a:rPr lang="en-US" sz="12800" dirty="0" err="1"/>
-              <a:t>szansę</a:t>
-            </a:r>
-            <a:r>
-              <a:rPr lang="en-US" sz="12800" dirty="0"/>
-              <a:t> </a:t>
-            </a:r>
-            <a:r>
-              <a:rPr lang="en-US" sz="12800" dirty="0" err="1"/>
-              <a:t>posiadania</a:t>
-            </a:r>
-            <a:r>
-              <a:rPr lang="en-US" sz="12800" dirty="0"/>
-              <a:t> </a:t>
-            </a:r>
-            <a:r>
-              <a:rPr lang="en-US" sz="12800" dirty="0" err="1"/>
-              <a:t>jednego</a:t>
-            </a:r>
-            <a:r>
-              <a:rPr lang="en-US" sz="12800" dirty="0"/>
-              <a:t> </a:t>
-            </a:r>
-            <a:r>
-              <a:rPr lang="en-US" sz="12800" dirty="0" err="1"/>
-              <a:t>wspólnego</a:t>
-            </a:r>
-            <a:r>
-              <a:rPr lang="en-US" sz="12800" dirty="0"/>
-              <a:t> </a:t>
-            </a:r>
-            <a:r>
-              <a:rPr lang="en-US" sz="12800" dirty="0" err="1"/>
-              <a:t>elementu</a:t>
-            </a:r>
-            <a:r>
-              <a:rPr lang="en-US" sz="12800" dirty="0"/>
-              <a:t>, </a:t>
-            </a:r>
-            <a:r>
-              <a:rPr lang="en-US" sz="12800" dirty="0" err="1"/>
-              <a:t>czyli</a:t>
-            </a:r>
-            <a:r>
-              <a:rPr lang="en-US" sz="12800" dirty="0"/>
-              <a:t> </a:t>
-            </a:r>
-            <a:r>
-              <a:rPr lang="en-US" sz="12800" dirty="0" err="1"/>
-              <a:t>umożliwia</a:t>
-            </a:r>
-            <a:r>
-              <a:rPr lang="en-US" sz="12800" dirty="0"/>
-              <a:t> </a:t>
-            </a:r>
-            <a:r>
-              <a:rPr lang="en-US" sz="12800" dirty="0" err="1"/>
-              <a:t>interakcje</a:t>
-            </a:r>
-            <a:r>
-              <a:rPr lang="pl-PL" sz="12800" dirty="0"/>
-              <a:t> </a:t>
-            </a:r>
-            <a:r>
-              <a:rPr lang="en-US" sz="12800" dirty="0" err="1"/>
-              <a:t>i</a:t>
-            </a:r>
-            <a:r>
-              <a:rPr lang="en-US" sz="12800" dirty="0"/>
-              <a:t> </a:t>
-            </a:r>
-            <a:r>
-              <a:rPr lang="en-US" sz="12800" dirty="0" err="1"/>
-              <a:t>dalsze</a:t>
-            </a:r>
-            <a:r>
-              <a:rPr lang="en-US" sz="12800" dirty="0"/>
-              <a:t> </a:t>
-            </a:r>
-            <a:r>
-              <a:rPr lang="en-US" sz="12800" dirty="0" err="1"/>
-              <a:t>zwiększanie</a:t>
-            </a:r>
-            <a:r>
-              <a:rPr lang="en-US" sz="12800" dirty="0"/>
-              <a:t> </a:t>
-            </a:r>
-            <a:r>
-              <a:rPr lang="en-US" sz="12800" dirty="0" err="1"/>
-              <a:t>liczby</a:t>
-            </a:r>
-            <a:r>
-              <a:rPr lang="en-US" sz="12800" dirty="0"/>
-              <a:t> </a:t>
-            </a:r>
-            <a:r>
-              <a:rPr lang="en-US" sz="12800" dirty="0" err="1"/>
-              <a:t>wspólnych</a:t>
-            </a:r>
-            <a:r>
-              <a:rPr lang="en-US" sz="12800" dirty="0"/>
-              <a:t> </a:t>
-            </a:r>
-            <a:r>
-              <a:rPr lang="en-US" sz="12800" dirty="0" err="1"/>
-              <a:t>cech</a:t>
-            </a:r>
-            <a:r>
-              <a:rPr lang="en-US" sz="12800" dirty="0"/>
-              <a:t>.</a:t>
-            </a:r>
-          </a:p>
-          <a:p>
-            <a:pPr marL="0" indent="0">
-              <a:buNone/>
-            </a:pPr>
-            <a:br>
-              <a:rPr lang="en-US" dirty="0"/>
-            </a:br>
-            <a:endParaRPr lang="en-US" dirty="0"/>
-          </a:p>
-          <a:p>
-            <a:endParaRPr lang="en-US" dirty="0"/>
-          </a:p>
-        </p:txBody>
-      </p:sp>
-    </p:spTree>
-    <p:extLst>
-      <p:ext uri="{BB962C8B-B14F-4D97-AF65-F5344CB8AC3E}">
-        <p14:creationId xmlns:p14="http://schemas.microsoft.com/office/powerpoint/2010/main" val="3429367521"/>
       </p:ext>
     </p:extLst>
   </p:cSld>
@@ -5112,6 +6608,638 @@
     <p:extLst>
       <p:ext uri="{BB962C8B-B14F-4D97-AF65-F5344CB8AC3E}">
         <p14:creationId xmlns:p14="http://schemas.microsoft.com/office/powerpoint/2010/main" val="830098270"/>
+      </p:ext>
+    </p:extLst>
+  </p:cSld>
+  <p:clrMapOvr>
+    <a:masterClrMapping/>
+  </p:clrMapOvr>
+</p:sld>
+</file>
+
+<file path=ppt/slides/slide20.xml><?xml version="1.0" encoding="utf-8"?>
+<p:sld xmlns:a="http://schemas.openxmlformats.org/drawingml/2006/main" xmlns:r="http://schemas.openxmlformats.org/officeDocument/2006/relationships" xmlns:p="http://schemas.openxmlformats.org/presentationml/2006/main">
+  <p:cSld>
+    <p:spTree>
+      <p:nvGrpSpPr>
+        <p:cNvPr id="1" name=""/>
+        <p:cNvGrpSpPr/>
+        <p:nvPr/>
+      </p:nvGrpSpPr>
+      <p:grpSpPr>
+        <a:xfrm>
+          <a:off x="0" y="0"/>
+          <a:ext cx="0" cy="0"/>
+          <a:chOff x="0" y="0"/>
+          <a:chExt cx="0" cy="0"/>
+        </a:xfrm>
+      </p:grpSpPr>
+      <p:sp>
+        <p:nvSpPr>
+          <p:cNvPr id="2" name="Tytuł 1">
+            <a:extLst>
+              <a:ext uri="{FF2B5EF4-FFF2-40B4-BE49-F238E27FC236}">
+                <a16:creationId xmlns:a16="http://schemas.microsoft.com/office/drawing/2014/main" id="{CB6157CB-37E3-1BAD-1464-BA515DC4B543}"/>
+              </a:ext>
+            </a:extLst>
+          </p:cNvPr>
+          <p:cNvSpPr>
+            <a:spLocks noGrp="1"/>
+          </p:cNvSpPr>
+          <p:nvPr>
+            <p:ph type="title"/>
+          </p:nvPr>
+        </p:nvSpPr>
+        <p:spPr/>
+        <p:txBody>
+          <a:bodyPr/>
+          <a:lstStyle/>
+          <a:p>
+            <a:r>
+              <a:rPr lang="pl-PL" dirty="0"/>
+              <a:t>Wnioski końcowe</a:t>
+            </a:r>
+            <a:endParaRPr lang="en-US" dirty="0"/>
+          </a:p>
+        </p:txBody>
+      </p:sp>
+      <p:sp>
+        <p:nvSpPr>
+          <p:cNvPr id="3" name="Symbol zastępczy zawartości 2">
+            <a:extLst>
+              <a:ext uri="{FF2B5EF4-FFF2-40B4-BE49-F238E27FC236}">
+                <a16:creationId xmlns:a16="http://schemas.microsoft.com/office/drawing/2014/main" id="{DE8976C9-4BCF-B715-7CBA-4FBC45D36595}"/>
+              </a:ext>
+            </a:extLst>
+          </p:cNvPr>
+          <p:cNvSpPr>
+            <a:spLocks noGrp="1"/>
+          </p:cNvSpPr>
+          <p:nvPr>
+            <p:ph idx="1"/>
+          </p:nvPr>
+        </p:nvSpPr>
+        <p:spPr>
+          <a:xfrm>
+            <a:off x="659219" y="1499191"/>
+            <a:ext cx="11206716" cy="5071730"/>
+          </a:xfrm>
+        </p:spPr>
+        <p:txBody>
+          <a:bodyPr>
+            <a:normAutofit fontScale="25000" lnSpcReduction="20000"/>
+          </a:bodyPr>
+          <a:lstStyle/>
+          <a:p>
+            <a:r>
+              <a:rPr lang="en-US" sz="12800" dirty="0" err="1"/>
+              <a:t>Najważniejszy</a:t>
+            </a:r>
+            <a:r>
+              <a:rPr lang="en-US" sz="12800" dirty="0"/>
+              <a:t> </a:t>
+            </a:r>
+            <a:r>
+              <a:rPr lang="en-US" sz="12800" dirty="0" err="1"/>
+              <a:t>wniosek</a:t>
+            </a:r>
+            <a:r>
+              <a:rPr lang="en-US" sz="12800" dirty="0"/>
+              <a:t> </a:t>
+            </a:r>
+            <a:r>
+              <a:rPr lang="en-US" sz="12800" dirty="0" err="1"/>
+              <a:t>płynący</a:t>
+            </a:r>
+            <a:r>
+              <a:rPr lang="en-US" sz="12800" dirty="0"/>
+              <a:t> z </a:t>
+            </a:r>
+            <a:r>
+              <a:rPr lang="en-US" sz="12800" dirty="0" err="1"/>
+              <a:t>badań</a:t>
+            </a:r>
+            <a:r>
+              <a:rPr lang="en-US" sz="12800" dirty="0"/>
+              <a:t> </a:t>
+            </a:r>
+            <a:r>
+              <a:rPr lang="en-US" sz="12800" dirty="0" err="1"/>
+              <a:t>Axelroda</a:t>
+            </a:r>
+            <a:r>
+              <a:rPr lang="en-US" sz="12800" dirty="0"/>
+              <a:t> </a:t>
+            </a:r>
+            <a:r>
+              <a:rPr lang="en-US" sz="12800" dirty="0" err="1"/>
+              <a:t>wskazuje</a:t>
+            </a:r>
+            <a:r>
+              <a:rPr lang="en-US" sz="12800" dirty="0"/>
+              <a:t>, </a:t>
+            </a:r>
+            <a:r>
+              <a:rPr lang="en-US" sz="12800" dirty="0" err="1"/>
+              <a:t>że</a:t>
+            </a:r>
+            <a:r>
+              <a:rPr lang="en-US" sz="12800" dirty="0"/>
+              <a:t> </a:t>
+            </a:r>
+            <a:r>
+              <a:rPr lang="en-US" sz="12800" b="1" dirty="0" err="1"/>
+              <a:t>dążenie</a:t>
+            </a:r>
+            <a:r>
+              <a:rPr lang="en-US" sz="12800" b="1" dirty="0"/>
+              <a:t> do </a:t>
+            </a:r>
+            <a:r>
+              <a:rPr lang="en-US" sz="12800" b="1" dirty="0" err="1"/>
+              <a:t>lokalnego</a:t>
+            </a:r>
+            <a:r>
+              <a:rPr lang="en-US" sz="12800" b="1" dirty="0"/>
+              <a:t> </a:t>
+            </a:r>
+            <a:r>
+              <a:rPr lang="en-US" sz="12800" b="1" dirty="0" err="1"/>
+              <a:t>podobieństwa</a:t>
+            </a:r>
+            <a:r>
+              <a:rPr lang="pl-PL" sz="12800" b="1" dirty="0"/>
+              <a:t> </a:t>
+            </a:r>
+            <a:r>
+              <a:rPr lang="en-US" sz="12800" dirty="0" err="1"/>
+              <a:t>paradoksalnie</a:t>
+            </a:r>
+            <a:r>
+              <a:rPr lang="en-US" sz="12800" dirty="0"/>
+              <a:t> </a:t>
+            </a:r>
+            <a:r>
+              <a:rPr lang="en-US" sz="12800" b="1" dirty="0" err="1"/>
+              <a:t>uniemożliwia</a:t>
+            </a:r>
+            <a:r>
+              <a:rPr lang="en-US" sz="12800" b="1" dirty="0"/>
+              <a:t> </a:t>
+            </a:r>
+            <a:r>
+              <a:rPr lang="en-US" sz="12800" b="1" dirty="0" err="1"/>
+              <a:t>całkowite</a:t>
+            </a:r>
+            <a:r>
+              <a:rPr lang="en-US" sz="12800" b="1" dirty="0"/>
+              <a:t> </a:t>
+            </a:r>
+            <a:r>
+              <a:rPr lang="en-US" sz="12800" b="1" dirty="0" err="1"/>
+              <a:t>ujednolicenie</a:t>
+            </a:r>
+            <a:r>
+              <a:rPr lang="en-US" sz="12800" b="1" dirty="0"/>
+              <a:t> </a:t>
+            </a:r>
+            <a:r>
+              <a:rPr lang="en-US" sz="12800" b="1" dirty="0" err="1"/>
+              <a:t>całego</a:t>
+            </a:r>
+            <a:r>
+              <a:rPr lang="en-US" sz="12800" b="1" dirty="0"/>
+              <a:t> </a:t>
+            </a:r>
+            <a:r>
+              <a:rPr lang="en-US" sz="12800" b="1" dirty="0" err="1"/>
+              <a:t>społeczeństwa</a:t>
+            </a:r>
+            <a:r>
+              <a:rPr lang="en-US" sz="12800" b="1" dirty="0"/>
+              <a:t> </a:t>
+            </a:r>
+            <a:r>
+              <a:rPr lang="en-US" sz="12800" dirty="0" err="1"/>
+              <a:t>i</a:t>
+            </a:r>
+            <a:r>
+              <a:rPr lang="en-US" sz="12800" dirty="0"/>
+              <a:t> </a:t>
+            </a:r>
+            <a:r>
+              <a:rPr lang="en-US" sz="12800" dirty="0" err="1"/>
+              <a:t>cementuje</a:t>
+            </a:r>
+            <a:r>
+              <a:rPr lang="en-US" sz="12800" dirty="0"/>
+              <a:t>  </a:t>
+            </a:r>
+            <a:r>
+              <a:rPr lang="en-US" sz="12800" dirty="0" err="1"/>
+              <a:t>trwałe</a:t>
+            </a:r>
+            <a:r>
+              <a:rPr lang="en-US" sz="12800" dirty="0"/>
+              <a:t> </a:t>
+            </a:r>
+            <a:r>
+              <a:rPr lang="en-US" sz="12800" dirty="0" err="1"/>
+              <a:t>podziały</a:t>
+            </a:r>
+            <a:r>
+              <a:rPr lang="en-US" sz="12800" dirty="0"/>
+              <a:t> </a:t>
+            </a:r>
+            <a:r>
+              <a:rPr lang="en-US" sz="12800" dirty="0" err="1"/>
+              <a:t>kulturowe</a:t>
+            </a:r>
+            <a:r>
+              <a:rPr lang="en-US" sz="12800" dirty="0"/>
+              <a:t> </a:t>
+            </a:r>
+            <a:r>
+              <a:rPr lang="en-US" sz="12800" dirty="0" err="1"/>
+              <a:t>na</a:t>
+            </a:r>
+            <a:r>
+              <a:rPr lang="en-US" sz="12800" dirty="0"/>
+              <a:t> </a:t>
+            </a:r>
+            <a:r>
+              <a:rPr lang="en-US" sz="12800" dirty="0" err="1"/>
+              <a:t>poziomie</a:t>
+            </a:r>
+            <a:r>
+              <a:rPr lang="en-US" sz="12800" dirty="0"/>
+              <a:t> </a:t>
+            </a:r>
+            <a:r>
+              <a:rPr lang="en-US" sz="12800" dirty="0" err="1"/>
+              <a:t>globalnym</a:t>
+            </a:r>
+            <a:r>
+              <a:rPr lang="en-US" sz="12800" dirty="0"/>
+              <a:t> (</a:t>
+            </a:r>
+            <a:r>
+              <a:rPr lang="en-US" sz="12800" dirty="0" err="1"/>
+              <a:t>wyspy</a:t>
+            </a:r>
+            <a:r>
+              <a:rPr lang="en-US" sz="12800" dirty="0"/>
+              <a:t> </a:t>
+            </a:r>
+            <a:r>
+              <a:rPr lang="en-US" sz="12800" dirty="0" err="1"/>
+              <a:t>wspólne</a:t>
+            </a:r>
+            <a:r>
+              <a:rPr lang="en-US" sz="12800" dirty="0"/>
+              <a:t> </a:t>
+            </a:r>
+            <a:r>
+              <a:rPr lang="en-US" sz="12800" dirty="0" err="1"/>
+              <a:t>kulturowo</a:t>
+            </a:r>
+            <a:r>
+              <a:rPr lang="en-US" sz="12800" dirty="0"/>
+              <a:t>).</a:t>
+            </a:r>
+            <a:br>
+              <a:rPr lang="en-US" sz="12800" dirty="0"/>
+            </a:br>
+            <a:endParaRPr lang="en-US" sz="12800" dirty="0"/>
+          </a:p>
+          <a:p>
+            <a:r>
+              <a:rPr lang="en-US" sz="12800" dirty="0"/>
+              <a:t>    </a:t>
+            </a:r>
+            <a:r>
+              <a:rPr lang="en-US" sz="12800" dirty="0" err="1"/>
+              <a:t>Im</a:t>
+            </a:r>
+            <a:r>
+              <a:rPr lang="en-US" sz="12800" dirty="0"/>
+              <a:t> </a:t>
+            </a:r>
+            <a:r>
+              <a:rPr lang="en-US" sz="12800" b="1" dirty="0" err="1"/>
+              <a:t>więcej</a:t>
+            </a:r>
+            <a:r>
+              <a:rPr lang="en-US" sz="12800" b="1" dirty="0"/>
+              <a:t> </a:t>
+            </a:r>
+            <a:r>
+              <a:rPr lang="en-US" sz="12800" b="1" dirty="0" err="1"/>
+              <a:t>cech</a:t>
+            </a:r>
+            <a:r>
+              <a:rPr lang="en-US" sz="12800" b="1" dirty="0"/>
+              <a:t> </a:t>
+            </a:r>
+            <a:r>
+              <a:rPr lang="en-US" sz="12800" dirty="0" err="1"/>
+              <a:t>opisuje</a:t>
+            </a:r>
+            <a:r>
+              <a:rPr lang="en-US" sz="12800" dirty="0"/>
+              <a:t> </a:t>
+            </a:r>
+            <a:r>
+              <a:rPr lang="en-US" sz="12800" dirty="0" err="1"/>
+              <a:t>kulturę</a:t>
+            </a:r>
+            <a:r>
+              <a:rPr lang="en-US" sz="12800" dirty="0"/>
+              <a:t>, </a:t>
+            </a:r>
+            <a:r>
+              <a:rPr lang="en-US" sz="12800" dirty="0" err="1"/>
+              <a:t>tym</a:t>
+            </a:r>
+            <a:r>
+              <a:rPr lang="en-US" sz="12800" dirty="0"/>
+              <a:t> </a:t>
+            </a:r>
+            <a:r>
+              <a:rPr lang="en-US" sz="12800" b="1" dirty="0" err="1"/>
+              <a:t>mniej</a:t>
+            </a:r>
+            <a:r>
+              <a:rPr lang="en-US" sz="12800" b="1" dirty="0"/>
+              <a:t> </a:t>
+            </a:r>
+            <a:r>
+              <a:rPr lang="en-US" sz="12800" b="1" dirty="0" err="1"/>
+              <a:t>stabilnych</a:t>
+            </a:r>
+            <a:r>
+              <a:rPr lang="en-US" sz="12800" b="1" dirty="0"/>
+              <a:t> </a:t>
+            </a:r>
+            <a:r>
+              <a:rPr lang="en-US" sz="12800" b="1" dirty="0" err="1"/>
+              <a:t>regionów</a:t>
+            </a:r>
+            <a:r>
+              <a:rPr lang="en-US" sz="12800" b="1" dirty="0"/>
+              <a:t> </a:t>
+            </a:r>
+            <a:r>
+              <a:rPr lang="en-US" sz="12800" b="1" dirty="0" err="1"/>
+              <a:t>kulturowych</a:t>
+            </a:r>
+            <a:r>
+              <a:rPr lang="en-US" sz="12800" b="1" dirty="0"/>
+              <a:t> </a:t>
+            </a:r>
+            <a:r>
+              <a:rPr lang="en-US" sz="12800" dirty="0" err="1"/>
+              <a:t>pozostaje</a:t>
+            </a:r>
+            <a:r>
+              <a:rPr lang="en-US" sz="12800" dirty="0"/>
+              <a:t> </a:t>
+            </a:r>
+            <a:r>
+              <a:rPr lang="en-US" sz="12800" dirty="0" err="1"/>
+              <a:t>na</a:t>
+            </a:r>
+            <a:r>
+              <a:rPr lang="en-US" sz="12800" dirty="0"/>
+              <a:t> </a:t>
+            </a:r>
+            <a:r>
+              <a:rPr lang="en-US" sz="12800" dirty="0" err="1"/>
+              <a:t>końcu</a:t>
+            </a:r>
+            <a:r>
+              <a:rPr lang="en-US" sz="12800" dirty="0"/>
+              <a:t> (</a:t>
+            </a:r>
+            <a:r>
+              <a:rPr lang="en-US" sz="12800" dirty="0" err="1"/>
+              <a:t>sprzeczne</a:t>
+            </a:r>
+            <a:r>
+              <a:rPr lang="en-US" sz="12800" dirty="0"/>
+              <a:t> z </a:t>
+            </a:r>
+            <a:r>
+              <a:rPr lang="en-US" sz="12800" dirty="0" err="1"/>
+              <a:t>intuicją</a:t>
+            </a:r>
+            <a:r>
+              <a:rPr lang="en-US" sz="12800" dirty="0"/>
+              <a:t>). </a:t>
+            </a:r>
+            <a:r>
+              <a:rPr lang="en-US" sz="12800" dirty="0" err="1"/>
+              <a:t>Dzieje</a:t>
+            </a:r>
+            <a:r>
+              <a:rPr lang="en-US" sz="12800" dirty="0"/>
+              <a:t> </a:t>
+            </a:r>
+            <a:r>
+              <a:rPr lang="en-US" sz="12800" dirty="0" err="1"/>
+              <a:t>się</a:t>
+            </a:r>
+            <a:r>
+              <a:rPr lang="en-US" sz="12800" dirty="0"/>
+              <a:t> </a:t>
+            </a:r>
+            <a:r>
+              <a:rPr lang="en-US" sz="12800" dirty="0" err="1"/>
+              <a:t>tak</a:t>
+            </a:r>
+            <a:r>
+              <a:rPr lang="en-US" sz="12800" dirty="0"/>
+              <a:t>, </a:t>
+            </a:r>
+            <a:r>
+              <a:rPr lang="en-US" sz="12800" dirty="0" err="1"/>
+              <a:t>ponieważ</a:t>
+            </a:r>
+            <a:r>
+              <a:rPr lang="en-US" sz="12800" dirty="0"/>
+              <a:t> </a:t>
+            </a:r>
+            <a:r>
+              <a:rPr lang="en-US" sz="12800" dirty="0" err="1"/>
+              <a:t>większa</a:t>
+            </a:r>
+            <a:r>
+              <a:rPr lang="en-US" sz="12800" dirty="0"/>
+              <a:t> </a:t>
+            </a:r>
+            <a:r>
+              <a:rPr lang="en-US" sz="12800" dirty="0" err="1"/>
+              <a:t>liczba</a:t>
+            </a:r>
+            <a:r>
+              <a:rPr lang="en-US" sz="12800" dirty="0"/>
+              <a:t> </a:t>
+            </a:r>
+            <a:r>
+              <a:rPr lang="en-US" sz="12800" dirty="0" err="1"/>
+              <a:t>cech</a:t>
+            </a:r>
+            <a:r>
+              <a:rPr lang="en-US" sz="12800" dirty="0"/>
+              <a:t> </a:t>
+            </a:r>
+            <a:r>
+              <a:rPr lang="en-US" sz="12800" dirty="0" err="1"/>
+              <a:t>statystycznie</a:t>
+            </a:r>
+            <a:r>
+              <a:rPr lang="pl-PL" sz="12800" dirty="0"/>
+              <a:t> </a:t>
+            </a:r>
+            <a:r>
+              <a:rPr lang="en-US" sz="12800" dirty="0" err="1"/>
+              <a:t>zwiększa</a:t>
+            </a:r>
+            <a:r>
+              <a:rPr lang="en-US" sz="12800" dirty="0"/>
+              <a:t> </a:t>
+            </a:r>
+            <a:r>
+              <a:rPr lang="en-US" sz="12800" dirty="0" err="1"/>
+              <a:t>szansę</a:t>
+            </a:r>
+            <a:r>
+              <a:rPr lang="en-US" sz="12800" dirty="0"/>
+              <a:t> </a:t>
+            </a:r>
+            <a:r>
+              <a:rPr lang="en-US" sz="12800" dirty="0" err="1"/>
+              <a:t>posiadania</a:t>
+            </a:r>
+            <a:r>
+              <a:rPr lang="en-US" sz="12800" dirty="0"/>
+              <a:t> </a:t>
+            </a:r>
+            <a:r>
+              <a:rPr lang="en-US" sz="12800" dirty="0" err="1"/>
+              <a:t>jednego</a:t>
+            </a:r>
+            <a:r>
+              <a:rPr lang="en-US" sz="12800" dirty="0"/>
+              <a:t> </a:t>
+            </a:r>
+            <a:r>
+              <a:rPr lang="en-US" sz="12800" dirty="0" err="1"/>
+              <a:t>wspólnego</a:t>
+            </a:r>
+            <a:r>
+              <a:rPr lang="en-US" sz="12800" dirty="0"/>
+              <a:t> </a:t>
+            </a:r>
+            <a:r>
+              <a:rPr lang="en-US" sz="12800" dirty="0" err="1"/>
+              <a:t>elementu</a:t>
+            </a:r>
+            <a:r>
+              <a:rPr lang="en-US" sz="12800" dirty="0"/>
+              <a:t>, </a:t>
+            </a:r>
+            <a:r>
+              <a:rPr lang="en-US" sz="12800" dirty="0" err="1"/>
+              <a:t>czyli</a:t>
+            </a:r>
+            <a:r>
+              <a:rPr lang="en-US" sz="12800" dirty="0"/>
+              <a:t> </a:t>
+            </a:r>
+            <a:r>
+              <a:rPr lang="en-US" sz="12800" dirty="0" err="1"/>
+              <a:t>umożliwia</a:t>
+            </a:r>
+            <a:r>
+              <a:rPr lang="en-US" sz="12800" dirty="0"/>
+              <a:t> </a:t>
+            </a:r>
+            <a:r>
+              <a:rPr lang="en-US" sz="12800" dirty="0" err="1"/>
+              <a:t>interakcje</a:t>
+            </a:r>
+            <a:r>
+              <a:rPr lang="pl-PL" sz="12800" dirty="0"/>
+              <a:t> </a:t>
+            </a:r>
+            <a:r>
+              <a:rPr lang="en-US" sz="12800" dirty="0" err="1"/>
+              <a:t>i</a:t>
+            </a:r>
+            <a:r>
+              <a:rPr lang="en-US" sz="12800" dirty="0"/>
+              <a:t> </a:t>
+            </a:r>
+            <a:r>
+              <a:rPr lang="en-US" sz="12800" dirty="0" err="1"/>
+              <a:t>dalsze</a:t>
+            </a:r>
+            <a:r>
+              <a:rPr lang="en-US" sz="12800" dirty="0"/>
+              <a:t> </a:t>
+            </a:r>
+            <a:r>
+              <a:rPr lang="en-US" sz="12800" dirty="0" err="1"/>
+              <a:t>zwiększanie</a:t>
+            </a:r>
+            <a:r>
+              <a:rPr lang="en-US" sz="12800" dirty="0"/>
+              <a:t> </a:t>
+            </a:r>
+            <a:r>
+              <a:rPr lang="en-US" sz="12800" dirty="0" err="1"/>
+              <a:t>liczby</a:t>
+            </a:r>
+            <a:r>
+              <a:rPr lang="en-US" sz="12800" dirty="0"/>
+              <a:t> </a:t>
+            </a:r>
+            <a:r>
+              <a:rPr lang="en-US" sz="12800" dirty="0" err="1"/>
+              <a:t>wspólnych</a:t>
+            </a:r>
+            <a:r>
+              <a:rPr lang="en-US" sz="12800" dirty="0"/>
+              <a:t> </a:t>
+            </a:r>
+            <a:r>
+              <a:rPr lang="en-US" sz="12800" dirty="0" err="1"/>
+              <a:t>cech</a:t>
+            </a:r>
+            <a:r>
+              <a:rPr lang="en-US" sz="12800" dirty="0"/>
+              <a:t>.</a:t>
+            </a:r>
+          </a:p>
+          <a:p>
+            <a:pPr marL="0" indent="0">
+              <a:buNone/>
+            </a:pPr>
+            <a:br>
+              <a:rPr lang="en-US" dirty="0"/>
+            </a:br>
+            <a:endParaRPr lang="en-US" dirty="0"/>
+          </a:p>
+          <a:p>
+            <a:endParaRPr lang="en-US" dirty="0"/>
+          </a:p>
+        </p:txBody>
+      </p:sp>
+    </p:spTree>
+    <p:extLst>
+      <p:ext uri="{BB962C8B-B14F-4D97-AF65-F5344CB8AC3E}">
+        <p14:creationId xmlns:p14="http://schemas.microsoft.com/office/powerpoint/2010/main" val="3429367521"/>
       </p:ext>
     </p:extLst>
   </p:cSld>
@@ -5603,7 +7731,7 @@
           <p:cNvPr id="2" name="Tytuł 1">
             <a:extLst>
               <a:ext uri="{FF2B5EF4-FFF2-40B4-BE49-F238E27FC236}">
-                <a16:creationId xmlns:a16="http://schemas.microsoft.com/office/drawing/2014/main" id="{B66288A7-C2FF-EEAF-913F-879F9A76983E}"/>
+                <a16:creationId xmlns:a16="http://schemas.microsoft.com/office/drawing/2014/main" id="{0FDF515C-BEA0-6167-A109-FEB7722E22A1}"/>
               </a:ext>
             </a:extLst>
           </p:cNvPr>
@@ -5620,18 +7748,9 @@
           <a:lstStyle/>
           <a:p>
             <a:r>
-              <a:rPr lang="en-US" dirty="0" err="1"/>
-              <a:t>Przebieg</a:t>
-            </a:r>
-            <a:r>
-              <a:rPr lang="en-US" dirty="0"/>
-              <a:t> </a:t>
-            </a:r>
-            <a:r>
-              <a:rPr lang="en-US" dirty="0" err="1"/>
-              <a:t>symulacji</a:t>
-            </a:r>
-            <a:endParaRPr lang="en-US" dirty="0"/>
+              <a:rPr lang="pl-PL" dirty="0"/>
+              <a:t>Agenci </a:t>
+            </a:r>
           </a:p>
         </p:txBody>
       </p:sp>
@@ -5640,7 +7759,7 @@
           <p:cNvPr id="3" name="Symbol zastępczy zawartości 2">
             <a:extLst>
               <a:ext uri="{FF2B5EF4-FFF2-40B4-BE49-F238E27FC236}">
-                <a16:creationId xmlns:a16="http://schemas.microsoft.com/office/drawing/2014/main" id="{0F17B2F8-4EF7-6C2B-E34A-76E8DFB21229}"/>
+                <a16:creationId xmlns:a16="http://schemas.microsoft.com/office/drawing/2014/main" id="{46C43EA2-9663-4D23-85AF-79F10E830E41}"/>
               </a:ext>
             </a:extLst>
           </p:cNvPr>
@@ -5653,623 +7772,169 @@
         </p:nvSpPr>
         <p:spPr/>
         <p:txBody>
-          <a:bodyPr>
-            <a:normAutofit fontScale="92500" lnSpcReduction="10000"/>
+          <a:bodyPr/>
+          <a:lstStyle/>
+          <a:p>
+            <a:r>
+              <a:rPr lang="pl-PL" dirty="0"/>
+              <a:t>Zbiór cech o określonej długości, które mogą przyjmować różne wartości. </a:t>
+            </a:r>
+          </a:p>
+          <a:p>
+            <a:pPr marL="0" indent="0">
+              <a:buNone/>
+            </a:pPr>
+            <a:r>
+              <a:rPr lang="pl-PL" dirty="0"/>
+              <a:t>Np. [1, 0, 5, 7]</a:t>
+            </a:r>
+          </a:p>
+          <a:p>
+            <a:pPr marL="0" indent="0">
+              <a:buNone/>
+            </a:pPr>
+            <a:endParaRPr lang="pl-PL" dirty="0"/>
+          </a:p>
+          <a:p>
+            <a:pPr marL="0" indent="0">
+              <a:buNone/>
+            </a:pPr>
+            <a:r>
+              <a:rPr lang="pl-PL" dirty="0"/>
+              <a:t>Kiedy agenci są podobni?</a:t>
+            </a:r>
+          </a:p>
+          <a:p>
+            <a:pPr marL="0" indent="0">
+              <a:buNone/>
+            </a:pPr>
+            <a:r>
+              <a:rPr lang="pl-PL" dirty="0"/>
+              <a:t>[</a:t>
+            </a:r>
+            <a:r>
+              <a:rPr lang="pl-PL" dirty="0">
+                <a:solidFill>
+                  <a:srgbClr val="00B0F0"/>
+                </a:solidFill>
+              </a:rPr>
+              <a:t>1</a:t>
+            </a:r>
+            <a:r>
+              <a:rPr lang="pl-PL" dirty="0"/>
+              <a:t>, 0, 5, 7]</a:t>
+            </a:r>
+          </a:p>
+          <a:p>
+            <a:pPr marL="0" indent="0">
+              <a:buNone/>
+            </a:pPr>
+            <a:r>
+              <a:rPr lang="pl-PL" dirty="0"/>
+              <a:t>[</a:t>
+            </a:r>
+            <a:r>
+              <a:rPr lang="pl-PL" dirty="0">
+                <a:solidFill>
+                  <a:srgbClr val="00B0F0"/>
+                </a:solidFill>
+              </a:rPr>
+              <a:t>1</a:t>
+            </a:r>
+            <a:r>
+              <a:rPr lang="pl-PL" dirty="0"/>
+              <a:t>, 3, 4, 6]			</a:t>
+            </a:r>
+          </a:p>
+          <a:p>
+            <a:pPr marL="0" indent="0">
+              <a:buNone/>
+            </a:pPr>
+            <a:r>
+              <a:rPr lang="pl-PL" dirty="0"/>
+              <a:t>				</a:t>
+            </a:r>
+          </a:p>
+        </p:txBody>
+      </p:sp>
+      <p:cxnSp>
+        <p:nvCxnSpPr>
+          <p:cNvPr id="5" name="Łącznik prosty ze strzałką 4">
+            <a:extLst>
+              <a:ext uri="{FF2B5EF4-FFF2-40B4-BE49-F238E27FC236}">
+                <a16:creationId xmlns:a16="http://schemas.microsoft.com/office/drawing/2014/main" id="{A8262240-8185-DEDB-F5E4-112D01256BC1}"/>
+              </a:ext>
+            </a:extLst>
+          </p:cNvPr>
+          <p:cNvCxnSpPr/>
+          <p:nvPr/>
+        </p:nvCxnSpPr>
+        <p:spPr>
+          <a:xfrm>
+            <a:off x="2517058" y="4709652"/>
+            <a:ext cx="1396181" cy="0"/>
+          </a:xfrm>
+          <a:prstGeom prst="straightConnector1">
+            <a:avLst/>
+          </a:prstGeom>
+          <a:ln>
+            <a:tailEnd type="triangle"/>
+          </a:ln>
+        </p:spPr>
+        <p:style>
+          <a:lnRef idx="2">
+            <a:schemeClr val="accent1"/>
+          </a:lnRef>
+          <a:fillRef idx="0">
+            <a:schemeClr val="accent1"/>
+          </a:fillRef>
+          <a:effectRef idx="1">
+            <a:schemeClr val="accent1"/>
+          </a:effectRef>
+          <a:fontRef idx="minor">
+            <a:schemeClr val="tx1"/>
+          </a:fontRef>
+        </p:style>
+      </p:cxnSp>
+      <p:sp>
+        <p:nvSpPr>
+          <p:cNvPr id="8" name="pole tekstowe 7">
+            <a:extLst>
+              <a:ext uri="{FF2B5EF4-FFF2-40B4-BE49-F238E27FC236}">
+                <a16:creationId xmlns:a16="http://schemas.microsoft.com/office/drawing/2014/main" id="{0EB9B950-B1B8-9E58-8752-63BA81109B26}"/>
+              </a:ext>
+            </a:extLst>
+          </p:cNvPr>
+          <p:cNvSpPr txBox="1"/>
+          <p:nvPr/>
+        </p:nvSpPr>
+        <p:spPr>
+          <a:xfrm>
+            <a:off x="4090218" y="4478812"/>
+            <a:ext cx="7187381" cy="523220"/>
+          </a:xfrm>
+          <a:prstGeom prst="rect">
+            <a:avLst/>
+          </a:prstGeom>
+          <a:noFill/>
+        </p:spPr>
+        <p:txBody>
+          <a:bodyPr wrap="square" rtlCol="0">
+            <a:spAutoFit/>
           </a:bodyPr>
           <a:lstStyle/>
           <a:p>
-            <a:pPr marL="514350" indent="-514350">
-              <a:buFont typeface="+mj-lt"/>
-              <a:buAutoNum type="arabicPeriod"/>
-            </a:pPr>
-            <a:r>
-              <a:rPr lang="en-US" dirty="0"/>
-              <a:t>Na </a:t>
-            </a:r>
-            <a:r>
-              <a:rPr lang="en-US" dirty="0" err="1"/>
-              <a:t>początku</a:t>
-            </a:r>
-            <a:r>
-              <a:rPr lang="en-US" dirty="0"/>
-              <a:t> </a:t>
-            </a:r>
-            <a:r>
-              <a:rPr lang="en-US" dirty="0" err="1"/>
-              <a:t>agenci</a:t>
-            </a:r>
-            <a:r>
-              <a:rPr lang="en-US" dirty="0"/>
-              <a:t> </a:t>
-            </a:r>
-            <a:r>
-              <a:rPr lang="en-US" dirty="0" err="1"/>
-              <a:t>mają</a:t>
-            </a:r>
-            <a:r>
-              <a:rPr lang="en-US" dirty="0"/>
-              <a:t> </a:t>
-            </a:r>
-            <a:r>
-              <a:rPr lang="en-US" dirty="0" err="1"/>
-              <a:t>losowo</a:t>
-            </a:r>
-            <a:r>
-              <a:rPr lang="en-US" dirty="0"/>
-              <a:t> </a:t>
-            </a:r>
-            <a:r>
-              <a:rPr lang="en-US" dirty="0" err="1"/>
-              <a:t>przypisane</a:t>
-            </a:r>
-            <a:r>
-              <a:rPr lang="en-US" dirty="0"/>
-              <a:t> </a:t>
-            </a:r>
-            <a:r>
-              <a:rPr lang="en-US" dirty="0" err="1"/>
-              <a:t>warianty</a:t>
-            </a:r>
-            <a:r>
-              <a:rPr lang="en-US" dirty="0"/>
-              <a:t> </a:t>
-            </a:r>
-            <a:r>
-              <a:rPr lang="en-US" dirty="0" err="1"/>
-              <a:t>kulturowe</a:t>
-            </a:r>
-            <a:r>
-              <a:rPr lang="en-US" dirty="0"/>
-              <a:t>. </a:t>
-            </a:r>
-            <a:r>
-              <a:rPr lang="en-US" dirty="0" err="1"/>
-              <a:t>Większość</a:t>
-            </a:r>
-            <a:r>
-              <a:rPr lang="en-US" dirty="0"/>
-              <a:t> </a:t>
-            </a:r>
-            <a:r>
-              <a:rPr lang="en-US" dirty="0" err="1"/>
-              <a:t>sąsiadów</a:t>
-            </a:r>
-            <a:r>
-              <a:rPr lang="en-US" dirty="0"/>
-              <a:t> ma ze </a:t>
-            </a:r>
-            <a:r>
-              <a:rPr lang="en-US" dirty="0" err="1"/>
-              <a:t>sobą</a:t>
-            </a:r>
-            <a:r>
-              <a:rPr lang="en-US" dirty="0"/>
-              <a:t> </a:t>
-            </a:r>
-            <a:r>
-              <a:rPr lang="en-US" b="1" dirty="0" err="1"/>
-              <a:t>bardzo</a:t>
-            </a:r>
-            <a:r>
-              <a:rPr lang="en-US" b="1" dirty="0"/>
-              <a:t> </a:t>
-            </a:r>
-            <a:r>
-              <a:rPr lang="en-US" b="1" dirty="0" err="1"/>
-              <a:t>mało</a:t>
-            </a:r>
-            <a:r>
-              <a:rPr lang="en-US" b="1" dirty="0"/>
-              <a:t> </a:t>
-            </a:r>
-            <a:r>
-              <a:rPr lang="en-US" b="1" dirty="0" err="1"/>
-              <a:t>wspólnego</a:t>
-            </a:r>
-            <a:r>
-              <a:rPr lang="en-US" b="1" dirty="0"/>
-              <a:t> </a:t>
-            </a:r>
-            <a:r>
-              <a:rPr lang="en-US" dirty="0"/>
-              <a:t>(</a:t>
-            </a:r>
-            <a:r>
-              <a:rPr lang="en-US" dirty="0" err="1"/>
-              <a:t>dużo</a:t>
-            </a:r>
-            <a:r>
-              <a:rPr lang="en-US" dirty="0"/>
-              <a:t> </a:t>
-            </a:r>
-            <a:r>
-              <a:rPr lang="en-US" dirty="0" err="1"/>
-              <a:t>różnych</a:t>
-            </a:r>
-            <a:r>
-              <a:rPr lang="en-US" dirty="0"/>
-              <a:t> </a:t>
-            </a:r>
-            <a:r>
-              <a:rPr lang="en-US" dirty="0" err="1"/>
-              <a:t>kolorów</a:t>
-            </a:r>
-            <a:r>
-              <a:rPr lang="en-US" dirty="0"/>
-              <a:t> </a:t>
-            </a:r>
-            <a:r>
-              <a:rPr lang="en-US" dirty="0" err="1"/>
-              <a:t>na</a:t>
-            </a:r>
-            <a:r>
-              <a:rPr lang="en-US" dirty="0"/>
-              <a:t> </a:t>
-            </a:r>
-            <a:r>
-              <a:rPr lang="pl-PL" dirty="0"/>
-              <a:t>następnym slajdzie</a:t>
-            </a:r>
-            <a:r>
-              <a:rPr lang="en-US" dirty="0"/>
-              <a:t>).</a:t>
-            </a:r>
-          </a:p>
-          <a:p>
-            <a:pPr marL="514350" indent="-514350">
-              <a:buFont typeface="+mj-lt"/>
-              <a:buAutoNum type="arabicPeriod"/>
-            </a:pPr>
-            <a:r>
-              <a:rPr lang="en-US" dirty="0"/>
-              <a:t> W </a:t>
-            </a:r>
-            <a:r>
-              <a:rPr lang="en-US" dirty="0" err="1"/>
-              <a:t>miarę</a:t>
-            </a:r>
-            <a:r>
-              <a:rPr lang="en-US" dirty="0"/>
-              <a:t> </a:t>
-            </a:r>
-            <a:r>
-              <a:rPr lang="en-US" dirty="0" err="1"/>
-              <a:t>upływu</a:t>
-            </a:r>
-            <a:r>
-              <a:rPr lang="en-US" dirty="0"/>
-              <a:t> </a:t>
-            </a:r>
-            <a:r>
-              <a:rPr lang="en-US" dirty="0" err="1"/>
-              <a:t>czasu</a:t>
-            </a:r>
-            <a:r>
-              <a:rPr lang="en-US" dirty="0"/>
-              <a:t> (</a:t>
-            </a:r>
-            <a:r>
-              <a:rPr lang="en-US" dirty="0" err="1"/>
-              <a:t>zdarzeń</a:t>
-            </a:r>
-            <a:r>
-              <a:rPr lang="en-US" dirty="0"/>
-              <a:t>) </a:t>
-            </a:r>
-            <a:r>
-              <a:rPr lang="en-US" dirty="0" err="1"/>
-              <a:t>lokalne</a:t>
-            </a:r>
-            <a:r>
-              <a:rPr lang="en-US" dirty="0"/>
-              <a:t> </a:t>
-            </a:r>
-            <a:r>
-              <a:rPr lang="en-US" dirty="0" err="1"/>
-              <a:t>interakcje</a:t>
-            </a:r>
-            <a:r>
-              <a:rPr lang="en-US" dirty="0"/>
-              <a:t> </a:t>
-            </a:r>
-            <a:r>
-              <a:rPr lang="en-US" dirty="0" err="1"/>
-              <a:t>powodują</a:t>
-            </a:r>
-            <a:r>
-              <a:rPr lang="en-US" dirty="0"/>
-              <a:t>, </a:t>
-            </a:r>
-            <a:r>
-              <a:rPr lang="en-US" dirty="0" err="1"/>
-              <a:t>że</a:t>
-            </a:r>
-            <a:r>
-              <a:rPr lang="en-US" dirty="0"/>
-              <a:t> </a:t>
-            </a:r>
-            <a:r>
-              <a:rPr lang="en-US" dirty="0" err="1"/>
-              <a:t>wspólne</a:t>
-            </a:r>
-            <a:r>
-              <a:rPr lang="en-US" dirty="0"/>
-              <a:t> </a:t>
-            </a:r>
-            <a:r>
-              <a:rPr lang="en-US" dirty="0" err="1"/>
-              <a:t>warianty</a:t>
-            </a:r>
-            <a:r>
-              <a:rPr lang="en-US" dirty="0"/>
-              <a:t> </a:t>
-            </a:r>
-            <a:r>
-              <a:rPr lang="en-US" dirty="0" err="1"/>
-              <a:t>kulturowe</a:t>
-            </a:r>
-            <a:r>
-              <a:rPr lang="en-US" dirty="0"/>
-              <a:t> </a:t>
-            </a:r>
-            <a:r>
-              <a:rPr lang="en-US" b="1" dirty="0" err="1"/>
-              <a:t>rozprzestrzeniają</a:t>
-            </a:r>
-            <a:r>
-              <a:rPr lang="en-US" b="1" dirty="0"/>
-              <a:t> </a:t>
-            </a:r>
-            <a:r>
-              <a:rPr lang="en-US" b="1" dirty="0" err="1"/>
-              <a:t>się</a:t>
-            </a:r>
-            <a:r>
-              <a:rPr lang="en-US" b="1" dirty="0"/>
-              <a:t> </a:t>
-            </a:r>
-            <a:r>
-              <a:rPr lang="en-US" b="1" dirty="0" err="1"/>
-              <a:t>na</a:t>
-            </a:r>
-            <a:r>
-              <a:rPr lang="en-US" b="1" dirty="0"/>
-              <a:t> </a:t>
-            </a:r>
-            <a:r>
-              <a:rPr lang="en-US" b="1" dirty="0" err="1"/>
-              <a:t>coraz</a:t>
-            </a:r>
-            <a:r>
-              <a:rPr lang="en-US" b="1" dirty="0"/>
-              <a:t> </a:t>
-            </a:r>
-            <a:r>
-              <a:rPr lang="en-US" b="1" dirty="0" err="1"/>
-              <a:t>większe</a:t>
-            </a:r>
-            <a:r>
-              <a:rPr lang="en-US" b="1" dirty="0"/>
-              <a:t> </a:t>
-            </a:r>
-            <a:r>
-              <a:rPr lang="en-US" b="1" dirty="0" err="1"/>
-              <a:t>obszary</a:t>
-            </a:r>
-            <a:r>
-              <a:rPr lang="en-US" dirty="0"/>
-              <a:t> (</a:t>
-            </a:r>
-            <a:r>
-              <a:rPr lang="en-US" dirty="0" err="1"/>
-              <a:t>regiony</a:t>
-            </a:r>
-            <a:r>
-              <a:rPr lang="en-US" dirty="0"/>
-              <a:t> </a:t>
-            </a:r>
-            <a:r>
-              <a:rPr lang="en-US" dirty="0" err="1"/>
-              <a:t>kulturowe</a:t>
-            </a:r>
-            <a:r>
-              <a:rPr lang="en-US" dirty="0"/>
-              <a:t>).</a:t>
-            </a:r>
-          </a:p>
-          <a:p>
-            <a:pPr marL="514350" indent="-514350">
-              <a:buFont typeface="+mj-lt"/>
-              <a:buAutoNum type="arabicPeriod"/>
-            </a:pPr>
-            <a:r>
-              <a:rPr lang="en-US" b="1" dirty="0"/>
-              <a:t>Stan </a:t>
-            </a:r>
-            <a:r>
-              <a:rPr lang="en-US" b="1" dirty="0" err="1"/>
-              <a:t>stacjonarny</a:t>
-            </a:r>
-            <a:r>
-              <a:rPr lang="en-US" b="1" dirty="0"/>
-              <a:t>: </a:t>
-            </a:r>
-            <a:r>
-              <a:rPr lang="en-US" dirty="0" err="1"/>
-              <a:t>proces</a:t>
-            </a:r>
-            <a:r>
-              <a:rPr lang="en-US" dirty="0"/>
-              <a:t> </a:t>
-            </a:r>
-            <a:r>
-              <a:rPr lang="en-US" dirty="0" err="1"/>
-              <a:t>kończy</a:t>
-            </a:r>
-            <a:r>
-              <a:rPr lang="en-US" dirty="0"/>
-              <a:t> </a:t>
-            </a:r>
-            <a:r>
-              <a:rPr lang="en-US" dirty="0" err="1"/>
-              <a:t>się</a:t>
-            </a:r>
-            <a:r>
-              <a:rPr lang="en-US" dirty="0"/>
-              <a:t> </a:t>
-            </a:r>
-            <a:r>
-              <a:rPr lang="en-US" dirty="0" err="1"/>
-              <a:t>i</a:t>
-            </a:r>
-            <a:r>
-              <a:rPr lang="en-US" dirty="0"/>
-              <a:t> </a:t>
-            </a:r>
-            <a:r>
-              <a:rPr lang="en-US" dirty="0" err="1"/>
-              <a:t>stabilizuje</a:t>
-            </a:r>
-            <a:r>
-              <a:rPr lang="en-US" dirty="0"/>
-              <a:t>, </a:t>
-            </a:r>
-            <a:r>
-              <a:rPr lang="en-US" dirty="0" err="1"/>
-              <a:t>gdy</a:t>
-            </a:r>
-            <a:r>
-              <a:rPr lang="en-US" dirty="0"/>
-              <a:t> </a:t>
-            </a:r>
-            <a:r>
-              <a:rPr lang="en-US" dirty="0" err="1"/>
-              <a:t>żadna</a:t>
-            </a:r>
-            <a:r>
-              <a:rPr lang="en-US" dirty="0"/>
-              <a:t> para </a:t>
-            </a:r>
-            <a:r>
-              <a:rPr lang="en-US" dirty="0" err="1"/>
-              <a:t>sąsiadujących</a:t>
-            </a:r>
-            <a:r>
-              <a:rPr lang="en-US" dirty="0"/>
-              <a:t> </a:t>
-            </a:r>
-            <a:r>
-              <a:rPr lang="en-US" dirty="0" err="1"/>
-              <a:t>jednostek</a:t>
-            </a:r>
-            <a:r>
-              <a:rPr lang="en-US" dirty="0"/>
-              <a:t>  </a:t>
-            </a:r>
-            <a:r>
-              <a:rPr lang="en-US" dirty="0" err="1"/>
-              <a:t>nie</a:t>
-            </a:r>
-            <a:r>
-              <a:rPr lang="en-US" dirty="0"/>
-              <a:t> </a:t>
-            </a:r>
-            <a:r>
-              <a:rPr lang="en-US" dirty="0" err="1"/>
-              <a:t>może</a:t>
-            </a:r>
-            <a:r>
-              <a:rPr lang="en-US" dirty="0"/>
-              <a:t> </a:t>
-            </a:r>
-            <a:r>
-              <a:rPr lang="en-US" dirty="0" err="1"/>
-              <a:t>już</a:t>
-            </a:r>
-            <a:r>
-              <a:rPr lang="en-US" dirty="0"/>
-              <a:t> </a:t>
-            </a:r>
-            <a:r>
-              <a:rPr lang="en-US" dirty="0" err="1"/>
-              <a:t>zmienić</a:t>
-            </a:r>
-            <a:r>
-              <a:rPr lang="en-US" dirty="0"/>
-              <a:t> </a:t>
-            </a:r>
-            <a:r>
-              <a:rPr lang="en-US" dirty="0" err="1"/>
-              <a:t>swojej</a:t>
-            </a:r>
-            <a:r>
-              <a:rPr lang="en-US" dirty="0"/>
-              <a:t> </a:t>
-            </a:r>
-            <a:r>
-              <a:rPr lang="en-US" dirty="0" err="1"/>
-              <a:t>kultury</a:t>
-            </a:r>
-            <a:r>
-              <a:rPr lang="en-US" dirty="0"/>
-              <a:t> (</a:t>
-            </a:r>
-            <a:r>
-              <a:rPr lang="en-US" dirty="0" err="1"/>
-              <a:t>całkowicie</a:t>
-            </a:r>
-            <a:r>
-              <a:rPr lang="en-US" dirty="0"/>
-              <a:t> </a:t>
-            </a:r>
-            <a:r>
-              <a:rPr lang="en-US" dirty="0" err="1"/>
-              <a:t>identyczni</a:t>
-            </a:r>
-            <a:r>
-              <a:rPr lang="en-US" dirty="0"/>
-              <a:t> </a:t>
-            </a:r>
-            <a:r>
-              <a:rPr lang="en-US" dirty="0" err="1"/>
-              <a:t>albo</a:t>
-            </a:r>
-            <a:r>
-              <a:rPr lang="en-US" dirty="0"/>
-              <a:t> </a:t>
-            </a:r>
-            <a:r>
-              <a:rPr lang="en-US" dirty="0" err="1"/>
-              <a:t>całkowicie</a:t>
-            </a:r>
-            <a:r>
-              <a:rPr lang="en-US" dirty="0"/>
-              <a:t> </a:t>
-            </a:r>
-            <a:r>
-              <a:rPr lang="en-US" dirty="0" err="1"/>
-              <a:t>odmienni</a:t>
-            </a:r>
-            <a:r>
-              <a:rPr lang="en-US" dirty="0"/>
-              <a:t>).</a:t>
-            </a:r>
-          </a:p>
-          <a:p>
-            <a:pPr marL="514350" indent="-514350">
-              <a:buFont typeface="+mj-lt"/>
-              <a:buAutoNum type="arabicPeriod"/>
-            </a:pPr>
-            <a:r>
-              <a:rPr lang="en-US" b="1" dirty="0" err="1"/>
-              <a:t>Wynik</a:t>
-            </a:r>
-            <a:r>
-              <a:rPr lang="en-US" b="1" dirty="0"/>
-              <a:t> </a:t>
-            </a:r>
-            <a:r>
-              <a:rPr lang="en-US" b="1" dirty="0" err="1"/>
-              <a:t>końcowy</a:t>
-            </a:r>
-            <a:r>
-              <a:rPr lang="en-US" b="1" dirty="0"/>
-              <a:t> </a:t>
-            </a:r>
-            <a:r>
-              <a:rPr lang="en-US" dirty="0"/>
-              <a:t>to </a:t>
-            </a:r>
-            <a:r>
-              <a:rPr lang="en-US" b="1" dirty="0" err="1"/>
-              <a:t>globalna</a:t>
-            </a:r>
-            <a:r>
-              <a:rPr lang="en-US" b="1" dirty="0"/>
-              <a:t> </a:t>
-            </a:r>
-            <a:r>
-              <a:rPr lang="en-US" b="1" dirty="0" err="1"/>
-              <a:t>polaryzacja</a:t>
-            </a:r>
-            <a:r>
-              <a:rPr lang="en-US" dirty="0"/>
-              <a:t>, </a:t>
-            </a:r>
-            <a:r>
-              <a:rPr lang="en-US" dirty="0" err="1"/>
-              <a:t>czyli</a:t>
-            </a:r>
-            <a:r>
-              <a:rPr lang="en-US" dirty="0"/>
-              <a:t> </a:t>
-            </a:r>
-            <a:r>
-              <a:rPr lang="en-US" dirty="0" err="1"/>
-              <a:t>kilka</a:t>
-            </a:r>
-            <a:r>
-              <a:rPr lang="en-US" dirty="0"/>
-              <a:t> </a:t>
-            </a:r>
-            <a:r>
-              <a:rPr lang="en-US" dirty="0" err="1"/>
-              <a:t>całkowicie</a:t>
-            </a:r>
-            <a:r>
-              <a:rPr lang="en-US" dirty="0"/>
-              <a:t> </a:t>
-            </a:r>
-            <a:r>
-              <a:rPr lang="en-US" dirty="0" err="1"/>
-              <a:t>odizolowanych</a:t>
-            </a:r>
-            <a:r>
-              <a:rPr lang="en-US" dirty="0"/>
-              <a:t> od </a:t>
-            </a:r>
-            <a:r>
-              <a:rPr lang="en-US" dirty="0" err="1"/>
-              <a:t>siebie</a:t>
-            </a:r>
-            <a:r>
-              <a:rPr lang="en-US" dirty="0"/>
-              <a:t>,  </a:t>
-            </a:r>
-            <a:r>
-              <a:rPr lang="en-US" dirty="0" err="1"/>
-              <a:t>stabilnych</a:t>
-            </a:r>
-            <a:r>
-              <a:rPr lang="en-US" dirty="0"/>
-              <a:t> </a:t>
-            </a:r>
-            <a:r>
-              <a:rPr lang="en-US" dirty="0" err="1"/>
-              <a:t>regionów</a:t>
-            </a:r>
-            <a:r>
-              <a:rPr lang="en-US" dirty="0"/>
-              <a:t> </a:t>
-            </a:r>
-            <a:r>
-              <a:rPr lang="en-US" dirty="0" err="1"/>
-              <a:t>kulturowych</a:t>
-            </a:r>
-            <a:r>
-              <a:rPr lang="en-US" dirty="0"/>
-              <a:t>. </a:t>
-            </a:r>
-          </a:p>
-          <a:p>
-            <a:endParaRPr lang="en-US" dirty="0"/>
+            <a:r>
+              <a:rPr lang="pl-PL" sz="2800" dirty="0"/>
+              <a:t>Podobieństwo, szansa interakcji = 1/4</a:t>
+            </a:r>
           </a:p>
         </p:txBody>
       </p:sp>
     </p:spTree>
     <p:extLst>
       <p:ext uri="{BB962C8B-B14F-4D97-AF65-F5344CB8AC3E}">
-        <p14:creationId xmlns:p14="http://schemas.microsoft.com/office/powerpoint/2010/main" val="3553586967"/>
+        <p14:creationId xmlns:p14="http://schemas.microsoft.com/office/powerpoint/2010/main" val="584733732"/>
       </p:ext>
     </p:extLst>
   </p:cSld>
@@ -6296,49 +7961,703 @@
           <a:chExt cx="0" cy="0"/>
         </a:xfrm>
       </p:grpSpPr>
-      <p:pic>
-        <p:nvPicPr>
-          <p:cNvPr id="3" name="Obraz 2">
-            <a:extLst>
-              <a:ext uri="{FF2B5EF4-FFF2-40B4-BE49-F238E27FC236}">
-                <a16:creationId xmlns:a16="http://schemas.microsoft.com/office/drawing/2014/main" id="{D3CB3F2C-B1F3-E809-0AE2-BC335BAD604E}"/>
-              </a:ext>
-            </a:extLst>
-          </p:cNvPr>
-          <p:cNvPicPr>
-            <a:picLocks noChangeAspect="1"/>
-          </p:cNvPicPr>
+      <p:sp>
+        <p:nvSpPr>
+          <p:cNvPr id="2" name="Tytuł 1">
+            <a:extLst>
+              <a:ext uri="{FF2B5EF4-FFF2-40B4-BE49-F238E27FC236}">
+                <a16:creationId xmlns:a16="http://schemas.microsoft.com/office/drawing/2014/main" id="{6E73E7B9-8195-F34D-5595-4475F0AD43AD}"/>
+              </a:ext>
+            </a:extLst>
+          </p:cNvPr>
+          <p:cNvSpPr>
+            <a:spLocks noGrp="1"/>
+          </p:cNvSpPr>
+          <p:nvPr>
+            <p:ph type="title"/>
+          </p:nvPr>
+        </p:nvSpPr>
+        <p:spPr/>
+        <p:txBody>
+          <a:bodyPr/>
+          <a:lstStyle/>
+          <a:p>
+            <a:r>
+              <a:rPr lang="pl-PL" dirty="0"/>
+              <a:t>Macierz agentów</a:t>
+            </a:r>
+          </a:p>
+        </p:txBody>
+      </p:sp>
+      <p:sp>
+        <p:nvSpPr>
+          <p:cNvPr id="3" name="Symbol zastępczy zawartości 2">
+            <a:extLst>
+              <a:ext uri="{FF2B5EF4-FFF2-40B4-BE49-F238E27FC236}">
+                <a16:creationId xmlns:a16="http://schemas.microsoft.com/office/drawing/2014/main" id="{1FDA5552-AE7D-5585-2170-6F2AAEA32F70}"/>
+              </a:ext>
+            </a:extLst>
+          </p:cNvPr>
+          <p:cNvSpPr>
+            <a:spLocks noGrp="1"/>
+          </p:cNvSpPr>
+          <p:nvPr>
+            <p:ph idx="1"/>
+          </p:nvPr>
+        </p:nvSpPr>
+        <p:spPr/>
+        <p:txBody>
+          <a:bodyPr/>
+          <a:lstStyle/>
+          <a:p>
+            <a:endParaRPr lang="pl-PL" dirty="0"/>
+          </a:p>
+        </p:txBody>
+      </p:sp>
+      <p:sp>
+        <p:nvSpPr>
+          <p:cNvPr id="18" name="Owal 17">
+            <a:extLst>
+              <a:ext uri="{FF2B5EF4-FFF2-40B4-BE49-F238E27FC236}">
+                <a16:creationId xmlns:a16="http://schemas.microsoft.com/office/drawing/2014/main" id="{162C34F4-E5BF-196B-C3B6-3371932A86FC}"/>
+              </a:ext>
+            </a:extLst>
+          </p:cNvPr>
+          <p:cNvSpPr/>
           <p:nvPr/>
-        </p:nvPicPr>
-        <p:blipFill>
-          <a:blip r:embed="rId2">
-            <a:extLst>
-              <a:ext uri="{28A0092B-C50C-407E-A947-70E740481C1C}">
-                <a14:useLocalDpi xmlns:a14="http://schemas.microsoft.com/office/drawing/2010/main" val="0"/>
-              </a:ext>
-            </a:extLst>
-          </a:blip>
-          <a:srcRect b="6961"/>
-          <a:stretch>
-            <a:fillRect/>
-          </a:stretch>
-        </p:blipFill>
-        <p:spPr>
-          <a:xfrm>
-            <a:off x="2261936" y="0"/>
-            <a:ext cx="9673389" cy="6750022"/>
-          </a:xfrm>
-          <a:prstGeom prst="rect">
+        </p:nvSpPr>
+        <p:spPr>
+          <a:xfrm>
+            <a:off x="4656186" y="4689502"/>
+            <a:ext cx="914400" cy="914400"/>
+          </a:xfrm>
+          <a:prstGeom prst="ellipse">
             <a:avLst/>
           </a:prstGeom>
         </p:spPr>
-      </p:pic>
-      <p:sp>
-        <p:nvSpPr>
-          <p:cNvPr id="4" name="pole tekstowe 3">
-            <a:extLst>
-              <a:ext uri="{FF2B5EF4-FFF2-40B4-BE49-F238E27FC236}">
-                <a16:creationId xmlns:a16="http://schemas.microsoft.com/office/drawing/2014/main" id="{8DAC0634-F7D3-2AC5-5478-1014E6CD789D}"/>
+        <p:style>
+          <a:lnRef idx="2">
+            <a:schemeClr val="accent1">
+              <a:shade val="15000"/>
+            </a:schemeClr>
+          </a:lnRef>
+          <a:fillRef idx="1">
+            <a:schemeClr val="accent1"/>
+          </a:fillRef>
+          <a:effectRef idx="0">
+            <a:schemeClr val="accent1"/>
+          </a:effectRef>
+          <a:fontRef idx="minor">
+            <a:schemeClr val="lt1"/>
+          </a:fontRef>
+        </p:style>
+        <p:txBody>
+          <a:bodyPr rtlCol="0" anchor="ctr"/>
+          <a:lstStyle/>
+          <a:p>
+            <a:pPr algn="ctr"/>
+            <a:endParaRPr lang="pl-PL"/>
+          </a:p>
+        </p:txBody>
+      </p:sp>
+      <p:sp>
+        <p:nvSpPr>
+          <p:cNvPr id="20" name="Owal 19">
+            <a:extLst>
+              <a:ext uri="{FF2B5EF4-FFF2-40B4-BE49-F238E27FC236}">
+                <a16:creationId xmlns:a16="http://schemas.microsoft.com/office/drawing/2014/main" id="{7A65A284-5220-2432-0399-9DB910A9676E}"/>
+              </a:ext>
+            </a:extLst>
+          </p:cNvPr>
+          <p:cNvSpPr/>
+          <p:nvPr/>
+        </p:nvSpPr>
+        <p:spPr>
+          <a:xfrm>
+            <a:off x="5911643" y="4668850"/>
+            <a:ext cx="914400" cy="914400"/>
+          </a:xfrm>
+          <a:prstGeom prst="ellipse">
+            <a:avLst/>
+          </a:prstGeom>
+        </p:spPr>
+        <p:style>
+          <a:lnRef idx="2">
+            <a:schemeClr val="accent1">
+              <a:shade val="15000"/>
+            </a:schemeClr>
+          </a:lnRef>
+          <a:fillRef idx="1">
+            <a:schemeClr val="accent1"/>
+          </a:fillRef>
+          <a:effectRef idx="0">
+            <a:schemeClr val="accent1"/>
+          </a:effectRef>
+          <a:fontRef idx="minor">
+            <a:schemeClr val="lt1"/>
+          </a:fontRef>
+        </p:style>
+        <p:txBody>
+          <a:bodyPr rtlCol="0" anchor="ctr"/>
+          <a:lstStyle/>
+          <a:p>
+            <a:pPr algn="ctr"/>
+            <a:endParaRPr lang="pl-PL"/>
+          </a:p>
+        </p:txBody>
+      </p:sp>
+      <p:sp>
+        <p:nvSpPr>
+          <p:cNvPr id="22" name="Owal 21">
+            <a:extLst>
+              <a:ext uri="{FF2B5EF4-FFF2-40B4-BE49-F238E27FC236}">
+                <a16:creationId xmlns:a16="http://schemas.microsoft.com/office/drawing/2014/main" id="{E3580E95-F18E-1221-CA34-5BBD1386E33F}"/>
+              </a:ext>
+            </a:extLst>
+          </p:cNvPr>
+          <p:cNvSpPr/>
+          <p:nvPr/>
+        </p:nvSpPr>
+        <p:spPr>
+          <a:xfrm>
+            <a:off x="4613786" y="3361896"/>
+            <a:ext cx="914400" cy="914400"/>
+          </a:xfrm>
+          <a:prstGeom prst="ellipse">
+            <a:avLst/>
+          </a:prstGeom>
+        </p:spPr>
+        <p:style>
+          <a:lnRef idx="2">
+            <a:schemeClr val="accent1">
+              <a:shade val="15000"/>
+            </a:schemeClr>
+          </a:lnRef>
+          <a:fillRef idx="1">
+            <a:schemeClr val="accent1"/>
+          </a:fillRef>
+          <a:effectRef idx="0">
+            <a:schemeClr val="accent1"/>
+          </a:effectRef>
+          <a:fontRef idx="minor">
+            <a:schemeClr val="lt1"/>
+          </a:fontRef>
+        </p:style>
+        <p:txBody>
+          <a:bodyPr rtlCol="0" anchor="ctr"/>
+          <a:lstStyle/>
+          <a:p>
+            <a:pPr algn="ctr"/>
+            <a:endParaRPr lang="pl-PL"/>
+          </a:p>
+        </p:txBody>
+      </p:sp>
+      <p:sp>
+        <p:nvSpPr>
+          <p:cNvPr id="24" name="Owal 23">
+            <a:extLst>
+              <a:ext uri="{FF2B5EF4-FFF2-40B4-BE49-F238E27FC236}">
+                <a16:creationId xmlns:a16="http://schemas.microsoft.com/office/drawing/2014/main" id="{A561B71D-0308-4444-F094-B18C604947C7}"/>
+              </a:ext>
+            </a:extLst>
+          </p:cNvPr>
+          <p:cNvSpPr/>
+          <p:nvPr/>
+        </p:nvSpPr>
+        <p:spPr>
+          <a:xfrm>
+            <a:off x="5943599" y="3327483"/>
+            <a:ext cx="914400" cy="914400"/>
+          </a:xfrm>
+          <a:prstGeom prst="ellipse">
+            <a:avLst/>
+          </a:prstGeom>
+        </p:spPr>
+        <p:style>
+          <a:lnRef idx="2">
+            <a:schemeClr val="accent1">
+              <a:shade val="15000"/>
+            </a:schemeClr>
+          </a:lnRef>
+          <a:fillRef idx="1">
+            <a:schemeClr val="accent1"/>
+          </a:fillRef>
+          <a:effectRef idx="0">
+            <a:schemeClr val="accent1"/>
+          </a:effectRef>
+          <a:fontRef idx="minor">
+            <a:schemeClr val="lt1"/>
+          </a:fontRef>
+        </p:style>
+        <p:txBody>
+          <a:bodyPr rtlCol="0" anchor="ctr"/>
+          <a:lstStyle/>
+          <a:p>
+            <a:pPr algn="ctr"/>
+            <a:endParaRPr lang="pl-PL"/>
+          </a:p>
+        </p:txBody>
+      </p:sp>
+      <p:sp>
+        <p:nvSpPr>
+          <p:cNvPr id="26" name="Owal 25">
+            <a:extLst>
+              <a:ext uri="{FF2B5EF4-FFF2-40B4-BE49-F238E27FC236}">
+                <a16:creationId xmlns:a16="http://schemas.microsoft.com/office/drawing/2014/main" id="{41E2EE0C-5C78-BDA6-CC8C-E8DF1B93D3C0}"/>
+              </a:ext>
+            </a:extLst>
+          </p:cNvPr>
+          <p:cNvSpPr/>
+          <p:nvPr/>
+        </p:nvSpPr>
+        <p:spPr>
+          <a:xfrm>
+            <a:off x="7270953" y="3323303"/>
+            <a:ext cx="914400" cy="914400"/>
+          </a:xfrm>
+          <a:prstGeom prst="ellipse">
+            <a:avLst/>
+          </a:prstGeom>
+        </p:spPr>
+        <p:style>
+          <a:lnRef idx="2">
+            <a:schemeClr val="accent1">
+              <a:shade val="15000"/>
+            </a:schemeClr>
+          </a:lnRef>
+          <a:fillRef idx="1">
+            <a:schemeClr val="accent1"/>
+          </a:fillRef>
+          <a:effectRef idx="0">
+            <a:schemeClr val="accent1"/>
+          </a:effectRef>
+          <a:fontRef idx="minor">
+            <a:schemeClr val="lt1"/>
+          </a:fontRef>
+        </p:style>
+        <p:txBody>
+          <a:bodyPr rtlCol="0" anchor="ctr"/>
+          <a:lstStyle/>
+          <a:p>
+            <a:pPr algn="ctr"/>
+            <a:endParaRPr lang="pl-PL"/>
+          </a:p>
+        </p:txBody>
+      </p:sp>
+      <p:sp>
+        <p:nvSpPr>
+          <p:cNvPr id="32" name="Owal 31">
+            <a:extLst>
+              <a:ext uri="{FF2B5EF4-FFF2-40B4-BE49-F238E27FC236}">
+                <a16:creationId xmlns:a16="http://schemas.microsoft.com/office/drawing/2014/main" id="{CA8EF8AA-DAA8-82B5-A9CC-80CA73818898}"/>
+              </a:ext>
+            </a:extLst>
+          </p:cNvPr>
+          <p:cNvSpPr/>
+          <p:nvPr/>
+        </p:nvSpPr>
+        <p:spPr>
+          <a:xfrm>
+            <a:off x="7270953" y="4660490"/>
+            <a:ext cx="914400" cy="914400"/>
+          </a:xfrm>
+          <a:prstGeom prst="ellipse">
+            <a:avLst/>
+          </a:prstGeom>
+        </p:spPr>
+        <p:style>
+          <a:lnRef idx="2">
+            <a:schemeClr val="accent1">
+              <a:shade val="15000"/>
+            </a:schemeClr>
+          </a:lnRef>
+          <a:fillRef idx="1">
+            <a:schemeClr val="accent1"/>
+          </a:fillRef>
+          <a:effectRef idx="0">
+            <a:schemeClr val="accent1"/>
+          </a:effectRef>
+          <a:fontRef idx="minor">
+            <a:schemeClr val="lt1"/>
+          </a:fontRef>
+        </p:style>
+        <p:txBody>
+          <a:bodyPr rtlCol="0" anchor="ctr"/>
+          <a:lstStyle/>
+          <a:p>
+            <a:pPr algn="ctr"/>
+            <a:endParaRPr lang="pl-PL" dirty="0"/>
+          </a:p>
+        </p:txBody>
+      </p:sp>
+      <p:sp>
+        <p:nvSpPr>
+          <p:cNvPr id="34" name="Owal 33">
+            <a:extLst>
+              <a:ext uri="{FF2B5EF4-FFF2-40B4-BE49-F238E27FC236}">
+                <a16:creationId xmlns:a16="http://schemas.microsoft.com/office/drawing/2014/main" id="{57A84347-3C28-0608-CCE9-FF307F2D1363}"/>
+              </a:ext>
+            </a:extLst>
+          </p:cNvPr>
+          <p:cNvSpPr/>
+          <p:nvPr/>
+        </p:nvSpPr>
+        <p:spPr>
+          <a:xfrm>
+            <a:off x="4629763" y="2033511"/>
+            <a:ext cx="914400" cy="914400"/>
+          </a:xfrm>
+          <a:prstGeom prst="ellipse">
+            <a:avLst/>
+          </a:prstGeom>
+        </p:spPr>
+        <p:style>
+          <a:lnRef idx="2">
+            <a:schemeClr val="accent1">
+              <a:shade val="15000"/>
+            </a:schemeClr>
+          </a:lnRef>
+          <a:fillRef idx="1">
+            <a:schemeClr val="accent1"/>
+          </a:fillRef>
+          <a:effectRef idx="0">
+            <a:schemeClr val="accent1"/>
+          </a:effectRef>
+          <a:fontRef idx="minor">
+            <a:schemeClr val="lt1"/>
+          </a:fontRef>
+        </p:style>
+        <p:txBody>
+          <a:bodyPr rtlCol="0" anchor="ctr"/>
+          <a:lstStyle/>
+          <a:p>
+            <a:pPr algn="ctr"/>
+            <a:endParaRPr lang="pl-PL"/>
+          </a:p>
+        </p:txBody>
+      </p:sp>
+      <p:sp>
+        <p:nvSpPr>
+          <p:cNvPr id="36" name="Owal 35">
+            <a:extLst>
+              <a:ext uri="{FF2B5EF4-FFF2-40B4-BE49-F238E27FC236}">
+                <a16:creationId xmlns:a16="http://schemas.microsoft.com/office/drawing/2014/main" id="{BB92E317-308C-C82C-F0D6-B1CBCABBAB8F}"/>
+              </a:ext>
+            </a:extLst>
+          </p:cNvPr>
+          <p:cNvSpPr/>
+          <p:nvPr/>
+        </p:nvSpPr>
+        <p:spPr>
+          <a:xfrm>
+            <a:off x="5960803" y="2033511"/>
+            <a:ext cx="914400" cy="914400"/>
+          </a:xfrm>
+          <a:prstGeom prst="ellipse">
+            <a:avLst/>
+          </a:prstGeom>
+        </p:spPr>
+        <p:style>
+          <a:lnRef idx="2">
+            <a:schemeClr val="accent1">
+              <a:shade val="15000"/>
+            </a:schemeClr>
+          </a:lnRef>
+          <a:fillRef idx="1">
+            <a:schemeClr val="accent1"/>
+          </a:fillRef>
+          <a:effectRef idx="0">
+            <a:schemeClr val="accent1"/>
+          </a:effectRef>
+          <a:fontRef idx="minor">
+            <a:schemeClr val="lt1"/>
+          </a:fontRef>
+        </p:style>
+        <p:txBody>
+          <a:bodyPr rtlCol="0" anchor="ctr"/>
+          <a:lstStyle/>
+          <a:p>
+            <a:pPr algn="ctr"/>
+            <a:endParaRPr lang="pl-PL"/>
+          </a:p>
+        </p:txBody>
+      </p:sp>
+      <p:sp>
+        <p:nvSpPr>
+          <p:cNvPr id="38" name="Owal 37">
+            <a:extLst>
+              <a:ext uri="{FF2B5EF4-FFF2-40B4-BE49-F238E27FC236}">
+                <a16:creationId xmlns:a16="http://schemas.microsoft.com/office/drawing/2014/main" id="{3676DDD0-8F97-CDB3-0733-8AED04BCCE03}"/>
+              </a:ext>
+            </a:extLst>
+          </p:cNvPr>
+          <p:cNvSpPr/>
+          <p:nvPr/>
+        </p:nvSpPr>
+        <p:spPr>
+          <a:xfrm>
+            <a:off x="7243916" y="2033511"/>
+            <a:ext cx="914400" cy="914400"/>
+          </a:xfrm>
+          <a:prstGeom prst="ellipse">
+            <a:avLst/>
+          </a:prstGeom>
+        </p:spPr>
+        <p:style>
+          <a:lnRef idx="2">
+            <a:schemeClr val="accent1">
+              <a:shade val="15000"/>
+            </a:schemeClr>
+          </a:lnRef>
+          <a:fillRef idx="1">
+            <a:schemeClr val="accent1"/>
+          </a:fillRef>
+          <a:effectRef idx="0">
+            <a:schemeClr val="accent1"/>
+          </a:effectRef>
+          <a:fontRef idx="minor">
+            <a:schemeClr val="lt1"/>
+          </a:fontRef>
+        </p:style>
+        <p:txBody>
+          <a:bodyPr rtlCol="0" anchor="ctr"/>
+          <a:lstStyle/>
+          <a:p>
+            <a:pPr algn="ctr"/>
+            <a:endParaRPr lang="pl-PL" dirty="0"/>
+          </a:p>
+        </p:txBody>
+      </p:sp>
+      <p:cxnSp>
+        <p:nvCxnSpPr>
+          <p:cNvPr id="43" name="Łącznik prosty 42">
+            <a:extLst>
+              <a:ext uri="{FF2B5EF4-FFF2-40B4-BE49-F238E27FC236}">
+                <a16:creationId xmlns:a16="http://schemas.microsoft.com/office/drawing/2014/main" id="{C9869464-7E11-25F4-829B-1BB75C4C95EC}"/>
+              </a:ext>
+            </a:extLst>
+          </p:cNvPr>
+          <p:cNvCxnSpPr>
+            <a:cxnSpLocks/>
+            <a:stCxn id="34" idx="2"/>
+            <a:endCxn id="38" idx="6"/>
+          </p:cNvCxnSpPr>
+          <p:nvPr/>
+        </p:nvCxnSpPr>
+        <p:spPr>
+          <a:xfrm>
+            <a:off x="4629763" y="2490711"/>
+            <a:ext cx="3528553" cy="0"/>
+          </a:xfrm>
+          <a:prstGeom prst="line">
+            <a:avLst/>
+          </a:prstGeom>
+        </p:spPr>
+        <p:style>
+          <a:lnRef idx="2">
+            <a:schemeClr val="accent1"/>
+          </a:lnRef>
+          <a:fillRef idx="0">
+            <a:schemeClr val="accent1"/>
+          </a:fillRef>
+          <a:effectRef idx="1">
+            <a:schemeClr val="accent1"/>
+          </a:effectRef>
+          <a:fontRef idx="minor">
+            <a:schemeClr val="tx1"/>
+          </a:fontRef>
+        </p:style>
+      </p:cxnSp>
+      <p:cxnSp>
+        <p:nvCxnSpPr>
+          <p:cNvPr id="46" name="Łącznik prosty 45">
+            <a:extLst>
+              <a:ext uri="{FF2B5EF4-FFF2-40B4-BE49-F238E27FC236}">
+                <a16:creationId xmlns:a16="http://schemas.microsoft.com/office/drawing/2014/main" id="{5D0C730A-33EB-F4B2-C53D-ED036C246845}"/>
+              </a:ext>
+            </a:extLst>
+          </p:cNvPr>
+          <p:cNvCxnSpPr>
+            <a:cxnSpLocks/>
+          </p:cNvCxnSpPr>
+          <p:nvPr/>
+        </p:nvCxnSpPr>
+        <p:spPr>
+          <a:xfrm>
+            <a:off x="4656800" y="3819096"/>
+            <a:ext cx="3528553" cy="0"/>
+          </a:xfrm>
+          <a:prstGeom prst="line">
+            <a:avLst/>
+          </a:prstGeom>
+        </p:spPr>
+        <p:style>
+          <a:lnRef idx="2">
+            <a:schemeClr val="accent1"/>
+          </a:lnRef>
+          <a:fillRef idx="0">
+            <a:schemeClr val="accent1"/>
+          </a:fillRef>
+          <a:effectRef idx="1">
+            <a:schemeClr val="accent1"/>
+          </a:effectRef>
+          <a:fontRef idx="minor">
+            <a:schemeClr val="tx1"/>
+          </a:fontRef>
+        </p:style>
+      </p:cxnSp>
+      <p:cxnSp>
+        <p:nvCxnSpPr>
+          <p:cNvPr id="47" name="Łącznik prosty 46">
+            <a:extLst>
+              <a:ext uri="{FF2B5EF4-FFF2-40B4-BE49-F238E27FC236}">
+                <a16:creationId xmlns:a16="http://schemas.microsoft.com/office/drawing/2014/main" id="{61B80037-DFC5-D3FC-9281-B3941B12EE95}"/>
+              </a:ext>
+            </a:extLst>
+          </p:cNvPr>
+          <p:cNvCxnSpPr>
+            <a:cxnSpLocks/>
+          </p:cNvCxnSpPr>
+          <p:nvPr/>
+        </p:nvCxnSpPr>
+        <p:spPr>
+          <a:xfrm>
+            <a:off x="4656800" y="5126050"/>
+            <a:ext cx="3528553" cy="0"/>
+          </a:xfrm>
+          <a:prstGeom prst="line">
+            <a:avLst/>
+          </a:prstGeom>
+        </p:spPr>
+        <p:style>
+          <a:lnRef idx="2">
+            <a:schemeClr val="accent1"/>
+          </a:lnRef>
+          <a:fillRef idx="0">
+            <a:schemeClr val="accent1"/>
+          </a:fillRef>
+          <a:effectRef idx="1">
+            <a:schemeClr val="accent1"/>
+          </a:effectRef>
+          <a:fontRef idx="minor">
+            <a:schemeClr val="tx1"/>
+          </a:fontRef>
+        </p:style>
+      </p:cxnSp>
+      <p:cxnSp>
+        <p:nvCxnSpPr>
+          <p:cNvPr id="49" name="Łącznik prosty 48">
+            <a:extLst>
+              <a:ext uri="{FF2B5EF4-FFF2-40B4-BE49-F238E27FC236}">
+                <a16:creationId xmlns:a16="http://schemas.microsoft.com/office/drawing/2014/main" id="{9C1D0090-D415-4954-C6E8-7737509B1BAE}"/>
+              </a:ext>
+            </a:extLst>
+          </p:cNvPr>
+          <p:cNvCxnSpPr/>
+          <p:nvPr/>
+        </p:nvCxnSpPr>
+        <p:spPr>
+          <a:xfrm>
+            <a:off x="5073444" y="2213096"/>
+            <a:ext cx="0" cy="3211999"/>
+          </a:xfrm>
+          <a:prstGeom prst="line">
+            <a:avLst/>
+          </a:prstGeom>
+        </p:spPr>
+        <p:style>
+          <a:lnRef idx="2">
+            <a:schemeClr val="accent1"/>
+          </a:lnRef>
+          <a:fillRef idx="0">
+            <a:schemeClr val="accent1"/>
+          </a:fillRef>
+          <a:effectRef idx="1">
+            <a:schemeClr val="accent1"/>
+          </a:effectRef>
+          <a:fontRef idx="minor">
+            <a:schemeClr val="tx1"/>
+          </a:fontRef>
+        </p:style>
+      </p:cxnSp>
+      <p:cxnSp>
+        <p:nvCxnSpPr>
+          <p:cNvPr id="50" name="Łącznik prosty 49">
+            <a:extLst>
+              <a:ext uri="{FF2B5EF4-FFF2-40B4-BE49-F238E27FC236}">
+                <a16:creationId xmlns:a16="http://schemas.microsoft.com/office/drawing/2014/main" id="{4B581ADB-6BD1-383C-8015-40878020625C}"/>
+              </a:ext>
+            </a:extLst>
+          </p:cNvPr>
+          <p:cNvCxnSpPr/>
+          <p:nvPr/>
+        </p:nvCxnSpPr>
+        <p:spPr>
+          <a:xfrm>
+            <a:off x="6405715" y="2213096"/>
+            <a:ext cx="0" cy="3211999"/>
+          </a:xfrm>
+          <a:prstGeom prst="line">
+            <a:avLst/>
+          </a:prstGeom>
+        </p:spPr>
+        <p:style>
+          <a:lnRef idx="2">
+            <a:schemeClr val="accent1"/>
+          </a:lnRef>
+          <a:fillRef idx="0">
+            <a:schemeClr val="accent1"/>
+          </a:fillRef>
+          <a:effectRef idx="1">
+            <a:schemeClr val="accent1"/>
+          </a:effectRef>
+          <a:fontRef idx="minor">
+            <a:schemeClr val="tx1"/>
+          </a:fontRef>
+        </p:style>
+      </p:cxnSp>
+      <p:cxnSp>
+        <p:nvCxnSpPr>
+          <p:cNvPr id="51" name="Łącznik prosty 50">
+            <a:extLst>
+              <a:ext uri="{FF2B5EF4-FFF2-40B4-BE49-F238E27FC236}">
+                <a16:creationId xmlns:a16="http://schemas.microsoft.com/office/drawing/2014/main" id="{5FDA1F15-5941-5C61-97D5-E509DD17DC9F}"/>
+              </a:ext>
+            </a:extLst>
+          </p:cNvPr>
+          <p:cNvCxnSpPr/>
+          <p:nvPr/>
+        </p:nvCxnSpPr>
+        <p:spPr>
+          <a:xfrm>
+            <a:off x="7733070" y="2362891"/>
+            <a:ext cx="0" cy="3211999"/>
+          </a:xfrm>
+          <a:prstGeom prst="line">
+            <a:avLst/>
+          </a:prstGeom>
+        </p:spPr>
+        <p:style>
+          <a:lnRef idx="2">
+            <a:schemeClr val="accent1"/>
+          </a:lnRef>
+          <a:fillRef idx="0">
+            <a:schemeClr val="accent1"/>
+          </a:fillRef>
+          <a:effectRef idx="1">
+            <a:schemeClr val="accent1"/>
+          </a:effectRef>
+          <a:fontRef idx="minor">
+            <a:schemeClr val="tx1"/>
+          </a:fontRef>
+        </p:style>
+      </p:cxnSp>
+      <p:sp>
+        <p:nvSpPr>
+          <p:cNvPr id="52" name="pole tekstowe 51">
+            <a:extLst>
+              <a:ext uri="{FF2B5EF4-FFF2-40B4-BE49-F238E27FC236}">
+                <a16:creationId xmlns:a16="http://schemas.microsoft.com/office/drawing/2014/main" id="{F3A3AAF2-9249-D8E4-A60F-8997B179BD44}"/>
               </a:ext>
             </a:extLst>
           </p:cNvPr>
@@ -6347,8 +8666,8 @@
         </p:nvSpPr>
         <p:spPr>
           <a:xfrm>
-            <a:off x="481262" y="4811616"/>
-            <a:ext cx="3100138" cy="1554272"/>
+            <a:off x="4549579" y="2278459"/>
+            <a:ext cx="1252831" cy="646331"/>
           </a:xfrm>
           <a:prstGeom prst="rect">
             <a:avLst/>
@@ -6356,106 +8675,460 @@
           <a:noFill/>
         </p:spPr>
         <p:txBody>
-          <a:bodyPr wrap="square" rtlCol="0" anchor="b">
+          <a:bodyPr wrap="square" rtlCol="0">
             <a:spAutoFit/>
           </a:bodyPr>
           <a:lstStyle/>
           <a:p>
             <a:r>
-              <a:rPr lang="pl-PL" sz="1900" u="sng" dirty="0"/>
-              <a:t>Parametry</a:t>
-            </a:r>
-          </a:p>
-          <a:p>
-            <a:r>
-              <a:rPr lang="pl-PL" sz="1900" dirty="0"/>
-              <a:t>liczba cech: 3</a:t>
-            </a:r>
-          </a:p>
-          <a:p>
-            <a:r>
-              <a:rPr lang="pl-PL" sz="1900" dirty="0"/>
-              <a:t>liczba wariantów: 6</a:t>
-            </a:r>
-          </a:p>
-          <a:p>
-            <a:r>
-              <a:rPr lang="pl-PL" sz="1900" dirty="0"/>
-              <a:t>długość boku siatki: 15</a:t>
-            </a:r>
-          </a:p>
-          <a:p>
-            <a:r>
-              <a:rPr lang="pl-PL" sz="1900" dirty="0"/>
-              <a:t>liczba iteracji: &lt;1mln</a:t>
-            </a:r>
-          </a:p>
-        </p:txBody>
-      </p:sp>
-      <p:pic>
-        <p:nvPicPr>
-          <p:cNvPr id="6" name="Obraz 5">
-            <a:extLst>
-              <a:ext uri="{FF2B5EF4-FFF2-40B4-BE49-F238E27FC236}">
-                <a16:creationId xmlns:a16="http://schemas.microsoft.com/office/drawing/2014/main" id="{7FB32805-6F4F-BDDA-1811-5FDFEAF37A50}"/>
-              </a:ext>
-            </a:extLst>
-          </p:cNvPr>
-          <p:cNvPicPr>
-            <a:picLocks noChangeAspect="1"/>
-          </p:cNvPicPr>
+              <a:rPr lang="pl-PL" dirty="0">
+                <a:solidFill>
+                  <a:schemeClr val="bg1"/>
+                </a:solidFill>
+              </a:rPr>
+              <a:t> [1,1,5,7]</a:t>
+            </a:r>
+          </a:p>
+          <a:p>
+            <a:r>
+              <a:rPr lang="pl-PL" dirty="0">
+                <a:solidFill>
+                  <a:schemeClr val="bg1"/>
+                </a:solidFill>
+              </a:rPr>
+              <a:t>,</a:t>
+            </a:r>
+          </a:p>
+        </p:txBody>
+      </p:sp>
+      <p:sp>
+        <p:nvSpPr>
+          <p:cNvPr id="54" name="pole tekstowe 53">
+            <a:extLst>
+              <a:ext uri="{FF2B5EF4-FFF2-40B4-BE49-F238E27FC236}">
+                <a16:creationId xmlns:a16="http://schemas.microsoft.com/office/drawing/2014/main" id="{FEBE3FE7-FC69-DF23-5693-5BFA66A3C28F}"/>
+              </a:ext>
+            </a:extLst>
+          </p:cNvPr>
+          <p:cNvSpPr txBox="1"/>
           <p:nvPr/>
-        </p:nvPicPr>
-        <p:blipFill>
-          <a:blip r:embed="rId3"/>
-          <a:stretch>
-            <a:fillRect/>
-          </a:stretch>
-        </p:blipFill>
-        <p:spPr>
-          <a:xfrm>
-            <a:off x="8051799" y="1037570"/>
-            <a:ext cx="2418081" cy="298469"/>
+        </p:nvSpPr>
+        <p:spPr>
+          <a:xfrm>
+            <a:off x="5830667" y="2262766"/>
+            <a:ext cx="1252831" cy="646331"/>
           </a:xfrm>
           <a:prstGeom prst="rect">
             <a:avLst/>
           </a:prstGeom>
-        </p:spPr>
-      </p:pic>
-      <p:pic>
-        <p:nvPicPr>
-          <p:cNvPr id="8" name="Obraz 7">
-            <a:extLst>
-              <a:ext uri="{FF2B5EF4-FFF2-40B4-BE49-F238E27FC236}">
-                <a16:creationId xmlns:a16="http://schemas.microsoft.com/office/drawing/2014/main" id="{04838392-E671-208D-C04A-254AFF27D9EF}"/>
-              </a:ext>
-            </a:extLst>
-          </p:cNvPr>
-          <p:cNvPicPr>
-            <a:picLocks noChangeAspect="1"/>
-          </p:cNvPicPr>
+          <a:noFill/>
+        </p:spPr>
+        <p:txBody>
+          <a:bodyPr wrap="square" rtlCol="0">
+            <a:spAutoFit/>
+          </a:bodyPr>
+          <a:lstStyle/>
+          <a:p>
+            <a:r>
+              <a:rPr lang="pl-PL" dirty="0">
+                <a:solidFill>
+                  <a:schemeClr val="bg1"/>
+                </a:solidFill>
+              </a:rPr>
+              <a:t> [1,0,5,</a:t>
+            </a:r>
+            <a:r>
+              <a:rPr lang="en-US" dirty="0">
+                <a:solidFill>
+                  <a:schemeClr val="bg1"/>
+                </a:solidFill>
+              </a:rPr>
+              <a:t>2</a:t>
+            </a:r>
+            <a:r>
+              <a:rPr lang="pl-PL" dirty="0">
+                <a:solidFill>
+                  <a:schemeClr val="bg1"/>
+                </a:solidFill>
+              </a:rPr>
+              <a:t>]</a:t>
+            </a:r>
+          </a:p>
+          <a:p>
+            <a:r>
+              <a:rPr lang="pl-PL" dirty="0">
+                <a:solidFill>
+                  <a:schemeClr val="bg1"/>
+                </a:solidFill>
+              </a:rPr>
+              <a:t>,</a:t>
+            </a:r>
+          </a:p>
+        </p:txBody>
+      </p:sp>
+      <p:sp>
+        <p:nvSpPr>
+          <p:cNvPr id="56" name="pole tekstowe 55">
+            <a:extLst>
+              <a:ext uri="{FF2B5EF4-FFF2-40B4-BE49-F238E27FC236}">
+                <a16:creationId xmlns:a16="http://schemas.microsoft.com/office/drawing/2014/main" id="{F89312C5-49AE-22D6-9603-F3BFEE4F2393}"/>
+              </a:ext>
+            </a:extLst>
+          </p:cNvPr>
+          <p:cNvSpPr txBox="1"/>
           <p:nvPr/>
-        </p:nvPicPr>
-        <p:blipFill>
-          <a:blip r:embed="rId4"/>
-          <a:stretch>
-            <a:fillRect/>
-          </a:stretch>
-        </p:blipFill>
-        <p:spPr>
-          <a:xfrm>
-            <a:off x="8051799" y="822960"/>
-            <a:ext cx="2330692" cy="214610"/>
+        </p:nvSpPr>
+        <p:spPr>
+          <a:xfrm>
+            <a:off x="4517089" y="3619396"/>
+            <a:ext cx="1252831" cy="646331"/>
           </a:xfrm>
           <a:prstGeom prst="rect">
             <a:avLst/>
           </a:prstGeom>
-        </p:spPr>
-      </p:pic>
+          <a:noFill/>
+        </p:spPr>
+        <p:txBody>
+          <a:bodyPr wrap="square" rtlCol="0">
+            <a:spAutoFit/>
+          </a:bodyPr>
+          <a:lstStyle/>
+          <a:p>
+            <a:r>
+              <a:rPr lang="pl-PL" dirty="0">
+                <a:solidFill>
+                  <a:schemeClr val="bg1"/>
+                </a:solidFill>
+              </a:rPr>
+              <a:t> [7,7,5,</a:t>
+            </a:r>
+            <a:r>
+              <a:rPr lang="en-US" dirty="0">
+                <a:solidFill>
+                  <a:schemeClr val="bg1"/>
+                </a:solidFill>
+              </a:rPr>
+              <a:t>3</a:t>
+            </a:r>
+            <a:r>
+              <a:rPr lang="pl-PL" dirty="0">
+                <a:solidFill>
+                  <a:schemeClr val="bg1"/>
+                </a:solidFill>
+              </a:rPr>
+              <a:t>]</a:t>
+            </a:r>
+          </a:p>
+          <a:p>
+            <a:r>
+              <a:rPr lang="pl-PL" dirty="0">
+                <a:solidFill>
+                  <a:schemeClr val="bg1"/>
+                </a:solidFill>
+              </a:rPr>
+              <a:t>,</a:t>
+            </a:r>
+          </a:p>
+        </p:txBody>
+      </p:sp>
+      <p:sp>
+        <p:nvSpPr>
+          <p:cNvPr id="58" name="pole tekstowe 57">
+            <a:extLst>
+              <a:ext uri="{FF2B5EF4-FFF2-40B4-BE49-F238E27FC236}">
+                <a16:creationId xmlns:a16="http://schemas.microsoft.com/office/drawing/2014/main" id="{C82DE7F7-4A6E-D448-5EA1-FC67861C1AAB}"/>
+              </a:ext>
+            </a:extLst>
+          </p:cNvPr>
+          <p:cNvSpPr txBox="1"/>
+          <p:nvPr/>
+        </p:nvSpPr>
+        <p:spPr>
+          <a:xfrm>
+            <a:off x="7191989" y="2286338"/>
+            <a:ext cx="1252831" cy="646331"/>
+          </a:xfrm>
+          <a:prstGeom prst="rect">
+            <a:avLst/>
+          </a:prstGeom>
+          <a:noFill/>
+        </p:spPr>
+        <p:txBody>
+          <a:bodyPr wrap="square" rtlCol="0">
+            <a:spAutoFit/>
+          </a:bodyPr>
+          <a:lstStyle/>
+          <a:p>
+            <a:r>
+              <a:rPr lang="pl-PL" dirty="0">
+                <a:solidFill>
+                  <a:schemeClr val="bg1"/>
+                </a:solidFill>
+              </a:rPr>
+              <a:t> [2,0,1,1]</a:t>
+            </a:r>
+          </a:p>
+          <a:p>
+            <a:r>
+              <a:rPr lang="pl-PL" dirty="0">
+                <a:solidFill>
+                  <a:schemeClr val="bg1"/>
+                </a:solidFill>
+              </a:rPr>
+              <a:t>,</a:t>
+            </a:r>
+          </a:p>
+        </p:txBody>
+      </p:sp>
+      <p:sp>
+        <p:nvSpPr>
+          <p:cNvPr id="60" name="pole tekstowe 59">
+            <a:extLst>
+              <a:ext uri="{FF2B5EF4-FFF2-40B4-BE49-F238E27FC236}">
+                <a16:creationId xmlns:a16="http://schemas.microsoft.com/office/drawing/2014/main" id="{778407FD-ACDB-C53D-5EE4-6259F8641BA6}"/>
+              </a:ext>
+            </a:extLst>
+          </p:cNvPr>
+          <p:cNvSpPr txBox="1"/>
+          <p:nvPr/>
+        </p:nvSpPr>
+        <p:spPr>
+          <a:xfrm>
+            <a:off x="5844443" y="3591372"/>
+            <a:ext cx="1252831" cy="646331"/>
+          </a:xfrm>
+          <a:prstGeom prst="rect">
+            <a:avLst/>
+          </a:prstGeom>
+          <a:noFill/>
+        </p:spPr>
+        <p:txBody>
+          <a:bodyPr wrap="square" rtlCol="0">
+            <a:spAutoFit/>
+          </a:bodyPr>
+          <a:lstStyle/>
+          <a:p>
+            <a:r>
+              <a:rPr lang="pl-PL" dirty="0">
+                <a:solidFill>
+                  <a:schemeClr val="bg1"/>
+                </a:solidFill>
+              </a:rPr>
+              <a:t> [1,1,1,2]</a:t>
+            </a:r>
+          </a:p>
+          <a:p>
+            <a:r>
+              <a:rPr lang="pl-PL" dirty="0">
+                <a:solidFill>
+                  <a:schemeClr val="bg1"/>
+                </a:solidFill>
+              </a:rPr>
+              <a:t>,</a:t>
+            </a:r>
+          </a:p>
+        </p:txBody>
+      </p:sp>
+      <p:sp>
+        <p:nvSpPr>
+          <p:cNvPr id="62" name="pole tekstowe 61">
+            <a:extLst>
+              <a:ext uri="{FF2B5EF4-FFF2-40B4-BE49-F238E27FC236}">
+                <a16:creationId xmlns:a16="http://schemas.microsoft.com/office/drawing/2014/main" id="{2242972C-E54B-FF5E-BF33-C07E8C410F33}"/>
+              </a:ext>
+            </a:extLst>
+          </p:cNvPr>
+          <p:cNvSpPr txBox="1"/>
+          <p:nvPr/>
+        </p:nvSpPr>
+        <p:spPr>
+          <a:xfrm>
+            <a:off x="7200283" y="3585319"/>
+            <a:ext cx="1252831" cy="646331"/>
+          </a:xfrm>
+          <a:prstGeom prst="rect">
+            <a:avLst/>
+          </a:prstGeom>
+          <a:noFill/>
+        </p:spPr>
+        <p:txBody>
+          <a:bodyPr wrap="square" rtlCol="0">
+            <a:spAutoFit/>
+          </a:bodyPr>
+          <a:lstStyle/>
+          <a:p>
+            <a:r>
+              <a:rPr lang="pl-PL" dirty="0">
+                <a:solidFill>
+                  <a:schemeClr val="bg1"/>
+                </a:solidFill>
+              </a:rPr>
+              <a:t> [1,0,5,7]</a:t>
+            </a:r>
+          </a:p>
+          <a:p>
+            <a:r>
+              <a:rPr lang="pl-PL" dirty="0">
+                <a:solidFill>
+                  <a:schemeClr val="bg1"/>
+                </a:solidFill>
+              </a:rPr>
+              <a:t>,</a:t>
+            </a:r>
+          </a:p>
+        </p:txBody>
+      </p:sp>
+      <p:sp>
+        <p:nvSpPr>
+          <p:cNvPr id="64" name="pole tekstowe 63">
+            <a:extLst>
+              <a:ext uri="{FF2B5EF4-FFF2-40B4-BE49-F238E27FC236}">
+                <a16:creationId xmlns:a16="http://schemas.microsoft.com/office/drawing/2014/main" id="{FA5AA254-9D3B-345A-6B80-DEDB06F4B007}"/>
+              </a:ext>
+            </a:extLst>
+          </p:cNvPr>
+          <p:cNvSpPr txBox="1"/>
+          <p:nvPr/>
+        </p:nvSpPr>
+        <p:spPr>
+          <a:xfrm>
+            <a:off x="4577836" y="4928559"/>
+            <a:ext cx="1252831" cy="646331"/>
+          </a:xfrm>
+          <a:prstGeom prst="rect">
+            <a:avLst/>
+          </a:prstGeom>
+          <a:noFill/>
+        </p:spPr>
+        <p:txBody>
+          <a:bodyPr wrap="square" rtlCol="0">
+            <a:spAutoFit/>
+          </a:bodyPr>
+          <a:lstStyle/>
+          <a:p>
+            <a:r>
+              <a:rPr lang="pl-PL" dirty="0">
+                <a:solidFill>
+                  <a:schemeClr val="bg1"/>
+                </a:solidFill>
+              </a:rPr>
+              <a:t> [1,0,1,7]</a:t>
+            </a:r>
+          </a:p>
+          <a:p>
+            <a:r>
+              <a:rPr lang="pl-PL" dirty="0">
+                <a:solidFill>
+                  <a:schemeClr val="bg1"/>
+                </a:solidFill>
+              </a:rPr>
+              <a:t>,</a:t>
+            </a:r>
+          </a:p>
+        </p:txBody>
+      </p:sp>
+      <p:sp>
+        <p:nvSpPr>
+          <p:cNvPr id="66" name="pole tekstowe 65">
+            <a:extLst>
+              <a:ext uri="{FF2B5EF4-FFF2-40B4-BE49-F238E27FC236}">
+                <a16:creationId xmlns:a16="http://schemas.microsoft.com/office/drawing/2014/main" id="{9612E740-FAA5-4D31-23E4-29A8C433D625}"/>
+              </a:ext>
+            </a:extLst>
+          </p:cNvPr>
+          <p:cNvSpPr txBox="1"/>
+          <p:nvPr/>
+        </p:nvSpPr>
+        <p:spPr>
+          <a:xfrm>
+            <a:off x="5817466" y="4913701"/>
+            <a:ext cx="1252831" cy="646331"/>
+          </a:xfrm>
+          <a:prstGeom prst="rect">
+            <a:avLst/>
+          </a:prstGeom>
+          <a:noFill/>
+        </p:spPr>
+        <p:txBody>
+          <a:bodyPr wrap="square" rtlCol="0">
+            <a:spAutoFit/>
+          </a:bodyPr>
+          <a:lstStyle/>
+          <a:p>
+            <a:r>
+              <a:rPr lang="pl-PL" dirty="0">
+                <a:solidFill>
+                  <a:schemeClr val="bg1"/>
+                </a:solidFill>
+              </a:rPr>
+              <a:t> [1,4,5,7]</a:t>
+            </a:r>
+          </a:p>
+          <a:p>
+            <a:r>
+              <a:rPr lang="pl-PL" dirty="0">
+                <a:solidFill>
+                  <a:schemeClr val="bg1"/>
+                </a:solidFill>
+              </a:rPr>
+              <a:t>,</a:t>
+            </a:r>
+          </a:p>
+        </p:txBody>
+      </p:sp>
+      <p:sp>
+        <p:nvSpPr>
+          <p:cNvPr id="68" name="pole tekstowe 67">
+            <a:extLst>
+              <a:ext uri="{FF2B5EF4-FFF2-40B4-BE49-F238E27FC236}">
+                <a16:creationId xmlns:a16="http://schemas.microsoft.com/office/drawing/2014/main" id="{CFD58858-A36C-1E95-CF69-39BCC23728EF}"/>
+              </a:ext>
+            </a:extLst>
+          </p:cNvPr>
+          <p:cNvSpPr txBox="1"/>
+          <p:nvPr/>
+        </p:nvSpPr>
+        <p:spPr>
+          <a:xfrm>
+            <a:off x="7191988" y="4928558"/>
+            <a:ext cx="1252831" cy="646331"/>
+          </a:xfrm>
+          <a:prstGeom prst="rect">
+            <a:avLst/>
+          </a:prstGeom>
+          <a:noFill/>
+        </p:spPr>
+        <p:txBody>
+          <a:bodyPr wrap="square" rtlCol="0">
+            <a:spAutoFit/>
+          </a:bodyPr>
+          <a:lstStyle/>
+          <a:p>
+            <a:r>
+              <a:rPr lang="pl-PL" dirty="0">
+                <a:solidFill>
+                  <a:schemeClr val="bg1"/>
+                </a:solidFill>
+              </a:rPr>
+              <a:t> [2,2,5,7]</a:t>
+            </a:r>
+          </a:p>
+          <a:p>
+            <a:r>
+              <a:rPr lang="pl-PL" dirty="0">
+                <a:solidFill>
+                  <a:schemeClr val="bg1"/>
+                </a:solidFill>
+              </a:rPr>
+              <a:t>,</a:t>
+            </a:r>
+          </a:p>
+        </p:txBody>
+      </p:sp>
     </p:spTree>
     <p:extLst>
       <p:ext uri="{BB962C8B-B14F-4D97-AF65-F5344CB8AC3E}">
-        <p14:creationId xmlns:p14="http://schemas.microsoft.com/office/powerpoint/2010/main" val="1943873016"/>
+        <p14:creationId xmlns:p14="http://schemas.microsoft.com/office/powerpoint/2010/main" val="4177816438"/>
       </p:ext>
     </p:extLst>
   </p:cSld>
@@ -6473,7 +9146,7 @@
         <p:cNvPr id="1" name="">
           <a:extLst>
             <a:ext uri="{FF2B5EF4-FFF2-40B4-BE49-F238E27FC236}">
-              <a16:creationId xmlns:a16="http://schemas.microsoft.com/office/drawing/2014/main" id="{C975BD9F-7388-27B7-6E97-13AEFA7F3079}"/>
+              <a16:creationId xmlns:a16="http://schemas.microsoft.com/office/drawing/2014/main" id="{70201F98-980C-CC9A-BA44-2231D0622E45}"/>
             </a:ext>
           </a:extLst>
         </p:cNvPr>
@@ -6488,48 +9161,657 @@
           <a:chExt cx="0" cy="0"/>
         </a:xfrm>
       </p:grpSpPr>
-      <p:pic>
-        <p:nvPicPr>
-          <p:cNvPr id="4" name="Obraz 3">
-            <a:extLst>
-              <a:ext uri="{FF2B5EF4-FFF2-40B4-BE49-F238E27FC236}">
-                <a16:creationId xmlns:a16="http://schemas.microsoft.com/office/drawing/2014/main" id="{4693E866-FE5B-AD44-8FA5-3862CBAF09FA}"/>
-              </a:ext>
-            </a:extLst>
-          </p:cNvPr>
-          <p:cNvPicPr>
-            <a:picLocks noChangeAspect="1"/>
-          </p:cNvPicPr>
+      <p:sp>
+        <p:nvSpPr>
+          <p:cNvPr id="2" name="Tytuł 1">
+            <a:extLst>
+              <a:ext uri="{FF2B5EF4-FFF2-40B4-BE49-F238E27FC236}">
+                <a16:creationId xmlns:a16="http://schemas.microsoft.com/office/drawing/2014/main" id="{2A116FD7-2DC7-AE82-7D9A-C02FAC9F0EAD}"/>
+              </a:ext>
+            </a:extLst>
+          </p:cNvPr>
+          <p:cNvSpPr>
+            <a:spLocks noGrp="1"/>
+          </p:cNvSpPr>
+          <p:nvPr>
+            <p:ph type="title"/>
+          </p:nvPr>
+        </p:nvSpPr>
+        <p:spPr/>
+        <p:txBody>
+          <a:bodyPr/>
+          <a:lstStyle/>
+          <a:p>
+            <a:r>
+              <a:rPr lang="pl-PL" dirty="0"/>
+              <a:t>Macierz agentów</a:t>
+            </a:r>
+          </a:p>
+        </p:txBody>
+      </p:sp>
+      <p:sp>
+        <p:nvSpPr>
+          <p:cNvPr id="3" name="Symbol zastępczy zawartości 2">
+            <a:extLst>
+              <a:ext uri="{FF2B5EF4-FFF2-40B4-BE49-F238E27FC236}">
+                <a16:creationId xmlns:a16="http://schemas.microsoft.com/office/drawing/2014/main" id="{717E801E-1873-9B8F-B89A-D9B54AEAA8C4}"/>
+              </a:ext>
+            </a:extLst>
+          </p:cNvPr>
+          <p:cNvSpPr>
+            <a:spLocks noGrp="1"/>
+          </p:cNvSpPr>
+          <p:nvPr>
+            <p:ph idx="1"/>
+          </p:nvPr>
+        </p:nvSpPr>
+        <p:spPr/>
+        <p:txBody>
+          <a:bodyPr/>
+          <a:lstStyle/>
+          <a:p>
+            <a:endParaRPr lang="pl-PL" dirty="0"/>
+          </a:p>
+        </p:txBody>
+      </p:sp>
+      <p:sp>
+        <p:nvSpPr>
+          <p:cNvPr id="18" name="Owal 17">
+            <a:extLst>
+              <a:ext uri="{FF2B5EF4-FFF2-40B4-BE49-F238E27FC236}">
+                <a16:creationId xmlns:a16="http://schemas.microsoft.com/office/drawing/2014/main" id="{CDD79732-7961-E532-49E9-82AB340E5D78}"/>
+              </a:ext>
+            </a:extLst>
+          </p:cNvPr>
+          <p:cNvSpPr/>
           <p:nvPr/>
-        </p:nvPicPr>
-        <p:blipFill>
-          <a:blip r:embed="rId2">
-            <a:extLst>
-              <a:ext uri="{28A0092B-C50C-407E-A947-70E740481C1C}">
-                <a14:useLocalDpi xmlns:a14="http://schemas.microsoft.com/office/drawing/2010/main" val="0"/>
-              </a:ext>
-            </a:extLst>
-          </a:blip>
-          <a:stretch>
-            <a:fillRect/>
-          </a:stretch>
-        </p:blipFill>
-        <p:spPr>
-          <a:xfrm>
-            <a:off x="2744536" y="76200"/>
-            <a:ext cx="8940800" cy="6705600"/>
-          </a:xfrm>
-          <a:prstGeom prst="rect">
+        </p:nvSpPr>
+        <p:spPr>
+          <a:xfrm>
+            <a:off x="4656186" y="4689502"/>
+            <a:ext cx="914400" cy="914400"/>
+          </a:xfrm>
+          <a:prstGeom prst="ellipse">
             <a:avLst/>
           </a:prstGeom>
         </p:spPr>
-      </p:pic>
-      <p:sp>
-        <p:nvSpPr>
-          <p:cNvPr id="3" name="pole tekstowe 2">
-            <a:extLst>
-              <a:ext uri="{FF2B5EF4-FFF2-40B4-BE49-F238E27FC236}">
-                <a16:creationId xmlns:a16="http://schemas.microsoft.com/office/drawing/2014/main" id="{3B774FEC-EBFA-B662-1372-7D093BD8B71A}"/>
+        <p:style>
+          <a:lnRef idx="2">
+            <a:schemeClr val="accent1">
+              <a:shade val="15000"/>
+            </a:schemeClr>
+          </a:lnRef>
+          <a:fillRef idx="1">
+            <a:schemeClr val="accent1"/>
+          </a:fillRef>
+          <a:effectRef idx="0">
+            <a:schemeClr val="accent1"/>
+          </a:effectRef>
+          <a:fontRef idx="minor">
+            <a:schemeClr val="lt1"/>
+          </a:fontRef>
+        </p:style>
+        <p:txBody>
+          <a:bodyPr rtlCol="0" anchor="ctr"/>
+          <a:lstStyle/>
+          <a:p>
+            <a:pPr algn="ctr"/>
+            <a:endParaRPr lang="pl-PL"/>
+          </a:p>
+        </p:txBody>
+      </p:sp>
+      <p:sp>
+        <p:nvSpPr>
+          <p:cNvPr id="20" name="Owal 19">
+            <a:extLst>
+              <a:ext uri="{FF2B5EF4-FFF2-40B4-BE49-F238E27FC236}">
+                <a16:creationId xmlns:a16="http://schemas.microsoft.com/office/drawing/2014/main" id="{A1CD4372-0AA9-DC81-53BD-4A0F0751A8CA}"/>
+              </a:ext>
+            </a:extLst>
+          </p:cNvPr>
+          <p:cNvSpPr/>
+          <p:nvPr/>
+        </p:nvSpPr>
+        <p:spPr>
+          <a:xfrm>
+            <a:off x="5911643" y="4668850"/>
+            <a:ext cx="914400" cy="914400"/>
+          </a:xfrm>
+          <a:prstGeom prst="ellipse">
+            <a:avLst/>
+          </a:prstGeom>
+        </p:spPr>
+        <p:style>
+          <a:lnRef idx="2">
+            <a:schemeClr val="accent1">
+              <a:shade val="15000"/>
+            </a:schemeClr>
+          </a:lnRef>
+          <a:fillRef idx="1">
+            <a:schemeClr val="accent1"/>
+          </a:fillRef>
+          <a:effectRef idx="0">
+            <a:schemeClr val="accent1"/>
+          </a:effectRef>
+          <a:fontRef idx="minor">
+            <a:schemeClr val="lt1"/>
+          </a:fontRef>
+        </p:style>
+        <p:txBody>
+          <a:bodyPr rtlCol="0" anchor="ctr"/>
+          <a:lstStyle/>
+          <a:p>
+            <a:pPr algn="ctr"/>
+            <a:endParaRPr lang="pl-PL"/>
+          </a:p>
+        </p:txBody>
+      </p:sp>
+      <p:sp>
+        <p:nvSpPr>
+          <p:cNvPr id="22" name="Owal 21">
+            <a:extLst>
+              <a:ext uri="{FF2B5EF4-FFF2-40B4-BE49-F238E27FC236}">
+                <a16:creationId xmlns:a16="http://schemas.microsoft.com/office/drawing/2014/main" id="{0F5FD360-3689-240A-2705-BDBA7FF5451A}"/>
+              </a:ext>
+            </a:extLst>
+          </p:cNvPr>
+          <p:cNvSpPr/>
+          <p:nvPr/>
+        </p:nvSpPr>
+        <p:spPr>
+          <a:xfrm>
+            <a:off x="4613786" y="3361896"/>
+            <a:ext cx="914400" cy="914400"/>
+          </a:xfrm>
+          <a:prstGeom prst="ellipse">
+            <a:avLst/>
+          </a:prstGeom>
+        </p:spPr>
+        <p:style>
+          <a:lnRef idx="2">
+            <a:schemeClr val="accent1">
+              <a:shade val="15000"/>
+            </a:schemeClr>
+          </a:lnRef>
+          <a:fillRef idx="1">
+            <a:schemeClr val="accent1"/>
+          </a:fillRef>
+          <a:effectRef idx="0">
+            <a:schemeClr val="accent1"/>
+          </a:effectRef>
+          <a:fontRef idx="minor">
+            <a:schemeClr val="lt1"/>
+          </a:fontRef>
+        </p:style>
+        <p:txBody>
+          <a:bodyPr rtlCol="0" anchor="ctr"/>
+          <a:lstStyle/>
+          <a:p>
+            <a:pPr algn="ctr"/>
+            <a:endParaRPr lang="pl-PL"/>
+          </a:p>
+        </p:txBody>
+      </p:sp>
+      <p:sp>
+        <p:nvSpPr>
+          <p:cNvPr id="26" name="Owal 25">
+            <a:extLst>
+              <a:ext uri="{FF2B5EF4-FFF2-40B4-BE49-F238E27FC236}">
+                <a16:creationId xmlns:a16="http://schemas.microsoft.com/office/drawing/2014/main" id="{E33D377E-50BF-93D6-998C-A9266AEADCEA}"/>
+              </a:ext>
+            </a:extLst>
+          </p:cNvPr>
+          <p:cNvSpPr/>
+          <p:nvPr/>
+        </p:nvSpPr>
+        <p:spPr>
+          <a:xfrm>
+            <a:off x="7270953" y="3323303"/>
+            <a:ext cx="914400" cy="914400"/>
+          </a:xfrm>
+          <a:prstGeom prst="ellipse">
+            <a:avLst/>
+          </a:prstGeom>
+        </p:spPr>
+        <p:style>
+          <a:lnRef idx="2">
+            <a:schemeClr val="accent1">
+              <a:shade val="15000"/>
+            </a:schemeClr>
+          </a:lnRef>
+          <a:fillRef idx="1">
+            <a:schemeClr val="accent1"/>
+          </a:fillRef>
+          <a:effectRef idx="0">
+            <a:schemeClr val="accent1"/>
+          </a:effectRef>
+          <a:fontRef idx="minor">
+            <a:schemeClr val="lt1"/>
+          </a:fontRef>
+        </p:style>
+        <p:txBody>
+          <a:bodyPr rtlCol="0" anchor="ctr"/>
+          <a:lstStyle/>
+          <a:p>
+            <a:pPr algn="ctr"/>
+            <a:endParaRPr lang="pl-PL"/>
+          </a:p>
+        </p:txBody>
+      </p:sp>
+      <p:sp>
+        <p:nvSpPr>
+          <p:cNvPr id="32" name="Owal 31">
+            <a:extLst>
+              <a:ext uri="{FF2B5EF4-FFF2-40B4-BE49-F238E27FC236}">
+                <a16:creationId xmlns:a16="http://schemas.microsoft.com/office/drawing/2014/main" id="{43CED3C7-DEA7-84FF-4BDE-8A1D8F9C985A}"/>
+              </a:ext>
+            </a:extLst>
+          </p:cNvPr>
+          <p:cNvSpPr/>
+          <p:nvPr/>
+        </p:nvSpPr>
+        <p:spPr>
+          <a:xfrm>
+            <a:off x="7270953" y="4660490"/>
+            <a:ext cx="914400" cy="914400"/>
+          </a:xfrm>
+          <a:prstGeom prst="ellipse">
+            <a:avLst/>
+          </a:prstGeom>
+        </p:spPr>
+        <p:style>
+          <a:lnRef idx="2">
+            <a:schemeClr val="accent1">
+              <a:shade val="15000"/>
+            </a:schemeClr>
+          </a:lnRef>
+          <a:fillRef idx="1">
+            <a:schemeClr val="accent1"/>
+          </a:fillRef>
+          <a:effectRef idx="0">
+            <a:schemeClr val="accent1"/>
+          </a:effectRef>
+          <a:fontRef idx="minor">
+            <a:schemeClr val="lt1"/>
+          </a:fontRef>
+        </p:style>
+        <p:txBody>
+          <a:bodyPr rtlCol="0" anchor="ctr"/>
+          <a:lstStyle/>
+          <a:p>
+            <a:pPr algn="ctr"/>
+            <a:endParaRPr lang="pl-PL" dirty="0"/>
+          </a:p>
+        </p:txBody>
+      </p:sp>
+      <p:sp>
+        <p:nvSpPr>
+          <p:cNvPr id="34" name="Owal 33">
+            <a:extLst>
+              <a:ext uri="{FF2B5EF4-FFF2-40B4-BE49-F238E27FC236}">
+                <a16:creationId xmlns:a16="http://schemas.microsoft.com/office/drawing/2014/main" id="{4695BF99-F0C8-F06F-CA7C-CE3A27C8D14B}"/>
+              </a:ext>
+            </a:extLst>
+          </p:cNvPr>
+          <p:cNvSpPr/>
+          <p:nvPr/>
+        </p:nvSpPr>
+        <p:spPr>
+          <a:xfrm>
+            <a:off x="4629763" y="2033511"/>
+            <a:ext cx="914400" cy="914400"/>
+          </a:xfrm>
+          <a:prstGeom prst="ellipse">
+            <a:avLst/>
+          </a:prstGeom>
+        </p:spPr>
+        <p:style>
+          <a:lnRef idx="2">
+            <a:schemeClr val="accent1">
+              <a:shade val="15000"/>
+            </a:schemeClr>
+          </a:lnRef>
+          <a:fillRef idx="1">
+            <a:schemeClr val="accent1"/>
+          </a:fillRef>
+          <a:effectRef idx="0">
+            <a:schemeClr val="accent1"/>
+          </a:effectRef>
+          <a:fontRef idx="minor">
+            <a:schemeClr val="lt1"/>
+          </a:fontRef>
+        </p:style>
+        <p:txBody>
+          <a:bodyPr rtlCol="0" anchor="ctr"/>
+          <a:lstStyle/>
+          <a:p>
+            <a:pPr algn="ctr"/>
+            <a:endParaRPr lang="pl-PL"/>
+          </a:p>
+        </p:txBody>
+      </p:sp>
+      <p:sp>
+        <p:nvSpPr>
+          <p:cNvPr id="36" name="Owal 35">
+            <a:extLst>
+              <a:ext uri="{FF2B5EF4-FFF2-40B4-BE49-F238E27FC236}">
+                <a16:creationId xmlns:a16="http://schemas.microsoft.com/office/drawing/2014/main" id="{AC3A48EA-7380-AD62-4E04-B2CA8C46E261}"/>
+              </a:ext>
+            </a:extLst>
+          </p:cNvPr>
+          <p:cNvSpPr/>
+          <p:nvPr/>
+        </p:nvSpPr>
+        <p:spPr>
+          <a:xfrm>
+            <a:off x="5960803" y="2033511"/>
+            <a:ext cx="914400" cy="914400"/>
+          </a:xfrm>
+          <a:prstGeom prst="ellipse">
+            <a:avLst/>
+          </a:prstGeom>
+        </p:spPr>
+        <p:style>
+          <a:lnRef idx="2">
+            <a:schemeClr val="accent1">
+              <a:shade val="15000"/>
+            </a:schemeClr>
+          </a:lnRef>
+          <a:fillRef idx="1">
+            <a:schemeClr val="accent1"/>
+          </a:fillRef>
+          <a:effectRef idx="0">
+            <a:schemeClr val="accent1"/>
+          </a:effectRef>
+          <a:fontRef idx="minor">
+            <a:schemeClr val="lt1"/>
+          </a:fontRef>
+        </p:style>
+        <p:txBody>
+          <a:bodyPr rtlCol="0" anchor="ctr"/>
+          <a:lstStyle/>
+          <a:p>
+            <a:pPr algn="ctr"/>
+            <a:endParaRPr lang="pl-PL"/>
+          </a:p>
+        </p:txBody>
+      </p:sp>
+      <p:sp>
+        <p:nvSpPr>
+          <p:cNvPr id="38" name="Owal 37">
+            <a:extLst>
+              <a:ext uri="{FF2B5EF4-FFF2-40B4-BE49-F238E27FC236}">
+                <a16:creationId xmlns:a16="http://schemas.microsoft.com/office/drawing/2014/main" id="{DDDE7F28-CD4A-A28F-192D-A1BD70C6E9AC}"/>
+              </a:ext>
+            </a:extLst>
+          </p:cNvPr>
+          <p:cNvSpPr/>
+          <p:nvPr/>
+        </p:nvSpPr>
+        <p:spPr>
+          <a:xfrm>
+            <a:off x="7243916" y="2033511"/>
+            <a:ext cx="914400" cy="914400"/>
+          </a:xfrm>
+          <a:prstGeom prst="ellipse">
+            <a:avLst/>
+          </a:prstGeom>
+        </p:spPr>
+        <p:style>
+          <a:lnRef idx="2">
+            <a:schemeClr val="accent1">
+              <a:shade val="15000"/>
+            </a:schemeClr>
+          </a:lnRef>
+          <a:fillRef idx="1">
+            <a:schemeClr val="accent1"/>
+          </a:fillRef>
+          <a:effectRef idx="0">
+            <a:schemeClr val="accent1"/>
+          </a:effectRef>
+          <a:fontRef idx="minor">
+            <a:schemeClr val="lt1"/>
+          </a:fontRef>
+        </p:style>
+        <p:txBody>
+          <a:bodyPr rtlCol="0" anchor="ctr"/>
+          <a:lstStyle/>
+          <a:p>
+            <a:pPr algn="ctr"/>
+            <a:endParaRPr lang="pl-PL" dirty="0"/>
+          </a:p>
+        </p:txBody>
+      </p:sp>
+      <p:cxnSp>
+        <p:nvCxnSpPr>
+          <p:cNvPr id="43" name="Łącznik prosty 42">
+            <a:extLst>
+              <a:ext uri="{FF2B5EF4-FFF2-40B4-BE49-F238E27FC236}">
+                <a16:creationId xmlns:a16="http://schemas.microsoft.com/office/drawing/2014/main" id="{6407FD4B-09D5-34E4-8872-E6E7A47F226A}"/>
+              </a:ext>
+            </a:extLst>
+          </p:cNvPr>
+          <p:cNvCxnSpPr>
+            <a:cxnSpLocks/>
+            <a:stCxn id="34" idx="2"/>
+            <a:endCxn id="38" idx="6"/>
+          </p:cNvCxnSpPr>
+          <p:nvPr/>
+        </p:nvCxnSpPr>
+        <p:spPr>
+          <a:xfrm>
+            <a:off x="4629763" y="2490711"/>
+            <a:ext cx="3528553" cy="0"/>
+          </a:xfrm>
+          <a:prstGeom prst="line">
+            <a:avLst/>
+          </a:prstGeom>
+        </p:spPr>
+        <p:style>
+          <a:lnRef idx="2">
+            <a:schemeClr val="accent1"/>
+          </a:lnRef>
+          <a:fillRef idx="0">
+            <a:schemeClr val="accent1"/>
+          </a:fillRef>
+          <a:effectRef idx="1">
+            <a:schemeClr val="accent1"/>
+          </a:effectRef>
+          <a:fontRef idx="minor">
+            <a:schemeClr val="tx1"/>
+          </a:fontRef>
+        </p:style>
+      </p:cxnSp>
+      <p:cxnSp>
+        <p:nvCxnSpPr>
+          <p:cNvPr id="46" name="Łącznik prosty 45">
+            <a:extLst>
+              <a:ext uri="{FF2B5EF4-FFF2-40B4-BE49-F238E27FC236}">
+                <a16:creationId xmlns:a16="http://schemas.microsoft.com/office/drawing/2014/main" id="{86E13F02-5E05-47FF-AEEC-CEA45824139C}"/>
+              </a:ext>
+            </a:extLst>
+          </p:cNvPr>
+          <p:cNvCxnSpPr>
+            <a:cxnSpLocks/>
+          </p:cNvCxnSpPr>
+          <p:nvPr/>
+        </p:nvCxnSpPr>
+        <p:spPr>
+          <a:xfrm>
+            <a:off x="4656800" y="3819096"/>
+            <a:ext cx="3528553" cy="0"/>
+          </a:xfrm>
+          <a:prstGeom prst="line">
+            <a:avLst/>
+          </a:prstGeom>
+        </p:spPr>
+        <p:style>
+          <a:lnRef idx="2">
+            <a:schemeClr val="accent1"/>
+          </a:lnRef>
+          <a:fillRef idx="0">
+            <a:schemeClr val="accent1"/>
+          </a:fillRef>
+          <a:effectRef idx="1">
+            <a:schemeClr val="accent1"/>
+          </a:effectRef>
+          <a:fontRef idx="minor">
+            <a:schemeClr val="tx1"/>
+          </a:fontRef>
+        </p:style>
+      </p:cxnSp>
+      <p:cxnSp>
+        <p:nvCxnSpPr>
+          <p:cNvPr id="47" name="Łącznik prosty 46">
+            <a:extLst>
+              <a:ext uri="{FF2B5EF4-FFF2-40B4-BE49-F238E27FC236}">
+                <a16:creationId xmlns:a16="http://schemas.microsoft.com/office/drawing/2014/main" id="{F648A2CD-7095-A2BC-C530-D519B6F89D83}"/>
+              </a:ext>
+            </a:extLst>
+          </p:cNvPr>
+          <p:cNvCxnSpPr>
+            <a:cxnSpLocks/>
+          </p:cNvCxnSpPr>
+          <p:nvPr/>
+        </p:nvCxnSpPr>
+        <p:spPr>
+          <a:xfrm>
+            <a:off x="4656800" y="5126050"/>
+            <a:ext cx="3528553" cy="0"/>
+          </a:xfrm>
+          <a:prstGeom prst="line">
+            <a:avLst/>
+          </a:prstGeom>
+        </p:spPr>
+        <p:style>
+          <a:lnRef idx="2">
+            <a:schemeClr val="accent1"/>
+          </a:lnRef>
+          <a:fillRef idx="0">
+            <a:schemeClr val="accent1"/>
+          </a:fillRef>
+          <a:effectRef idx="1">
+            <a:schemeClr val="accent1"/>
+          </a:effectRef>
+          <a:fontRef idx="minor">
+            <a:schemeClr val="tx1"/>
+          </a:fontRef>
+        </p:style>
+      </p:cxnSp>
+      <p:cxnSp>
+        <p:nvCxnSpPr>
+          <p:cNvPr id="49" name="Łącznik prosty 48">
+            <a:extLst>
+              <a:ext uri="{FF2B5EF4-FFF2-40B4-BE49-F238E27FC236}">
+                <a16:creationId xmlns:a16="http://schemas.microsoft.com/office/drawing/2014/main" id="{F1CA3D66-2D96-B533-830A-8B6EDE07EC27}"/>
+              </a:ext>
+            </a:extLst>
+          </p:cNvPr>
+          <p:cNvCxnSpPr/>
+          <p:nvPr/>
+        </p:nvCxnSpPr>
+        <p:spPr>
+          <a:xfrm>
+            <a:off x="5073444" y="2213096"/>
+            <a:ext cx="0" cy="3211999"/>
+          </a:xfrm>
+          <a:prstGeom prst="line">
+            <a:avLst/>
+          </a:prstGeom>
+        </p:spPr>
+        <p:style>
+          <a:lnRef idx="2">
+            <a:schemeClr val="accent1"/>
+          </a:lnRef>
+          <a:fillRef idx="0">
+            <a:schemeClr val="accent1"/>
+          </a:fillRef>
+          <a:effectRef idx="1">
+            <a:schemeClr val="accent1"/>
+          </a:effectRef>
+          <a:fontRef idx="minor">
+            <a:schemeClr val="tx1"/>
+          </a:fontRef>
+        </p:style>
+      </p:cxnSp>
+      <p:cxnSp>
+        <p:nvCxnSpPr>
+          <p:cNvPr id="50" name="Łącznik prosty 49">
+            <a:extLst>
+              <a:ext uri="{FF2B5EF4-FFF2-40B4-BE49-F238E27FC236}">
+                <a16:creationId xmlns:a16="http://schemas.microsoft.com/office/drawing/2014/main" id="{8EA55B8F-2BF8-8B7E-4219-9347607A451B}"/>
+              </a:ext>
+            </a:extLst>
+          </p:cNvPr>
+          <p:cNvCxnSpPr/>
+          <p:nvPr/>
+        </p:nvCxnSpPr>
+        <p:spPr>
+          <a:xfrm>
+            <a:off x="6386050" y="2213096"/>
+            <a:ext cx="0" cy="3211999"/>
+          </a:xfrm>
+          <a:prstGeom prst="line">
+            <a:avLst/>
+          </a:prstGeom>
+        </p:spPr>
+        <p:style>
+          <a:lnRef idx="2">
+            <a:schemeClr val="accent1"/>
+          </a:lnRef>
+          <a:fillRef idx="0">
+            <a:schemeClr val="accent1"/>
+          </a:fillRef>
+          <a:effectRef idx="1">
+            <a:schemeClr val="accent1"/>
+          </a:effectRef>
+          <a:fontRef idx="minor">
+            <a:schemeClr val="tx1"/>
+          </a:fontRef>
+        </p:style>
+      </p:cxnSp>
+      <p:cxnSp>
+        <p:nvCxnSpPr>
+          <p:cNvPr id="51" name="Łącznik prosty 50">
+            <a:extLst>
+              <a:ext uri="{FF2B5EF4-FFF2-40B4-BE49-F238E27FC236}">
+                <a16:creationId xmlns:a16="http://schemas.microsoft.com/office/drawing/2014/main" id="{7D6EF537-030E-12CC-CDB6-9945A02360ED}"/>
+              </a:ext>
+            </a:extLst>
+          </p:cNvPr>
+          <p:cNvCxnSpPr/>
+          <p:nvPr/>
+        </p:nvCxnSpPr>
+        <p:spPr>
+          <a:xfrm>
+            <a:off x="7733070" y="2362891"/>
+            <a:ext cx="0" cy="3211999"/>
+          </a:xfrm>
+          <a:prstGeom prst="line">
+            <a:avLst/>
+          </a:prstGeom>
+        </p:spPr>
+        <p:style>
+          <a:lnRef idx="2">
+            <a:schemeClr val="accent1"/>
+          </a:lnRef>
+          <a:fillRef idx="0">
+            <a:schemeClr val="accent1"/>
+          </a:fillRef>
+          <a:effectRef idx="1">
+            <a:schemeClr val="accent1"/>
+          </a:effectRef>
+          <a:fontRef idx="minor">
+            <a:schemeClr val="tx1"/>
+          </a:fontRef>
+        </p:style>
+      </p:cxnSp>
+      <p:sp>
+        <p:nvSpPr>
+          <p:cNvPr id="52" name="pole tekstowe 51">
+            <a:extLst>
+              <a:ext uri="{FF2B5EF4-FFF2-40B4-BE49-F238E27FC236}">
+                <a16:creationId xmlns:a16="http://schemas.microsoft.com/office/drawing/2014/main" id="{309722FB-BF90-B681-CFCD-34B159C17C5E}"/>
               </a:ext>
             </a:extLst>
           </p:cNvPr>
@@ -6538,8 +9820,8 @@
         </p:nvSpPr>
         <p:spPr>
           <a:xfrm>
-            <a:off x="481262" y="5104004"/>
-            <a:ext cx="3100138" cy="1261884"/>
+            <a:off x="4549579" y="2278459"/>
+            <a:ext cx="1252831" cy="646331"/>
           </a:xfrm>
           <a:prstGeom prst="rect">
             <a:avLst/>
@@ -6547,32 +9829,552 @@
           <a:noFill/>
         </p:spPr>
         <p:txBody>
-          <a:bodyPr wrap="square" rtlCol="0" anchor="b">
+          <a:bodyPr wrap="square" rtlCol="0">
             <a:spAutoFit/>
           </a:bodyPr>
           <a:lstStyle/>
           <a:p>
             <a:r>
-              <a:rPr lang="pl-PL" sz="1900" u="sng" dirty="0"/>
-              <a:t>Parametry</a:t>
-            </a:r>
-          </a:p>
-          <a:p>
-            <a:r>
-              <a:rPr lang="pl-PL" sz="1900" dirty="0"/>
-              <a:t>liczba cech: 5</a:t>
-            </a:r>
-          </a:p>
-          <a:p>
-            <a:r>
-              <a:rPr lang="pl-PL" sz="1900" dirty="0"/>
-              <a:t>długość boku siatki: 10</a:t>
-            </a:r>
-          </a:p>
-          <a:p>
-            <a:r>
-              <a:rPr lang="pl-PL" sz="1900" dirty="0"/>
-              <a:t>liczba iteracji: &lt;300000</a:t>
+              <a:rPr lang="pl-PL" dirty="0">
+                <a:solidFill>
+                  <a:schemeClr val="bg1"/>
+                </a:solidFill>
+              </a:rPr>
+              <a:t> [1,1,5,7]</a:t>
+            </a:r>
+          </a:p>
+          <a:p>
+            <a:r>
+              <a:rPr lang="pl-PL" dirty="0">
+                <a:solidFill>
+                  <a:schemeClr val="bg1"/>
+                </a:solidFill>
+              </a:rPr>
+              <a:t>,</a:t>
+            </a:r>
+          </a:p>
+        </p:txBody>
+      </p:sp>
+      <p:sp>
+        <p:nvSpPr>
+          <p:cNvPr id="54" name="pole tekstowe 53">
+            <a:extLst>
+              <a:ext uri="{FF2B5EF4-FFF2-40B4-BE49-F238E27FC236}">
+                <a16:creationId xmlns:a16="http://schemas.microsoft.com/office/drawing/2014/main" id="{9959F5B0-C84A-CDC9-20CA-02D7CEC71B4C}"/>
+              </a:ext>
+            </a:extLst>
+          </p:cNvPr>
+          <p:cNvSpPr txBox="1"/>
+          <p:nvPr/>
+        </p:nvSpPr>
+        <p:spPr>
+          <a:xfrm>
+            <a:off x="5830667" y="2262766"/>
+            <a:ext cx="1252831" cy="646331"/>
+          </a:xfrm>
+          <a:prstGeom prst="rect">
+            <a:avLst/>
+          </a:prstGeom>
+          <a:noFill/>
+        </p:spPr>
+        <p:txBody>
+          <a:bodyPr wrap="square" rtlCol="0">
+            <a:spAutoFit/>
+          </a:bodyPr>
+          <a:lstStyle/>
+          <a:p>
+            <a:r>
+              <a:rPr lang="pl-PL" dirty="0">
+                <a:solidFill>
+                  <a:schemeClr val="bg1"/>
+                </a:solidFill>
+              </a:rPr>
+              <a:t> [1,0,5,</a:t>
+            </a:r>
+            <a:r>
+              <a:rPr lang="en-US" dirty="0">
+                <a:solidFill>
+                  <a:schemeClr val="bg1"/>
+                </a:solidFill>
+              </a:rPr>
+              <a:t>2</a:t>
+            </a:r>
+            <a:r>
+              <a:rPr lang="pl-PL" dirty="0">
+                <a:solidFill>
+                  <a:schemeClr val="bg1"/>
+                </a:solidFill>
+              </a:rPr>
+              <a:t>]</a:t>
+            </a:r>
+          </a:p>
+          <a:p>
+            <a:r>
+              <a:rPr lang="pl-PL" dirty="0">
+                <a:solidFill>
+                  <a:schemeClr val="bg1"/>
+                </a:solidFill>
+              </a:rPr>
+              <a:t>,</a:t>
+            </a:r>
+          </a:p>
+        </p:txBody>
+      </p:sp>
+      <p:sp>
+        <p:nvSpPr>
+          <p:cNvPr id="56" name="pole tekstowe 55">
+            <a:extLst>
+              <a:ext uri="{FF2B5EF4-FFF2-40B4-BE49-F238E27FC236}">
+                <a16:creationId xmlns:a16="http://schemas.microsoft.com/office/drawing/2014/main" id="{6B3EF203-68BC-F9F3-3900-FD35A8A3344E}"/>
+              </a:ext>
+            </a:extLst>
+          </p:cNvPr>
+          <p:cNvSpPr txBox="1"/>
+          <p:nvPr/>
+        </p:nvSpPr>
+        <p:spPr>
+          <a:xfrm>
+            <a:off x="4517089" y="3619396"/>
+            <a:ext cx="1252831" cy="646331"/>
+          </a:xfrm>
+          <a:prstGeom prst="rect">
+            <a:avLst/>
+          </a:prstGeom>
+          <a:noFill/>
+        </p:spPr>
+        <p:txBody>
+          <a:bodyPr wrap="square" rtlCol="0">
+            <a:spAutoFit/>
+          </a:bodyPr>
+          <a:lstStyle/>
+          <a:p>
+            <a:r>
+              <a:rPr lang="pl-PL" dirty="0">
+                <a:solidFill>
+                  <a:schemeClr val="bg1"/>
+                </a:solidFill>
+              </a:rPr>
+              <a:t> [7,7,5,</a:t>
+            </a:r>
+            <a:r>
+              <a:rPr lang="en-US" dirty="0">
+                <a:solidFill>
+                  <a:schemeClr val="bg1"/>
+                </a:solidFill>
+              </a:rPr>
+              <a:t>3</a:t>
+            </a:r>
+            <a:r>
+              <a:rPr lang="pl-PL" dirty="0">
+                <a:solidFill>
+                  <a:schemeClr val="bg1"/>
+                </a:solidFill>
+              </a:rPr>
+              <a:t>]</a:t>
+            </a:r>
+          </a:p>
+          <a:p>
+            <a:r>
+              <a:rPr lang="pl-PL" dirty="0">
+                <a:solidFill>
+                  <a:schemeClr val="bg1"/>
+                </a:solidFill>
+              </a:rPr>
+              <a:t>,</a:t>
+            </a:r>
+          </a:p>
+        </p:txBody>
+      </p:sp>
+      <p:sp>
+        <p:nvSpPr>
+          <p:cNvPr id="58" name="pole tekstowe 57">
+            <a:extLst>
+              <a:ext uri="{FF2B5EF4-FFF2-40B4-BE49-F238E27FC236}">
+                <a16:creationId xmlns:a16="http://schemas.microsoft.com/office/drawing/2014/main" id="{96988D90-C752-6A0F-74C2-B99175F4DAA8}"/>
+              </a:ext>
+            </a:extLst>
+          </p:cNvPr>
+          <p:cNvSpPr txBox="1"/>
+          <p:nvPr/>
+        </p:nvSpPr>
+        <p:spPr>
+          <a:xfrm>
+            <a:off x="7191989" y="2286338"/>
+            <a:ext cx="1252831" cy="646331"/>
+          </a:xfrm>
+          <a:prstGeom prst="rect">
+            <a:avLst/>
+          </a:prstGeom>
+          <a:noFill/>
+        </p:spPr>
+        <p:txBody>
+          <a:bodyPr wrap="square" rtlCol="0">
+            <a:spAutoFit/>
+          </a:bodyPr>
+          <a:lstStyle/>
+          <a:p>
+            <a:r>
+              <a:rPr lang="pl-PL" dirty="0">
+                <a:solidFill>
+                  <a:schemeClr val="bg1"/>
+                </a:solidFill>
+              </a:rPr>
+              <a:t> [2,0,1,1]</a:t>
+            </a:r>
+          </a:p>
+          <a:p>
+            <a:r>
+              <a:rPr lang="pl-PL" dirty="0">
+                <a:solidFill>
+                  <a:schemeClr val="bg1"/>
+                </a:solidFill>
+              </a:rPr>
+              <a:t>,</a:t>
+            </a:r>
+          </a:p>
+        </p:txBody>
+      </p:sp>
+      <p:sp>
+        <p:nvSpPr>
+          <p:cNvPr id="60" name="pole tekstowe 59">
+            <a:extLst>
+              <a:ext uri="{FF2B5EF4-FFF2-40B4-BE49-F238E27FC236}">
+                <a16:creationId xmlns:a16="http://schemas.microsoft.com/office/drawing/2014/main" id="{83623277-F3D3-2804-C0AF-7342EC2B349F}"/>
+              </a:ext>
+            </a:extLst>
+          </p:cNvPr>
+          <p:cNvSpPr txBox="1"/>
+          <p:nvPr/>
+        </p:nvSpPr>
+        <p:spPr>
+          <a:xfrm>
+            <a:off x="5844443" y="3591372"/>
+            <a:ext cx="1252831" cy="646331"/>
+          </a:xfrm>
+          <a:prstGeom prst="rect">
+            <a:avLst/>
+          </a:prstGeom>
+          <a:noFill/>
+        </p:spPr>
+        <p:txBody>
+          <a:bodyPr wrap="square" rtlCol="0">
+            <a:spAutoFit/>
+          </a:bodyPr>
+          <a:lstStyle/>
+          <a:p>
+            <a:r>
+              <a:rPr lang="pl-PL" dirty="0">
+                <a:solidFill>
+                  <a:schemeClr val="bg1"/>
+                </a:solidFill>
+              </a:rPr>
+              <a:t> [1,1,1,2]</a:t>
+            </a:r>
+          </a:p>
+          <a:p>
+            <a:r>
+              <a:rPr lang="pl-PL" dirty="0">
+                <a:solidFill>
+                  <a:schemeClr val="bg1"/>
+                </a:solidFill>
+              </a:rPr>
+              <a:t>,</a:t>
+            </a:r>
+          </a:p>
+        </p:txBody>
+      </p:sp>
+      <p:sp>
+        <p:nvSpPr>
+          <p:cNvPr id="62" name="pole tekstowe 61">
+            <a:extLst>
+              <a:ext uri="{FF2B5EF4-FFF2-40B4-BE49-F238E27FC236}">
+                <a16:creationId xmlns:a16="http://schemas.microsoft.com/office/drawing/2014/main" id="{DD1C364B-FF42-F778-4580-D19D7C36FB00}"/>
+              </a:ext>
+            </a:extLst>
+          </p:cNvPr>
+          <p:cNvSpPr txBox="1"/>
+          <p:nvPr/>
+        </p:nvSpPr>
+        <p:spPr>
+          <a:xfrm>
+            <a:off x="7200283" y="3585319"/>
+            <a:ext cx="1252831" cy="646331"/>
+          </a:xfrm>
+          <a:prstGeom prst="rect">
+            <a:avLst/>
+          </a:prstGeom>
+          <a:noFill/>
+        </p:spPr>
+        <p:txBody>
+          <a:bodyPr wrap="square" rtlCol="0">
+            <a:spAutoFit/>
+          </a:bodyPr>
+          <a:lstStyle/>
+          <a:p>
+            <a:r>
+              <a:rPr lang="pl-PL" dirty="0">
+                <a:solidFill>
+                  <a:schemeClr val="bg1"/>
+                </a:solidFill>
+              </a:rPr>
+              <a:t> [1,0,5,7]</a:t>
+            </a:r>
+          </a:p>
+          <a:p>
+            <a:r>
+              <a:rPr lang="pl-PL" dirty="0">
+                <a:solidFill>
+                  <a:schemeClr val="bg1"/>
+                </a:solidFill>
+              </a:rPr>
+              <a:t>,</a:t>
+            </a:r>
+          </a:p>
+        </p:txBody>
+      </p:sp>
+      <p:sp>
+        <p:nvSpPr>
+          <p:cNvPr id="64" name="pole tekstowe 63">
+            <a:extLst>
+              <a:ext uri="{FF2B5EF4-FFF2-40B4-BE49-F238E27FC236}">
+                <a16:creationId xmlns:a16="http://schemas.microsoft.com/office/drawing/2014/main" id="{FCB7F36D-CCC3-F548-F792-3E792B78B614}"/>
+              </a:ext>
+            </a:extLst>
+          </p:cNvPr>
+          <p:cNvSpPr txBox="1"/>
+          <p:nvPr/>
+        </p:nvSpPr>
+        <p:spPr>
+          <a:xfrm>
+            <a:off x="4577836" y="4928559"/>
+            <a:ext cx="1252831" cy="646331"/>
+          </a:xfrm>
+          <a:prstGeom prst="rect">
+            <a:avLst/>
+          </a:prstGeom>
+          <a:noFill/>
+        </p:spPr>
+        <p:txBody>
+          <a:bodyPr wrap="square" rtlCol="0">
+            <a:spAutoFit/>
+          </a:bodyPr>
+          <a:lstStyle/>
+          <a:p>
+            <a:r>
+              <a:rPr lang="pl-PL" dirty="0">
+                <a:solidFill>
+                  <a:schemeClr val="bg1"/>
+                </a:solidFill>
+              </a:rPr>
+              <a:t> [1,0,1,7]</a:t>
+            </a:r>
+          </a:p>
+          <a:p>
+            <a:r>
+              <a:rPr lang="pl-PL" dirty="0">
+                <a:solidFill>
+                  <a:schemeClr val="bg1"/>
+                </a:solidFill>
+              </a:rPr>
+              <a:t>,</a:t>
+            </a:r>
+          </a:p>
+        </p:txBody>
+      </p:sp>
+      <p:sp>
+        <p:nvSpPr>
+          <p:cNvPr id="66" name="pole tekstowe 65">
+            <a:extLst>
+              <a:ext uri="{FF2B5EF4-FFF2-40B4-BE49-F238E27FC236}">
+                <a16:creationId xmlns:a16="http://schemas.microsoft.com/office/drawing/2014/main" id="{2A9E1FAF-3F9C-824E-2518-955EBD07544F}"/>
+              </a:ext>
+            </a:extLst>
+          </p:cNvPr>
+          <p:cNvSpPr txBox="1"/>
+          <p:nvPr/>
+        </p:nvSpPr>
+        <p:spPr>
+          <a:xfrm>
+            <a:off x="5817466" y="4913701"/>
+            <a:ext cx="1252831" cy="646331"/>
+          </a:xfrm>
+          <a:prstGeom prst="rect">
+            <a:avLst/>
+          </a:prstGeom>
+          <a:noFill/>
+        </p:spPr>
+        <p:txBody>
+          <a:bodyPr wrap="square" rtlCol="0">
+            <a:spAutoFit/>
+          </a:bodyPr>
+          <a:lstStyle/>
+          <a:p>
+            <a:r>
+              <a:rPr lang="pl-PL" dirty="0">
+                <a:solidFill>
+                  <a:schemeClr val="bg1"/>
+                </a:solidFill>
+              </a:rPr>
+              <a:t> [1,4,5,7]</a:t>
+            </a:r>
+          </a:p>
+          <a:p>
+            <a:r>
+              <a:rPr lang="pl-PL" dirty="0">
+                <a:solidFill>
+                  <a:schemeClr val="bg1"/>
+                </a:solidFill>
+              </a:rPr>
+              <a:t>,</a:t>
+            </a:r>
+          </a:p>
+        </p:txBody>
+      </p:sp>
+      <p:sp>
+        <p:nvSpPr>
+          <p:cNvPr id="68" name="pole tekstowe 67">
+            <a:extLst>
+              <a:ext uri="{FF2B5EF4-FFF2-40B4-BE49-F238E27FC236}">
+                <a16:creationId xmlns:a16="http://schemas.microsoft.com/office/drawing/2014/main" id="{41D01D82-0805-5412-299A-F5A09ABB81CE}"/>
+              </a:ext>
+            </a:extLst>
+          </p:cNvPr>
+          <p:cNvSpPr txBox="1"/>
+          <p:nvPr/>
+        </p:nvSpPr>
+        <p:spPr>
+          <a:xfrm>
+            <a:off x="7191988" y="4928558"/>
+            <a:ext cx="1252831" cy="646331"/>
+          </a:xfrm>
+          <a:prstGeom prst="rect">
+            <a:avLst/>
+          </a:prstGeom>
+          <a:noFill/>
+        </p:spPr>
+        <p:txBody>
+          <a:bodyPr wrap="square" rtlCol="0">
+            <a:spAutoFit/>
+          </a:bodyPr>
+          <a:lstStyle/>
+          <a:p>
+            <a:r>
+              <a:rPr lang="pl-PL" dirty="0">
+                <a:solidFill>
+                  <a:schemeClr val="bg1"/>
+                </a:solidFill>
+              </a:rPr>
+              <a:t> [2,2,5,7]</a:t>
+            </a:r>
+          </a:p>
+          <a:p>
+            <a:r>
+              <a:rPr lang="pl-PL" dirty="0">
+                <a:solidFill>
+                  <a:schemeClr val="bg1"/>
+                </a:solidFill>
+              </a:rPr>
+              <a:t>,</a:t>
+            </a:r>
+          </a:p>
+        </p:txBody>
+      </p:sp>
+      <p:sp>
+        <p:nvSpPr>
+          <p:cNvPr id="24" name="Owal 23">
+            <a:extLst>
+              <a:ext uri="{FF2B5EF4-FFF2-40B4-BE49-F238E27FC236}">
+                <a16:creationId xmlns:a16="http://schemas.microsoft.com/office/drawing/2014/main" id="{6C45BF54-2488-9C22-E776-903DA5069686}"/>
+              </a:ext>
+            </a:extLst>
+          </p:cNvPr>
+          <p:cNvSpPr/>
+          <p:nvPr/>
+        </p:nvSpPr>
+        <p:spPr>
+          <a:xfrm>
+            <a:off x="5943599" y="3327483"/>
+            <a:ext cx="914400" cy="914400"/>
+          </a:xfrm>
+          <a:prstGeom prst="ellipse">
+            <a:avLst/>
+          </a:prstGeom>
+          <a:solidFill>
+            <a:schemeClr val="accent2">
+              <a:lumMod val="75000"/>
+            </a:schemeClr>
+          </a:solidFill>
+        </p:spPr>
+        <p:style>
+          <a:lnRef idx="2">
+            <a:schemeClr val="accent1">
+              <a:shade val="15000"/>
+            </a:schemeClr>
+          </a:lnRef>
+          <a:fillRef idx="1">
+            <a:schemeClr val="accent1"/>
+          </a:fillRef>
+          <a:effectRef idx="0">
+            <a:schemeClr val="accent1"/>
+          </a:effectRef>
+          <a:fontRef idx="minor">
+            <a:schemeClr val="lt1"/>
+          </a:fontRef>
+        </p:style>
+        <p:txBody>
+          <a:bodyPr rtlCol="0" anchor="ctr"/>
+          <a:lstStyle/>
+          <a:p>
+            <a:pPr algn="ctr"/>
+            <a:endParaRPr lang="pl-PL"/>
+          </a:p>
+        </p:txBody>
+      </p:sp>
+      <p:sp>
+        <p:nvSpPr>
+          <p:cNvPr id="5" name="pole tekstowe 4">
+            <a:extLst>
+              <a:ext uri="{FF2B5EF4-FFF2-40B4-BE49-F238E27FC236}">
+                <a16:creationId xmlns:a16="http://schemas.microsoft.com/office/drawing/2014/main" id="{39B7D9DC-EF69-40AC-8846-019845ACCDE5}"/>
+              </a:ext>
+            </a:extLst>
+          </p:cNvPr>
+          <p:cNvSpPr txBox="1"/>
+          <p:nvPr/>
+        </p:nvSpPr>
+        <p:spPr>
+          <a:xfrm>
+            <a:off x="5860612" y="3606205"/>
+            <a:ext cx="1252831" cy="646331"/>
+          </a:xfrm>
+          <a:prstGeom prst="rect">
+            <a:avLst/>
+          </a:prstGeom>
+          <a:noFill/>
+        </p:spPr>
+        <p:txBody>
+          <a:bodyPr wrap="square" rtlCol="0">
+            <a:spAutoFit/>
+          </a:bodyPr>
+          <a:lstStyle/>
+          <a:p>
+            <a:r>
+              <a:rPr lang="pl-PL" dirty="0">
+                <a:solidFill>
+                  <a:schemeClr val="bg1"/>
+                </a:solidFill>
+              </a:rPr>
+              <a:t> [1,1,1,2]</a:t>
+            </a:r>
+          </a:p>
+          <a:p>
+            <a:r>
+              <a:rPr lang="pl-PL" dirty="0">
+                <a:solidFill>
+                  <a:schemeClr val="bg1"/>
+                </a:solidFill>
+              </a:rPr>
+              <a:t>,</a:t>
             </a:r>
           </a:p>
         </p:txBody>
@@ -6580,7 +10382,7 @@
     </p:spTree>
     <p:extLst>
       <p:ext uri="{BB962C8B-B14F-4D97-AF65-F5344CB8AC3E}">
-        <p14:creationId xmlns:p14="http://schemas.microsoft.com/office/powerpoint/2010/main" val="2455441191"/>
+        <p14:creationId xmlns:p14="http://schemas.microsoft.com/office/powerpoint/2010/main" val="3105657409"/>
       </p:ext>
     </p:extLst>
   </p:cSld>
@@ -6595,13 +10397,7 @@
   <p:cSld>
     <p:spTree>
       <p:nvGrpSpPr>
-        <p:cNvPr id="1" name="">
-          <a:extLst>
-            <a:ext uri="{FF2B5EF4-FFF2-40B4-BE49-F238E27FC236}">
-              <a16:creationId xmlns:a16="http://schemas.microsoft.com/office/drawing/2014/main" id="{3AEBEEFD-4777-E5BE-A441-F2ED6C94E4B5}"/>
-            </a:ext>
-          </a:extLst>
-        </p:cNvPr>
+        <p:cNvPr id="1" name=""/>
         <p:cNvGrpSpPr/>
         <p:nvPr/>
       </p:nvGrpSpPr>
@@ -6613,48 +10409,467 @@
           <a:chExt cx="0" cy="0"/>
         </a:xfrm>
       </p:grpSpPr>
-      <p:pic>
-        <p:nvPicPr>
-          <p:cNvPr id="4" name="Obraz 3">
-            <a:extLst>
-              <a:ext uri="{FF2B5EF4-FFF2-40B4-BE49-F238E27FC236}">
-                <a16:creationId xmlns:a16="http://schemas.microsoft.com/office/drawing/2014/main" id="{8AA74A69-C74E-CA5A-4969-7D4FF901DFA8}"/>
-              </a:ext>
-            </a:extLst>
-          </p:cNvPr>
-          <p:cNvPicPr>
-            <a:picLocks noChangeAspect="1"/>
-          </p:cNvPicPr>
+      <p:sp>
+        <p:nvSpPr>
+          <p:cNvPr id="2" name="Tytuł 1">
+            <a:extLst>
+              <a:ext uri="{FF2B5EF4-FFF2-40B4-BE49-F238E27FC236}">
+                <a16:creationId xmlns:a16="http://schemas.microsoft.com/office/drawing/2014/main" id="{64710E48-1FEB-75E1-9FF5-BF24E36679CE}"/>
+              </a:ext>
+            </a:extLst>
+          </p:cNvPr>
+          <p:cNvSpPr>
+            <a:spLocks noGrp="1"/>
+          </p:cNvSpPr>
+          <p:nvPr>
+            <p:ph type="title"/>
+          </p:nvPr>
+        </p:nvSpPr>
+        <p:spPr/>
+        <p:txBody>
+          <a:bodyPr/>
+          <a:lstStyle/>
+          <a:p>
+            <a:r>
+              <a:rPr lang="pl-PL" dirty="0"/>
+              <a:t>Interakcje</a:t>
+            </a:r>
+          </a:p>
+        </p:txBody>
+      </p:sp>
+      <p:sp>
+        <p:nvSpPr>
+          <p:cNvPr id="9" name="Owal 8">
+            <a:extLst>
+              <a:ext uri="{FF2B5EF4-FFF2-40B4-BE49-F238E27FC236}">
+                <a16:creationId xmlns:a16="http://schemas.microsoft.com/office/drawing/2014/main" id="{131B6BCD-3E54-BB78-E755-BCA7545685E5}"/>
+              </a:ext>
+            </a:extLst>
+          </p:cNvPr>
+          <p:cNvSpPr/>
           <p:nvPr/>
-        </p:nvPicPr>
-        <p:blipFill>
-          <a:blip r:embed="rId2">
-            <a:extLst>
-              <a:ext uri="{28A0092B-C50C-407E-A947-70E740481C1C}">
-                <a14:useLocalDpi xmlns:a14="http://schemas.microsoft.com/office/drawing/2010/main" val="0"/>
-              </a:ext>
-            </a:extLst>
-          </a:blip>
-          <a:stretch>
-            <a:fillRect/>
-          </a:stretch>
-        </p:blipFill>
-        <p:spPr>
-          <a:xfrm>
-            <a:off x="2785790" y="144378"/>
-            <a:ext cx="8758990" cy="6569243"/>
-          </a:xfrm>
-          <a:prstGeom prst="rect">
+        </p:nvSpPr>
+        <p:spPr>
+          <a:xfrm>
+            <a:off x="5538019" y="3293806"/>
+            <a:ext cx="1115962" cy="1115962"/>
+          </a:xfrm>
+          <a:prstGeom prst="ellipse">
             <a:avLst/>
           </a:prstGeom>
-        </p:spPr>
-      </p:pic>
-      <p:sp>
-        <p:nvSpPr>
-          <p:cNvPr id="3" name="pole tekstowe 2">
-            <a:extLst>
-              <a:ext uri="{FF2B5EF4-FFF2-40B4-BE49-F238E27FC236}">
-                <a16:creationId xmlns:a16="http://schemas.microsoft.com/office/drawing/2014/main" id="{335EFD6F-418E-DEBF-4D57-0A479983EECB}"/>
+          <a:solidFill>
+            <a:schemeClr val="accent2">
+              <a:lumMod val="75000"/>
+            </a:schemeClr>
+          </a:solidFill>
+        </p:spPr>
+        <p:style>
+          <a:lnRef idx="2">
+            <a:schemeClr val="accent1">
+              <a:shade val="15000"/>
+            </a:schemeClr>
+          </a:lnRef>
+          <a:fillRef idx="1">
+            <a:schemeClr val="accent1"/>
+          </a:fillRef>
+          <a:effectRef idx="0">
+            <a:schemeClr val="accent1"/>
+          </a:effectRef>
+          <a:fontRef idx="minor">
+            <a:schemeClr val="lt1"/>
+          </a:fontRef>
+        </p:style>
+        <p:txBody>
+          <a:bodyPr rtlCol="0" anchor="ctr"/>
+          <a:lstStyle/>
+          <a:p>
+            <a:pPr algn="ctr"/>
+            <a:endParaRPr lang="pl-PL"/>
+          </a:p>
+        </p:txBody>
+      </p:sp>
+      <p:sp>
+        <p:nvSpPr>
+          <p:cNvPr id="11" name="Owal 10">
+            <a:extLst>
+              <a:ext uri="{FF2B5EF4-FFF2-40B4-BE49-F238E27FC236}">
+                <a16:creationId xmlns:a16="http://schemas.microsoft.com/office/drawing/2014/main" id="{612D9946-9FCE-AD9C-2C98-039CCFD8A53E}"/>
+              </a:ext>
+            </a:extLst>
+          </p:cNvPr>
+          <p:cNvSpPr/>
+          <p:nvPr/>
+        </p:nvSpPr>
+        <p:spPr>
+          <a:xfrm>
+            <a:off x="2499852" y="3293806"/>
+            <a:ext cx="1115962" cy="1115962"/>
+          </a:xfrm>
+          <a:prstGeom prst="ellipse">
+            <a:avLst/>
+          </a:prstGeom>
+        </p:spPr>
+        <p:style>
+          <a:lnRef idx="2">
+            <a:schemeClr val="accent1">
+              <a:shade val="15000"/>
+            </a:schemeClr>
+          </a:lnRef>
+          <a:fillRef idx="1">
+            <a:schemeClr val="accent1"/>
+          </a:fillRef>
+          <a:effectRef idx="0">
+            <a:schemeClr val="accent1"/>
+          </a:effectRef>
+          <a:fontRef idx="minor">
+            <a:schemeClr val="lt1"/>
+          </a:fontRef>
+        </p:style>
+        <p:txBody>
+          <a:bodyPr rtlCol="0" anchor="ctr"/>
+          <a:lstStyle/>
+          <a:p>
+            <a:pPr algn="ctr"/>
+            <a:endParaRPr lang="pl-PL"/>
+          </a:p>
+        </p:txBody>
+      </p:sp>
+      <p:sp>
+        <p:nvSpPr>
+          <p:cNvPr id="13" name="Owal 12">
+            <a:extLst>
+              <a:ext uri="{FF2B5EF4-FFF2-40B4-BE49-F238E27FC236}">
+                <a16:creationId xmlns:a16="http://schemas.microsoft.com/office/drawing/2014/main" id="{AB27A452-A91D-34BB-F858-46BFD3DE416A}"/>
+              </a:ext>
+            </a:extLst>
+          </p:cNvPr>
+          <p:cNvSpPr/>
+          <p:nvPr/>
+        </p:nvSpPr>
+        <p:spPr>
+          <a:xfrm>
+            <a:off x="8576186" y="3293806"/>
+            <a:ext cx="1115962" cy="1115962"/>
+          </a:xfrm>
+          <a:prstGeom prst="ellipse">
+            <a:avLst/>
+          </a:prstGeom>
+        </p:spPr>
+        <p:style>
+          <a:lnRef idx="2">
+            <a:schemeClr val="accent1">
+              <a:shade val="15000"/>
+            </a:schemeClr>
+          </a:lnRef>
+          <a:fillRef idx="1">
+            <a:schemeClr val="accent1"/>
+          </a:fillRef>
+          <a:effectRef idx="0">
+            <a:schemeClr val="accent1"/>
+          </a:effectRef>
+          <a:fontRef idx="minor">
+            <a:schemeClr val="lt1"/>
+          </a:fontRef>
+        </p:style>
+        <p:txBody>
+          <a:bodyPr rtlCol="0" anchor="ctr"/>
+          <a:lstStyle/>
+          <a:p>
+            <a:pPr algn="ctr"/>
+            <a:endParaRPr lang="pl-PL" dirty="0"/>
+          </a:p>
+        </p:txBody>
+      </p:sp>
+      <p:sp>
+        <p:nvSpPr>
+          <p:cNvPr id="15" name="Owal 14">
+            <a:extLst>
+              <a:ext uri="{FF2B5EF4-FFF2-40B4-BE49-F238E27FC236}">
+                <a16:creationId xmlns:a16="http://schemas.microsoft.com/office/drawing/2014/main" id="{D9242B72-DCF4-C8F1-FEDE-135C0B2699D5}"/>
+              </a:ext>
+            </a:extLst>
+          </p:cNvPr>
+          <p:cNvSpPr/>
+          <p:nvPr/>
+        </p:nvSpPr>
+        <p:spPr>
+          <a:xfrm>
+            <a:off x="5538019" y="5376913"/>
+            <a:ext cx="1115962" cy="1115962"/>
+          </a:xfrm>
+          <a:prstGeom prst="ellipse">
+            <a:avLst/>
+          </a:prstGeom>
+        </p:spPr>
+        <p:style>
+          <a:lnRef idx="2">
+            <a:schemeClr val="accent1">
+              <a:shade val="15000"/>
+            </a:schemeClr>
+          </a:lnRef>
+          <a:fillRef idx="1">
+            <a:schemeClr val="accent1"/>
+          </a:fillRef>
+          <a:effectRef idx="0">
+            <a:schemeClr val="accent1"/>
+          </a:effectRef>
+          <a:fontRef idx="minor">
+            <a:schemeClr val="lt1"/>
+          </a:fontRef>
+        </p:style>
+        <p:txBody>
+          <a:bodyPr rtlCol="0" anchor="ctr"/>
+          <a:lstStyle/>
+          <a:p>
+            <a:pPr algn="ctr"/>
+            <a:endParaRPr lang="pl-PL"/>
+          </a:p>
+        </p:txBody>
+      </p:sp>
+      <p:sp>
+        <p:nvSpPr>
+          <p:cNvPr id="17" name="Owal 16">
+            <a:extLst>
+              <a:ext uri="{FF2B5EF4-FFF2-40B4-BE49-F238E27FC236}">
+                <a16:creationId xmlns:a16="http://schemas.microsoft.com/office/drawing/2014/main" id="{8ADAF726-B1A5-29E0-0454-35317E6C03BE}"/>
+              </a:ext>
+            </a:extLst>
+          </p:cNvPr>
+          <p:cNvSpPr/>
+          <p:nvPr/>
+        </p:nvSpPr>
+        <p:spPr>
+          <a:xfrm>
+            <a:off x="5538019" y="1210699"/>
+            <a:ext cx="1115962" cy="1115962"/>
+          </a:xfrm>
+          <a:prstGeom prst="ellipse">
+            <a:avLst/>
+          </a:prstGeom>
+        </p:spPr>
+        <p:style>
+          <a:lnRef idx="2">
+            <a:schemeClr val="accent1">
+              <a:shade val="15000"/>
+            </a:schemeClr>
+          </a:lnRef>
+          <a:fillRef idx="1">
+            <a:schemeClr val="accent1"/>
+          </a:fillRef>
+          <a:effectRef idx="0">
+            <a:schemeClr val="accent1"/>
+          </a:effectRef>
+          <a:fontRef idx="minor">
+            <a:schemeClr val="lt1"/>
+          </a:fontRef>
+        </p:style>
+        <p:txBody>
+          <a:bodyPr rtlCol="0" anchor="ctr"/>
+          <a:lstStyle/>
+          <a:p>
+            <a:pPr algn="ctr"/>
+            <a:endParaRPr lang="pl-PL"/>
+          </a:p>
+        </p:txBody>
+      </p:sp>
+      <p:cxnSp>
+        <p:nvCxnSpPr>
+          <p:cNvPr id="19" name="Łącznik prosty ze strzałką 18">
+            <a:extLst>
+              <a:ext uri="{FF2B5EF4-FFF2-40B4-BE49-F238E27FC236}">
+                <a16:creationId xmlns:a16="http://schemas.microsoft.com/office/drawing/2014/main" id="{3906933A-48B1-4DE6-31F8-ED6E37B3FB43}"/>
+              </a:ext>
+            </a:extLst>
+          </p:cNvPr>
+          <p:cNvCxnSpPr>
+            <a:stCxn id="11" idx="6"/>
+            <a:endCxn id="9" idx="2"/>
+          </p:cNvCxnSpPr>
+          <p:nvPr/>
+        </p:nvCxnSpPr>
+        <p:spPr>
+          <a:xfrm>
+            <a:off x="3615814" y="3851787"/>
+            <a:ext cx="1922205" cy="0"/>
+          </a:xfrm>
+          <a:prstGeom prst="straightConnector1">
+            <a:avLst/>
+          </a:prstGeom>
+          <a:ln w="19050" cap="flat" cmpd="sng" algn="ctr">
+            <a:solidFill>
+              <a:schemeClr val="accent1"/>
+            </a:solidFill>
+            <a:prstDash val="solid"/>
+            <a:round/>
+            <a:headEnd type="none" w="med" len="med"/>
+            <a:tailEnd type="arrow" w="med" len="med"/>
+          </a:ln>
+        </p:spPr>
+        <p:style>
+          <a:lnRef idx="0">
+            <a:scrgbClr r="0" g="0" b="0"/>
+          </a:lnRef>
+          <a:fillRef idx="0">
+            <a:scrgbClr r="0" g="0" b="0"/>
+          </a:fillRef>
+          <a:effectRef idx="0">
+            <a:scrgbClr r="0" g="0" b="0"/>
+          </a:effectRef>
+          <a:fontRef idx="minor">
+            <a:schemeClr val="tx1"/>
+          </a:fontRef>
+        </p:style>
+      </p:cxnSp>
+      <p:cxnSp>
+        <p:nvCxnSpPr>
+          <p:cNvPr id="21" name="Łącznik prosty ze strzałką 20">
+            <a:extLst>
+              <a:ext uri="{FF2B5EF4-FFF2-40B4-BE49-F238E27FC236}">
+                <a16:creationId xmlns:a16="http://schemas.microsoft.com/office/drawing/2014/main" id="{2B3C4987-50BD-3C34-CC12-4DDC7B419FA9}"/>
+              </a:ext>
+            </a:extLst>
+          </p:cNvPr>
+          <p:cNvCxnSpPr>
+            <a:stCxn id="17" idx="4"/>
+            <a:endCxn id="9" idx="0"/>
+          </p:cNvCxnSpPr>
+          <p:nvPr/>
+        </p:nvCxnSpPr>
+        <p:spPr>
+          <a:xfrm>
+            <a:off x="6096000" y="2326661"/>
+            <a:ext cx="0" cy="967145"/>
+          </a:xfrm>
+          <a:prstGeom prst="straightConnector1">
+            <a:avLst/>
+          </a:prstGeom>
+          <a:ln w="19050" cap="flat" cmpd="sng" algn="ctr">
+            <a:solidFill>
+              <a:schemeClr val="accent1"/>
+            </a:solidFill>
+            <a:prstDash val="solid"/>
+            <a:round/>
+            <a:headEnd type="none" w="med" len="med"/>
+            <a:tailEnd type="arrow" w="med" len="med"/>
+          </a:ln>
+        </p:spPr>
+        <p:style>
+          <a:lnRef idx="0">
+            <a:scrgbClr r="0" g="0" b="0"/>
+          </a:lnRef>
+          <a:fillRef idx="0">
+            <a:scrgbClr r="0" g="0" b="0"/>
+          </a:fillRef>
+          <a:effectRef idx="0">
+            <a:scrgbClr r="0" g="0" b="0"/>
+          </a:effectRef>
+          <a:fontRef idx="minor">
+            <a:schemeClr val="tx1"/>
+          </a:fontRef>
+        </p:style>
+      </p:cxnSp>
+      <p:cxnSp>
+        <p:nvCxnSpPr>
+          <p:cNvPr id="23" name="Łącznik prosty ze strzałką 22">
+            <a:extLst>
+              <a:ext uri="{FF2B5EF4-FFF2-40B4-BE49-F238E27FC236}">
+                <a16:creationId xmlns:a16="http://schemas.microsoft.com/office/drawing/2014/main" id="{346C79FC-4A6C-CAB9-0115-6F015A081528}"/>
+              </a:ext>
+            </a:extLst>
+          </p:cNvPr>
+          <p:cNvCxnSpPr>
+            <a:stCxn id="15" idx="0"/>
+            <a:endCxn id="9" idx="4"/>
+          </p:cNvCxnSpPr>
+          <p:nvPr/>
+        </p:nvCxnSpPr>
+        <p:spPr>
+          <a:xfrm flipV="1">
+            <a:off x="6096000" y="4409768"/>
+            <a:ext cx="0" cy="967145"/>
+          </a:xfrm>
+          <a:prstGeom prst="straightConnector1">
+            <a:avLst/>
+          </a:prstGeom>
+          <a:ln w="19050" cap="flat" cmpd="sng" algn="ctr">
+            <a:solidFill>
+              <a:schemeClr val="accent1"/>
+            </a:solidFill>
+            <a:prstDash val="solid"/>
+            <a:round/>
+            <a:headEnd type="none" w="med" len="med"/>
+            <a:tailEnd type="arrow" w="med" len="med"/>
+          </a:ln>
+        </p:spPr>
+        <p:style>
+          <a:lnRef idx="0">
+            <a:scrgbClr r="0" g="0" b="0"/>
+          </a:lnRef>
+          <a:fillRef idx="0">
+            <a:scrgbClr r="0" g="0" b="0"/>
+          </a:fillRef>
+          <a:effectRef idx="0">
+            <a:scrgbClr r="0" g="0" b="0"/>
+          </a:effectRef>
+          <a:fontRef idx="minor">
+            <a:schemeClr val="tx1"/>
+          </a:fontRef>
+        </p:style>
+      </p:cxnSp>
+      <p:cxnSp>
+        <p:nvCxnSpPr>
+          <p:cNvPr id="25" name="Łącznik prosty ze strzałką 24">
+            <a:extLst>
+              <a:ext uri="{FF2B5EF4-FFF2-40B4-BE49-F238E27FC236}">
+                <a16:creationId xmlns:a16="http://schemas.microsoft.com/office/drawing/2014/main" id="{53D9BAA0-6220-6395-B510-807358D00E4F}"/>
+              </a:ext>
+            </a:extLst>
+          </p:cNvPr>
+          <p:cNvCxnSpPr>
+            <a:stCxn id="13" idx="2"/>
+            <a:endCxn id="9" idx="6"/>
+          </p:cNvCxnSpPr>
+          <p:nvPr/>
+        </p:nvCxnSpPr>
+        <p:spPr>
+          <a:xfrm flipH="1">
+            <a:off x="6653981" y="3851787"/>
+            <a:ext cx="1922205" cy="0"/>
+          </a:xfrm>
+          <a:prstGeom prst="straightConnector1">
+            <a:avLst/>
+          </a:prstGeom>
+          <a:ln w="19050" cap="flat" cmpd="sng" algn="ctr">
+            <a:solidFill>
+              <a:schemeClr val="accent1"/>
+            </a:solidFill>
+            <a:prstDash val="solid"/>
+            <a:round/>
+            <a:headEnd type="none" w="med" len="med"/>
+            <a:tailEnd type="arrow" w="med" len="med"/>
+          </a:ln>
+        </p:spPr>
+        <p:style>
+          <a:lnRef idx="0">
+            <a:scrgbClr r="0" g="0" b="0"/>
+          </a:lnRef>
+          <a:fillRef idx="0">
+            <a:scrgbClr r="0" g="0" b="0"/>
+          </a:fillRef>
+          <a:effectRef idx="0">
+            <a:scrgbClr r="0" g="0" b="0"/>
+          </a:effectRef>
+          <a:fontRef idx="minor">
+            <a:schemeClr val="tx1"/>
+          </a:fontRef>
+        </p:style>
+      </p:cxnSp>
+      <p:sp>
+        <p:nvSpPr>
+          <p:cNvPr id="30" name="pole tekstowe 29">
+            <a:extLst>
+              <a:ext uri="{FF2B5EF4-FFF2-40B4-BE49-F238E27FC236}">
+                <a16:creationId xmlns:a16="http://schemas.microsoft.com/office/drawing/2014/main" id="{5548D2F4-4961-0379-E518-D19D4856086D}"/>
               </a:ext>
             </a:extLst>
           </p:cNvPr>
@@ -6663,8 +10878,8 @@
         </p:nvSpPr>
         <p:spPr>
           <a:xfrm>
-            <a:off x="481262" y="5104004"/>
-            <a:ext cx="3100138" cy="1261884"/>
+            <a:off x="5538019" y="3667121"/>
+            <a:ext cx="1115962" cy="369332"/>
           </a:xfrm>
           <a:prstGeom prst="rect">
             <a:avLst/>
@@ -6672,72 +10887,28 @@
           <a:noFill/>
         </p:spPr>
         <p:txBody>
-          <a:bodyPr wrap="square" rtlCol="0" anchor="b">
+          <a:bodyPr wrap="square" rtlCol="0">
             <a:spAutoFit/>
           </a:bodyPr>
           <a:lstStyle/>
           <a:p>
             <a:r>
-              <a:rPr lang="pl-PL" sz="1900" u="sng" dirty="0"/>
-              <a:t>Parametry</a:t>
-            </a:r>
-          </a:p>
-          <a:p>
-            <a:r>
-              <a:rPr lang="pl-PL" sz="1900" dirty="0"/>
-              <a:t>liczba cech: 5</a:t>
-            </a:r>
-          </a:p>
-          <a:p>
-            <a:r>
-              <a:rPr lang="pl-PL" sz="1900" dirty="0"/>
-              <a:t>długość boku siatki: 10</a:t>
-            </a:r>
-          </a:p>
-          <a:p>
-            <a:r>
-              <a:rPr lang="pl-PL" sz="1900" dirty="0"/>
-              <a:t>liczba iteracji: &lt;400000</a:t>
-            </a:r>
-          </a:p>
-        </p:txBody>
-      </p:sp>
-      <p:pic>
-        <p:nvPicPr>
-          <p:cNvPr id="6" name="Obraz 5">
-            <a:extLst>
-              <a:ext uri="{FF2B5EF4-FFF2-40B4-BE49-F238E27FC236}">
-                <a16:creationId xmlns:a16="http://schemas.microsoft.com/office/drawing/2014/main" id="{BD0C09B4-26CE-4575-BDA9-DE177BA3BAD9}"/>
-              </a:ext>
-            </a:extLst>
-          </p:cNvPr>
-          <p:cNvPicPr>
-            <a:picLocks noChangeAspect="1"/>
-          </p:cNvPicPr>
-          <p:nvPr/>
-        </p:nvPicPr>
-        <p:blipFill>
-          <a:blip r:embed="rId3"/>
-          <a:stretch>
-            <a:fillRect/>
-          </a:stretch>
-        </p:blipFill>
-        <p:spPr>
-          <a:xfrm>
-            <a:off x="5651792" y="304800"/>
-            <a:ext cx="3877218" cy="288364"/>
-          </a:xfrm>
-          <a:prstGeom prst="rect">
-            <a:avLst/>
-          </a:prstGeom>
-        </p:spPr>
-      </p:pic>
-      <p:sp>
-        <p:nvSpPr>
-          <p:cNvPr id="7" name="pole tekstowe 6">
-            <a:extLst>
-              <a:ext uri="{FF2B5EF4-FFF2-40B4-BE49-F238E27FC236}">
-                <a16:creationId xmlns:a16="http://schemas.microsoft.com/office/drawing/2014/main" id="{55926E9D-9C6D-461D-CA0A-C9934EBC198E}"/>
+              <a:rPr lang="pl-PL" dirty="0">
+                <a:solidFill>
+                  <a:schemeClr val="bg1"/>
+                </a:solidFill>
+              </a:rPr>
+              <a:t> [1,1,1,2]</a:t>
+            </a:r>
+          </a:p>
+        </p:txBody>
+      </p:sp>
+      <p:sp>
+        <p:nvSpPr>
+          <p:cNvPr id="32" name="pole tekstowe 31">
+            <a:extLst>
+              <a:ext uri="{FF2B5EF4-FFF2-40B4-BE49-F238E27FC236}">
+                <a16:creationId xmlns:a16="http://schemas.microsoft.com/office/drawing/2014/main" id="{6D3C2D8F-CCC2-81F0-C64D-FB2CC4361B4C}"/>
               </a:ext>
             </a:extLst>
           </p:cNvPr>
@@ -6746,8 +10917,8 @@
         </p:nvSpPr>
         <p:spPr>
           <a:xfrm>
-            <a:off x="3446284" y="288758"/>
-            <a:ext cx="8288233" cy="384721"/>
+            <a:off x="2499852" y="3625334"/>
+            <a:ext cx="1252831" cy="369332"/>
           </a:xfrm>
           <a:prstGeom prst="rect">
             <a:avLst/>
@@ -6761,16 +10932,313 @@
           <a:lstStyle/>
           <a:p>
             <a:r>
-              <a:rPr lang="pl-PL" sz="1900" dirty="0"/>
-              <a:t>Unormowana wielkość największego regionu w zależności od liczby wariantów</a:t>
-            </a:r>
+              <a:rPr lang="pl-PL" dirty="0">
+                <a:solidFill>
+                  <a:schemeClr val="bg1"/>
+                </a:solidFill>
+              </a:rPr>
+              <a:t> [7,7,5,</a:t>
+            </a:r>
+            <a:r>
+              <a:rPr lang="en-US" dirty="0">
+                <a:solidFill>
+                  <a:schemeClr val="bg1"/>
+                </a:solidFill>
+              </a:rPr>
+              <a:t>3</a:t>
+            </a:r>
+            <a:r>
+              <a:rPr lang="pl-PL" dirty="0">
+                <a:solidFill>
+                  <a:schemeClr val="bg1"/>
+                </a:solidFill>
+              </a:rPr>
+              <a:t>]</a:t>
+            </a:r>
+          </a:p>
+        </p:txBody>
+      </p:sp>
+      <p:sp>
+        <p:nvSpPr>
+          <p:cNvPr id="34" name="pole tekstowe 33">
+            <a:extLst>
+              <a:ext uri="{FF2B5EF4-FFF2-40B4-BE49-F238E27FC236}">
+                <a16:creationId xmlns:a16="http://schemas.microsoft.com/office/drawing/2014/main" id="{08764B5B-577A-C2E4-C28D-F42F4BB0365F}"/>
+              </a:ext>
+            </a:extLst>
+          </p:cNvPr>
+          <p:cNvSpPr txBox="1"/>
+          <p:nvPr/>
+        </p:nvSpPr>
+        <p:spPr>
+          <a:xfrm>
+            <a:off x="8576186" y="3667121"/>
+            <a:ext cx="1252831" cy="369332"/>
+          </a:xfrm>
+          <a:prstGeom prst="rect">
+            <a:avLst/>
+          </a:prstGeom>
+          <a:noFill/>
+        </p:spPr>
+        <p:txBody>
+          <a:bodyPr wrap="square" rtlCol="0">
+            <a:spAutoFit/>
+          </a:bodyPr>
+          <a:lstStyle/>
+          <a:p>
+            <a:r>
+              <a:rPr lang="pl-PL" dirty="0">
+                <a:solidFill>
+                  <a:schemeClr val="bg1"/>
+                </a:solidFill>
+              </a:rPr>
+              <a:t> [1,0,5,7]</a:t>
+            </a:r>
+          </a:p>
+        </p:txBody>
+      </p:sp>
+      <p:sp>
+        <p:nvSpPr>
+          <p:cNvPr id="36" name="pole tekstowe 35">
+            <a:extLst>
+              <a:ext uri="{FF2B5EF4-FFF2-40B4-BE49-F238E27FC236}">
+                <a16:creationId xmlns:a16="http://schemas.microsoft.com/office/drawing/2014/main" id="{84F7A12F-81EC-6324-76CE-47E4C6116F04}"/>
+              </a:ext>
+            </a:extLst>
+          </p:cNvPr>
+          <p:cNvSpPr txBox="1"/>
+          <p:nvPr/>
+        </p:nvSpPr>
+        <p:spPr>
+          <a:xfrm>
+            <a:off x="5538019" y="5750228"/>
+            <a:ext cx="1252831" cy="369332"/>
+          </a:xfrm>
+          <a:prstGeom prst="rect">
+            <a:avLst/>
+          </a:prstGeom>
+          <a:noFill/>
+        </p:spPr>
+        <p:txBody>
+          <a:bodyPr wrap="square" rtlCol="0">
+            <a:spAutoFit/>
+          </a:bodyPr>
+          <a:lstStyle/>
+          <a:p>
+            <a:r>
+              <a:rPr lang="pl-PL" dirty="0">
+                <a:solidFill>
+                  <a:schemeClr val="bg1"/>
+                </a:solidFill>
+              </a:rPr>
+              <a:t> [1,4,5,7]</a:t>
+            </a:r>
+          </a:p>
+        </p:txBody>
+      </p:sp>
+      <p:sp>
+        <p:nvSpPr>
+          <p:cNvPr id="38" name="pole tekstowe 37">
+            <a:extLst>
+              <a:ext uri="{FF2B5EF4-FFF2-40B4-BE49-F238E27FC236}">
+                <a16:creationId xmlns:a16="http://schemas.microsoft.com/office/drawing/2014/main" id="{416B634B-CA48-13E1-484B-0FFAA0AA75DC}"/>
+              </a:ext>
+            </a:extLst>
+          </p:cNvPr>
+          <p:cNvSpPr txBox="1"/>
+          <p:nvPr/>
+        </p:nvSpPr>
+        <p:spPr>
+          <a:xfrm>
+            <a:off x="5555226" y="1584014"/>
+            <a:ext cx="1252831" cy="369332"/>
+          </a:xfrm>
+          <a:prstGeom prst="rect">
+            <a:avLst/>
+          </a:prstGeom>
+          <a:noFill/>
+        </p:spPr>
+        <p:txBody>
+          <a:bodyPr wrap="square" rtlCol="0">
+            <a:spAutoFit/>
+          </a:bodyPr>
+          <a:lstStyle/>
+          <a:p>
+            <a:r>
+              <a:rPr lang="pl-PL" dirty="0">
+                <a:solidFill>
+                  <a:schemeClr val="bg1"/>
+                </a:solidFill>
+              </a:rPr>
+              <a:t> [1,0,5,</a:t>
+            </a:r>
+            <a:r>
+              <a:rPr lang="en-US" dirty="0">
+                <a:solidFill>
+                  <a:schemeClr val="bg1"/>
+                </a:solidFill>
+              </a:rPr>
+              <a:t>2</a:t>
+            </a:r>
+            <a:r>
+              <a:rPr lang="pl-PL" dirty="0">
+                <a:solidFill>
+                  <a:schemeClr val="bg1"/>
+                </a:solidFill>
+              </a:rPr>
+              <a:t>]</a:t>
+            </a:r>
+          </a:p>
+        </p:txBody>
+      </p:sp>
+      <p:sp>
+        <p:nvSpPr>
+          <p:cNvPr id="39" name="pole tekstowe 38">
+            <a:extLst>
+              <a:ext uri="{FF2B5EF4-FFF2-40B4-BE49-F238E27FC236}">
+                <a16:creationId xmlns:a16="http://schemas.microsoft.com/office/drawing/2014/main" id="{16FD7123-3018-ABF3-9811-A76DE5E2FE44}"/>
+              </a:ext>
+            </a:extLst>
+          </p:cNvPr>
+          <p:cNvSpPr txBox="1"/>
+          <p:nvPr/>
+        </p:nvSpPr>
+        <p:spPr>
+          <a:xfrm>
+            <a:off x="4001729" y="3519948"/>
+            <a:ext cx="657552" cy="369332"/>
+          </a:xfrm>
+          <a:prstGeom prst="rect">
+            <a:avLst/>
+          </a:prstGeom>
+          <a:noFill/>
+        </p:spPr>
+        <p:txBody>
+          <a:bodyPr wrap="none" rtlCol="0">
+            <a:spAutoFit/>
+          </a:bodyPr>
+          <a:lstStyle/>
+          <a:p>
+            <a:r>
+              <a:rPr lang="en-US" dirty="0"/>
+              <a:t>P = 0</a:t>
+            </a:r>
+            <a:endParaRPr lang="pl-PL" dirty="0"/>
+          </a:p>
+        </p:txBody>
+      </p:sp>
+      <p:sp>
+        <p:nvSpPr>
+          <p:cNvPr id="43" name="pole tekstowe 42">
+            <a:extLst>
+              <a:ext uri="{FF2B5EF4-FFF2-40B4-BE49-F238E27FC236}">
+                <a16:creationId xmlns:a16="http://schemas.microsoft.com/office/drawing/2014/main" id="{2E687FF8-2E0A-F4C6-4D25-DFD31FD71D47}"/>
+              </a:ext>
+            </a:extLst>
+          </p:cNvPr>
+          <p:cNvSpPr txBox="1"/>
+          <p:nvPr/>
+        </p:nvSpPr>
+        <p:spPr>
+          <a:xfrm>
+            <a:off x="7286307" y="3519948"/>
+            <a:ext cx="859531" cy="369332"/>
+          </a:xfrm>
+          <a:prstGeom prst="rect">
+            <a:avLst/>
+          </a:prstGeom>
+          <a:noFill/>
+        </p:spPr>
+        <p:txBody>
+          <a:bodyPr wrap="none" rtlCol="0">
+            <a:spAutoFit/>
+          </a:bodyPr>
+          <a:lstStyle/>
+          <a:p>
+            <a:r>
+              <a:rPr lang="en-US" dirty="0"/>
+              <a:t>P = 1/4</a:t>
+            </a:r>
+            <a:endParaRPr lang="pl-PL" dirty="0"/>
+          </a:p>
+        </p:txBody>
+      </p:sp>
+      <p:sp>
+        <p:nvSpPr>
+          <p:cNvPr id="45" name="pole tekstowe 44">
+            <a:extLst>
+              <a:ext uri="{FF2B5EF4-FFF2-40B4-BE49-F238E27FC236}">
+                <a16:creationId xmlns:a16="http://schemas.microsoft.com/office/drawing/2014/main" id="{7BA17F71-47CB-2FBD-417F-8F0FEA8E8CC4}"/>
+              </a:ext>
+            </a:extLst>
+          </p:cNvPr>
+          <p:cNvSpPr txBox="1"/>
+          <p:nvPr/>
+        </p:nvSpPr>
+        <p:spPr>
+          <a:xfrm>
+            <a:off x="6164434" y="2627714"/>
+            <a:ext cx="859531" cy="369332"/>
+          </a:xfrm>
+          <a:prstGeom prst="rect">
+            <a:avLst/>
+          </a:prstGeom>
+          <a:noFill/>
+        </p:spPr>
+        <p:txBody>
+          <a:bodyPr wrap="none" rtlCol="0">
+            <a:spAutoFit/>
+          </a:bodyPr>
+          <a:lstStyle/>
+          <a:p>
+            <a:r>
+              <a:rPr lang="en-US" dirty="0"/>
+              <a:t>P = 1/2</a:t>
+            </a:r>
+            <a:endParaRPr lang="pl-PL" dirty="0"/>
+          </a:p>
+        </p:txBody>
+      </p:sp>
+      <p:sp>
+        <p:nvSpPr>
+          <p:cNvPr id="47" name="pole tekstowe 46">
+            <a:extLst>
+              <a:ext uri="{FF2B5EF4-FFF2-40B4-BE49-F238E27FC236}">
+                <a16:creationId xmlns:a16="http://schemas.microsoft.com/office/drawing/2014/main" id="{BFE46211-1B17-C36E-5C11-B59990142E9D}"/>
+              </a:ext>
+            </a:extLst>
+          </p:cNvPr>
+          <p:cNvSpPr txBox="1"/>
+          <p:nvPr/>
+        </p:nvSpPr>
+        <p:spPr>
+          <a:xfrm>
+            <a:off x="6181641" y="4689633"/>
+            <a:ext cx="859531" cy="369332"/>
+          </a:xfrm>
+          <a:prstGeom prst="rect">
+            <a:avLst/>
+          </a:prstGeom>
+          <a:noFill/>
+        </p:spPr>
+        <p:txBody>
+          <a:bodyPr wrap="none" rtlCol="0">
+            <a:spAutoFit/>
+          </a:bodyPr>
+          <a:lstStyle/>
+          <a:p>
+            <a:r>
+              <a:rPr lang="en-US" dirty="0"/>
+              <a:t>P = 1/4</a:t>
+            </a:r>
+            <a:endParaRPr lang="pl-PL" dirty="0"/>
           </a:p>
         </p:txBody>
       </p:sp>
     </p:spTree>
     <p:extLst>
       <p:ext uri="{BB962C8B-B14F-4D97-AF65-F5344CB8AC3E}">
-        <p14:creationId xmlns:p14="http://schemas.microsoft.com/office/powerpoint/2010/main" val="1244680839"/>
+        <p14:creationId xmlns:p14="http://schemas.microsoft.com/office/powerpoint/2010/main" val="1118797495"/>
       </p:ext>
     </p:extLst>
   </p:cSld>
@@ -6788,7 +11256,7 @@
         <p:cNvPr id="1" name="">
           <a:extLst>
             <a:ext uri="{FF2B5EF4-FFF2-40B4-BE49-F238E27FC236}">
-              <a16:creationId xmlns:a16="http://schemas.microsoft.com/office/drawing/2014/main" id="{0346A47C-9D1B-ADDB-C999-E46054B35C68}"/>
+              <a16:creationId xmlns:a16="http://schemas.microsoft.com/office/drawing/2014/main" id="{EEAABFE6-52D4-48FF-820C-FDA0424639AA}"/>
             </a:ext>
           </a:extLst>
         </p:cNvPr>
@@ -6803,48 +11271,473 @@
           <a:chExt cx="0" cy="0"/>
         </a:xfrm>
       </p:grpSpPr>
-      <p:pic>
-        <p:nvPicPr>
-          <p:cNvPr id="4" name="Obraz 3">
-            <a:extLst>
-              <a:ext uri="{FF2B5EF4-FFF2-40B4-BE49-F238E27FC236}">
-                <a16:creationId xmlns:a16="http://schemas.microsoft.com/office/drawing/2014/main" id="{D1C94B36-4188-B57F-D942-9E288C45B2A9}"/>
-              </a:ext>
-            </a:extLst>
-          </p:cNvPr>
-          <p:cNvPicPr>
-            <a:picLocks noChangeAspect="1"/>
-          </p:cNvPicPr>
+      <p:sp>
+        <p:nvSpPr>
+          <p:cNvPr id="2" name="Tytuł 1">
+            <a:extLst>
+              <a:ext uri="{FF2B5EF4-FFF2-40B4-BE49-F238E27FC236}">
+                <a16:creationId xmlns:a16="http://schemas.microsoft.com/office/drawing/2014/main" id="{AB00865E-1DDD-AD45-8CC9-8F068ECF45C5}"/>
+              </a:ext>
+            </a:extLst>
+          </p:cNvPr>
+          <p:cNvSpPr>
+            <a:spLocks noGrp="1"/>
+          </p:cNvSpPr>
+          <p:nvPr>
+            <p:ph type="title"/>
+          </p:nvPr>
+        </p:nvSpPr>
+        <p:spPr/>
+        <p:txBody>
+          <a:bodyPr/>
+          <a:lstStyle/>
+          <a:p>
+            <a:r>
+              <a:rPr lang="pl-PL" dirty="0"/>
+              <a:t>Interakcje</a:t>
+            </a:r>
+          </a:p>
+        </p:txBody>
+      </p:sp>
+      <p:sp>
+        <p:nvSpPr>
+          <p:cNvPr id="9" name="Owal 8">
+            <a:extLst>
+              <a:ext uri="{FF2B5EF4-FFF2-40B4-BE49-F238E27FC236}">
+                <a16:creationId xmlns:a16="http://schemas.microsoft.com/office/drawing/2014/main" id="{43084442-39ED-85AE-F37C-C761048EA483}"/>
+              </a:ext>
+            </a:extLst>
+          </p:cNvPr>
+          <p:cNvSpPr/>
           <p:nvPr/>
-        </p:nvPicPr>
-        <p:blipFill>
-          <a:blip r:embed="rId2">
-            <a:extLst>
-              <a:ext uri="{28A0092B-C50C-407E-A947-70E740481C1C}">
-                <a14:useLocalDpi xmlns:a14="http://schemas.microsoft.com/office/drawing/2010/main" val="0"/>
-              </a:ext>
-            </a:extLst>
-          </a:blip>
-          <a:stretch>
-            <a:fillRect/>
-          </a:stretch>
-        </p:blipFill>
-        <p:spPr>
-          <a:xfrm>
-            <a:off x="2398000" y="244638"/>
-            <a:ext cx="9794000" cy="6121250"/>
-          </a:xfrm>
-          <a:prstGeom prst="rect">
+        </p:nvSpPr>
+        <p:spPr>
+          <a:xfrm>
+            <a:off x="5538019" y="3293806"/>
+            <a:ext cx="1115962" cy="1115962"/>
+          </a:xfrm>
+          <a:prstGeom prst="ellipse">
             <a:avLst/>
           </a:prstGeom>
-        </p:spPr>
-      </p:pic>
-      <p:sp>
-        <p:nvSpPr>
-          <p:cNvPr id="3" name="pole tekstowe 2">
-            <a:extLst>
-              <a:ext uri="{FF2B5EF4-FFF2-40B4-BE49-F238E27FC236}">
-                <a16:creationId xmlns:a16="http://schemas.microsoft.com/office/drawing/2014/main" id="{4E702975-534F-BD40-3DB2-DC29CD0460FD}"/>
+          <a:solidFill>
+            <a:schemeClr val="accent2">
+              <a:lumMod val="75000"/>
+            </a:schemeClr>
+          </a:solidFill>
+        </p:spPr>
+        <p:style>
+          <a:lnRef idx="2">
+            <a:schemeClr val="accent1">
+              <a:shade val="15000"/>
+            </a:schemeClr>
+          </a:lnRef>
+          <a:fillRef idx="1">
+            <a:schemeClr val="accent1"/>
+          </a:fillRef>
+          <a:effectRef idx="0">
+            <a:schemeClr val="accent1"/>
+          </a:effectRef>
+          <a:fontRef idx="minor">
+            <a:schemeClr val="lt1"/>
+          </a:fontRef>
+        </p:style>
+        <p:txBody>
+          <a:bodyPr rtlCol="0" anchor="ctr"/>
+          <a:lstStyle/>
+          <a:p>
+            <a:pPr algn="ctr"/>
+            <a:endParaRPr lang="pl-PL"/>
+          </a:p>
+        </p:txBody>
+      </p:sp>
+      <p:sp>
+        <p:nvSpPr>
+          <p:cNvPr id="11" name="Owal 10">
+            <a:extLst>
+              <a:ext uri="{FF2B5EF4-FFF2-40B4-BE49-F238E27FC236}">
+                <a16:creationId xmlns:a16="http://schemas.microsoft.com/office/drawing/2014/main" id="{FBE93C4B-D690-660B-A806-D67678AC0D38}"/>
+              </a:ext>
+            </a:extLst>
+          </p:cNvPr>
+          <p:cNvSpPr/>
+          <p:nvPr/>
+        </p:nvSpPr>
+        <p:spPr>
+          <a:xfrm>
+            <a:off x="2499852" y="3293806"/>
+            <a:ext cx="1115962" cy="1115962"/>
+          </a:xfrm>
+          <a:prstGeom prst="ellipse">
+            <a:avLst/>
+          </a:prstGeom>
+        </p:spPr>
+        <p:style>
+          <a:lnRef idx="2">
+            <a:schemeClr val="accent1">
+              <a:shade val="15000"/>
+            </a:schemeClr>
+          </a:lnRef>
+          <a:fillRef idx="1">
+            <a:schemeClr val="accent1"/>
+          </a:fillRef>
+          <a:effectRef idx="0">
+            <a:schemeClr val="accent1"/>
+          </a:effectRef>
+          <a:fontRef idx="minor">
+            <a:schemeClr val="lt1"/>
+          </a:fontRef>
+        </p:style>
+        <p:txBody>
+          <a:bodyPr rtlCol="0" anchor="ctr"/>
+          <a:lstStyle/>
+          <a:p>
+            <a:pPr algn="ctr"/>
+            <a:endParaRPr lang="pl-PL"/>
+          </a:p>
+        </p:txBody>
+      </p:sp>
+      <p:sp>
+        <p:nvSpPr>
+          <p:cNvPr id="13" name="Owal 12">
+            <a:extLst>
+              <a:ext uri="{FF2B5EF4-FFF2-40B4-BE49-F238E27FC236}">
+                <a16:creationId xmlns:a16="http://schemas.microsoft.com/office/drawing/2014/main" id="{35EF87F6-C951-6031-6809-28AF2798DC7A}"/>
+              </a:ext>
+            </a:extLst>
+          </p:cNvPr>
+          <p:cNvSpPr/>
+          <p:nvPr/>
+        </p:nvSpPr>
+        <p:spPr>
+          <a:xfrm>
+            <a:off x="8576186" y="3293806"/>
+            <a:ext cx="1115962" cy="1115962"/>
+          </a:xfrm>
+          <a:prstGeom prst="ellipse">
+            <a:avLst/>
+          </a:prstGeom>
+        </p:spPr>
+        <p:style>
+          <a:lnRef idx="2">
+            <a:schemeClr val="accent1">
+              <a:shade val="15000"/>
+            </a:schemeClr>
+          </a:lnRef>
+          <a:fillRef idx="1">
+            <a:schemeClr val="accent1"/>
+          </a:fillRef>
+          <a:effectRef idx="0">
+            <a:schemeClr val="accent1"/>
+          </a:effectRef>
+          <a:fontRef idx="minor">
+            <a:schemeClr val="lt1"/>
+          </a:fontRef>
+        </p:style>
+        <p:txBody>
+          <a:bodyPr rtlCol="0" anchor="ctr"/>
+          <a:lstStyle/>
+          <a:p>
+            <a:pPr algn="ctr"/>
+            <a:endParaRPr lang="pl-PL" dirty="0"/>
+          </a:p>
+        </p:txBody>
+      </p:sp>
+      <p:sp>
+        <p:nvSpPr>
+          <p:cNvPr id="15" name="Owal 14">
+            <a:extLst>
+              <a:ext uri="{FF2B5EF4-FFF2-40B4-BE49-F238E27FC236}">
+                <a16:creationId xmlns:a16="http://schemas.microsoft.com/office/drawing/2014/main" id="{D3BD3A29-07AC-309F-9B64-BD8F95B9EB68}"/>
+              </a:ext>
+            </a:extLst>
+          </p:cNvPr>
+          <p:cNvSpPr/>
+          <p:nvPr/>
+        </p:nvSpPr>
+        <p:spPr>
+          <a:xfrm>
+            <a:off x="5538019" y="5376913"/>
+            <a:ext cx="1115962" cy="1115962"/>
+          </a:xfrm>
+          <a:prstGeom prst="ellipse">
+            <a:avLst/>
+          </a:prstGeom>
+          <a:solidFill>
+            <a:schemeClr val="tx2">
+              <a:lumMod val="50000"/>
+              <a:lumOff val="50000"/>
+            </a:schemeClr>
+          </a:solidFill>
+        </p:spPr>
+        <p:style>
+          <a:lnRef idx="2">
+            <a:schemeClr val="accent1">
+              <a:shade val="15000"/>
+            </a:schemeClr>
+          </a:lnRef>
+          <a:fillRef idx="1">
+            <a:schemeClr val="accent1"/>
+          </a:fillRef>
+          <a:effectRef idx="0">
+            <a:schemeClr val="accent1"/>
+          </a:effectRef>
+          <a:fontRef idx="minor">
+            <a:schemeClr val="lt1"/>
+          </a:fontRef>
+        </p:style>
+        <p:txBody>
+          <a:bodyPr rtlCol="0" anchor="ctr"/>
+          <a:lstStyle/>
+          <a:p>
+            <a:pPr algn="ctr"/>
+            <a:endParaRPr lang="pl-PL"/>
+          </a:p>
+        </p:txBody>
+      </p:sp>
+      <p:sp>
+        <p:nvSpPr>
+          <p:cNvPr id="17" name="Owal 16">
+            <a:extLst>
+              <a:ext uri="{FF2B5EF4-FFF2-40B4-BE49-F238E27FC236}">
+                <a16:creationId xmlns:a16="http://schemas.microsoft.com/office/drawing/2014/main" id="{375D1CD5-7461-D585-19AE-E22ED71CE80A}"/>
+              </a:ext>
+            </a:extLst>
+          </p:cNvPr>
+          <p:cNvSpPr/>
+          <p:nvPr/>
+        </p:nvSpPr>
+        <p:spPr>
+          <a:xfrm>
+            <a:off x="5538019" y="1210699"/>
+            <a:ext cx="1115962" cy="1115962"/>
+          </a:xfrm>
+          <a:prstGeom prst="ellipse">
+            <a:avLst/>
+          </a:prstGeom>
+        </p:spPr>
+        <p:style>
+          <a:lnRef idx="2">
+            <a:schemeClr val="accent1">
+              <a:shade val="15000"/>
+            </a:schemeClr>
+          </a:lnRef>
+          <a:fillRef idx="1">
+            <a:schemeClr val="accent1"/>
+          </a:fillRef>
+          <a:effectRef idx="0">
+            <a:schemeClr val="accent1"/>
+          </a:effectRef>
+          <a:fontRef idx="minor">
+            <a:schemeClr val="lt1"/>
+          </a:fontRef>
+        </p:style>
+        <p:txBody>
+          <a:bodyPr rtlCol="0" anchor="ctr"/>
+          <a:lstStyle/>
+          <a:p>
+            <a:pPr algn="ctr"/>
+            <a:endParaRPr lang="pl-PL"/>
+          </a:p>
+        </p:txBody>
+      </p:sp>
+      <p:cxnSp>
+        <p:nvCxnSpPr>
+          <p:cNvPr id="19" name="Łącznik prosty ze strzałką 18">
+            <a:extLst>
+              <a:ext uri="{FF2B5EF4-FFF2-40B4-BE49-F238E27FC236}">
+                <a16:creationId xmlns:a16="http://schemas.microsoft.com/office/drawing/2014/main" id="{4F4C1783-0E75-0B3A-0991-88064C6E6AE5}"/>
+              </a:ext>
+            </a:extLst>
+          </p:cNvPr>
+          <p:cNvCxnSpPr>
+            <a:stCxn id="11" idx="6"/>
+            <a:endCxn id="9" idx="2"/>
+          </p:cNvCxnSpPr>
+          <p:nvPr/>
+        </p:nvCxnSpPr>
+        <p:spPr>
+          <a:xfrm>
+            <a:off x="3615814" y="3851787"/>
+            <a:ext cx="1922205" cy="0"/>
+          </a:xfrm>
+          <a:prstGeom prst="straightConnector1">
+            <a:avLst/>
+          </a:prstGeom>
+          <a:ln w="19050" cap="flat" cmpd="sng" algn="ctr">
+            <a:solidFill>
+              <a:schemeClr val="accent1"/>
+            </a:solidFill>
+            <a:prstDash val="solid"/>
+            <a:round/>
+            <a:headEnd type="none" w="med" len="med"/>
+            <a:tailEnd type="arrow" w="med" len="med"/>
+          </a:ln>
+        </p:spPr>
+        <p:style>
+          <a:lnRef idx="0">
+            <a:scrgbClr r="0" g="0" b="0"/>
+          </a:lnRef>
+          <a:fillRef idx="0">
+            <a:scrgbClr r="0" g="0" b="0"/>
+          </a:fillRef>
+          <a:effectRef idx="0">
+            <a:scrgbClr r="0" g="0" b="0"/>
+          </a:effectRef>
+          <a:fontRef idx="minor">
+            <a:schemeClr val="tx1"/>
+          </a:fontRef>
+        </p:style>
+      </p:cxnSp>
+      <p:cxnSp>
+        <p:nvCxnSpPr>
+          <p:cNvPr id="21" name="Łącznik prosty ze strzałką 20">
+            <a:extLst>
+              <a:ext uri="{FF2B5EF4-FFF2-40B4-BE49-F238E27FC236}">
+                <a16:creationId xmlns:a16="http://schemas.microsoft.com/office/drawing/2014/main" id="{F38EE3C2-65FB-0F0D-4C00-6AFE65C48A85}"/>
+              </a:ext>
+            </a:extLst>
+          </p:cNvPr>
+          <p:cNvCxnSpPr>
+            <a:stCxn id="17" idx="4"/>
+            <a:endCxn id="9" idx="0"/>
+          </p:cNvCxnSpPr>
+          <p:nvPr/>
+        </p:nvCxnSpPr>
+        <p:spPr>
+          <a:xfrm>
+            <a:off x="6096000" y="2326661"/>
+            <a:ext cx="0" cy="967145"/>
+          </a:xfrm>
+          <a:prstGeom prst="straightConnector1">
+            <a:avLst/>
+          </a:prstGeom>
+          <a:ln w="19050" cap="flat" cmpd="sng" algn="ctr">
+            <a:solidFill>
+              <a:schemeClr val="accent1"/>
+            </a:solidFill>
+            <a:prstDash val="solid"/>
+            <a:round/>
+            <a:headEnd type="none" w="med" len="med"/>
+            <a:tailEnd type="arrow" w="med" len="med"/>
+          </a:ln>
+        </p:spPr>
+        <p:style>
+          <a:lnRef idx="0">
+            <a:scrgbClr r="0" g="0" b="0"/>
+          </a:lnRef>
+          <a:fillRef idx="0">
+            <a:scrgbClr r="0" g="0" b="0"/>
+          </a:fillRef>
+          <a:effectRef idx="0">
+            <a:scrgbClr r="0" g="0" b="0"/>
+          </a:effectRef>
+          <a:fontRef idx="minor">
+            <a:schemeClr val="tx1"/>
+          </a:fontRef>
+        </p:style>
+      </p:cxnSp>
+      <p:cxnSp>
+        <p:nvCxnSpPr>
+          <p:cNvPr id="23" name="Łącznik prosty ze strzałką 22">
+            <a:extLst>
+              <a:ext uri="{FF2B5EF4-FFF2-40B4-BE49-F238E27FC236}">
+                <a16:creationId xmlns:a16="http://schemas.microsoft.com/office/drawing/2014/main" id="{664C1242-0693-9AC7-8610-1B6ECC9DBE10}"/>
+              </a:ext>
+            </a:extLst>
+          </p:cNvPr>
+          <p:cNvCxnSpPr>
+            <a:stCxn id="15" idx="0"/>
+            <a:endCxn id="9" idx="4"/>
+          </p:cNvCxnSpPr>
+          <p:nvPr/>
+        </p:nvCxnSpPr>
+        <p:spPr>
+          <a:xfrm flipV="1">
+            <a:off x="6096000" y="4409768"/>
+            <a:ext cx="0" cy="967145"/>
+          </a:xfrm>
+          <a:prstGeom prst="straightConnector1">
+            <a:avLst/>
+          </a:prstGeom>
+          <a:ln w="19050" cap="flat" cmpd="sng" algn="ctr">
+            <a:solidFill>
+              <a:schemeClr val="accent1"/>
+            </a:solidFill>
+            <a:prstDash val="solid"/>
+            <a:round/>
+            <a:headEnd type="none" w="med" len="med"/>
+            <a:tailEnd type="arrow" w="med" len="med"/>
+          </a:ln>
+        </p:spPr>
+        <p:style>
+          <a:lnRef idx="0">
+            <a:scrgbClr r="0" g="0" b="0"/>
+          </a:lnRef>
+          <a:fillRef idx="0">
+            <a:scrgbClr r="0" g="0" b="0"/>
+          </a:fillRef>
+          <a:effectRef idx="0">
+            <a:scrgbClr r="0" g="0" b="0"/>
+          </a:effectRef>
+          <a:fontRef idx="minor">
+            <a:schemeClr val="tx1"/>
+          </a:fontRef>
+        </p:style>
+      </p:cxnSp>
+      <p:cxnSp>
+        <p:nvCxnSpPr>
+          <p:cNvPr id="25" name="Łącznik prosty ze strzałką 24">
+            <a:extLst>
+              <a:ext uri="{FF2B5EF4-FFF2-40B4-BE49-F238E27FC236}">
+                <a16:creationId xmlns:a16="http://schemas.microsoft.com/office/drawing/2014/main" id="{E0092A95-3260-F54D-01C6-25C824180891}"/>
+              </a:ext>
+            </a:extLst>
+          </p:cNvPr>
+          <p:cNvCxnSpPr>
+            <a:stCxn id="13" idx="2"/>
+            <a:endCxn id="9" idx="6"/>
+          </p:cNvCxnSpPr>
+          <p:nvPr/>
+        </p:nvCxnSpPr>
+        <p:spPr>
+          <a:xfrm flipH="1">
+            <a:off x="6653981" y="3851787"/>
+            <a:ext cx="1922205" cy="0"/>
+          </a:xfrm>
+          <a:prstGeom prst="straightConnector1">
+            <a:avLst/>
+          </a:prstGeom>
+          <a:ln w="19050" cap="flat" cmpd="sng" algn="ctr">
+            <a:solidFill>
+              <a:schemeClr val="accent1"/>
+            </a:solidFill>
+            <a:prstDash val="solid"/>
+            <a:round/>
+            <a:headEnd type="none" w="med" len="med"/>
+            <a:tailEnd type="arrow" w="med" len="med"/>
+          </a:ln>
+        </p:spPr>
+        <p:style>
+          <a:lnRef idx="0">
+            <a:scrgbClr r="0" g="0" b="0"/>
+          </a:lnRef>
+          <a:fillRef idx="0">
+            <a:scrgbClr r="0" g="0" b="0"/>
+          </a:fillRef>
+          <a:effectRef idx="0">
+            <a:scrgbClr r="0" g="0" b="0"/>
+          </a:effectRef>
+          <a:fontRef idx="minor">
+            <a:schemeClr val="tx1"/>
+          </a:fontRef>
+        </p:style>
+      </p:cxnSp>
+      <p:sp>
+        <p:nvSpPr>
+          <p:cNvPr id="30" name="pole tekstowe 29">
+            <a:extLst>
+              <a:ext uri="{FF2B5EF4-FFF2-40B4-BE49-F238E27FC236}">
+                <a16:creationId xmlns:a16="http://schemas.microsoft.com/office/drawing/2014/main" id="{AABC309A-AB24-ECE8-6D97-57405EE30C07}"/>
               </a:ext>
             </a:extLst>
           </p:cNvPr>
@@ -6853,8 +11746,8 @@
         </p:nvSpPr>
         <p:spPr>
           <a:xfrm>
-            <a:off x="481262" y="5104004"/>
-            <a:ext cx="3100138" cy="1261884"/>
+            <a:off x="5538019" y="3667121"/>
+            <a:ext cx="1115962" cy="369332"/>
           </a:xfrm>
           <a:prstGeom prst="rect">
             <a:avLst/>
@@ -6862,40 +11755,358 @@
           <a:noFill/>
         </p:spPr>
         <p:txBody>
-          <a:bodyPr wrap="square" rtlCol="0" anchor="b">
+          <a:bodyPr wrap="square" rtlCol="0">
             <a:spAutoFit/>
           </a:bodyPr>
           <a:lstStyle/>
           <a:p>
             <a:r>
-              <a:rPr lang="pl-PL" sz="1900" u="sng" dirty="0"/>
-              <a:t>Parametry</a:t>
-            </a:r>
-          </a:p>
-          <a:p>
-            <a:r>
-              <a:rPr lang="pl-PL" sz="1900" dirty="0"/>
-              <a:t>liczba cech: 5</a:t>
-            </a:r>
-          </a:p>
-          <a:p>
-            <a:r>
-              <a:rPr lang="pl-PL" sz="1900" dirty="0"/>
-              <a:t>liczba wariantów: 5</a:t>
-            </a:r>
-          </a:p>
-          <a:p>
-            <a:r>
-              <a:rPr lang="pl-PL" sz="1900" dirty="0"/>
-              <a:t>liczba iteracji: &lt;1mln</a:t>
-            </a:r>
+              <a:rPr lang="pl-PL" dirty="0">
+                <a:solidFill>
+                  <a:schemeClr val="bg1"/>
+                </a:solidFill>
+              </a:rPr>
+              <a:t> [1,1,1,2]</a:t>
+            </a:r>
+          </a:p>
+        </p:txBody>
+      </p:sp>
+      <p:sp>
+        <p:nvSpPr>
+          <p:cNvPr id="32" name="pole tekstowe 31">
+            <a:extLst>
+              <a:ext uri="{FF2B5EF4-FFF2-40B4-BE49-F238E27FC236}">
+                <a16:creationId xmlns:a16="http://schemas.microsoft.com/office/drawing/2014/main" id="{D059CC28-724A-408E-CEB4-DF4E26C84AC5}"/>
+              </a:ext>
+            </a:extLst>
+          </p:cNvPr>
+          <p:cNvSpPr txBox="1"/>
+          <p:nvPr/>
+        </p:nvSpPr>
+        <p:spPr>
+          <a:xfrm>
+            <a:off x="2499852" y="3625334"/>
+            <a:ext cx="1252831" cy="369332"/>
+          </a:xfrm>
+          <a:prstGeom prst="rect">
+            <a:avLst/>
+          </a:prstGeom>
+          <a:noFill/>
+        </p:spPr>
+        <p:txBody>
+          <a:bodyPr wrap="square" rtlCol="0">
+            <a:spAutoFit/>
+          </a:bodyPr>
+          <a:lstStyle/>
+          <a:p>
+            <a:r>
+              <a:rPr lang="pl-PL" dirty="0">
+                <a:solidFill>
+                  <a:schemeClr val="bg1"/>
+                </a:solidFill>
+              </a:rPr>
+              <a:t> [7,7,5,</a:t>
+            </a:r>
+            <a:r>
+              <a:rPr lang="en-US" dirty="0">
+                <a:solidFill>
+                  <a:schemeClr val="bg1"/>
+                </a:solidFill>
+              </a:rPr>
+              <a:t>3</a:t>
+            </a:r>
+            <a:r>
+              <a:rPr lang="pl-PL" dirty="0">
+                <a:solidFill>
+                  <a:schemeClr val="bg1"/>
+                </a:solidFill>
+              </a:rPr>
+              <a:t>]</a:t>
+            </a:r>
+          </a:p>
+        </p:txBody>
+      </p:sp>
+      <p:sp>
+        <p:nvSpPr>
+          <p:cNvPr id="34" name="pole tekstowe 33">
+            <a:extLst>
+              <a:ext uri="{FF2B5EF4-FFF2-40B4-BE49-F238E27FC236}">
+                <a16:creationId xmlns:a16="http://schemas.microsoft.com/office/drawing/2014/main" id="{B324DAC9-D543-113B-AA79-351DC68030BA}"/>
+              </a:ext>
+            </a:extLst>
+          </p:cNvPr>
+          <p:cNvSpPr txBox="1"/>
+          <p:nvPr/>
+        </p:nvSpPr>
+        <p:spPr>
+          <a:xfrm>
+            <a:off x="8576186" y="3667121"/>
+            <a:ext cx="1252831" cy="369332"/>
+          </a:xfrm>
+          <a:prstGeom prst="rect">
+            <a:avLst/>
+          </a:prstGeom>
+          <a:noFill/>
+        </p:spPr>
+        <p:txBody>
+          <a:bodyPr wrap="square" rtlCol="0">
+            <a:spAutoFit/>
+          </a:bodyPr>
+          <a:lstStyle/>
+          <a:p>
+            <a:r>
+              <a:rPr lang="pl-PL" dirty="0">
+                <a:solidFill>
+                  <a:schemeClr val="bg1"/>
+                </a:solidFill>
+              </a:rPr>
+              <a:t> [1,0,5,7]</a:t>
+            </a:r>
+          </a:p>
+        </p:txBody>
+      </p:sp>
+      <p:sp>
+        <p:nvSpPr>
+          <p:cNvPr id="36" name="pole tekstowe 35">
+            <a:extLst>
+              <a:ext uri="{FF2B5EF4-FFF2-40B4-BE49-F238E27FC236}">
+                <a16:creationId xmlns:a16="http://schemas.microsoft.com/office/drawing/2014/main" id="{F49E8997-06E0-5C96-B6C2-B3EF0A10D641}"/>
+              </a:ext>
+            </a:extLst>
+          </p:cNvPr>
+          <p:cNvSpPr txBox="1"/>
+          <p:nvPr/>
+        </p:nvSpPr>
+        <p:spPr>
+          <a:xfrm>
+            <a:off x="5538019" y="5750228"/>
+            <a:ext cx="1252831" cy="369332"/>
+          </a:xfrm>
+          <a:prstGeom prst="rect">
+            <a:avLst/>
+          </a:prstGeom>
+          <a:noFill/>
+        </p:spPr>
+        <p:txBody>
+          <a:bodyPr wrap="square" rtlCol="0">
+            <a:spAutoFit/>
+          </a:bodyPr>
+          <a:lstStyle/>
+          <a:p>
+            <a:r>
+              <a:rPr lang="pl-PL" dirty="0">
+                <a:solidFill>
+                  <a:schemeClr val="bg1"/>
+                </a:solidFill>
+              </a:rPr>
+              <a:t> [1,4,5,7]</a:t>
+            </a:r>
+          </a:p>
+        </p:txBody>
+      </p:sp>
+      <p:sp>
+        <p:nvSpPr>
+          <p:cNvPr id="38" name="pole tekstowe 37">
+            <a:extLst>
+              <a:ext uri="{FF2B5EF4-FFF2-40B4-BE49-F238E27FC236}">
+                <a16:creationId xmlns:a16="http://schemas.microsoft.com/office/drawing/2014/main" id="{75F1D24B-A757-BC58-E1D3-9FA17F5EE5E5}"/>
+              </a:ext>
+            </a:extLst>
+          </p:cNvPr>
+          <p:cNvSpPr txBox="1"/>
+          <p:nvPr/>
+        </p:nvSpPr>
+        <p:spPr>
+          <a:xfrm>
+            <a:off x="5555226" y="1584014"/>
+            <a:ext cx="1252831" cy="369332"/>
+          </a:xfrm>
+          <a:prstGeom prst="rect">
+            <a:avLst/>
+          </a:prstGeom>
+          <a:noFill/>
+        </p:spPr>
+        <p:txBody>
+          <a:bodyPr wrap="square" rtlCol="0">
+            <a:spAutoFit/>
+          </a:bodyPr>
+          <a:lstStyle/>
+          <a:p>
+            <a:r>
+              <a:rPr lang="pl-PL" dirty="0">
+                <a:solidFill>
+                  <a:schemeClr val="bg1"/>
+                </a:solidFill>
+              </a:rPr>
+              <a:t> [1,0,5,</a:t>
+            </a:r>
+            <a:r>
+              <a:rPr lang="en-US" dirty="0">
+                <a:solidFill>
+                  <a:schemeClr val="bg1"/>
+                </a:solidFill>
+              </a:rPr>
+              <a:t>2</a:t>
+            </a:r>
+            <a:r>
+              <a:rPr lang="pl-PL" dirty="0">
+                <a:solidFill>
+                  <a:schemeClr val="bg1"/>
+                </a:solidFill>
+              </a:rPr>
+              <a:t>]</a:t>
+            </a:r>
+          </a:p>
+        </p:txBody>
+      </p:sp>
+      <p:sp>
+        <p:nvSpPr>
+          <p:cNvPr id="39" name="pole tekstowe 38">
+            <a:extLst>
+              <a:ext uri="{FF2B5EF4-FFF2-40B4-BE49-F238E27FC236}">
+                <a16:creationId xmlns:a16="http://schemas.microsoft.com/office/drawing/2014/main" id="{09BFD67E-13F0-40B3-8A1D-9178EFB08CD7}"/>
+              </a:ext>
+            </a:extLst>
+          </p:cNvPr>
+          <p:cNvSpPr txBox="1"/>
+          <p:nvPr/>
+        </p:nvSpPr>
+        <p:spPr>
+          <a:xfrm>
+            <a:off x="4001729" y="3519948"/>
+            <a:ext cx="657552" cy="369332"/>
+          </a:xfrm>
+          <a:prstGeom prst="rect">
+            <a:avLst/>
+          </a:prstGeom>
+          <a:noFill/>
+        </p:spPr>
+        <p:txBody>
+          <a:bodyPr wrap="none" rtlCol="0">
+            <a:spAutoFit/>
+          </a:bodyPr>
+          <a:lstStyle/>
+          <a:p>
+            <a:r>
+              <a:rPr lang="en-US" dirty="0"/>
+              <a:t>P = 0</a:t>
+            </a:r>
+            <a:endParaRPr lang="pl-PL" dirty="0"/>
+          </a:p>
+        </p:txBody>
+      </p:sp>
+      <p:sp>
+        <p:nvSpPr>
+          <p:cNvPr id="43" name="pole tekstowe 42">
+            <a:extLst>
+              <a:ext uri="{FF2B5EF4-FFF2-40B4-BE49-F238E27FC236}">
+                <a16:creationId xmlns:a16="http://schemas.microsoft.com/office/drawing/2014/main" id="{BAB75950-07C5-49C4-0414-5E32533518D1}"/>
+              </a:ext>
+            </a:extLst>
+          </p:cNvPr>
+          <p:cNvSpPr txBox="1"/>
+          <p:nvPr/>
+        </p:nvSpPr>
+        <p:spPr>
+          <a:xfrm>
+            <a:off x="7286307" y="3519948"/>
+            <a:ext cx="859531" cy="369332"/>
+          </a:xfrm>
+          <a:prstGeom prst="rect">
+            <a:avLst/>
+          </a:prstGeom>
+          <a:noFill/>
+        </p:spPr>
+        <p:txBody>
+          <a:bodyPr wrap="none" rtlCol="0">
+            <a:spAutoFit/>
+          </a:bodyPr>
+          <a:lstStyle/>
+          <a:p>
+            <a:r>
+              <a:rPr lang="en-US" dirty="0"/>
+              <a:t>P = 1/4</a:t>
+            </a:r>
+            <a:endParaRPr lang="pl-PL" dirty="0"/>
+          </a:p>
+        </p:txBody>
+      </p:sp>
+      <p:sp>
+        <p:nvSpPr>
+          <p:cNvPr id="45" name="pole tekstowe 44">
+            <a:extLst>
+              <a:ext uri="{FF2B5EF4-FFF2-40B4-BE49-F238E27FC236}">
+                <a16:creationId xmlns:a16="http://schemas.microsoft.com/office/drawing/2014/main" id="{11392DA1-ACC3-0BF0-AEC4-32CFA300F05A}"/>
+              </a:ext>
+            </a:extLst>
+          </p:cNvPr>
+          <p:cNvSpPr txBox="1"/>
+          <p:nvPr/>
+        </p:nvSpPr>
+        <p:spPr>
+          <a:xfrm>
+            <a:off x="6164434" y="2627714"/>
+            <a:ext cx="859531" cy="369332"/>
+          </a:xfrm>
+          <a:prstGeom prst="rect">
+            <a:avLst/>
+          </a:prstGeom>
+          <a:noFill/>
+        </p:spPr>
+        <p:txBody>
+          <a:bodyPr wrap="none" rtlCol="0">
+            <a:spAutoFit/>
+          </a:bodyPr>
+          <a:lstStyle/>
+          <a:p>
+            <a:r>
+              <a:rPr lang="en-US" dirty="0"/>
+              <a:t>P = 1/2</a:t>
+            </a:r>
+            <a:endParaRPr lang="pl-PL" dirty="0"/>
+          </a:p>
+        </p:txBody>
+      </p:sp>
+      <p:sp>
+        <p:nvSpPr>
+          <p:cNvPr id="47" name="pole tekstowe 46">
+            <a:extLst>
+              <a:ext uri="{FF2B5EF4-FFF2-40B4-BE49-F238E27FC236}">
+                <a16:creationId xmlns:a16="http://schemas.microsoft.com/office/drawing/2014/main" id="{8039A616-E6D9-9832-FBB3-242A8BDFAF20}"/>
+              </a:ext>
+            </a:extLst>
+          </p:cNvPr>
+          <p:cNvSpPr txBox="1"/>
+          <p:nvPr/>
+        </p:nvSpPr>
+        <p:spPr>
+          <a:xfrm>
+            <a:off x="6181641" y="4689633"/>
+            <a:ext cx="859531" cy="369332"/>
+          </a:xfrm>
+          <a:prstGeom prst="rect">
+            <a:avLst/>
+          </a:prstGeom>
+          <a:noFill/>
+        </p:spPr>
+        <p:txBody>
+          <a:bodyPr wrap="none" rtlCol="0">
+            <a:spAutoFit/>
+          </a:bodyPr>
+          <a:lstStyle/>
+          <a:p>
+            <a:r>
+              <a:rPr lang="en-US" dirty="0"/>
+              <a:t>P = 1/4</a:t>
+            </a:r>
+            <a:endParaRPr lang="pl-PL" dirty="0"/>
           </a:p>
         </p:txBody>
       </p:sp>
     </p:spTree>
     <p:extLst>
       <p:ext uri="{BB962C8B-B14F-4D97-AF65-F5344CB8AC3E}">
-        <p14:creationId xmlns:p14="http://schemas.microsoft.com/office/powerpoint/2010/main" val="2773652040"/>
+        <p14:creationId xmlns:p14="http://schemas.microsoft.com/office/powerpoint/2010/main" val="3565329498"/>
       </p:ext>
     </p:extLst>
   </p:cSld>
@@ -6913,7 +12124,7 @@
         <p:cNvPr id="1" name="">
           <a:extLst>
             <a:ext uri="{FF2B5EF4-FFF2-40B4-BE49-F238E27FC236}">
-              <a16:creationId xmlns:a16="http://schemas.microsoft.com/office/drawing/2014/main" id="{CC6C778C-6913-9203-0009-771F46F93336}"/>
+              <a16:creationId xmlns:a16="http://schemas.microsoft.com/office/drawing/2014/main" id="{B00A6215-C4E6-AC75-6B6A-8E9F5422975E}"/>
             </a:ext>
           </a:extLst>
         </p:cNvPr>
@@ -6928,48 +12139,473 @@
           <a:chExt cx="0" cy="0"/>
         </a:xfrm>
       </p:grpSpPr>
-      <p:pic>
-        <p:nvPicPr>
-          <p:cNvPr id="4" name="Obraz 3">
-            <a:extLst>
-              <a:ext uri="{FF2B5EF4-FFF2-40B4-BE49-F238E27FC236}">
-                <a16:creationId xmlns:a16="http://schemas.microsoft.com/office/drawing/2014/main" id="{0145A6B3-F51E-DF0E-0AF2-74CD15D5F1B7}"/>
-              </a:ext>
-            </a:extLst>
-          </p:cNvPr>
-          <p:cNvPicPr>
-            <a:picLocks noChangeAspect="1"/>
-          </p:cNvPicPr>
+      <p:sp>
+        <p:nvSpPr>
+          <p:cNvPr id="2" name="Tytuł 1">
+            <a:extLst>
+              <a:ext uri="{FF2B5EF4-FFF2-40B4-BE49-F238E27FC236}">
+                <a16:creationId xmlns:a16="http://schemas.microsoft.com/office/drawing/2014/main" id="{2AD7C586-07EE-1C78-5CBD-B68A055CDCA5}"/>
+              </a:ext>
+            </a:extLst>
+          </p:cNvPr>
+          <p:cNvSpPr>
+            <a:spLocks noGrp="1"/>
+          </p:cNvSpPr>
+          <p:nvPr>
+            <p:ph type="title"/>
+          </p:nvPr>
+        </p:nvSpPr>
+        <p:spPr/>
+        <p:txBody>
+          <a:bodyPr/>
+          <a:lstStyle/>
+          <a:p>
+            <a:r>
+              <a:rPr lang="pl-PL" dirty="0"/>
+              <a:t>Interakcje</a:t>
+            </a:r>
+          </a:p>
+        </p:txBody>
+      </p:sp>
+      <p:sp>
+        <p:nvSpPr>
+          <p:cNvPr id="9" name="Owal 8">
+            <a:extLst>
+              <a:ext uri="{FF2B5EF4-FFF2-40B4-BE49-F238E27FC236}">
+                <a16:creationId xmlns:a16="http://schemas.microsoft.com/office/drawing/2014/main" id="{FF138750-3521-FA2B-4E44-893432237AA2}"/>
+              </a:ext>
+            </a:extLst>
+          </p:cNvPr>
+          <p:cNvSpPr/>
           <p:nvPr/>
-        </p:nvPicPr>
-        <p:blipFill>
-          <a:blip r:embed="rId2">
-            <a:extLst>
-              <a:ext uri="{28A0092B-C50C-407E-A947-70E740481C1C}">
-                <a14:useLocalDpi xmlns:a14="http://schemas.microsoft.com/office/drawing/2010/main" val="0"/>
-              </a:ext>
-            </a:extLst>
-          </a:blip>
-          <a:stretch>
-            <a:fillRect/>
-          </a:stretch>
-        </p:blipFill>
-        <p:spPr>
-          <a:xfrm>
-            <a:off x="0" y="324263"/>
-            <a:ext cx="12192000" cy="4876799"/>
-          </a:xfrm>
-          <a:prstGeom prst="rect">
+        </p:nvSpPr>
+        <p:spPr>
+          <a:xfrm>
+            <a:off x="5538019" y="3293806"/>
+            <a:ext cx="1115962" cy="1115962"/>
+          </a:xfrm>
+          <a:prstGeom prst="ellipse">
             <a:avLst/>
           </a:prstGeom>
-        </p:spPr>
-      </p:pic>
-      <p:sp>
-        <p:nvSpPr>
-          <p:cNvPr id="6" name="pole tekstowe 5">
-            <a:extLst>
-              <a:ext uri="{FF2B5EF4-FFF2-40B4-BE49-F238E27FC236}">
-                <a16:creationId xmlns:a16="http://schemas.microsoft.com/office/drawing/2014/main" id="{172743B8-D8F6-9E33-B65F-B2EE3D858D57}"/>
+          <a:solidFill>
+            <a:schemeClr val="accent2">
+              <a:lumMod val="75000"/>
+            </a:schemeClr>
+          </a:solidFill>
+        </p:spPr>
+        <p:style>
+          <a:lnRef idx="2">
+            <a:schemeClr val="accent1">
+              <a:shade val="15000"/>
+            </a:schemeClr>
+          </a:lnRef>
+          <a:fillRef idx="1">
+            <a:schemeClr val="accent1"/>
+          </a:fillRef>
+          <a:effectRef idx="0">
+            <a:schemeClr val="accent1"/>
+          </a:effectRef>
+          <a:fontRef idx="minor">
+            <a:schemeClr val="lt1"/>
+          </a:fontRef>
+        </p:style>
+        <p:txBody>
+          <a:bodyPr rtlCol="0" anchor="ctr"/>
+          <a:lstStyle/>
+          <a:p>
+            <a:pPr algn="ctr"/>
+            <a:endParaRPr lang="pl-PL"/>
+          </a:p>
+        </p:txBody>
+      </p:sp>
+      <p:sp>
+        <p:nvSpPr>
+          <p:cNvPr id="11" name="Owal 10">
+            <a:extLst>
+              <a:ext uri="{FF2B5EF4-FFF2-40B4-BE49-F238E27FC236}">
+                <a16:creationId xmlns:a16="http://schemas.microsoft.com/office/drawing/2014/main" id="{7E1E8B2E-5FE2-4B44-A8B7-69EAAA4B471B}"/>
+              </a:ext>
+            </a:extLst>
+          </p:cNvPr>
+          <p:cNvSpPr/>
+          <p:nvPr/>
+        </p:nvSpPr>
+        <p:spPr>
+          <a:xfrm>
+            <a:off x="2499852" y="3293806"/>
+            <a:ext cx="1115962" cy="1115962"/>
+          </a:xfrm>
+          <a:prstGeom prst="ellipse">
+            <a:avLst/>
+          </a:prstGeom>
+        </p:spPr>
+        <p:style>
+          <a:lnRef idx="2">
+            <a:schemeClr val="accent1">
+              <a:shade val="15000"/>
+            </a:schemeClr>
+          </a:lnRef>
+          <a:fillRef idx="1">
+            <a:schemeClr val="accent1"/>
+          </a:fillRef>
+          <a:effectRef idx="0">
+            <a:schemeClr val="accent1"/>
+          </a:effectRef>
+          <a:fontRef idx="minor">
+            <a:schemeClr val="lt1"/>
+          </a:fontRef>
+        </p:style>
+        <p:txBody>
+          <a:bodyPr rtlCol="0" anchor="ctr"/>
+          <a:lstStyle/>
+          <a:p>
+            <a:pPr algn="ctr"/>
+            <a:endParaRPr lang="pl-PL"/>
+          </a:p>
+        </p:txBody>
+      </p:sp>
+      <p:sp>
+        <p:nvSpPr>
+          <p:cNvPr id="13" name="Owal 12">
+            <a:extLst>
+              <a:ext uri="{FF2B5EF4-FFF2-40B4-BE49-F238E27FC236}">
+                <a16:creationId xmlns:a16="http://schemas.microsoft.com/office/drawing/2014/main" id="{8B28CFAC-4C52-71BD-D6DC-330134587056}"/>
+              </a:ext>
+            </a:extLst>
+          </p:cNvPr>
+          <p:cNvSpPr/>
+          <p:nvPr/>
+        </p:nvSpPr>
+        <p:spPr>
+          <a:xfrm>
+            <a:off x="8576186" y="3293806"/>
+            <a:ext cx="1115962" cy="1115962"/>
+          </a:xfrm>
+          <a:prstGeom prst="ellipse">
+            <a:avLst/>
+          </a:prstGeom>
+        </p:spPr>
+        <p:style>
+          <a:lnRef idx="2">
+            <a:schemeClr val="accent1">
+              <a:shade val="15000"/>
+            </a:schemeClr>
+          </a:lnRef>
+          <a:fillRef idx="1">
+            <a:schemeClr val="accent1"/>
+          </a:fillRef>
+          <a:effectRef idx="0">
+            <a:schemeClr val="accent1"/>
+          </a:effectRef>
+          <a:fontRef idx="minor">
+            <a:schemeClr val="lt1"/>
+          </a:fontRef>
+        </p:style>
+        <p:txBody>
+          <a:bodyPr rtlCol="0" anchor="ctr"/>
+          <a:lstStyle/>
+          <a:p>
+            <a:pPr algn="ctr"/>
+            <a:endParaRPr lang="pl-PL" dirty="0"/>
+          </a:p>
+        </p:txBody>
+      </p:sp>
+      <p:sp>
+        <p:nvSpPr>
+          <p:cNvPr id="15" name="Owal 14">
+            <a:extLst>
+              <a:ext uri="{FF2B5EF4-FFF2-40B4-BE49-F238E27FC236}">
+                <a16:creationId xmlns:a16="http://schemas.microsoft.com/office/drawing/2014/main" id="{26925B68-1884-F793-03FF-065054D022DB}"/>
+              </a:ext>
+            </a:extLst>
+          </p:cNvPr>
+          <p:cNvSpPr/>
+          <p:nvPr/>
+        </p:nvSpPr>
+        <p:spPr>
+          <a:xfrm>
+            <a:off x="5538019" y="5376913"/>
+            <a:ext cx="1115962" cy="1115962"/>
+          </a:xfrm>
+          <a:prstGeom prst="ellipse">
+            <a:avLst/>
+          </a:prstGeom>
+          <a:solidFill>
+            <a:schemeClr val="tx2">
+              <a:lumMod val="50000"/>
+              <a:lumOff val="50000"/>
+            </a:schemeClr>
+          </a:solidFill>
+        </p:spPr>
+        <p:style>
+          <a:lnRef idx="2">
+            <a:schemeClr val="accent1">
+              <a:shade val="15000"/>
+            </a:schemeClr>
+          </a:lnRef>
+          <a:fillRef idx="1">
+            <a:schemeClr val="accent1"/>
+          </a:fillRef>
+          <a:effectRef idx="0">
+            <a:schemeClr val="accent1"/>
+          </a:effectRef>
+          <a:fontRef idx="minor">
+            <a:schemeClr val="lt1"/>
+          </a:fontRef>
+        </p:style>
+        <p:txBody>
+          <a:bodyPr rtlCol="0" anchor="ctr"/>
+          <a:lstStyle/>
+          <a:p>
+            <a:pPr algn="ctr"/>
+            <a:endParaRPr lang="pl-PL"/>
+          </a:p>
+        </p:txBody>
+      </p:sp>
+      <p:sp>
+        <p:nvSpPr>
+          <p:cNvPr id="17" name="Owal 16">
+            <a:extLst>
+              <a:ext uri="{FF2B5EF4-FFF2-40B4-BE49-F238E27FC236}">
+                <a16:creationId xmlns:a16="http://schemas.microsoft.com/office/drawing/2014/main" id="{953F0EC4-1CF8-7E0D-B8D0-328701AC1BAA}"/>
+              </a:ext>
+            </a:extLst>
+          </p:cNvPr>
+          <p:cNvSpPr/>
+          <p:nvPr/>
+        </p:nvSpPr>
+        <p:spPr>
+          <a:xfrm>
+            <a:off x="5538019" y="1210699"/>
+            <a:ext cx="1115962" cy="1115962"/>
+          </a:xfrm>
+          <a:prstGeom prst="ellipse">
+            <a:avLst/>
+          </a:prstGeom>
+        </p:spPr>
+        <p:style>
+          <a:lnRef idx="2">
+            <a:schemeClr val="accent1">
+              <a:shade val="15000"/>
+            </a:schemeClr>
+          </a:lnRef>
+          <a:fillRef idx="1">
+            <a:schemeClr val="accent1"/>
+          </a:fillRef>
+          <a:effectRef idx="0">
+            <a:schemeClr val="accent1"/>
+          </a:effectRef>
+          <a:fontRef idx="minor">
+            <a:schemeClr val="lt1"/>
+          </a:fontRef>
+        </p:style>
+        <p:txBody>
+          <a:bodyPr rtlCol="0" anchor="ctr"/>
+          <a:lstStyle/>
+          <a:p>
+            <a:pPr algn="ctr"/>
+            <a:endParaRPr lang="pl-PL"/>
+          </a:p>
+        </p:txBody>
+      </p:sp>
+      <p:cxnSp>
+        <p:nvCxnSpPr>
+          <p:cNvPr id="19" name="Łącznik prosty ze strzałką 18">
+            <a:extLst>
+              <a:ext uri="{FF2B5EF4-FFF2-40B4-BE49-F238E27FC236}">
+                <a16:creationId xmlns:a16="http://schemas.microsoft.com/office/drawing/2014/main" id="{5E26CC31-45B2-EDA6-135F-32B7459D6C8F}"/>
+              </a:ext>
+            </a:extLst>
+          </p:cNvPr>
+          <p:cNvCxnSpPr>
+            <a:stCxn id="11" idx="6"/>
+            <a:endCxn id="9" idx="2"/>
+          </p:cNvCxnSpPr>
+          <p:nvPr/>
+        </p:nvCxnSpPr>
+        <p:spPr>
+          <a:xfrm>
+            <a:off x="3615814" y="3851787"/>
+            <a:ext cx="1922205" cy="0"/>
+          </a:xfrm>
+          <a:prstGeom prst="straightConnector1">
+            <a:avLst/>
+          </a:prstGeom>
+          <a:ln w="19050" cap="flat" cmpd="sng" algn="ctr">
+            <a:solidFill>
+              <a:schemeClr val="accent1"/>
+            </a:solidFill>
+            <a:prstDash val="solid"/>
+            <a:round/>
+            <a:headEnd type="none" w="med" len="med"/>
+            <a:tailEnd type="arrow" w="med" len="med"/>
+          </a:ln>
+        </p:spPr>
+        <p:style>
+          <a:lnRef idx="0">
+            <a:scrgbClr r="0" g="0" b="0"/>
+          </a:lnRef>
+          <a:fillRef idx="0">
+            <a:scrgbClr r="0" g="0" b="0"/>
+          </a:fillRef>
+          <a:effectRef idx="0">
+            <a:scrgbClr r="0" g="0" b="0"/>
+          </a:effectRef>
+          <a:fontRef idx="minor">
+            <a:schemeClr val="tx1"/>
+          </a:fontRef>
+        </p:style>
+      </p:cxnSp>
+      <p:cxnSp>
+        <p:nvCxnSpPr>
+          <p:cNvPr id="21" name="Łącznik prosty ze strzałką 20">
+            <a:extLst>
+              <a:ext uri="{FF2B5EF4-FFF2-40B4-BE49-F238E27FC236}">
+                <a16:creationId xmlns:a16="http://schemas.microsoft.com/office/drawing/2014/main" id="{E37ED14B-9E32-E8B4-B5AD-FA683BE24DF9}"/>
+              </a:ext>
+            </a:extLst>
+          </p:cNvPr>
+          <p:cNvCxnSpPr>
+            <a:stCxn id="17" idx="4"/>
+            <a:endCxn id="9" idx="0"/>
+          </p:cNvCxnSpPr>
+          <p:nvPr/>
+        </p:nvCxnSpPr>
+        <p:spPr>
+          <a:xfrm>
+            <a:off x="6096000" y="2326661"/>
+            <a:ext cx="0" cy="967145"/>
+          </a:xfrm>
+          <a:prstGeom prst="straightConnector1">
+            <a:avLst/>
+          </a:prstGeom>
+          <a:ln w="19050" cap="flat" cmpd="sng" algn="ctr">
+            <a:solidFill>
+              <a:schemeClr val="accent1"/>
+            </a:solidFill>
+            <a:prstDash val="solid"/>
+            <a:round/>
+            <a:headEnd type="none" w="med" len="med"/>
+            <a:tailEnd type="arrow" w="med" len="med"/>
+          </a:ln>
+        </p:spPr>
+        <p:style>
+          <a:lnRef idx="0">
+            <a:scrgbClr r="0" g="0" b="0"/>
+          </a:lnRef>
+          <a:fillRef idx="0">
+            <a:scrgbClr r="0" g="0" b="0"/>
+          </a:fillRef>
+          <a:effectRef idx="0">
+            <a:scrgbClr r="0" g="0" b="0"/>
+          </a:effectRef>
+          <a:fontRef idx="minor">
+            <a:schemeClr val="tx1"/>
+          </a:fontRef>
+        </p:style>
+      </p:cxnSp>
+      <p:cxnSp>
+        <p:nvCxnSpPr>
+          <p:cNvPr id="23" name="Łącznik prosty ze strzałką 22">
+            <a:extLst>
+              <a:ext uri="{FF2B5EF4-FFF2-40B4-BE49-F238E27FC236}">
+                <a16:creationId xmlns:a16="http://schemas.microsoft.com/office/drawing/2014/main" id="{E9A41BD0-FB61-145F-7A27-0F9371309519}"/>
+              </a:ext>
+            </a:extLst>
+          </p:cNvPr>
+          <p:cNvCxnSpPr>
+            <a:stCxn id="15" idx="0"/>
+            <a:endCxn id="9" idx="4"/>
+          </p:cNvCxnSpPr>
+          <p:nvPr/>
+        </p:nvCxnSpPr>
+        <p:spPr>
+          <a:xfrm flipV="1">
+            <a:off x="6096000" y="4409768"/>
+            <a:ext cx="0" cy="967145"/>
+          </a:xfrm>
+          <a:prstGeom prst="straightConnector1">
+            <a:avLst/>
+          </a:prstGeom>
+          <a:ln w="19050" cap="flat" cmpd="sng" algn="ctr">
+            <a:solidFill>
+              <a:schemeClr val="accent1"/>
+            </a:solidFill>
+            <a:prstDash val="solid"/>
+            <a:round/>
+            <a:headEnd type="none" w="med" len="med"/>
+            <a:tailEnd type="arrow" w="med" len="med"/>
+          </a:ln>
+        </p:spPr>
+        <p:style>
+          <a:lnRef idx="0">
+            <a:scrgbClr r="0" g="0" b="0"/>
+          </a:lnRef>
+          <a:fillRef idx="0">
+            <a:scrgbClr r="0" g="0" b="0"/>
+          </a:fillRef>
+          <a:effectRef idx="0">
+            <a:scrgbClr r="0" g="0" b="0"/>
+          </a:effectRef>
+          <a:fontRef idx="minor">
+            <a:schemeClr val="tx1"/>
+          </a:fontRef>
+        </p:style>
+      </p:cxnSp>
+      <p:cxnSp>
+        <p:nvCxnSpPr>
+          <p:cNvPr id="25" name="Łącznik prosty ze strzałką 24">
+            <a:extLst>
+              <a:ext uri="{FF2B5EF4-FFF2-40B4-BE49-F238E27FC236}">
+                <a16:creationId xmlns:a16="http://schemas.microsoft.com/office/drawing/2014/main" id="{C7A8A049-38D0-DF0F-5CED-DFA6E4C7E529}"/>
+              </a:ext>
+            </a:extLst>
+          </p:cNvPr>
+          <p:cNvCxnSpPr>
+            <a:stCxn id="13" idx="2"/>
+            <a:endCxn id="9" idx="6"/>
+          </p:cNvCxnSpPr>
+          <p:nvPr/>
+        </p:nvCxnSpPr>
+        <p:spPr>
+          <a:xfrm flipH="1">
+            <a:off x="6653981" y="3851787"/>
+            <a:ext cx="1922205" cy="0"/>
+          </a:xfrm>
+          <a:prstGeom prst="straightConnector1">
+            <a:avLst/>
+          </a:prstGeom>
+          <a:ln w="19050" cap="flat" cmpd="sng" algn="ctr">
+            <a:solidFill>
+              <a:schemeClr val="accent1"/>
+            </a:solidFill>
+            <a:prstDash val="solid"/>
+            <a:round/>
+            <a:headEnd type="none" w="med" len="med"/>
+            <a:tailEnd type="arrow" w="med" len="med"/>
+          </a:ln>
+        </p:spPr>
+        <p:style>
+          <a:lnRef idx="0">
+            <a:scrgbClr r="0" g="0" b="0"/>
+          </a:lnRef>
+          <a:fillRef idx="0">
+            <a:scrgbClr r="0" g="0" b="0"/>
+          </a:fillRef>
+          <a:effectRef idx="0">
+            <a:scrgbClr r="0" g="0" b="0"/>
+          </a:effectRef>
+          <a:fontRef idx="minor">
+            <a:schemeClr val="tx1"/>
+          </a:fontRef>
+        </p:style>
+      </p:cxnSp>
+      <p:sp>
+        <p:nvSpPr>
+          <p:cNvPr id="30" name="pole tekstowe 29">
+            <a:extLst>
+              <a:ext uri="{FF2B5EF4-FFF2-40B4-BE49-F238E27FC236}">
+                <a16:creationId xmlns:a16="http://schemas.microsoft.com/office/drawing/2014/main" id="{8DFE19C5-5B3B-5C03-A8E9-D957B2698F1B}"/>
               </a:ext>
             </a:extLst>
           </p:cNvPr>
@@ -6978,8 +12614,8 @@
         </p:nvSpPr>
         <p:spPr>
           <a:xfrm>
-            <a:off x="481262" y="5396392"/>
-            <a:ext cx="5213685" cy="969496"/>
+            <a:off x="5538019" y="3667121"/>
+            <a:ext cx="1115962" cy="369332"/>
           </a:xfrm>
           <a:prstGeom prst="rect">
             <a:avLst/>
@@ -6987,34 +12623,454 @@
           <a:noFill/>
         </p:spPr>
         <p:txBody>
-          <a:bodyPr wrap="square" rtlCol="0" anchor="b">
+          <a:bodyPr wrap="square" rtlCol="0">
             <a:spAutoFit/>
           </a:bodyPr>
           <a:lstStyle/>
           <a:p>
             <a:r>
-              <a:rPr lang="pl-PL" sz="1900" u="sng" dirty="0"/>
-              <a:t>Parametry</a:t>
-            </a:r>
-          </a:p>
-          <a:p>
-            <a:r>
-              <a:rPr lang="pl-PL" sz="1900" dirty="0"/>
-              <a:t>liczba cech: 3, liczba wariantów: 6</a:t>
-            </a:r>
-          </a:p>
-          <a:p>
-            <a:r>
-              <a:rPr lang="pl-PL" sz="1900" dirty="0"/>
-              <a:t>długość boku siatki: 18,  liczba iteracji: 1mln</a:t>
-            </a:r>
+              <a:rPr lang="pl-PL" dirty="0">
+                <a:solidFill>
+                  <a:schemeClr val="bg1"/>
+                </a:solidFill>
+              </a:rPr>
+              <a:t> [1,</a:t>
+            </a:r>
+            <a:r>
+              <a:rPr lang="en-US" dirty="0">
+                <a:solidFill>
+                  <a:schemeClr val="bg1"/>
+                </a:solidFill>
+              </a:rPr>
+              <a:t>4</a:t>
+            </a:r>
+            <a:r>
+              <a:rPr lang="pl-PL" dirty="0">
+                <a:solidFill>
+                  <a:schemeClr val="bg1"/>
+                </a:solidFill>
+              </a:rPr>
+              <a:t>,1,2]</a:t>
+            </a:r>
+          </a:p>
+        </p:txBody>
+      </p:sp>
+      <p:sp>
+        <p:nvSpPr>
+          <p:cNvPr id="32" name="pole tekstowe 31">
+            <a:extLst>
+              <a:ext uri="{FF2B5EF4-FFF2-40B4-BE49-F238E27FC236}">
+                <a16:creationId xmlns:a16="http://schemas.microsoft.com/office/drawing/2014/main" id="{2746DD0B-1E50-8405-7571-D6C5BFA8C40D}"/>
+              </a:ext>
+            </a:extLst>
+          </p:cNvPr>
+          <p:cNvSpPr txBox="1"/>
+          <p:nvPr/>
+        </p:nvSpPr>
+        <p:spPr>
+          <a:xfrm>
+            <a:off x="2499852" y="3625334"/>
+            <a:ext cx="1252831" cy="369332"/>
+          </a:xfrm>
+          <a:prstGeom prst="rect">
+            <a:avLst/>
+          </a:prstGeom>
+          <a:noFill/>
+        </p:spPr>
+        <p:txBody>
+          <a:bodyPr wrap="square" rtlCol="0">
+            <a:spAutoFit/>
+          </a:bodyPr>
+          <a:lstStyle/>
+          <a:p>
+            <a:r>
+              <a:rPr lang="pl-PL" dirty="0">
+                <a:solidFill>
+                  <a:schemeClr val="bg1"/>
+                </a:solidFill>
+              </a:rPr>
+              <a:t> [7,7,5,</a:t>
+            </a:r>
+            <a:r>
+              <a:rPr lang="en-US" dirty="0">
+                <a:solidFill>
+                  <a:schemeClr val="bg1"/>
+                </a:solidFill>
+              </a:rPr>
+              <a:t>3</a:t>
+            </a:r>
+            <a:r>
+              <a:rPr lang="pl-PL" dirty="0">
+                <a:solidFill>
+                  <a:schemeClr val="bg1"/>
+                </a:solidFill>
+              </a:rPr>
+              <a:t>]</a:t>
+            </a:r>
+          </a:p>
+        </p:txBody>
+      </p:sp>
+      <p:sp>
+        <p:nvSpPr>
+          <p:cNvPr id="34" name="pole tekstowe 33">
+            <a:extLst>
+              <a:ext uri="{FF2B5EF4-FFF2-40B4-BE49-F238E27FC236}">
+                <a16:creationId xmlns:a16="http://schemas.microsoft.com/office/drawing/2014/main" id="{6C9A7DE0-549F-0BEE-1B08-404DA57F7D16}"/>
+              </a:ext>
+            </a:extLst>
+          </p:cNvPr>
+          <p:cNvSpPr txBox="1"/>
+          <p:nvPr/>
+        </p:nvSpPr>
+        <p:spPr>
+          <a:xfrm>
+            <a:off x="8576186" y="3667121"/>
+            <a:ext cx="1252831" cy="369332"/>
+          </a:xfrm>
+          <a:prstGeom prst="rect">
+            <a:avLst/>
+          </a:prstGeom>
+          <a:noFill/>
+        </p:spPr>
+        <p:txBody>
+          <a:bodyPr wrap="square" rtlCol="0">
+            <a:spAutoFit/>
+          </a:bodyPr>
+          <a:lstStyle/>
+          <a:p>
+            <a:r>
+              <a:rPr lang="pl-PL" dirty="0">
+                <a:solidFill>
+                  <a:schemeClr val="bg1"/>
+                </a:solidFill>
+              </a:rPr>
+              <a:t> [1,0,5,7]</a:t>
+            </a:r>
+          </a:p>
+        </p:txBody>
+      </p:sp>
+      <p:sp>
+        <p:nvSpPr>
+          <p:cNvPr id="36" name="pole tekstowe 35">
+            <a:extLst>
+              <a:ext uri="{FF2B5EF4-FFF2-40B4-BE49-F238E27FC236}">
+                <a16:creationId xmlns:a16="http://schemas.microsoft.com/office/drawing/2014/main" id="{1ECEFE5D-728C-4432-46D6-754814153758}"/>
+              </a:ext>
+            </a:extLst>
+          </p:cNvPr>
+          <p:cNvSpPr txBox="1"/>
+          <p:nvPr/>
+        </p:nvSpPr>
+        <p:spPr>
+          <a:xfrm>
+            <a:off x="5538019" y="5750228"/>
+            <a:ext cx="1252831" cy="369332"/>
+          </a:xfrm>
+          <a:prstGeom prst="rect">
+            <a:avLst/>
+          </a:prstGeom>
+          <a:noFill/>
+        </p:spPr>
+        <p:txBody>
+          <a:bodyPr wrap="square" rtlCol="0">
+            <a:spAutoFit/>
+          </a:bodyPr>
+          <a:lstStyle/>
+          <a:p>
+            <a:r>
+              <a:rPr lang="pl-PL" dirty="0">
+                <a:solidFill>
+                  <a:schemeClr val="bg1"/>
+                </a:solidFill>
+              </a:rPr>
+              <a:t> [1,4,5,7]</a:t>
+            </a:r>
+          </a:p>
+        </p:txBody>
+      </p:sp>
+      <p:sp>
+        <p:nvSpPr>
+          <p:cNvPr id="38" name="pole tekstowe 37">
+            <a:extLst>
+              <a:ext uri="{FF2B5EF4-FFF2-40B4-BE49-F238E27FC236}">
+                <a16:creationId xmlns:a16="http://schemas.microsoft.com/office/drawing/2014/main" id="{B2FE0B97-3C01-033F-5A34-0F3210F583D5}"/>
+              </a:ext>
+            </a:extLst>
+          </p:cNvPr>
+          <p:cNvSpPr txBox="1"/>
+          <p:nvPr/>
+        </p:nvSpPr>
+        <p:spPr>
+          <a:xfrm>
+            <a:off x="5555226" y="1584014"/>
+            <a:ext cx="1252831" cy="369332"/>
+          </a:xfrm>
+          <a:prstGeom prst="rect">
+            <a:avLst/>
+          </a:prstGeom>
+          <a:noFill/>
+        </p:spPr>
+        <p:txBody>
+          <a:bodyPr wrap="square" rtlCol="0">
+            <a:spAutoFit/>
+          </a:bodyPr>
+          <a:lstStyle/>
+          <a:p>
+            <a:r>
+              <a:rPr lang="pl-PL" dirty="0">
+                <a:solidFill>
+                  <a:schemeClr val="bg1"/>
+                </a:solidFill>
+              </a:rPr>
+              <a:t> [1,0,5,</a:t>
+            </a:r>
+            <a:r>
+              <a:rPr lang="en-US" dirty="0">
+                <a:solidFill>
+                  <a:schemeClr val="bg1"/>
+                </a:solidFill>
+              </a:rPr>
+              <a:t>2</a:t>
+            </a:r>
+            <a:r>
+              <a:rPr lang="pl-PL" dirty="0">
+                <a:solidFill>
+                  <a:schemeClr val="bg1"/>
+                </a:solidFill>
+              </a:rPr>
+              <a:t>]</a:t>
+            </a:r>
+          </a:p>
+        </p:txBody>
+      </p:sp>
+      <p:sp>
+        <p:nvSpPr>
+          <p:cNvPr id="39" name="pole tekstowe 38">
+            <a:extLst>
+              <a:ext uri="{FF2B5EF4-FFF2-40B4-BE49-F238E27FC236}">
+                <a16:creationId xmlns:a16="http://schemas.microsoft.com/office/drawing/2014/main" id="{3CEB0D2C-04B5-70E9-9086-803EF12953A7}"/>
+              </a:ext>
+            </a:extLst>
+          </p:cNvPr>
+          <p:cNvSpPr txBox="1"/>
+          <p:nvPr/>
+        </p:nvSpPr>
+        <p:spPr>
+          <a:xfrm>
+            <a:off x="4001729" y="3519948"/>
+            <a:ext cx="657552" cy="369332"/>
+          </a:xfrm>
+          <a:prstGeom prst="rect">
+            <a:avLst/>
+          </a:prstGeom>
+          <a:noFill/>
+        </p:spPr>
+        <p:txBody>
+          <a:bodyPr wrap="none" rtlCol="0">
+            <a:spAutoFit/>
+          </a:bodyPr>
+          <a:lstStyle/>
+          <a:p>
+            <a:r>
+              <a:rPr lang="en-US" dirty="0"/>
+              <a:t>P = 0</a:t>
+            </a:r>
+            <a:endParaRPr lang="pl-PL" dirty="0"/>
+          </a:p>
+        </p:txBody>
+      </p:sp>
+      <p:sp>
+        <p:nvSpPr>
+          <p:cNvPr id="43" name="pole tekstowe 42">
+            <a:extLst>
+              <a:ext uri="{FF2B5EF4-FFF2-40B4-BE49-F238E27FC236}">
+                <a16:creationId xmlns:a16="http://schemas.microsoft.com/office/drawing/2014/main" id="{2F5293F2-E47E-9835-C036-672AD1F2A370}"/>
+              </a:ext>
+            </a:extLst>
+          </p:cNvPr>
+          <p:cNvSpPr txBox="1"/>
+          <p:nvPr/>
+        </p:nvSpPr>
+        <p:spPr>
+          <a:xfrm>
+            <a:off x="7286307" y="3519948"/>
+            <a:ext cx="859531" cy="369332"/>
+          </a:xfrm>
+          <a:prstGeom prst="rect">
+            <a:avLst/>
+          </a:prstGeom>
+          <a:noFill/>
+        </p:spPr>
+        <p:txBody>
+          <a:bodyPr wrap="none" rtlCol="0">
+            <a:spAutoFit/>
+          </a:bodyPr>
+          <a:lstStyle/>
+          <a:p>
+            <a:r>
+              <a:rPr lang="en-US" dirty="0"/>
+              <a:t>P = 1/4</a:t>
+            </a:r>
+            <a:endParaRPr lang="pl-PL" dirty="0"/>
+          </a:p>
+        </p:txBody>
+      </p:sp>
+      <p:sp>
+        <p:nvSpPr>
+          <p:cNvPr id="45" name="pole tekstowe 44">
+            <a:extLst>
+              <a:ext uri="{FF2B5EF4-FFF2-40B4-BE49-F238E27FC236}">
+                <a16:creationId xmlns:a16="http://schemas.microsoft.com/office/drawing/2014/main" id="{498259D8-790A-FD42-3BB8-D15B458ED709}"/>
+              </a:ext>
+            </a:extLst>
+          </p:cNvPr>
+          <p:cNvSpPr txBox="1"/>
+          <p:nvPr/>
+        </p:nvSpPr>
+        <p:spPr>
+          <a:xfrm>
+            <a:off x="6164434" y="2627714"/>
+            <a:ext cx="859531" cy="369332"/>
+          </a:xfrm>
+          <a:prstGeom prst="rect">
+            <a:avLst/>
+          </a:prstGeom>
+          <a:noFill/>
+        </p:spPr>
+        <p:txBody>
+          <a:bodyPr wrap="none" rtlCol="0">
+            <a:spAutoFit/>
+          </a:bodyPr>
+          <a:lstStyle/>
+          <a:p>
+            <a:r>
+              <a:rPr lang="en-US" dirty="0"/>
+              <a:t>P = 1/2</a:t>
+            </a:r>
+            <a:endParaRPr lang="pl-PL" dirty="0"/>
+          </a:p>
+        </p:txBody>
+      </p:sp>
+      <p:sp>
+        <p:nvSpPr>
+          <p:cNvPr id="47" name="pole tekstowe 46">
+            <a:extLst>
+              <a:ext uri="{FF2B5EF4-FFF2-40B4-BE49-F238E27FC236}">
+                <a16:creationId xmlns:a16="http://schemas.microsoft.com/office/drawing/2014/main" id="{7CE31329-00DB-DA96-9A24-0AC1472C4AF8}"/>
+              </a:ext>
+            </a:extLst>
+          </p:cNvPr>
+          <p:cNvSpPr txBox="1"/>
+          <p:nvPr/>
+        </p:nvSpPr>
+        <p:spPr>
+          <a:xfrm>
+            <a:off x="6181641" y="4689633"/>
+            <a:ext cx="859531" cy="369332"/>
+          </a:xfrm>
+          <a:prstGeom prst="rect">
+            <a:avLst/>
+          </a:prstGeom>
+          <a:noFill/>
+        </p:spPr>
+        <p:txBody>
+          <a:bodyPr wrap="none" rtlCol="0">
+            <a:spAutoFit/>
+          </a:bodyPr>
+          <a:lstStyle/>
+          <a:p>
+            <a:r>
+              <a:rPr lang="en-US" dirty="0"/>
+              <a:t>P = 1/2</a:t>
+            </a:r>
+            <a:endParaRPr lang="pl-PL" dirty="0"/>
+          </a:p>
+        </p:txBody>
+      </p:sp>
+      <p:sp>
+        <p:nvSpPr>
+          <p:cNvPr id="3" name="pole tekstowe 2">
+            <a:extLst>
+              <a:ext uri="{FF2B5EF4-FFF2-40B4-BE49-F238E27FC236}">
+                <a16:creationId xmlns:a16="http://schemas.microsoft.com/office/drawing/2014/main" id="{FDF8329F-0805-4891-C012-7562F2DE2D8A}"/>
+              </a:ext>
+            </a:extLst>
+          </p:cNvPr>
+          <p:cNvSpPr txBox="1"/>
+          <p:nvPr/>
+        </p:nvSpPr>
+        <p:spPr>
+          <a:xfrm>
+            <a:off x="780435" y="1584014"/>
+            <a:ext cx="3496593" cy="892552"/>
+          </a:xfrm>
+          <a:prstGeom prst="rect">
+            <a:avLst/>
+          </a:prstGeom>
+          <a:noFill/>
+        </p:spPr>
+        <p:txBody>
+          <a:bodyPr wrap="square" rtlCol="0">
+            <a:spAutoFit/>
+          </a:bodyPr>
+          <a:lstStyle/>
+          <a:p>
+            <a:r>
+              <a:rPr lang="en-US" sz="2600" dirty="0" err="1"/>
+              <a:t>Zmieniamy</a:t>
+            </a:r>
+            <a:r>
+              <a:rPr lang="en-US" sz="2600" dirty="0"/>
+              <a:t> </a:t>
+            </a:r>
+            <a:r>
+              <a:rPr lang="en-US" sz="2600" dirty="0" err="1"/>
+              <a:t>losową</a:t>
+            </a:r>
+            <a:r>
+              <a:rPr lang="en-US" sz="2600" dirty="0"/>
+              <a:t> </a:t>
+            </a:r>
+            <a:r>
+              <a:rPr lang="en-US" sz="2600" dirty="0" err="1"/>
+              <a:t>cechę</a:t>
+            </a:r>
+            <a:r>
+              <a:rPr lang="en-US" sz="2600" dirty="0"/>
+              <a:t>, </a:t>
+            </a:r>
+            <a:r>
+              <a:rPr lang="en-US" sz="2600" dirty="0" err="1"/>
+              <a:t>którą</a:t>
+            </a:r>
+            <a:r>
+              <a:rPr lang="en-US" sz="2600" dirty="0"/>
+              <a:t> </a:t>
+            </a:r>
+            <a:r>
+              <a:rPr lang="en-US" sz="2600" dirty="0" err="1"/>
+              <a:t>się</a:t>
+            </a:r>
+            <a:r>
+              <a:rPr lang="en-US" sz="2600" dirty="0"/>
+              <a:t> </a:t>
+            </a:r>
+            <a:r>
+              <a:rPr lang="en-US" sz="2600" dirty="0" err="1"/>
+              <a:t>rożnią</a:t>
+            </a:r>
+            <a:r>
+              <a:rPr lang="en-US" sz="2600" dirty="0"/>
+              <a:t>.</a:t>
+            </a:r>
+            <a:endParaRPr lang="pl-PL" sz="2600" dirty="0"/>
           </a:p>
         </p:txBody>
       </p:sp>
     </p:spTree>
     <p:extLst>
       <p:ext uri="{BB962C8B-B14F-4D97-AF65-F5344CB8AC3E}">
-        <p14:creationId xmlns:p14="http://schemas.microsoft.com/office/powerpoint/2010/main" val="2513979403"/>
+        <p14:creationId xmlns:p14="http://schemas.microsoft.com/office/powerpoint/2010/main" val="3975637616"/>
       </p:ext>
     </p:extLst>
   </p:cSld>

--- a/ModelAxelroda_prezentacja.pptx
+++ b/ModelAxelroda_prezentacja.pptx
@@ -1,9 +1,12 @@
 
 <file path=ppt/presentation.xml><?xml version="1.0" encoding="utf-8"?>
-<p:presentation xmlns:a="http://schemas.openxmlformats.org/drawingml/2006/main" xmlns:r="http://schemas.openxmlformats.org/officeDocument/2006/relationships" xmlns:p="http://schemas.openxmlformats.org/presentationml/2006/main" saveSubsetFonts="1">
+<p:presentation xmlns:a="http://schemas.openxmlformats.org/drawingml/2006/main" xmlns:r="http://schemas.openxmlformats.org/officeDocument/2006/relationships" xmlns:p="http://schemas.openxmlformats.org/presentationml/2006/main" showSpecialPlsOnTitleSld="0" saveSubsetFonts="1">
   <p:sldMasterIdLst>
     <p:sldMasterId id="2147483648" r:id="rId1"/>
   </p:sldMasterIdLst>
+  <p:notesMasterIdLst>
+    <p:notesMasterId r:id="rId23"/>
+  </p:notesMasterIdLst>
   <p:sldIdLst>
     <p:sldId id="256" r:id="rId2"/>
     <p:sldId id="258" r:id="rId3"/>
@@ -25,6 +28,7 @@
     <p:sldId id="271" r:id="rId19"/>
     <p:sldId id="265" r:id="rId20"/>
     <p:sldId id="264" r:id="rId21"/>
+    <p:sldId id="290" r:id="rId22"/>
   </p:sldIdLst>
   <p:sldSz cx="12192000" cy="6858000"/>
   <p:notesSz cx="6858000" cy="9144000"/>
@@ -810,6 +814,355 @@
 </pc:chgInfo>
 </file>
 
+<file path=ppt/notesMasters/notesMaster1.xml><?xml version="1.0" encoding="utf-8"?>
+<p:notesMaster xmlns:a="http://schemas.openxmlformats.org/drawingml/2006/main" xmlns:r="http://schemas.openxmlformats.org/officeDocument/2006/relationships" xmlns:p="http://schemas.openxmlformats.org/presentationml/2006/main">
+  <p:cSld>
+    <p:bg>
+      <p:bgRef idx="1001">
+        <a:schemeClr val="bg1"/>
+      </p:bgRef>
+    </p:bg>
+    <p:spTree>
+      <p:nvGrpSpPr>
+        <p:cNvPr id="1" name=""/>
+        <p:cNvGrpSpPr/>
+        <p:nvPr/>
+      </p:nvGrpSpPr>
+      <p:grpSpPr>
+        <a:xfrm>
+          <a:off x="0" y="0"/>
+          <a:ext cx="0" cy="0"/>
+          <a:chOff x="0" y="0"/>
+          <a:chExt cx="0" cy="0"/>
+        </a:xfrm>
+      </p:grpSpPr>
+      <p:sp>
+        <p:nvSpPr>
+          <p:cNvPr id="2" name="Symbol zastępczy nagłówka 1"/>
+          <p:cNvSpPr>
+            <a:spLocks noGrp="1"/>
+          </p:cNvSpPr>
+          <p:nvPr>
+            <p:ph type="hdr" sz="quarter"/>
+          </p:nvPr>
+        </p:nvSpPr>
+        <p:spPr>
+          <a:xfrm>
+            <a:off x="0" y="0"/>
+            <a:ext cx="2971800" cy="458788"/>
+          </a:xfrm>
+          <a:prstGeom prst="rect">
+            <a:avLst/>
+          </a:prstGeom>
+        </p:spPr>
+        <p:txBody>
+          <a:bodyPr vert="horz" lIns="91440" tIns="45720" rIns="91440" bIns="45720" rtlCol="0"/>
+          <a:lstStyle>
+            <a:lvl1pPr algn="l">
+              <a:defRPr sz="1200"/>
+            </a:lvl1pPr>
+          </a:lstStyle>
+          <a:p>
+            <a:endParaRPr lang="pl-PL"/>
+          </a:p>
+        </p:txBody>
+      </p:sp>
+      <p:sp>
+        <p:nvSpPr>
+          <p:cNvPr id="3" name="Symbol zastępczy daty 2"/>
+          <p:cNvSpPr>
+            <a:spLocks noGrp="1"/>
+          </p:cNvSpPr>
+          <p:nvPr>
+            <p:ph type="dt" idx="1"/>
+          </p:nvPr>
+        </p:nvSpPr>
+        <p:spPr>
+          <a:xfrm>
+            <a:off x="3884613" y="0"/>
+            <a:ext cx="2971800" cy="458788"/>
+          </a:xfrm>
+          <a:prstGeom prst="rect">
+            <a:avLst/>
+          </a:prstGeom>
+        </p:spPr>
+        <p:txBody>
+          <a:bodyPr vert="horz" lIns="91440" tIns="45720" rIns="91440" bIns="45720" rtlCol="0"/>
+          <a:lstStyle>
+            <a:lvl1pPr algn="r">
+              <a:defRPr sz="1200"/>
+            </a:lvl1pPr>
+          </a:lstStyle>
+          <a:p>
+            <a:fld id="{21FD153F-C2D7-42B8-9DDD-313149076134}" type="datetimeFigureOut">
+              <a:rPr lang="pl-PL" smtClean="0"/>
+              <a:t>24.06.2026</a:t>
+            </a:fld>
+            <a:endParaRPr lang="pl-PL"/>
+          </a:p>
+        </p:txBody>
+      </p:sp>
+      <p:sp>
+        <p:nvSpPr>
+          <p:cNvPr id="4" name="Symbol zastępczy obrazu slajdu 3"/>
+          <p:cNvSpPr>
+            <a:spLocks noGrp="1" noRot="1" noChangeAspect="1"/>
+          </p:cNvSpPr>
+          <p:nvPr>
+            <p:ph type="sldImg" idx="2"/>
+          </p:nvPr>
+        </p:nvSpPr>
+        <p:spPr>
+          <a:xfrm>
+            <a:off x="685800" y="1143000"/>
+            <a:ext cx="5486400" cy="3086100"/>
+          </a:xfrm>
+          <a:prstGeom prst="rect">
+            <a:avLst/>
+          </a:prstGeom>
+          <a:noFill/>
+          <a:ln w="12700">
+            <a:solidFill>
+              <a:prstClr val="black"/>
+            </a:solidFill>
+          </a:ln>
+        </p:spPr>
+        <p:txBody>
+          <a:bodyPr vert="horz" lIns="91440" tIns="45720" rIns="91440" bIns="45720" rtlCol="0" anchor="ctr"/>
+          <a:lstStyle/>
+          <a:p>
+            <a:endParaRPr lang="pl-PL"/>
+          </a:p>
+        </p:txBody>
+      </p:sp>
+      <p:sp>
+        <p:nvSpPr>
+          <p:cNvPr id="5" name="Symbol zastępczy notatek 4"/>
+          <p:cNvSpPr>
+            <a:spLocks noGrp="1"/>
+          </p:cNvSpPr>
+          <p:nvPr>
+            <p:ph type="body" sz="quarter" idx="3"/>
+          </p:nvPr>
+        </p:nvSpPr>
+        <p:spPr>
+          <a:xfrm>
+            <a:off x="685800" y="4400550"/>
+            <a:ext cx="5486400" cy="3600450"/>
+          </a:xfrm>
+          <a:prstGeom prst="rect">
+            <a:avLst/>
+          </a:prstGeom>
+        </p:spPr>
+        <p:txBody>
+          <a:bodyPr vert="horz" lIns="91440" tIns="45720" rIns="91440" bIns="45720" rtlCol="0"/>
+          <a:lstStyle/>
+          <a:p>
+            <a:pPr lvl="0"/>
+            <a:r>
+              <a:rPr lang="pl-PL"/>
+              <a:t>Kliknij, aby edytować style wzorca tekstu</a:t>
+            </a:r>
+          </a:p>
+          <a:p>
+            <a:pPr lvl="1"/>
+            <a:r>
+              <a:rPr lang="pl-PL"/>
+              <a:t>Drugi poziom</a:t>
+            </a:r>
+          </a:p>
+          <a:p>
+            <a:pPr lvl="2"/>
+            <a:r>
+              <a:rPr lang="pl-PL"/>
+              <a:t>Trzeci poziom</a:t>
+            </a:r>
+          </a:p>
+          <a:p>
+            <a:pPr lvl="3"/>
+            <a:r>
+              <a:rPr lang="pl-PL"/>
+              <a:t>Czwarty poziom</a:t>
+            </a:r>
+          </a:p>
+          <a:p>
+            <a:pPr lvl="4"/>
+            <a:r>
+              <a:rPr lang="pl-PL"/>
+              <a:t>Piąty poziom</a:t>
+            </a:r>
+          </a:p>
+        </p:txBody>
+      </p:sp>
+      <p:sp>
+        <p:nvSpPr>
+          <p:cNvPr id="6" name="Symbol zastępczy stopki 5"/>
+          <p:cNvSpPr>
+            <a:spLocks noGrp="1"/>
+          </p:cNvSpPr>
+          <p:nvPr>
+            <p:ph type="ftr" sz="quarter" idx="4"/>
+          </p:nvPr>
+        </p:nvSpPr>
+        <p:spPr>
+          <a:xfrm>
+            <a:off x="0" y="8685213"/>
+            <a:ext cx="2971800" cy="458787"/>
+          </a:xfrm>
+          <a:prstGeom prst="rect">
+            <a:avLst/>
+          </a:prstGeom>
+        </p:spPr>
+        <p:txBody>
+          <a:bodyPr vert="horz" lIns="91440" tIns="45720" rIns="91440" bIns="45720" rtlCol="0" anchor="b"/>
+          <a:lstStyle>
+            <a:lvl1pPr algn="l">
+              <a:defRPr sz="1200"/>
+            </a:lvl1pPr>
+          </a:lstStyle>
+          <a:p>
+            <a:endParaRPr lang="pl-PL"/>
+          </a:p>
+        </p:txBody>
+      </p:sp>
+      <p:sp>
+        <p:nvSpPr>
+          <p:cNvPr id="7" name="Symbol zastępczy numeru slajdu 6"/>
+          <p:cNvSpPr>
+            <a:spLocks noGrp="1"/>
+          </p:cNvSpPr>
+          <p:nvPr>
+            <p:ph type="sldNum" sz="quarter" idx="5"/>
+          </p:nvPr>
+        </p:nvSpPr>
+        <p:spPr>
+          <a:xfrm>
+            <a:off x="3884613" y="8685213"/>
+            <a:ext cx="2971800" cy="458787"/>
+          </a:xfrm>
+          <a:prstGeom prst="rect">
+            <a:avLst/>
+          </a:prstGeom>
+        </p:spPr>
+        <p:txBody>
+          <a:bodyPr vert="horz" lIns="91440" tIns="45720" rIns="91440" bIns="45720" rtlCol="0" anchor="b"/>
+          <a:lstStyle>
+            <a:lvl1pPr algn="r">
+              <a:defRPr sz="1200"/>
+            </a:lvl1pPr>
+          </a:lstStyle>
+          <a:p>
+            <a:fld id="{A817F9CD-A7BD-4F9D-9A15-86D6F7B83BC2}" type="slidenum">
+              <a:rPr lang="pl-PL" smtClean="0"/>
+              <a:t>‹#›</a:t>
+            </a:fld>
+            <a:endParaRPr lang="pl-PL"/>
+          </a:p>
+        </p:txBody>
+      </p:sp>
+    </p:spTree>
+    <p:extLst>
+      <p:ext uri="{BB962C8B-B14F-4D97-AF65-F5344CB8AC3E}">
+        <p14:creationId xmlns:p14="http://schemas.microsoft.com/office/powerpoint/2010/main" val="3180723073"/>
+      </p:ext>
+    </p:extLst>
+  </p:cSld>
+  <p:clrMap bg1="lt1" tx1="dk1" bg2="lt2" tx2="dk2" accent1="accent1" accent2="accent2" accent3="accent3" accent4="accent4" accent5="accent5" accent6="accent6" hlink="hlink" folHlink="folHlink"/>
+  <p:notesStyle>
+    <a:lvl1pPr marL="0" algn="l" defTabSz="914400" rtl="0" eaLnBrk="1" latinLnBrk="0" hangingPunct="1">
+      <a:defRPr sz="1200" kern="1200">
+        <a:solidFill>
+          <a:schemeClr val="tx1"/>
+        </a:solidFill>
+        <a:latin typeface="+mn-lt"/>
+        <a:ea typeface="+mn-ea"/>
+        <a:cs typeface="+mn-cs"/>
+      </a:defRPr>
+    </a:lvl1pPr>
+    <a:lvl2pPr marL="457200" algn="l" defTabSz="914400" rtl="0" eaLnBrk="1" latinLnBrk="0" hangingPunct="1">
+      <a:defRPr sz="1200" kern="1200">
+        <a:solidFill>
+          <a:schemeClr val="tx1"/>
+        </a:solidFill>
+        <a:latin typeface="+mn-lt"/>
+        <a:ea typeface="+mn-ea"/>
+        <a:cs typeface="+mn-cs"/>
+      </a:defRPr>
+    </a:lvl2pPr>
+    <a:lvl3pPr marL="914400" algn="l" defTabSz="914400" rtl="0" eaLnBrk="1" latinLnBrk="0" hangingPunct="1">
+      <a:defRPr sz="1200" kern="1200">
+        <a:solidFill>
+          <a:schemeClr val="tx1"/>
+        </a:solidFill>
+        <a:latin typeface="+mn-lt"/>
+        <a:ea typeface="+mn-ea"/>
+        <a:cs typeface="+mn-cs"/>
+      </a:defRPr>
+    </a:lvl3pPr>
+    <a:lvl4pPr marL="1371600" algn="l" defTabSz="914400" rtl="0" eaLnBrk="1" latinLnBrk="0" hangingPunct="1">
+      <a:defRPr sz="1200" kern="1200">
+        <a:solidFill>
+          <a:schemeClr val="tx1"/>
+        </a:solidFill>
+        <a:latin typeface="+mn-lt"/>
+        <a:ea typeface="+mn-ea"/>
+        <a:cs typeface="+mn-cs"/>
+      </a:defRPr>
+    </a:lvl4pPr>
+    <a:lvl5pPr marL="1828800" algn="l" defTabSz="914400" rtl="0" eaLnBrk="1" latinLnBrk="0" hangingPunct="1">
+      <a:defRPr sz="1200" kern="1200">
+        <a:solidFill>
+          <a:schemeClr val="tx1"/>
+        </a:solidFill>
+        <a:latin typeface="+mn-lt"/>
+        <a:ea typeface="+mn-ea"/>
+        <a:cs typeface="+mn-cs"/>
+      </a:defRPr>
+    </a:lvl5pPr>
+    <a:lvl6pPr marL="2286000" algn="l" defTabSz="914400" rtl="0" eaLnBrk="1" latinLnBrk="0" hangingPunct="1">
+      <a:defRPr sz="1200" kern="1200">
+        <a:solidFill>
+          <a:schemeClr val="tx1"/>
+        </a:solidFill>
+        <a:latin typeface="+mn-lt"/>
+        <a:ea typeface="+mn-ea"/>
+        <a:cs typeface="+mn-cs"/>
+      </a:defRPr>
+    </a:lvl6pPr>
+    <a:lvl7pPr marL="2743200" algn="l" defTabSz="914400" rtl="0" eaLnBrk="1" latinLnBrk="0" hangingPunct="1">
+      <a:defRPr sz="1200" kern="1200">
+        <a:solidFill>
+          <a:schemeClr val="tx1"/>
+        </a:solidFill>
+        <a:latin typeface="+mn-lt"/>
+        <a:ea typeface="+mn-ea"/>
+        <a:cs typeface="+mn-cs"/>
+      </a:defRPr>
+    </a:lvl7pPr>
+    <a:lvl8pPr marL="3200400" algn="l" defTabSz="914400" rtl="0" eaLnBrk="1" latinLnBrk="0" hangingPunct="1">
+      <a:defRPr sz="1200" kern="1200">
+        <a:solidFill>
+          <a:schemeClr val="tx1"/>
+        </a:solidFill>
+        <a:latin typeface="+mn-lt"/>
+        <a:ea typeface="+mn-ea"/>
+        <a:cs typeface="+mn-cs"/>
+      </a:defRPr>
+    </a:lvl8pPr>
+    <a:lvl9pPr marL="3657600" algn="l" defTabSz="914400" rtl="0" eaLnBrk="1" latinLnBrk="0" hangingPunct="1">
+      <a:defRPr sz="1200" kern="1200">
+        <a:solidFill>
+          <a:schemeClr val="tx1"/>
+        </a:solidFill>
+        <a:latin typeface="+mn-lt"/>
+        <a:ea typeface="+mn-ea"/>
+        <a:cs typeface="+mn-cs"/>
+      </a:defRPr>
+    </a:lvl9pPr>
+  </p:notesStyle>
+</p:notesMaster>
+</file>
+
 <file path=ppt/slideLayouts/slideLayout1.xml><?xml version="1.0" encoding="utf-8"?>
 <p:sldLayout xmlns:a="http://schemas.openxmlformats.org/drawingml/2006/main" xmlns:r="http://schemas.openxmlformats.org/officeDocument/2006/relationships" xmlns:p="http://schemas.openxmlformats.org/presentationml/2006/main" type="title" preserve="1">
   <p:cSld name="Slajd tytułowy">
@@ -957,7 +1310,7 @@
           <a:bodyPr/>
           <a:lstStyle/>
           <a:p>
-            <a:fld id="{230516DF-AA08-42DB-AE84-024A6CB5A4E7}" type="datetimeFigureOut">
+            <a:fld id="{CC219924-E421-45AF-95F8-DE961D4F9D7A}" type="datetime1">
               <a:rPr lang="en-US" smtClean="0"/>
               <a:t>6/24/2026</a:t>
             </a:fld>
@@ -1157,7 +1510,7 @@
           <a:bodyPr/>
           <a:lstStyle/>
           <a:p>
-            <a:fld id="{230516DF-AA08-42DB-AE84-024A6CB5A4E7}" type="datetimeFigureOut">
+            <a:fld id="{F11651D3-EEA5-4503-81CA-84DD957BCB36}" type="datetime1">
               <a:rPr lang="en-US" smtClean="0"/>
               <a:t>6/24/2026</a:t>
             </a:fld>
@@ -1367,7 +1720,7 @@
           <a:bodyPr/>
           <a:lstStyle/>
           <a:p>
-            <a:fld id="{230516DF-AA08-42DB-AE84-024A6CB5A4E7}" type="datetimeFigureOut">
+            <a:fld id="{DAF250FE-9038-48B6-94F3-ECFC677205F2}" type="datetime1">
               <a:rPr lang="en-US" smtClean="0"/>
               <a:t>6/24/2026</a:t>
             </a:fld>
@@ -1567,7 +1920,7 @@
           <a:bodyPr/>
           <a:lstStyle/>
           <a:p>
-            <a:fld id="{230516DF-AA08-42DB-AE84-024A6CB5A4E7}" type="datetimeFigureOut">
+            <a:fld id="{06BFBEC8-DC87-4AD6-A3C0-88B93FFD0D13}" type="datetime1">
               <a:rPr lang="en-US" smtClean="0"/>
               <a:t>6/24/2026</a:t>
             </a:fld>
@@ -1843,7 +2196,7 @@
           <a:bodyPr/>
           <a:lstStyle/>
           <a:p>
-            <a:fld id="{230516DF-AA08-42DB-AE84-024A6CB5A4E7}" type="datetimeFigureOut">
+            <a:fld id="{80B419C0-543D-4075-9507-412CBCC30423}" type="datetime1">
               <a:rPr lang="en-US" smtClean="0"/>
               <a:t>6/24/2026</a:t>
             </a:fld>
@@ -2111,7 +2464,7 @@
           <a:bodyPr/>
           <a:lstStyle/>
           <a:p>
-            <a:fld id="{230516DF-AA08-42DB-AE84-024A6CB5A4E7}" type="datetimeFigureOut">
+            <a:fld id="{0535CA57-FCE8-44E1-A5F0-E29C2B2639B4}" type="datetime1">
               <a:rPr lang="en-US" smtClean="0"/>
               <a:t>6/24/2026</a:t>
             </a:fld>
@@ -2526,7 +2879,7 @@
           <a:bodyPr/>
           <a:lstStyle/>
           <a:p>
-            <a:fld id="{230516DF-AA08-42DB-AE84-024A6CB5A4E7}" type="datetimeFigureOut">
+            <a:fld id="{BA2CBAD6-0278-49CE-A1D5-416981DF7CE4}" type="datetime1">
               <a:rPr lang="en-US" smtClean="0"/>
               <a:t>6/24/2026</a:t>
             </a:fld>
@@ -2668,7 +3021,7 @@
           <a:bodyPr/>
           <a:lstStyle/>
           <a:p>
-            <a:fld id="{230516DF-AA08-42DB-AE84-024A6CB5A4E7}" type="datetimeFigureOut">
+            <a:fld id="{C511A707-D6C6-4D3D-9AB3-F062F184410C}" type="datetime1">
               <a:rPr lang="en-US" smtClean="0"/>
               <a:t>6/24/2026</a:t>
             </a:fld>
@@ -2781,7 +3134,7 @@
           <a:bodyPr/>
           <a:lstStyle/>
           <a:p>
-            <a:fld id="{230516DF-AA08-42DB-AE84-024A6CB5A4E7}" type="datetimeFigureOut">
+            <a:fld id="{F19F0C89-A7E6-4C5B-B3BD-10DCFD7050F3}" type="datetime1">
               <a:rPr lang="en-US" smtClean="0"/>
               <a:t>6/24/2026</a:t>
             </a:fld>
@@ -3094,7 +3447,7 @@
           <a:bodyPr/>
           <a:lstStyle/>
           <a:p>
-            <a:fld id="{230516DF-AA08-42DB-AE84-024A6CB5A4E7}" type="datetimeFigureOut">
+            <a:fld id="{AD206A01-47A2-4797-B056-F939721E8BB4}" type="datetime1">
               <a:rPr lang="en-US" smtClean="0"/>
               <a:t>6/24/2026</a:t>
             </a:fld>
@@ -3383,7 +3736,7 @@
           <a:bodyPr/>
           <a:lstStyle/>
           <a:p>
-            <a:fld id="{230516DF-AA08-42DB-AE84-024A6CB5A4E7}" type="datetimeFigureOut">
+            <a:fld id="{8800C9F3-23E9-41A3-A86F-F642FAA31D8A}" type="datetime1">
               <a:rPr lang="en-US" smtClean="0"/>
               <a:t>6/24/2026</a:t>
             </a:fld>
@@ -3626,7 +3979,7 @@
             </a:lvl1pPr>
           </a:lstStyle>
           <a:p>
-            <a:fld id="{230516DF-AA08-42DB-AE84-024A6CB5A4E7}" type="datetimeFigureOut">
+            <a:fld id="{794C5B19-86B2-4997-B0CD-299D1D03B03B}" type="datetime1">
               <a:rPr lang="en-US" smtClean="0"/>
               <a:t>6/24/2026</a:t>
             </a:fld>
@@ -3745,6 +4098,7 @@
     <p:sldLayoutId id="2147483658" r:id="rId10"/>
     <p:sldLayoutId id="2147483659" r:id="rId11"/>
   </p:sldLayoutIdLst>
+  <p:hf hdr="0" ftr="0" dt="0"/>
   <p:txStyles>
     <p:titleStyle>
       <a:lvl1pPr algn="l" defTabSz="914400" rtl="0" eaLnBrk="1" latinLnBrk="0" hangingPunct="1">
@@ -4932,6 +5286,35 @@
           </a:p>
         </p:txBody>
       </p:sp>
+      <p:sp>
+        <p:nvSpPr>
+          <p:cNvPr id="4" name="Symbol zastępczy numeru slajdu 3">
+            <a:extLst>
+              <a:ext uri="{FF2B5EF4-FFF2-40B4-BE49-F238E27FC236}">
+                <a16:creationId xmlns:a16="http://schemas.microsoft.com/office/drawing/2014/main" id="{902FF2B3-919C-5615-6B5C-423EC5C9BA2A}"/>
+              </a:ext>
+            </a:extLst>
+          </p:cNvPr>
+          <p:cNvSpPr>
+            <a:spLocks noGrp="1"/>
+          </p:cNvSpPr>
+          <p:nvPr>
+            <p:ph type="sldNum" sz="quarter" idx="12"/>
+          </p:nvPr>
+        </p:nvSpPr>
+        <p:spPr/>
+        <p:txBody>
+          <a:bodyPr/>
+          <a:lstStyle/>
+          <a:p>
+            <a:fld id="{09FCEDA0-FE4B-4119-AC61-AEA1E37FC66A}" type="slidenum">
+              <a:rPr lang="en-US" smtClean="0"/>
+              <a:t>10</a:t>
+            </a:fld>
+            <a:endParaRPr lang="en-US"/>
+          </a:p>
+        </p:txBody>
+      </p:sp>
     </p:spTree>
     <p:extLst>
       <p:ext uri="{BB962C8B-B14F-4D97-AF65-F5344CB8AC3E}">
@@ -5118,6 +5501,35 @@
           </a:prstGeom>
         </p:spPr>
       </p:pic>
+      <p:sp>
+        <p:nvSpPr>
+          <p:cNvPr id="2" name="Symbol zastępczy numeru slajdu 1">
+            <a:extLst>
+              <a:ext uri="{FF2B5EF4-FFF2-40B4-BE49-F238E27FC236}">
+                <a16:creationId xmlns:a16="http://schemas.microsoft.com/office/drawing/2014/main" id="{690A1182-A3A5-BE4F-EA66-501B26704D2E}"/>
+              </a:ext>
+            </a:extLst>
+          </p:cNvPr>
+          <p:cNvSpPr>
+            <a:spLocks noGrp="1"/>
+          </p:cNvSpPr>
+          <p:nvPr>
+            <p:ph type="sldNum" sz="quarter" idx="12"/>
+          </p:nvPr>
+        </p:nvSpPr>
+        <p:spPr/>
+        <p:txBody>
+          <a:bodyPr/>
+          <a:lstStyle/>
+          <a:p>
+            <a:fld id="{09FCEDA0-FE4B-4119-AC61-AEA1E37FC66A}" type="slidenum">
+              <a:rPr lang="en-US" smtClean="0"/>
+              <a:t>11</a:t>
+            </a:fld>
+            <a:endParaRPr lang="en-US"/>
+          </a:p>
+        </p:txBody>
+      </p:sp>
     </p:spTree>
     <p:extLst>
       <p:ext uri="{BB962C8B-B14F-4D97-AF65-F5344CB8AC3E}">
@@ -5243,6 +5655,35 @@
           </a:p>
         </p:txBody>
       </p:sp>
+      <p:sp>
+        <p:nvSpPr>
+          <p:cNvPr id="2" name="Symbol zastępczy numeru slajdu 1">
+            <a:extLst>
+              <a:ext uri="{FF2B5EF4-FFF2-40B4-BE49-F238E27FC236}">
+                <a16:creationId xmlns:a16="http://schemas.microsoft.com/office/drawing/2014/main" id="{712BE039-A615-0FED-AA2B-0ADC328ED6BF}"/>
+              </a:ext>
+            </a:extLst>
+          </p:cNvPr>
+          <p:cNvSpPr>
+            <a:spLocks noGrp="1"/>
+          </p:cNvSpPr>
+          <p:nvPr>
+            <p:ph type="sldNum" sz="quarter" idx="12"/>
+          </p:nvPr>
+        </p:nvSpPr>
+        <p:spPr/>
+        <p:txBody>
+          <a:bodyPr/>
+          <a:lstStyle/>
+          <a:p>
+            <a:fld id="{09FCEDA0-FE4B-4119-AC61-AEA1E37FC66A}" type="slidenum">
+              <a:rPr lang="en-US" smtClean="0"/>
+              <a:t>12</a:t>
+            </a:fld>
+            <a:endParaRPr lang="en-US"/>
+          </a:p>
+        </p:txBody>
+      </p:sp>
     </p:spTree>
     <p:extLst>
       <p:ext uri="{BB962C8B-B14F-4D97-AF65-F5344CB8AC3E}">
@@ -5433,6 +5874,35 @@
           </a:p>
         </p:txBody>
       </p:sp>
+      <p:sp>
+        <p:nvSpPr>
+          <p:cNvPr id="2" name="Symbol zastępczy numeru slajdu 1">
+            <a:extLst>
+              <a:ext uri="{FF2B5EF4-FFF2-40B4-BE49-F238E27FC236}">
+                <a16:creationId xmlns:a16="http://schemas.microsoft.com/office/drawing/2014/main" id="{2A5870F8-AB54-E4FF-3F0D-46C36E02EA94}"/>
+              </a:ext>
+            </a:extLst>
+          </p:cNvPr>
+          <p:cNvSpPr>
+            <a:spLocks noGrp="1"/>
+          </p:cNvSpPr>
+          <p:nvPr>
+            <p:ph type="sldNum" sz="quarter" idx="12"/>
+          </p:nvPr>
+        </p:nvSpPr>
+        <p:spPr/>
+        <p:txBody>
+          <a:bodyPr/>
+          <a:lstStyle/>
+          <a:p>
+            <a:fld id="{09FCEDA0-FE4B-4119-AC61-AEA1E37FC66A}" type="slidenum">
+              <a:rPr lang="en-US" smtClean="0"/>
+              <a:t>13</a:t>
+            </a:fld>
+            <a:endParaRPr lang="en-US"/>
+          </a:p>
+        </p:txBody>
+      </p:sp>
     </p:spTree>
     <p:extLst>
       <p:ext uri="{BB962C8B-B14F-4D97-AF65-F5344CB8AC3E}">
@@ -5558,6 +6028,35 @@
           </a:p>
         </p:txBody>
       </p:sp>
+      <p:sp>
+        <p:nvSpPr>
+          <p:cNvPr id="2" name="Symbol zastępczy numeru slajdu 1">
+            <a:extLst>
+              <a:ext uri="{FF2B5EF4-FFF2-40B4-BE49-F238E27FC236}">
+                <a16:creationId xmlns:a16="http://schemas.microsoft.com/office/drawing/2014/main" id="{E8B14BBC-DC36-A8CA-BBF2-9AFF2C84D9C5}"/>
+              </a:ext>
+            </a:extLst>
+          </p:cNvPr>
+          <p:cNvSpPr>
+            <a:spLocks noGrp="1"/>
+          </p:cNvSpPr>
+          <p:nvPr>
+            <p:ph type="sldNum" sz="quarter" idx="12"/>
+          </p:nvPr>
+        </p:nvSpPr>
+        <p:spPr/>
+        <p:txBody>
+          <a:bodyPr/>
+          <a:lstStyle/>
+          <a:p>
+            <a:fld id="{09FCEDA0-FE4B-4119-AC61-AEA1E37FC66A}" type="slidenum">
+              <a:rPr lang="en-US" smtClean="0"/>
+              <a:t>14</a:t>
+            </a:fld>
+            <a:endParaRPr lang="en-US"/>
+          </a:p>
+        </p:txBody>
+      </p:sp>
     </p:spTree>
     <p:extLst>
       <p:ext uri="{BB962C8B-B14F-4D97-AF65-F5344CB8AC3E}">
@@ -5677,6 +6176,35 @@
           </a:p>
         </p:txBody>
       </p:sp>
+      <p:sp>
+        <p:nvSpPr>
+          <p:cNvPr id="2" name="Symbol zastępczy numeru slajdu 1">
+            <a:extLst>
+              <a:ext uri="{FF2B5EF4-FFF2-40B4-BE49-F238E27FC236}">
+                <a16:creationId xmlns:a16="http://schemas.microsoft.com/office/drawing/2014/main" id="{7B2D977B-BB74-7FD4-7BBC-C0987B5F9673}"/>
+              </a:ext>
+            </a:extLst>
+          </p:cNvPr>
+          <p:cNvSpPr>
+            <a:spLocks noGrp="1"/>
+          </p:cNvSpPr>
+          <p:nvPr>
+            <p:ph type="sldNum" sz="quarter" idx="12"/>
+          </p:nvPr>
+        </p:nvSpPr>
+        <p:spPr/>
+        <p:txBody>
+          <a:bodyPr/>
+          <a:lstStyle/>
+          <a:p>
+            <a:fld id="{09FCEDA0-FE4B-4119-AC61-AEA1E37FC66A}" type="slidenum">
+              <a:rPr lang="en-US" smtClean="0"/>
+              <a:t>15</a:t>
+            </a:fld>
+            <a:endParaRPr lang="en-US"/>
+          </a:p>
+        </p:txBody>
+      </p:sp>
     </p:spTree>
     <p:extLst>
       <p:ext uri="{BB962C8B-B14F-4D97-AF65-F5344CB8AC3E}">
@@ -5887,6 +6415,35 @@
           </a:prstGeom>
         </p:spPr>
       </p:pic>
+      <p:sp>
+        <p:nvSpPr>
+          <p:cNvPr id="4" name="Symbol zastępczy numeru slajdu 3">
+            <a:extLst>
+              <a:ext uri="{FF2B5EF4-FFF2-40B4-BE49-F238E27FC236}">
+                <a16:creationId xmlns:a16="http://schemas.microsoft.com/office/drawing/2014/main" id="{064A57D2-0665-33F0-767A-174A3F3266BB}"/>
+              </a:ext>
+            </a:extLst>
+          </p:cNvPr>
+          <p:cNvSpPr>
+            <a:spLocks noGrp="1"/>
+          </p:cNvSpPr>
+          <p:nvPr>
+            <p:ph type="sldNum" sz="quarter" idx="12"/>
+          </p:nvPr>
+        </p:nvSpPr>
+        <p:spPr/>
+        <p:txBody>
+          <a:bodyPr/>
+          <a:lstStyle/>
+          <a:p>
+            <a:fld id="{09FCEDA0-FE4B-4119-AC61-AEA1E37FC66A}" type="slidenum">
+              <a:rPr lang="en-US" smtClean="0"/>
+              <a:t>16</a:t>
+            </a:fld>
+            <a:endParaRPr lang="en-US"/>
+          </a:p>
+        </p:txBody>
+      </p:sp>
     </p:spTree>
     <p:extLst>
       <p:ext uri="{BB962C8B-B14F-4D97-AF65-F5344CB8AC3E}">
@@ -6041,6 +6598,35 @@
           </a:p>
         </p:txBody>
       </p:sp>
+      <p:sp>
+        <p:nvSpPr>
+          <p:cNvPr id="2" name="Symbol zastępczy numeru slajdu 1">
+            <a:extLst>
+              <a:ext uri="{FF2B5EF4-FFF2-40B4-BE49-F238E27FC236}">
+                <a16:creationId xmlns:a16="http://schemas.microsoft.com/office/drawing/2014/main" id="{2CF74C33-1C50-E634-3113-2AD8514336B1}"/>
+              </a:ext>
+            </a:extLst>
+          </p:cNvPr>
+          <p:cNvSpPr>
+            <a:spLocks noGrp="1"/>
+          </p:cNvSpPr>
+          <p:nvPr>
+            <p:ph type="sldNum" sz="quarter" idx="12"/>
+          </p:nvPr>
+        </p:nvSpPr>
+        <p:spPr/>
+        <p:txBody>
+          <a:bodyPr/>
+          <a:lstStyle/>
+          <a:p>
+            <a:fld id="{09FCEDA0-FE4B-4119-AC61-AEA1E37FC66A}" type="slidenum">
+              <a:rPr lang="en-US" smtClean="0"/>
+              <a:t>17</a:t>
+            </a:fld>
+            <a:endParaRPr lang="en-US"/>
+          </a:p>
+        </p:txBody>
+      </p:sp>
     </p:spTree>
     <p:extLst>
       <p:ext uri="{BB962C8B-B14F-4D97-AF65-F5344CB8AC3E}">
@@ -6189,6 +6775,35 @@
           </a:p>
         </p:txBody>
       </p:sp>
+      <p:sp>
+        <p:nvSpPr>
+          <p:cNvPr id="2" name="Symbol zastępczy numeru slajdu 1">
+            <a:extLst>
+              <a:ext uri="{FF2B5EF4-FFF2-40B4-BE49-F238E27FC236}">
+                <a16:creationId xmlns:a16="http://schemas.microsoft.com/office/drawing/2014/main" id="{1F406462-F70A-6F3E-ED9A-B4FC62C77998}"/>
+              </a:ext>
+            </a:extLst>
+          </p:cNvPr>
+          <p:cNvSpPr>
+            <a:spLocks noGrp="1"/>
+          </p:cNvSpPr>
+          <p:nvPr>
+            <p:ph type="sldNum" sz="quarter" idx="12"/>
+          </p:nvPr>
+        </p:nvSpPr>
+        <p:spPr/>
+        <p:txBody>
+          <a:bodyPr/>
+          <a:lstStyle/>
+          <a:p>
+            <a:fld id="{09FCEDA0-FE4B-4119-AC61-AEA1E37FC66A}" type="slidenum">
+              <a:rPr lang="en-US" smtClean="0"/>
+              <a:t>18</a:t>
+            </a:fld>
+            <a:endParaRPr lang="en-US"/>
+          </a:p>
+        </p:txBody>
+      </p:sp>
     </p:spTree>
     <p:extLst>
       <p:ext uri="{BB962C8B-B14F-4D97-AF65-F5344CB8AC3E}">
@@ -6319,6 +6934,35 @@
           </a:p>
         </p:txBody>
       </p:sp>
+      <p:sp>
+        <p:nvSpPr>
+          <p:cNvPr id="4" name="Symbol zastępczy numeru slajdu 3">
+            <a:extLst>
+              <a:ext uri="{FF2B5EF4-FFF2-40B4-BE49-F238E27FC236}">
+                <a16:creationId xmlns:a16="http://schemas.microsoft.com/office/drawing/2014/main" id="{ACB2E10E-018D-3E97-BF81-B826120B42A2}"/>
+              </a:ext>
+            </a:extLst>
+          </p:cNvPr>
+          <p:cNvSpPr>
+            <a:spLocks noGrp="1"/>
+          </p:cNvSpPr>
+          <p:nvPr>
+            <p:ph type="sldNum" sz="quarter" idx="12"/>
+          </p:nvPr>
+        </p:nvSpPr>
+        <p:spPr/>
+        <p:txBody>
+          <a:bodyPr/>
+          <a:lstStyle/>
+          <a:p>
+            <a:fld id="{09FCEDA0-FE4B-4119-AC61-AEA1E37FC66A}" type="slidenum">
+              <a:rPr lang="en-US" smtClean="0"/>
+              <a:t>19</a:t>
+            </a:fld>
+            <a:endParaRPr lang="en-US"/>
+          </a:p>
+        </p:txBody>
+      </p:sp>
     </p:spTree>
     <p:extLst>
       <p:ext uri="{BB962C8B-B14F-4D97-AF65-F5344CB8AC3E}">
@@ -6604,6 +7248,35 @@
           </a:prstGeom>
         </p:spPr>
       </p:pic>
+      <p:sp>
+        <p:nvSpPr>
+          <p:cNvPr id="4" name="Symbol zastępczy numeru slajdu 3">
+            <a:extLst>
+              <a:ext uri="{FF2B5EF4-FFF2-40B4-BE49-F238E27FC236}">
+                <a16:creationId xmlns:a16="http://schemas.microsoft.com/office/drawing/2014/main" id="{59F9FF63-9BFD-AE04-FDF4-62ED5620EFB0}"/>
+              </a:ext>
+            </a:extLst>
+          </p:cNvPr>
+          <p:cNvSpPr>
+            <a:spLocks noGrp="1"/>
+          </p:cNvSpPr>
+          <p:nvPr>
+            <p:ph type="sldNum" sz="quarter" idx="12"/>
+          </p:nvPr>
+        </p:nvSpPr>
+        <p:spPr/>
+        <p:txBody>
+          <a:bodyPr/>
+          <a:lstStyle/>
+          <a:p>
+            <a:fld id="{09FCEDA0-FE4B-4119-AC61-AEA1E37FC66A}" type="slidenum">
+              <a:rPr lang="en-US" smtClean="0"/>
+              <a:t>2</a:t>
+            </a:fld>
+            <a:endParaRPr lang="en-US"/>
+          </a:p>
+        </p:txBody>
+      </p:sp>
     </p:spTree>
     <p:extLst>
       <p:ext uri="{BB962C8B-B14F-4D97-AF65-F5344CB8AC3E}">
@@ -7236,10 +7909,264 @@
           </a:p>
         </p:txBody>
       </p:sp>
+      <p:sp>
+        <p:nvSpPr>
+          <p:cNvPr id="4" name="Symbol zastępczy numeru slajdu 3">
+            <a:extLst>
+              <a:ext uri="{FF2B5EF4-FFF2-40B4-BE49-F238E27FC236}">
+                <a16:creationId xmlns:a16="http://schemas.microsoft.com/office/drawing/2014/main" id="{6C86B616-862A-784B-0601-5107D5A30B35}"/>
+              </a:ext>
+            </a:extLst>
+          </p:cNvPr>
+          <p:cNvSpPr>
+            <a:spLocks noGrp="1"/>
+          </p:cNvSpPr>
+          <p:nvPr>
+            <p:ph type="sldNum" sz="quarter" idx="12"/>
+          </p:nvPr>
+        </p:nvSpPr>
+        <p:spPr/>
+        <p:txBody>
+          <a:bodyPr/>
+          <a:lstStyle/>
+          <a:p>
+            <a:fld id="{09FCEDA0-FE4B-4119-AC61-AEA1E37FC66A}" type="slidenum">
+              <a:rPr lang="en-US" smtClean="0"/>
+              <a:t>20</a:t>
+            </a:fld>
+            <a:endParaRPr lang="en-US"/>
+          </a:p>
+        </p:txBody>
+      </p:sp>
     </p:spTree>
     <p:extLst>
       <p:ext uri="{BB962C8B-B14F-4D97-AF65-F5344CB8AC3E}">
         <p14:creationId xmlns:p14="http://schemas.microsoft.com/office/powerpoint/2010/main" val="3429367521"/>
+      </p:ext>
+    </p:extLst>
+  </p:cSld>
+  <p:clrMapOvr>
+    <a:masterClrMapping/>
+  </p:clrMapOvr>
+</p:sld>
+</file>
+
+<file path=ppt/slides/slide21.xml><?xml version="1.0" encoding="utf-8"?>
+<p:sld xmlns:a="http://schemas.openxmlformats.org/drawingml/2006/main" xmlns:r="http://schemas.openxmlformats.org/officeDocument/2006/relationships" xmlns:p="http://schemas.openxmlformats.org/presentationml/2006/main">
+  <p:cSld>
+    <p:spTree>
+      <p:nvGrpSpPr>
+        <p:cNvPr id="1" name="">
+          <a:extLst>
+            <a:ext uri="{FF2B5EF4-FFF2-40B4-BE49-F238E27FC236}">
+              <a16:creationId xmlns:a16="http://schemas.microsoft.com/office/drawing/2014/main" id="{51FA6B31-EFBC-4DCD-EBD5-1A82B5ACBC16}"/>
+            </a:ext>
+          </a:extLst>
+        </p:cNvPr>
+        <p:cNvGrpSpPr/>
+        <p:nvPr/>
+      </p:nvGrpSpPr>
+      <p:grpSpPr>
+        <a:xfrm>
+          <a:off x="0" y="0"/>
+          <a:ext cx="0" cy="0"/>
+          <a:chOff x="0" y="0"/>
+          <a:chExt cx="0" cy="0"/>
+        </a:xfrm>
+      </p:grpSpPr>
+      <p:sp>
+        <p:nvSpPr>
+          <p:cNvPr id="2" name="Tytuł 1">
+            <a:extLst>
+              <a:ext uri="{FF2B5EF4-FFF2-40B4-BE49-F238E27FC236}">
+                <a16:creationId xmlns:a16="http://schemas.microsoft.com/office/drawing/2014/main" id="{6B4CBA7B-A468-1F50-191A-DC8A8F6F7B74}"/>
+              </a:ext>
+            </a:extLst>
+          </p:cNvPr>
+          <p:cNvSpPr>
+            <a:spLocks noGrp="1"/>
+          </p:cNvSpPr>
+          <p:nvPr>
+            <p:ph type="ctrTitle"/>
+          </p:nvPr>
+        </p:nvSpPr>
+        <p:spPr>
+          <a:xfrm>
+            <a:off x="200527" y="1122363"/>
+            <a:ext cx="11790946" cy="2711700"/>
+          </a:xfrm>
+        </p:spPr>
+        <p:txBody>
+          <a:bodyPr>
+            <a:normAutofit fontScale="90000"/>
+          </a:bodyPr>
+          <a:lstStyle/>
+          <a:p>
+            <a:r>
+              <a:rPr lang="en-US" dirty="0"/>
+              <a:t>Model</a:t>
+            </a:r>
+            <a:r>
+              <a:rPr lang="pl-PL" dirty="0"/>
+              <a:t> </a:t>
+            </a:r>
+            <a:r>
+              <a:rPr lang="en-US" dirty="0" err="1"/>
+              <a:t>Axelroda</a:t>
+            </a:r>
+            <a:br>
+              <a:rPr lang="pl-PL" dirty="0"/>
+            </a:br>
+            <a:r>
+              <a:rPr lang="en-US" sz="3600" dirty="0" err="1"/>
+              <a:t>Badanie</a:t>
+            </a:r>
+            <a:r>
+              <a:rPr lang="en-US" sz="3600" dirty="0"/>
+              <a:t> </a:t>
+            </a:r>
+            <a:r>
+              <a:rPr lang="en-US" sz="3600" dirty="0" err="1"/>
+              <a:t>wpływu</a:t>
+            </a:r>
+            <a:r>
+              <a:rPr lang="en-US" sz="3600" dirty="0"/>
+              <a:t> </a:t>
+            </a:r>
+            <a:r>
+              <a:rPr lang="en-US" sz="3600" dirty="0" err="1"/>
+              <a:t>homofilii</a:t>
+            </a:r>
+            <a:r>
+              <a:rPr lang="en-US" sz="3600" dirty="0"/>
+              <a:t> </a:t>
+            </a:r>
+            <a:r>
+              <a:rPr lang="en-US" sz="3600" dirty="0" err="1"/>
+              <a:t>na</a:t>
+            </a:r>
+            <a:r>
+              <a:rPr lang="en-US" sz="3600" dirty="0"/>
+              <a:t> </a:t>
+            </a:r>
+            <a:r>
+              <a:rPr lang="en-US" sz="3600" dirty="0" err="1"/>
+              <a:t>trwałość</a:t>
+            </a:r>
+            <a:r>
+              <a:rPr lang="en-US" sz="3600" dirty="0"/>
+              <a:t> </a:t>
+            </a:r>
+            <a:r>
+              <a:rPr lang="en-US" sz="3600" dirty="0" err="1"/>
+              <a:t>różnorodności</a:t>
+            </a:r>
+            <a:r>
+              <a:rPr lang="en-US" sz="3600" dirty="0"/>
+              <a:t> </a:t>
+            </a:r>
+            <a:r>
+              <a:rPr lang="en-US" sz="3600" dirty="0" err="1"/>
+              <a:t>kulturowej</a:t>
+            </a:r>
+            <a:br>
+              <a:rPr lang="en-US" dirty="0"/>
+            </a:br>
+            <a:endParaRPr lang="en-US" dirty="0"/>
+          </a:p>
+        </p:txBody>
+      </p:sp>
+      <p:sp>
+        <p:nvSpPr>
+          <p:cNvPr id="3" name="Podtytuł 2">
+            <a:extLst>
+              <a:ext uri="{FF2B5EF4-FFF2-40B4-BE49-F238E27FC236}">
+                <a16:creationId xmlns:a16="http://schemas.microsoft.com/office/drawing/2014/main" id="{BCAC3D20-B133-CB5C-17FE-55FC2A5AFB62}"/>
+              </a:ext>
+            </a:extLst>
+          </p:cNvPr>
+          <p:cNvSpPr>
+            <a:spLocks noGrp="1"/>
+          </p:cNvSpPr>
+          <p:nvPr>
+            <p:ph type="subTitle" idx="1"/>
+          </p:nvPr>
+        </p:nvSpPr>
+        <p:spPr>
+          <a:xfrm>
+            <a:off x="1524000" y="4709636"/>
+            <a:ext cx="9144000" cy="1655762"/>
+          </a:xfrm>
+        </p:spPr>
+        <p:txBody>
+          <a:bodyPr>
+            <a:normAutofit lnSpcReduction="10000"/>
+          </a:bodyPr>
+          <a:lstStyle/>
+          <a:p>
+            <a:r>
+              <a:rPr lang="en-US" dirty="0"/>
+              <a:t>Karol </a:t>
+            </a:r>
+            <a:r>
+              <a:rPr lang="en-US" dirty="0" err="1"/>
+              <a:t>Garbaczewski</a:t>
+            </a:r>
+            <a:r>
+              <a:rPr lang="en-US" dirty="0"/>
+              <a:t>, </a:t>
+            </a:r>
+            <a:endParaRPr lang="pl-PL" dirty="0"/>
+          </a:p>
+          <a:p>
+            <a:r>
+              <a:rPr lang="en-US" dirty="0"/>
+              <a:t>Szymon Go</a:t>
+            </a:r>
+            <a:r>
+              <a:rPr lang="pl-PL" dirty="0"/>
+              <a:t>ź</a:t>
+            </a:r>
+            <a:r>
+              <a:rPr lang="en-US" dirty="0" err="1"/>
+              <a:t>dzikowski</a:t>
+            </a:r>
+            <a:r>
+              <a:rPr lang="en-US" dirty="0"/>
+              <a:t>, </a:t>
+            </a:r>
+            <a:endParaRPr lang="pl-PL" dirty="0"/>
+          </a:p>
+          <a:p>
+            <a:r>
+              <a:rPr lang="en-US" dirty="0"/>
+              <a:t>Z</a:t>
+            </a:r>
+            <a:r>
+              <a:rPr lang="pl-PL" dirty="0" err="1"/>
+              <a:t>ofi</a:t>
+            </a:r>
+            <a:r>
+              <a:rPr lang="en-US" dirty="0"/>
+              <a:t>a Sopel, </a:t>
+            </a:r>
+            <a:endParaRPr lang="pl-PL" dirty="0"/>
+          </a:p>
+          <a:p>
+            <a:r>
+              <a:rPr lang="en-US" dirty="0"/>
+              <a:t>Sasza Tomczyk</a:t>
+            </a:r>
+          </a:p>
+          <a:p>
+            <a:endParaRPr lang="en-US" dirty="0"/>
+          </a:p>
+        </p:txBody>
+      </p:sp>
+    </p:spTree>
+    <p:extLst>
+      <p:ext uri="{BB962C8B-B14F-4D97-AF65-F5344CB8AC3E}">
+        <p14:creationId xmlns:p14="http://schemas.microsoft.com/office/powerpoint/2010/main" val="2804561360"/>
       </p:ext>
     </p:extLst>
   </p:cSld>
@@ -7693,6 +8620,35 @@
               <a:buAutoNum type="arabicPeriod"/>
             </a:pPr>
             <a:endParaRPr lang="en-US" dirty="0"/>
+          </a:p>
+        </p:txBody>
+      </p:sp>
+      <p:sp>
+        <p:nvSpPr>
+          <p:cNvPr id="4" name="Symbol zastępczy numeru slajdu 3">
+            <a:extLst>
+              <a:ext uri="{FF2B5EF4-FFF2-40B4-BE49-F238E27FC236}">
+                <a16:creationId xmlns:a16="http://schemas.microsoft.com/office/drawing/2014/main" id="{EABA0655-2852-E143-D068-1BA681919248}"/>
+              </a:ext>
+            </a:extLst>
+          </p:cNvPr>
+          <p:cNvSpPr>
+            <a:spLocks noGrp="1"/>
+          </p:cNvSpPr>
+          <p:nvPr>
+            <p:ph type="sldNum" sz="quarter" idx="12"/>
+          </p:nvPr>
+        </p:nvSpPr>
+        <p:spPr/>
+        <p:txBody>
+          <a:bodyPr/>
+          <a:lstStyle/>
+          <a:p>
+            <a:fld id="{09FCEDA0-FE4B-4119-AC61-AEA1E37FC66A}" type="slidenum">
+              <a:rPr lang="en-US" smtClean="0"/>
+              <a:t>3</a:t>
+            </a:fld>
+            <a:endParaRPr lang="en-US"/>
           </a:p>
         </p:txBody>
       </p:sp>
@@ -7931,6 +8887,35 @@
           </a:p>
         </p:txBody>
       </p:sp>
+      <p:sp>
+        <p:nvSpPr>
+          <p:cNvPr id="4" name="Symbol zastępczy numeru slajdu 3">
+            <a:extLst>
+              <a:ext uri="{FF2B5EF4-FFF2-40B4-BE49-F238E27FC236}">
+                <a16:creationId xmlns:a16="http://schemas.microsoft.com/office/drawing/2014/main" id="{5E7DCCBE-F70E-6500-511D-599EF198D95D}"/>
+              </a:ext>
+            </a:extLst>
+          </p:cNvPr>
+          <p:cNvSpPr>
+            <a:spLocks noGrp="1"/>
+          </p:cNvSpPr>
+          <p:nvPr>
+            <p:ph type="sldNum" sz="quarter" idx="12"/>
+          </p:nvPr>
+        </p:nvSpPr>
+        <p:spPr/>
+        <p:txBody>
+          <a:bodyPr/>
+          <a:lstStyle/>
+          <a:p>
+            <a:fld id="{09FCEDA0-FE4B-4119-AC61-AEA1E37FC66A}" type="slidenum">
+              <a:rPr lang="en-US" smtClean="0"/>
+              <a:t>4</a:t>
+            </a:fld>
+            <a:endParaRPr lang="en-US"/>
+          </a:p>
+        </p:txBody>
+      </p:sp>
     </p:spTree>
     <p:extLst>
       <p:ext uri="{BB962C8B-B14F-4D97-AF65-F5344CB8AC3E}">
@@ -9122,6 +10107,35 @@
               </a:rPr>
               <a:t>,</a:t>
             </a:r>
+          </a:p>
+        </p:txBody>
+      </p:sp>
+      <p:sp>
+        <p:nvSpPr>
+          <p:cNvPr id="4" name="Symbol zastępczy numeru slajdu 3">
+            <a:extLst>
+              <a:ext uri="{FF2B5EF4-FFF2-40B4-BE49-F238E27FC236}">
+                <a16:creationId xmlns:a16="http://schemas.microsoft.com/office/drawing/2014/main" id="{916977E4-5DFF-3E01-64FB-7C21B5C9B02F}"/>
+              </a:ext>
+            </a:extLst>
+          </p:cNvPr>
+          <p:cNvSpPr>
+            <a:spLocks noGrp="1"/>
+          </p:cNvSpPr>
+          <p:nvPr>
+            <p:ph type="sldNum" sz="quarter" idx="12"/>
+          </p:nvPr>
+        </p:nvSpPr>
+        <p:spPr/>
+        <p:txBody>
+          <a:bodyPr/>
+          <a:lstStyle/>
+          <a:p>
+            <a:fld id="{09FCEDA0-FE4B-4119-AC61-AEA1E37FC66A}" type="slidenum">
+              <a:rPr lang="en-US" smtClean="0"/>
+              <a:t>5</a:t>
+            </a:fld>
+            <a:endParaRPr lang="en-US"/>
           </a:p>
         </p:txBody>
       </p:sp>
@@ -10379,6 +11393,35 @@
           </a:p>
         </p:txBody>
       </p:sp>
+      <p:sp>
+        <p:nvSpPr>
+          <p:cNvPr id="4" name="Symbol zastępczy numeru slajdu 3">
+            <a:extLst>
+              <a:ext uri="{FF2B5EF4-FFF2-40B4-BE49-F238E27FC236}">
+                <a16:creationId xmlns:a16="http://schemas.microsoft.com/office/drawing/2014/main" id="{E2F9E80E-CA6E-C821-ED89-E66E9203B079}"/>
+              </a:ext>
+            </a:extLst>
+          </p:cNvPr>
+          <p:cNvSpPr>
+            <a:spLocks noGrp="1"/>
+          </p:cNvSpPr>
+          <p:nvPr>
+            <p:ph type="sldNum" sz="quarter" idx="12"/>
+          </p:nvPr>
+        </p:nvSpPr>
+        <p:spPr/>
+        <p:txBody>
+          <a:bodyPr/>
+          <a:lstStyle/>
+          <a:p>
+            <a:fld id="{09FCEDA0-FE4B-4119-AC61-AEA1E37FC66A}" type="slidenum">
+              <a:rPr lang="en-US" smtClean="0"/>
+              <a:t>6</a:t>
+            </a:fld>
+            <a:endParaRPr lang="en-US"/>
+          </a:p>
+        </p:txBody>
+      </p:sp>
     </p:spTree>
     <p:extLst>
       <p:ext uri="{BB962C8B-B14F-4D97-AF65-F5344CB8AC3E}">
@@ -11232,6 +12275,35 @@
               <a:t>P = 1/4</a:t>
             </a:r>
             <a:endParaRPr lang="pl-PL" dirty="0"/>
+          </a:p>
+        </p:txBody>
+      </p:sp>
+      <p:sp>
+        <p:nvSpPr>
+          <p:cNvPr id="3" name="Symbol zastępczy numeru slajdu 2">
+            <a:extLst>
+              <a:ext uri="{FF2B5EF4-FFF2-40B4-BE49-F238E27FC236}">
+                <a16:creationId xmlns:a16="http://schemas.microsoft.com/office/drawing/2014/main" id="{03290A9B-8AAB-0C84-1405-611283290378}"/>
+              </a:ext>
+            </a:extLst>
+          </p:cNvPr>
+          <p:cNvSpPr>
+            <a:spLocks noGrp="1"/>
+          </p:cNvSpPr>
+          <p:nvPr>
+            <p:ph type="sldNum" sz="quarter" idx="12"/>
+          </p:nvPr>
+        </p:nvSpPr>
+        <p:spPr/>
+        <p:txBody>
+          <a:bodyPr/>
+          <a:lstStyle/>
+          <a:p>
+            <a:fld id="{09FCEDA0-FE4B-4119-AC61-AEA1E37FC66A}" type="slidenum">
+              <a:rPr lang="en-US" smtClean="0"/>
+              <a:t>7</a:t>
+            </a:fld>
+            <a:endParaRPr lang="en-US"/>
           </a:p>
         </p:txBody>
       </p:sp>
@@ -12103,6 +13175,35 @@
           </a:p>
         </p:txBody>
       </p:sp>
+      <p:sp>
+        <p:nvSpPr>
+          <p:cNvPr id="3" name="Symbol zastępczy numeru slajdu 2">
+            <a:extLst>
+              <a:ext uri="{FF2B5EF4-FFF2-40B4-BE49-F238E27FC236}">
+                <a16:creationId xmlns:a16="http://schemas.microsoft.com/office/drawing/2014/main" id="{210A82A9-B7A8-908F-357F-DA47E41D055D}"/>
+              </a:ext>
+            </a:extLst>
+          </p:cNvPr>
+          <p:cNvSpPr>
+            <a:spLocks noGrp="1"/>
+          </p:cNvSpPr>
+          <p:nvPr>
+            <p:ph type="sldNum" sz="quarter" idx="12"/>
+          </p:nvPr>
+        </p:nvSpPr>
+        <p:spPr/>
+        <p:txBody>
+          <a:bodyPr/>
+          <a:lstStyle/>
+          <a:p>
+            <a:fld id="{09FCEDA0-FE4B-4119-AC61-AEA1E37FC66A}" type="slidenum">
+              <a:rPr lang="en-US" smtClean="0"/>
+              <a:t>8</a:t>
+            </a:fld>
+            <a:endParaRPr lang="en-US"/>
+          </a:p>
+        </p:txBody>
+      </p:sp>
     </p:spTree>
     <p:extLst>
       <p:ext uri="{BB962C8B-B14F-4D97-AF65-F5344CB8AC3E}">
@@ -13064,6 +14165,35 @@
               <a:t>.</a:t>
             </a:r>
             <a:endParaRPr lang="pl-PL" sz="2600" dirty="0"/>
+          </a:p>
+        </p:txBody>
+      </p:sp>
+      <p:sp>
+        <p:nvSpPr>
+          <p:cNvPr id="4" name="Symbol zastępczy numeru slajdu 3">
+            <a:extLst>
+              <a:ext uri="{FF2B5EF4-FFF2-40B4-BE49-F238E27FC236}">
+                <a16:creationId xmlns:a16="http://schemas.microsoft.com/office/drawing/2014/main" id="{A59753B1-1F0C-C8B7-4948-277EBBD7CDD4}"/>
+              </a:ext>
+            </a:extLst>
+          </p:cNvPr>
+          <p:cNvSpPr>
+            <a:spLocks noGrp="1"/>
+          </p:cNvSpPr>
+          <p:nvPr>
+            <p:ph type="sldNum" sz="quarter" idx="12"/>
+          </p:nvPr>
+        </p:nvSpPr>
+        <p:spPr/>
+        <p:txBody>
+          <a:bodyPr/>
+          <a:lstStyle/>
+          <a:p>
+            <a:fld id="{09FCEDA0-FE4B-4119-AC61-AEA1E37FC66A}" type="slidenum">
+              <a:rPr lang="en-US" smtClean="0"/>
+              <a:t>9</a:t>
+            </a:fld>
+            <a:endParaRPr lang="en-US"/>
           </a:p>
         </p:txBody>
       </p:sp>
@@ -13393,4 +14523,319 @@
     </a:ext>
   </a:extLst>
 </a:theme>
+</file>
+
+<file path=ppt/theme/theme2.xml><?xml version="1.0" encoding="utf-8"?>
+<a:theme xmlns:a="http://schemas.openxmlformats.org/drawingml/2006/main" name="Motyw pakietu Office">
+  <a:themeElements>
+    <a:clrScheme name="Pakiet Office">
+      <a:dk1>
+        <a:sysClr val="windowText" lastClr="000000"/>
+      </a:dk1>
+      <a:lt1>
+        <a:sysClr val="window" lastClr="FFFFFF"/>
+      </a:lt1>
+      <a:dk2>
+        <a:srgbClr val="0E2841"/>
+      </a:dk2>
+      <a:lt2>
+        <a:srgbClr val="E8E8E8"/>
+      </a:lt2>
+      <a:accent1>
+        <a:srgbClr val="156082"/>
+      </a:accent1>
+      <a:accent2>
+        <a:srgbClr val="E97132"/>
+      </a:accent2>
+      <a:accent3>
+        <a:srgbClr val="196B24"/>
+      </a:accent3>
+      <a:accent4>
+        <a:srgbClr val="0F9ED5"/>
+      </a:accent4>
+      <a:accent5>
+        <a:srgbClr val="A02B93"/>
+      </a:accent5>
+      <a:accent6>
+        <a:srgbClr val="4EA72E"/>
+      </a:accent6>
+      <a:hlink>
+        <a:srgbClr val="467886"/>
+      </a:hlink>
+      <a:folHlink>
+        <a:srgbClr val="96607D"/>
+      </a:folHlink>
+    </a:clrScheme>
+    <a:fontScheme name="Pakiet Office">
+      <a:majorFont>
+        <a:latin typeface="Aptos Display" panose="02110004020202020204"/>
+        <a:ea typeface=""/>
+        <a:cs typeface=""/>
+        <a:font script="Jpan" typeface="游ゴシック Light"/>
+        <a:font script="Hang" typeface="맑은 고딕"/>
+        <a:font script="Hans" typeface="等线 Light"/>
+        <a:font script="Hant" typeface="新細明體"/>
+        <a:font script="Arab" typeface="Times New Roman"/>
+        <a:font script="Hebr" typeface="Times New Roman"/>
+        <a:font script="Thai" typeface="Angsana New"/>
+        <a:font script="Ethi" typeface="Nyala"/>
+        <a:font script="Beng" typeface="Vrinda"/>
+        <a:font script="Gujr" typeface="Shruti"/>
+        <a:font script="Khmr" typeface="MoolBoran"/>
+        <a:font script="Knda" typeface="Tunga"/>
+        <a:font script="Guru" typeface="Raavi"/>
+        <a:font script="Cans" typeface="Euphemia"/>
+        <a:font script="Cher" typeface="Plantagenet Cherokee"/>
+        <a:font script="Yiii" typeface="Microsoft Yi Baiti"/>
+        <a:font script="Tibt" typeface="Microsoft Himalaya"/>
+        <a:font script="Thaa" typeface="MV Boli"/>
+        <a:font script="Deva" typeface="Mangal"/>
+        <a:font script="Telu" typeface="Gautami"/>
+        <a:font script="Taml" typeface="Latha"/>
+        <a:font script="Syrc" typeface="Estrangelo Edessa"/>
+        <a:font script="Orya" typeface="Kalinga"/>
+        <a:font script="Mlym" typeface="Kartika"/>
+        <a:font script="Laoo" typeface="DokChampa"/>
+        <a:font script="Sinh" typeface="Iskoola Pota"/>
+        <a:font script="Mong" typeface="Mongolian Baiti"/>
+        <a:font script="Viet" typeface="Times New Roman"/>
+        <a:font script="Uigh" typeface="Microsoft Uighur"/>
+        <a:font script="Geor" typeface="Sylfaen"/>
+        <a:font script="Armn" typeface="Arial"/>
+        <a:font script="Bugi" typeface="Leelawadee UI"/>
+        <a:font script="Bopo" typeface="Microsoft JhengHei"/>
+        <a:font script="Java" typeface="Javanese Text"/>
+        <a:font script="Lisu" typeface="Segoe UI"/>
+        <a:font script="Mymr" typeface="Myanmar Text"/>
+        <a:font script="Nkoo" typeface="Ebrima"/>
+        <a:font script="Olck" typeface="Nirmala UI"/>
+        <a:font script="Osma" typeface="Ebrima"/>
+        <a:font script="Phag" typeface="Phagspa"/>
+        <a:font script="Syrn" typeface="Estrangelo Edessa"/>
+        <a:font script="Syrj" typeface="Estrangelo Edessa"/>
+        <a:font script="Syre" typeface="Estrangelo Edessa"/>
+        <a:font script="Sora" typeface="Nirmala UI"/>
+        <a:font script="Tale" typeface="Microsoft Tai Le"/>
+        <a:font script="Talu" typeface="Microsoft New Tai Lue"/>
+        <a:font script="Tfng" typeface="Ebrima"/>
+      </a:majorFont>
+      <a:minorFont>
+        <a:latin typeface="Aptos" panose="02110004020202020204"/>
+        <a:ea typeface=""/>
+        <a:cs typeface=""/>
+        <a:font script="Jpan" typeface="游ゴシック"/>
+        <a:font script="Hang" typeface="맑은 고딕"/>
+        <a:font script="Hans" typeface="等线"/>
+        <a:font script="Hant" typeface="新細明體"/>
+        <a:font script="Arab" typeface="Arial"/>
+        <a:font script="Hebr" typeface="Arial"/>
+        <a:font script="Thai" typeface="Cordia New"/>
+        <a:font script="Ethi" typeface="Nyala"/>
+        <a:font script="Beng" typeface="Vrinda"/>
+        <a:font script="Gujr" typeface="Shruti"/>
+        <a:font script="Khmr" typeface="DaunPenh"/>
+        <a:font script="Knda" typeface="Tunga"/>
+        <a:font script="Guru" typeface="Raavi"/>
+        <a:font script="Cans" typeface="Euphemia"/>
+        <a:font script="Cher" typeface="Plantagenet Cherokee"/>
+        <a:font script="Yiii" typeface="Microsoft Yi Baiti"/>
+        <a:font script="Tibt" typeface="Microsoft Himalaya"/>
+        <a:font script="Thaa" typeface="MV Boli"/>
+        <a:font script="Deva" typeface="Mangal"/>
+        <a:font script="Telu" typeface="Gautami"/>
+        <a:font script="Taml" typeface="Latha"/>
+        <a:font script="Syrc" typeface="Estrangelo Edessa"/>
+        <a:font script="Orya" typeface="Kalinga"/>
+        <a:font script="Mlym" typeface="Kartika"/>
+        <a:font script="Laoo" typeface="DokChampa"/>
+        <a:font script="Sinh" typeface="Iskoola Pota"/>
+        <a:font script="Mong" typeface="Mongolian Baiti"/>
+        <a:font script="Viet" typeface="Arial"/>
+        <a:font script="Uigh" typeface="Microsoft Uighur"/>
+        <a:font script="Geor" typeface="Sylfaen"/>
+        <a:font script="Armn" typeface="Arial"/>
+        <a:font script="Bugi" typeface="Leelawadee UI"/>
+        <a:font script="Bopo" typeface="Microsoft JhengHei"/>
+        <a:font script="Java" typeface="Javanese Text"/>
+        <a:font script="Lisu" typeface="Segoe UI"/>
+        <a:font script="Mymr" typeface="Myanmar Text"/>
+        <a:font script="Nkoo" typeface="Ebrima"/>
+        <a:font script="Olck" typeface="Nirmala UI"/>
+        <a:font script="Osma" typeface="Ebrima"/>
+        <a:font script="Phag" typeface="Phagspa"/>
+        <a:font script="Syrn" typeface="Estrangelo Edessa"/>
+        <a:font script="Syrj" typeface="Estrangelo Edessa"/>
+        <a:font script="Syre" typeface="Estrangelo Edessa"/>
+        <a:font script="Sora" typeface="Nirmala UI"/>
+        <a:font script="Tale" typeface="Microsoft Tai Le"/>
+        <a:font script="Talu" typeface="Microsoft New Tai Lue"/>
+        <a:font script="Tfng" typeface="Ebrima"/>
+      </a:minorFont>
+    </a:fontScheme>
+    <a:fmtScheme name="Pakiet Office">
+      <a:fillStyleLst>
+        <a:solidFill>
+          <a:schemeClr val="phClr"/>
+        </a:solidFill>
+        <a:gradFill rotWithShape="1">
+          <a:gsLst>
+            <a:gs pos="0">
+              <a:schemeClr val="phClr">
+                <a:lumMod val="110000"/>
+                <a:satMod val="105000"/>
+                <a:tint val="67000"/>
+              </a:schemeClr>
+            </a:gs>
+            <a:gs pos="50000">
+              <a:schemeClr val="phClr">
+                <a:lumMod val="105000"/>
+                <a:satMod val="103000"/>
+                <a:tint val="73000"/>
+              </a:schemeClr>
+            </a:gs>
+            <a:gs pos="100000">
+              <a:schemeClr val="phClr">
+                <a:lumMod val="105000"/>
+                <a:satMod val="109000"/>
+                <a:tint val="81000"/>
+              </a:schemeClr>
+            </a:gs>
+          </a:gsLst>
+          <a:lin ang="5400000" scaled="0"/>
+        </a:gradFill>
+        <a:gradFill rotWithShape="1">
+          <a:gsLst>
+            <a:gs pos="0">
+              <a:schemeClr val="phClr">
+                <a:satMod val="103000"/>
+                <a:lumMod val="102000"/>
+                <a:tint val="94000"/>
+              </a:schemeClr>
+            </a:gs>
+            <a:gs pos="50000">
+              <a:schemeClr val="phClr">
+                <a:satMod val="110000"/>
+                <a:lumMod val="100000"/>
+                <a:shade val="100000"/>
+              </a:schemeClr>
+            </a:gs>
+            <a:gs pos="100000">
+              <a:schemeClr val="phClr">
+                <a:lumMod val="99000"/>
+                <a:satMod val="120000"/>
+                <a:shade val="78000"/>
+              </a:schemeClr>
+            </a:gs>
+          </a:gsLst>
+          <a:lin ang="5400000" scaled="0"/>
+        </a:gradFill>
+      </a:fillStyleLst>
+      <a:lnStyleLst>
+        <a:ln w="12700" cap="flat" cmpd="sng" algn="ctr">
+          <a:solidFill>
+            <a:schemeClr val="phClr"/>
+          </a:solidFill>
+          <a:prstDash val="solid"/>
+          <a:miter lim="800000"/>
+        </a:ln>
+        <a:ln w="19050" cap="flat" cmpd="sng" algn="ctr">
+          <a:solidFill>
+            <a:schemeClr val="phClr"/>
+          </a:solidFill>
+          <a:prstDash val="solid"/>
+          <a:miter lim="800000"/>
+        </a:ln>
+        <a:ln w="25400" cap="flat" cmpd="sng" algn="ctr">
+          <a:solidFill>
+            <a:schemeClr val="phClr"/>
+          </a:solidFill>
+          <a:prstDash val="solid"/>
+          <a:miter lim="800000"/>
+        </a:ln>
+      </a:lnStyleLst>
+      <a:effectStyleLst>
+        <a:effectStyle>
+          <a:effectLst/>
+        </a:effectStyle>
+        <a:effectStyle>
+          <a:effectLst/>
+        </a:effectStyle>
+        <a:effectStyle>
+          <a:effectLst>
+            <a:outerShdw blurRad="57150" dist="19050" dir="5400000" algn="ctr" rotWithShape="0">
+              <a:srgbClr val="000000">
+                <a:alpha val="63000"/>
+              </a:srgbClr>
+            </a:outerShdw>
+          </a:effectLst>
+        </a:effectStyle>
+      </a:effectStyleLst>
+      <a:bgFillStyleLst>
+        <a:solidFill>
+          <a:schemeClr val="phClr"/>
+        </a:solidFill>
+        <a:solidFill>
+          <a:schemeClr val="phClr">
+            <a:tint val="95000"/>
+            <a:satMod val="170000"/>
+          </a:schemeClr>
+        </a:solidFill>
+        <a:gradFill rotWithShape="1">
+          <a:gsLst>
+            <a:gs pos="0">
+              <a:schemeClr val="phClr">
+                <a:tint val="93000"/>
+                <a:satMod val="150000"/>
+                <a:shade val="98000"/>
+                <a:lumMod val="102000"/>
+              </a:schemeClr>
+            </a:gs>
+            <a:gs pos="50000">
+              <a:schemeClr val="phClr">
+                <a:tint val="98000"/>
+                <a:satMod val="130000"/>
+                <a:shade val="90000"/>
+                <a:lumMod val="103000"/>
+              </a:schemeClr>
+            </a:gs>
+            <a:gs pos="100000">
+              <a:schemeClr val="phClr">
+                <a:shade val="63000"/>
+                <a:satMod val="120000"/>
+              </a:schemeClr>
+            </a:gs>
+          </a:gsLst>
+          <a:lin ang="5400000" scaled="0"/>
+        </a:gradFill>
+      </a:bgFillStyleLst>
+    </a:fmtScheme>
+  </a:themeElements>
+  <a:objectDefaults>
+    <a:lnDef>
+      <a:spPr/>
+      <a:bodyPr/>
+      <a:lstStyle/>
+      <a:style>
+        <a:lnRef idx="2">
+          <a:schemeClr val="accent1"/>
+        </a:lnRef>
+        <a:fillRef idx="0">
+          <a:schemeClr val="accent1"/>
+        </a:fillRef>
+        <a:effectRef idx="1">
+          <a:schemeClr val="accent1"/>
+        </a:effectRef>
+        <a:fontRef idx="minor">
+          <a:schemeClr val="tx1"/>
+        </a:fontRef>
+      </a:style>
+    </a:lnDef>
+  </a:objectDefaults>
+  <a:extraClrSchemeLst/>
+  <a:extLst>
+    <a:ext uri="{05A4C25C-085E-4340-85A3-A5531E510DB2}">
+      <thm15:themeFamily xmlns:thm15="http://schemas.microsoft.com/office/thememl/2012/main" name="Office Theme" id="{2E142A2C-CD16-42D6-873A-C26D2A0506FA}" vid="{1BDDFF52-6CD6-40A5-AB3C-68EB2F1E4D0A}"/>
+    </a:ext>
+  </a:extLst>
+</a:theme>
 </file>
--- a/ModelAxelroda_prezentacja.pptx
+++ b/ModelAxelroda_prezentacja.pptx
@@ -148,10 +148,25 @@
   <pc:docChgLst>
     <pc:chgData name="Karol Garabczewski" userId="6e35707fbcbc2133" providerId="LiveId" clId="{FDA66D67-08B2-4F99-85FD-82FDE8892109}"/>
     <pc:docChg chg="undo custSel addSld delSld modSld">
-      <pc:chgData name="Karol Garabczewski" userId="6e35707fbcbc2133" providerId="LiveId" clId="{FDA66D67-08B2-4F99-85FD-82FDE8892109}" dt="2026-06-24T16:32:13.398" v="655" actId="20577"/>
+      <pc:chgData name="Karol Garabczewski" userId="6e35707fbcbc2133" providerId="LiveId" clId="{FDA66D67-08B2-4F99-85FD-82FDE8892109}" dt="2026-06-25T08:57:06.004" v="667" actId="20577"/>
       <pc:docMkLst>
         <pc:docMk/>
       </pc:docMkLst>
+      <pc:sldChg chg="modSp mod">
+        <pc:chgData name="Karol Garabczewski" userId="6e35707fbcbc2133" providerId="LiveId" clId="{FDA66D67-08B2-4F99-85FD-82FDE8892109}" dt="2026-06-25T08:57:06.004" v="667" actId="20577"/>
+        <pc:sldMkLst>
+          <pc:docMk/>
+          <pc:sldMk cId="1142525123" sldId="263"/>
+        </pc:sldMkLst>
+        <pc:spChg chg="mod">
+          <ac:chgData name="Karol Garabczewski" userId="6e35707fbcbc2133" providerId="LiveId" clId="{FDA66D67-08B2-4F99-85FD-82FDE8892109}" dt="2026-06-25T08:57:06.004" v="667" actId="20577"/>
+          <ac:spMkLst>
+            <pc:docMk/>
+            <pc:sldMk cId="1142525123" sldId="263"/>
+            <ac:spMk id="3" creationId="{BA4F3297-7DD6-0EF4-82F1-773AB2F43F61}"/>
+          </ac:spMkLst>
+        </pc:spChg>
+      </pc:sldChg>
       <pc:sldChg chg="addSp delSp modSp new mod">
         <pc:chgData name="Karol Garabczewski" userId="6e35707fbcbc2133" providerId="LiveId" clId="{FDA66D67-08B2-4F99-85FD-82FDE8892109}" dt="2026-06-24T16:27:39.748" v="568" actId="20577"/>
         <pc:sldMkLst>
@@ -896,7 +911,7 @@
           <a:p>
             <a:fld id="{21FD153F-C2D7-42B8-9DDD-313149076134}" type="datetimeFigureOut">
               <a:rPr lang="pl-PL" smtClean="0"/>
-              <a:t>24.06.2026</a:t>
+              <a:t>25.06.2026</a:t>
             </a:fld>
             <a:endParaRPr lang="pl-PL"/>
           </a:p>
@@ -1312,7 +1327,7 @@
           <a:p>
             <a:fld id="{CC219924-E421-45AF-95F8-DE961D4F9D7A}" type="datetime1">
               <a:rPr lang="en-US" smtClean="0"/>
-              <a:t>6/24/2026</a:t>
+              <a:t>6/25/2026</a:t>
             </a:fld>
             <a:endParaRPr lang="en-US"/>
           </a:p>
@@ -1512,7 +1527,7 @@
           <a:p>
             <a:fld id="{F11651D3-EEA5-4503-81CA-84DD957BCB36}" type="datetime1">
               <a:rPr lang="en-US" smtClean="0"/>
-              <a:t>6/24/2026</a:t>
+              <a:t>6/25/2026</a:t>
             </a:fld>
             <a:endParaRPr lang="en-US"/>
           </a:p>
@@ -1722,7 +1737,7 @@
           <a:p>
             <a:fld id="{DAF250FE-9038-48B6-94F3-ECFC677205F2}" type="datetime1">
               <a:rPr lang="en-US" smtClean="0"/>
-              <a:t>6/24/2026</a:t>
+              <a:t>6/25/2026</a:t>
             </a:fld>
             <a:endParaRPr lang="en-US"/>
           </a:p>
@@ -1922,7 +1937,7 @@
           <a:p>
             <a:fld id="{06BFBEC8-DC87-4AD6-A3C0-88B93FFD0D13}" type="datetime1">
               <a:rPr lang="en-US" smtClean="0"/>
-              <a:t>6/24/2026</a:t>
+              <a:t>6/25/2026</a:t>
             </a:fld>
             <a:endParaRPr lang="en-US"/>
           </a:p>
@@ -2198,7 +2213,7 @@
           <a:p>
             <a:fld id="{80B419C0-543D-4075-9507-412CBCC30423}" type="datetime1">
               <a:rPr lang="en-US" smtClean="0"/>
-              <a:t>6/24/2026</a:t>
+              <a:t>6/25/2026</a:t>
             </a:fld>
             <a:endParaRPr lang="en-US"/>
           </a:p>
@@ -2466,7 +2481,7 @@
           <a:p>
             <a:fld id="{0535CA57-FCE8-44E1-A5F0-E29C2B2639B4}" type="datetime1">
               <a:rPr lang="en-US" smtClean="0"/>
-              <a:t>6/24/2026</a:t>
+              <a:t>6/25/2026</a:t>
             </a:fld>
             <a:endParaRPr lang="en-US"/>
           </a:p>
@@ -2881,7 +2896,7 @@
           <a:p>
             <a:fld id="{BA2CBAD6-0278-49CE-A1D5-416981DF7CE4}" type="datetime1">
               <a:rPr lang="en-US" smtClean="0"/>
-              <a:t>6/24/2026</a:t>
+              <a:t>6/25/2026</a:t>
             </a:fld>
             <a:endParaRPr lang="en-US"/>
           </a:p>
@@ -3023,7 +3038,7 @@
           <a:p>
             <a:fld id="{C511A707-D6C6-4D3D-9AB3-F062F184410C}" type="datetime1">
               <a:rPr lang="en-US" smtClean="0"/>
-              <a:t>6/24/2026</a:t>
+              <a:t>6/25/2026</a:t>
             </a:fld>
             <a:endParaRPr lang="en-US"/>
           </a:p>
@@ -3136,7 +3151,7 @@
           <a:p>
             <a:fld id="{F19F0C89-A7E6-4C5B-B3BD-10DCFD7050F3}" type="datetime1">
               <a:rPr lang="en-US" smtClean="0"/>
-              <a:t>6/24/2026</a:t>
+              <a:t>6/25/2026</a:t>
             </a:fld>
             <a:endParaRPr lang="en-US"/>
           </a:p>
@@ -3449,7 +3464,7 @@
           <a:p>
             <a:fld id="{AD206A01-47A2-4797-B056-F939721E8BB4}" type="datetime1">
               <a:rPr lang="en-US" smtClean="0"/>
-              <a:t>6/24/2026</a:t>
+              <a:t>6/25/2026</a:t>
             </a:fld>
             <a:endParaRPr lang="en-US"/>
           </a:p>
@@ -3738,7 +3753,7 @@
           <a:p>
             <a:fld id="{8800C9F3-23E9-41A3-A86F-F642FAA31D8A}" type="datetime1">
               <a:rPr lang="en-US" smtClean="0"/>
-              <a:t>6/24/2026</a:t>
+              <a:t>6/25/2026</a:t>
             </a:fld>
             <a:endParaRPr lang="en-US"/>
           </a:p>
@@ -3981,7 +3996,7 @@
           <a:p>
             <a:fld id="{794C5B19-86B2-4997-B0CD-299D1D03B03B}" type="datetime1">
               <a:rPr lang="en-US" smtClean="0"/>
-              <a:t>6/24/2026</a:t>
+              <a:t>6/25/2026</a:t>
             </a:fld>
             <a:endParaRPr lang="en-US"/>
           </a:p>
@@ -6356,25 +6371,10 @@
               <a:t>równując</a:t>
             </a:r>
             <a:r>
-              <a:rPr lang="en-US" sz="3600" dirty="0"/>
-              <a:t> </a:t>
-            </a:r>
-            <a:r>
-              <a:rPr lang="en-US" sz="3600" dirty="0" err="1"/>
-              <a:t>szanse</a:t>
-            </a:r>
-            <a:r>
-              <a:rPr lang="en-US" sz="3600" dirty="0"/>
-              <a:t> </a:t>
-            </a:r>
-            <a:r>
-              <a:rPr lang="en-US" sz="3600" dirty="0" err="1"/>
-              <a:t>interakcj</a:t>
-            </a:r>
-            <a:r>
-              <a:rPr lang="pl-PL" sz="3600" dirty="0"/>
-              <a:t>i.</a:t>
-            </a:r>
+              <a:rPr lang="pl-PL" sz="3600"/>
+              <a:t> sąsiedztwa.</a:t>
+            </a:r>
+            <a:endParaRPr lang="pl-PL" sz="3600" dirty="0"/>
           </a:p>
           <a:p>
             <a:pPr>

--- a/ModelAxelroda_prezentacja.pptx
+++ b/ModelAxelroda_prezentacja.pptx
@@ -5445,7 +5445,7 @@
           <a:p>
             <a:r>
               <a:rPr lang="pl-PL" sz="1900" dirty="0"/>
-              <a:t>długość boku siatki: 15</a:t>
+              <a:t>długość boku siatki: 16</a:t>
             </a:r>
           </a:p>
           <a:p>
@@ -7607,8 +7607,8 @@
               <a:t> </a:t>
             </a:r>
             <a:r>
-              <a:rPr lang="en-US" sz="12800" b="1" dirty="0" err="1"/>
-              <a:t>cech</a:t>
+              <a:rPr lang="pl-PL" sz="12800" b="1" dirty="0"/>
+              <a:t>wariantów</a:t>
             </a:r>
             <a:r>
               <a:rPr lang="en-US" sz="12800" b="1" dirty="0"/>
@@ -7635,12 +7635,12 @@
               <a:t>tym</a:t>
             </a:r>
             <a:r>
-              <a:rPr lang="en-US" sz="12800" dirty="0"/>
-              <a:t> </a:t>
-            </a:r>
-            <a:r>
-              <a:rPr lang="en-US" sz="12800" b="1" dirty="0" err="1"/>
-              <a:t>mniej</a:t>
+              <a:rPr lang="pl-PL" sz="12800" dirty="0"/>
+              <a:t> </a:t>
+            </a:r>
+            <a:r>
+              <a:rPr lang="pl-PL" sz="12800" b="1" dirty="0"/>
+              <a:t>więcej</a:t>
             </a:r>
             <a:r>
               <a:rPr lang="en-US" sz="12800" b="1" dirty="0"/>
@@ -7692,23 +7692,7 @@
             </a:r>
             <a:r>
               <a:rPr lang="en-US" sz="12800" dirty="0"/>
-              <a:t> (</a:t>
-            </a:r>
-            <a:r>
-              <a:rPr lang="en-US" sz="12800" dirty="0" err="1"/>
-              <a:t>sprzeczne</a:t>
-            </a:r>
-            <a:r>
-              <a:rPr lang="en-US" sz="12800" dirty="0"/>
-              <a:t> z </a:t>
-            </a:r>
-            <a:r>
-              <a:rPr lang="en-US" sz="12800" dirty="0" err="1"/>
-              <a:t>intuicją</a:t>
-            </a:r>
-            <a:r>
-              <a:rPr lang="en-US" sz="12800" dirty="0"/>
-              <a:t>). </a:t>
+              <a:t>. </a:t>
             </a:r>
             <a:r>
               <a:rPr lang="en-US" sz="12800" dirty="0" err="1"/>
